--- a/IUEA_Teaching_Plan/decks/CML3112_Week14_Design_Infrastructure.pptx
+++ b/IUEA_Teaching_Plan/decks/CML3112_Week14_Design_Infrastructure.pptx
@@ -2,33 +2,33 @@
 <file path=ppt/presentation.xml><?xml version="1.0" encoding="utf-8"?>
 <p:presentation xmlns:p="http://schemas.openxmlformats.org/presentationml/2006/main">
   <p:sldMasterIdLst>
-    <p:sldMasterId xmlns:r="http://schemas.openxmlformats.org/officeDocument/2006/relationships" id="2147483648" r:id="R90cdfacd3d5e40a5"/>
+    <p:sldMasterId xmlns:r="http://schemas.openxmlformats.org/officeDocument/2006/relationships" id="2147483648" r:id="R03d8b1b7a8594e8e"/>
   </p:sldMasterIdLst>
   <p:notesMasterIdLst>
-    <p:notesMasterId xmlns:r="http://schemas.openxmlformats.org/officeDocument/2006/relationships" r:id="Ra443ca5267084894"/>
+    <p:notesMasterId xmlns:r="http://schemas.openxmlformats.org/officeDocument/2006/relationships" r:id="R3bd633a1ccc84463"/>
   </p:notesMasterIdLst>
   <p:sldIdLst>
-    <p:sldId xmlns:r="http://schemas.openxmlformats.org/officeDocument/2006/relationships" id="256" r:id="R73ed7ab1e9cb4e5a"/>
-    <p:sldId xmlns:r="http://schemas.openxmlformats.org/officeDocument/2006/relationships" id="257" r:id="Re5c450c9ebd84eb1"/>
-    <p:sldId xmlns:r="http://schemas.openxmlformats.org/officeDocument/2006/relationships" id="258" r:id="R3219ae5417b0431a"/>
-    <p:sldId xmlns:r="http://schemas.openxmlformats.org/officeDocument/2006/relationships" id="259" r:id="Rbf77d1742b8a4315"/>
-    <p:sldId xmlns:r="http://schemas.openxmlformats.org/officeDocument/2006/relationships" id="260" r:id="R0b803860da6b4933"/>
-    <p:sldId xmlns:r="http://schemas.openxmlformats.org/officeDocument/2006/relationships" id="261" r:id="R3687c0c215a34032"/>
-    <p:sldId xmlns:r="http://schemas.openxmlformats.org/officeDocument/2006/relationships" id="262" r:id="R1920a85109ff4beb"/>
-    <p:sldId xmlns:r="http://schemas.openxmlformats.org/officeDocument/2006/relationships" id="263" r:id="R98b0468cd9f3455a"/>
-    <p:sldId xmlns:r="http://schemas.openxmlformats.org/officeDocument/2006/relationships" id="264" r:id="R122f04d6af1d4b3a"/>
-    <p:sldId xmlns:r="http://schemas.openxmlformats.org/officeDocument/2006/relationships" id="265" r:id="Re45b7105ab5649c7"/>
-    <p:sldId xmlns:r="http://schemas.openxmlformats.org/officeDocument/2006/relationships" id="266" r:id="Rd061165833f54b45"/>
-    <p:sldId xmlns:r="http://schemas.openxmlformats.org/officeDocument/2006/relationships" id="267" r:id="R9eb087b60de944ec"/>
-    <p:sldId xmlns:r="http://schemas.openxmlformats.org/officeDocument/2006/relationships" id="268" r:id="R892b998801ff4bef"/>
-    <p:sldId xmlns:r="http://schemas.openxmlformats.org/officeDocument/2006/relationships" id="269" r:id="Rbf5384e74ddc473b"/>
-    <p:sldId xmlns:r="http://schemas.openxmlformats.org/officeDocument/2006/relationships" id="270" r:id="R0467e559fcdb4291"/>
-    <p:sldId xmlns:r="http://schemas.openxmlformats.org/officeDocument/2006/relationships" id="271" r:id="Rbd3d004f33084ebb"/>
-    <p:sldId xmlns:r="http://schemas.openxmlformats.org/officeDocument/2006/relationships" id="272" r:id="R3478bc7943614667"/>
-    <p:sldId xmlns:r="http://schemas.openxmlformats.org/officeDocument/2006/relationships" id="273" r:id="R22c0b6a3fd284991"/>
-    <p:sldId xmlns:r="http://schemas.openxmlformats.org/officeDocument/2006/relationships" id="274" r:id="R04a2c0216d4149da"/>
-    <p:sldId xmlns:r="http://schemas.openxmlformats.org/officeDocument/2006/relationships" id="275" r:id="Rcecb3d66f28b48b3"/>
-    <p:sldId xmlns:r="http://schemas.openxmlformats.org/officeDocument/2006/relationships" id="276" r:id="R67dc888aa53c47b1"/>
+    <p:sldId xmlns:r="http://schemas.openxmlformats.org/officeDocument/2006/relationships" id="256" r:id="Rd843baaee42c43e3"/>
+    <p:sldId xmlns:r="http://schemas.openxmlformats.org/officeDocument/2006/relationships" id="257" r:id="Rd2ddf94a62774ecf"/>
+    <p:sldId xmlns:r="http://schemas.openxmlformats.org/officeDocument/2006/relationships" id="258" r:id="R022122223014428b"/>
+    <p:sldId xmlns:r="http://schemas.openxmlformats.org/officeDocument/2006/relationships" id="259" r:id="R1615005f83fb4ad8"/>
+    <p:sldId xmlns:r="http://schemas.openxmlformats.org/officeDocument/2006/relationships" id="260" r:id="R6a0e9a77a9414216"/>
+    <p:sldId xmlns:r="http://schemas.openxmlformats.org/officeDocument/2006/relationships" id="261" r:id="R63d787d8f38a4200"/>
+    <p:sldId xmlns:r="http://schemas.openxmlformats.org/officeDocument/2006/relationships" id="262" r:id="Rba1260397d05437e"/>
+    <p:sldId xmlns:r="http://schemas.openxmlformats.org/officeDocument/2006/relationships" id="263" r:id="Rc75d9eeed35a459e"/>
+    <p:sldId xmlns:r="http://schemas.openxmlformats.org/officeDocument/2006/relationships" id="264" r:id="R8f104c31fc634443"/>
+    <p:sldId xmlns:r="http://schemas.openxmlformats.org/officeDocument/2006/relationships" id="265" r:id="Rea8e869e45ec4a36"/>
+    <p:sldId xmlns:r="http://schemas.openxmlformats.org/officeDocument/2006/relationships" id="266" r:id="R297198ba1b0b45b2"/>
+    <p:sldId xmlns:r="http://schemas.openxmlformats.org/officeDocument/2006/relationships" id="267" r:id="Rb0806213e34645d7"/>
+    <p:sldId xmlns:r="http://schemas.openxmlformats.org/officeDocument/2006/relationships" id="268" r:id="R888c5c8df59f46c5"/>
+    <p:sldId xmlns:r="http://schemas.openxmlformats.org/officeDocument/2006/relationships" id="269" r:id="Re2eb1d626b994fe2"/>
+    <p:sldId xmlns:r="http://schemas.openxmlformats.org/officeDocument/2006/relationships" id="270" r:id="R781a194e793845d6"/>
+    <p:sldId xmlns:r="http://schemas.openxmlformats.org/officeDocument/2006/relationships" id="271" r:id="Re4242940f19b40c7"/>
+    <p:sldId xmlns:r="http://schemas.openxmlformats.org/officeDocument/2006/relationships" id="272" r:id="R401d4f3e59604e59"/>
+    <p:sldId xmlns:r="http://schemas.openxmlformats.org/officeDocument/2006/relationships" id="273" r:id="Rf1383dbcbadb419f"/>
+    <p:sldId xmlns:r="http://schemas.openxmlformats.org/officeDocument/2006/relationships" id="274" r:id="R537f0cc0c8ad4c31"/>
+    <p:sldId xmlns:r="http://schemas.openxmlformats.org/officeDocument/2006/relationships" id="275" r:id="R69c21af687ec402a"/>
+    <p:sldId xmlns:r="http://schemas.openxmlformats.org/officeDocument/2006/relationships" id="276" r:id="R27134f5513374d5d"/>
   </p:sldIdLst>
   <p:sldSz cx="12191695" cy="6858000"/>
   <p:notesSz cx="6858000" cy="9144000"/>
@@ -482,7 +482,7 @@
           </a:p>
           <a:p xmlns:a="http://schemas.openxmlformats.org/drawingml/2006/main">
             <a:r>
-              <a:t>Build on the preceding week. Explain why this example is needed before running it.</a:t>
+              <a:t>Previous slide: the preceding week.</a:t>
             </a:r>
           </a:p>
           <a:p xmlns:a="http://schemas.openxmlformats.org/drawingml/2006/main">
@@ -507,26 +507,6 @@
           </a:p>
           <a:p xmlns:a="http://schemas.openxmlformats.org/drawingml/2006/main">
             <a:r>
-              <a:t>LECTURER DETAIL</a:t>
-            </a:r>
-          </a:p>
-          <a:p xmlns:a="http://schemas.openxmlformats.org/drawingml/2006/main">
-            <a:r>
-              <a:t>TEACHING PURPOSE</a:t>
-            </a:r>
-          </a:p>
-          <a:p xmlns:a="http://schemas.openxmlformats.org/drawingml/2006/main">
-            <a:r>
-              <a:t>Preparing for Practical Test 2</a:t>
-            </a:r>
-          </a:p>
-          <a:p xmlns:a="http://schemas.openxmlformats.org/drawingml/2006/main">
-            <a:r>
-              <a:t/>
-            </a:r>
-          </a:p>
-          <a:p xmlns:a="http://schemas.openxmlformats.org/drawingml/2006/main">
-            <a:r>
               <a:t>LECTURER CUE</a:t>
             </a:r>
           </a:p>
@@ -542,12 +522,12 @@
           </a:p>
           <a:p xmlns:a="http://schemas.openxmlformats.org/drawingml/2006/main">
             <a:r>
-              <a:t>TEST COLLECTION RULE</a:t>
-            </a:r>
-          </a:p>
-          <a:p xmlns:a="http://schemas.openxmlformats.org/drawingml/2006/main">
-            <a:r>
-              <a:t>This deck is for rehearsal before the timed assessment. Preserve the invigilated timetable and Part A snapshot. During Part B, type answers in the notebook cell headed ## My written evidence without executing code. Collect one complete .ipynb offline; later Google upload only transports the collected work. Do not require internet or AI during the test.</a:t>
+              <a:t>TEACHING MODE</a:t>
+            </a:r>
+          </a:p>
+          <a:p xmlns:a="http://schemas.openxmlformats.org/drawingml/2006/main">
+            <a:r>
+              <a:t>Demonstrate first. Read each new symbol aloud, trace the values and compare the shown output. Learners repeat worked examples individually after class.</a:t>
             </a:r>
           </a:p>
           <a:p xmlns:a="http://schemas.openxmlformats.org/drawingml/2006/main">
@@ -562,37 +542,22 @@
           </a:p>
           <a:p xmlns:a="http://schemas.openxmlformats.org/drawingml/2006/main">
             <a:r>
-              <a:t>Today’s learning. Move on after a learner can explain the current example or required action.</a:t>
-            </a:r>
-          </a:p>
-          <a:p xmlns:a="http://schemas.openxmlformats.org/drawingml/2006/main">
-            <a:r>
-              <a:t/>
-            </a:r>
-          </a:p>
-          <a:p xmlns:a="http://schemas.openxmlformats.org/drawingml/2006/main">
-            <a:r>
-              <a:t>TEACHING MODE</a:t>
-            </a:r>
-          </a:p>
-          <a:p xmlns:a="http://schemas.openxmlformats.org/drawingml/2006/main">
-            <a:r>
-              <a:t>Demonstrate the example directly. Explain each new name, symbol and output. Use the revision example for an individual check after class; no live partner activity is required.</a:t>
-            </a:r>
-          </a:p>
-          <a:p xmlns:a="http://schemas.openxmlformats.org/drawingml/2006/main">
-            <a:r>
-              <a:t/>
-            </a:r>
-          </a:p>
-          <a:p xmlns:a="http://schemas.openxmlformats.org/drawingml/2006/main">
-            <a:r>
-              <a:t>NEXT</a:t>
-            </a:r>
-          </a:p>
-          <a:p xmlns:a="http://schemas.openxmlformats.org/drawingml/2006/main">
-            <a:r>
               <a:t>Today’s learning.</a:t>
+            </a:r>
+          </a:p>
+          <a:p xmlns:a="http://schemas.openxmlformats.org/drawingml/2006/main">
+            <a:r>
+              <a:t/>
+            </a:r>
+          </a:p>
+          <a:p xmlns:a="http://schemas.openxmlformats.org/drawingml/2006/main">
+            <a:r>
+              <a:t>REFERENCES</a:t>
+            </a:r>
+          </a:p>
+          <a:p xmlns:a="http://schemas.openxmlformats.org/drawingml/2006/main">
+            <a:r>
+              <a:t/>
             </a:r>
           </a:p>
         </p:txBody>
@@ -682,7 +647,7 @@
           </a:p>
           <a:p xmlns:a="http://schemas.openxmlformats.org/drawingml/2006/main">
             <a:r>
-              <a:t>Build on Preparation checkpoint. Explain why this example is needed before running it.</a:t>
+              <a:t>Previous slide: Preparation checkpoint.</a:t>
             </a:r>
           </a:p>
           <a:p xmlns:a="http://schemas.openxmlformats.org/drawingml/2006/main">
@@ -717,41 +682,6 @@
           </a:p>
           <a:p xmlns:a="http://schemas.openxmlformats.org/drawingml/2006/main">
             <a:r>
-              <a:t>LECTURER DETAIL</a:t>
-            </a:r>
-          </a:p>
-          <a:p xmlns:a="http://schemas.openxmlformats.org/drawingml/2006/main">
-            <a:r>
-              <a:t>TEACHING PURPOSE</a:t>
-            </a:r>
-          </a:p>
-          <a:p xmlns:a="http://schemas.openxmlformats.org/drawingml/2006/main">
-            <a:r>
-              <a:t>Your evidence</a:t>
-            </a:r>
-          </a:p>
-          <a:p xmlns:a="http://schemas.openxmlformats.org/drawingml/2006/main">
-            <a:r>
-              <a:t/>
-            </a:r>
-          </a:p>
-          <a:p xmlns:a="http://schemas.openxmlformats.org/drawingml/2006/main">
-            <a:r>
-              <a:t>CONNECT</a:t>
-            </a:r>
-          </a:p>
-          <a:p xmlns:a="http://schemas.openxmlformats.org/drawingml/2006/main">
-            <a:r>
-              <a:t>Build on the preceding slide: Preparation checkpoint.</a:t>
-            </a:r>
-          </a:p>
-          <a:p xmlns:a="http://schemas.openxmlformats.org/drawingml/2006/main">
-            <a:r>
-              <a:t/>
-            </a:r>
-          </a:p>
-          <a:p xmlns:a="http://schemas.openxmlformats.org/drawingml/2006/main">
-            <a:r>
               <a:t>LECTURER CUE</a:t>
             </a:r>
           </a:p>
@@ -767,72 +697,12 @@
           </a:p>
           <a:p xmlns:a="http://schemas.openxmlformats.org/drawingml/2006/main">
             <a:r>
-              <a:t>EXPLAIN IN ORDINARY WORDS</a:t>
-            </a:r>
-          </a:p>
-          <a:p xmlns:a="http://schemas.openxmlformats.org/drawingml/2006/main">
-            <a:r>
-              <a:t>An observation describes the data. A finding answers a defined question with evidence. A recommendation adds an action, its justification and limits.</a:t>
-            </a:r>
-          </a:p>
-          <a:p xmlns:a="http://schemas.openxmlformats.org/drawingml/2006/main">
-            <a:r>
-              <a:t/>
-            </a:r>
-          </a:p>
-          <a:p xmlns:a="http://schemas.openxmlformats.org/drawingml/2006/main">
-            <a:r>
-              <a:t>CHECK AND EXPECTED ANSWER</a:t>
-            </a:r>
-          </a:p>
-          <a:p xmlns:a="http://schemas.openxmlformats.org/drawingml/2006/main">
-            <a:r>
-              <a:t>Does a difference between two groups prove one caused the other? No. Other differences or selection may explain it.</a:t>
-            </a:r>
-          </a:p>
-          <a:p xmlns:a="http://schemas.openxmlformats.org/drawingml/2006/main">
-            <a:r>
-              <a:t/>
-            </a:r>
-          </a:p>
-          <a:p xmlns:a="http://schemas.openxmlformats.org/drawingml/2006/main">
-            <a:r>
-              <a:t>IF LEARNERS ARE STUCK</a:t>
-            </a:r>
-          </a:p>
-          <a:p xmlns:a="http://schemas.openxmlformats.org/drawingml/2006/main">
-            <a:r>
-              <a:t>Ask for the population, time period, number and comparison. Then ask what additional evidence could change the recommendation.</a:t>
-            </a:r>
-          </a:p>
-          <a:p xmlns:a="http://schemas.openxmlformats.org/drawingml/2006/main">
-            <a:r>
-              <a:t/>
-            </a:r>
-          </a:p>
-          <a:p xmlns:a="http://schemas.openxmlformats.org/drawingml/2006/main">
-            <a:r>
-              <a:t>ASSIGNMENT HANDOVER</a:t>
-            </a:r>
-          </a:p>
-          <a:p xmlns:a="http://schemas.openxmlformats.org/drawingml/2006/main">
-            <a:r>
-              <a:t>Open the matching public student guide and show the exact starter filename, required outputs and upload set. Ask one learner to repeat what to submit and where. IUEA Student Registration Number is required freeform text; learners enter their own number. A saved repository is not a submitted form. Read the live deadline and keep the submission confirmation. Do not release an assessment that is still awaiting grading validation.</a:t>
-            </a:r>
-          </a:p>
-          <a:p xmlns:a="http://schemas.openxmlformats.org/drawingml/2006/main">
-            <a:r>
-              <a:t/>
-            </a:r>
-          </a:p>
-          <a:p xmlns:a="http://schemas.openxmlformats.org/drawingml/2006/main">
-            <a:r>
-              <a:t>TEST COLLECTION RULE</a:t>
-            </a:r>
-          </a:p>
-          <a:p xmlns:a="http://schemas.openxmlformats.org/drawingml/2006/main">
-            <a:r>
-              <a:t>This deck is for rehearsal before the timed assessment. Preserve the invigilated timetable and Part A snapshot. During Part B, type answers in the notebook cell headed ## My written evidence without executing code. Collect one complete .ipynb offline; later Google upload only transports the collected work. Do not require internet or AI during the test.</a:t>
+              <a:t>TEACHING MODE</a:t>
+            </a:r>
+          </a:p>
+          <a:p xmlns:a="http://schemas.openxmlformats.org/drawingml/2006/main">
+            <a:r>
+              <a:t>Demonstrate first. Read each new symbol aloud, trace the values and compare the shown output. Learners repeat worked examples individually after class.</a:t>
             </a:r>
           </a:p>
           <a:p xmlns:a="http://schemas.openxmlformats.org/drawingml/2006/main">
@@ -847,37 +717,22 @@
           </a:p>
           <a:p xmlns:a="http://schemas.openxmlformats.org/drawingml/2006/main">
             <a:r>
-              <a:t>Practical Test 2. Move on after a learner can explain the current example or required action.</a:t>
-            </a:r>
-          </a:p>
-          <a:p xmlns:a="http://schemas.openxmlformats.org/drawingml/2006/main">
-            <a:r>
-              <a:t/>
-            </a:r>
-          </a:p>
-          <a:p xmlns:a="http://schemas.openxmlformats.org/drawingml/2006/main">
-            <a:r>
-              <a:t>TEACHING MODE</a:t>
-            </a:r>
-          </a:p>
-          <a:p xmlns:a="http://schemas.openxmlformats.org/drawingml/2006/main">
-            <a:r>
-              <a:t>Demonstrate the example directly. Explain each new name, symbol and output. Use the revision example for an individual check after class; no live partner activity is required.</a:t>
-            </a:r>
-          </a:p>
-          <a:p xmlns:a="http://schemas.openxmlformats.org/drawingml/2006/main">
-            <a:r>
-              <a:t/>
-            </a:r>
-          </a:p>
-          <a:p xmlns:a="http://schemas.openxmlformats.org/drawingml/2006/main">
-            <a:r>
-              <a:t>NEXT</a:t>
-            </a:r>
-          </a:p>
-          <a:p xmlns:a="http://schemas.openxmlformats.org/drawingml/2006/main">
-            <a:r>
               <a:t>Practical Test 2.</a:t>
+            </a:r>
+          </a:p>
+          <a:p xmlns:a="http://schemas.openxmlformats.org/drawingml/2006/main">
+            <a:r>
+              <a:t/>
+            </a:r>
+          </a:p>
+          <a:p xmlns:a="http://schemas.openxmlformats.org/drawingml/2006/main">
+            <a:r>
+              <a:t>REFERENCES</a:t>
+            </a:r>
+          </a:p>
+          <a:p xmlns:a="http://schemas.openxmlformats.org/drawingml/2006/main">
+            <a:r>
+              <a:t/>
             </a:r>
           </a:p>
         </p:txBody>
@@ -967,7 +822,7 @@
           </a:p>
           <a:p xmlns:a="http://schemas.openxmlformats.org/drawingml/2006/main">
             <a:r>
-              <a:t>Build on Your evidence. Explain why this example is needed before running it.</a:t>
+              <a:t>Previous slide: Your evidence.</a:t>
             </a:r>
           </a:p>
           <a:p xmlns:a="http://schemas.openxmlformats.org/drawingml/2006/main">
@@ -1022,41 +877,6 @@
           </a:p>
           <a:p xmlns:a="http://schemas.openxmlformats.org/drawingml/2006/main">
             <a:r>
-              <a:t>LECTURER DETAIL</a:t>
-            </a:r>
-          </a:p>
-          <a:p xmlns:a="http://schemas.openxmlformats.org/drawingml/2006/main">
-            <a:r>
-              <a:t>TEACHING PURPOSE</a:t>
-            </a:r>
-          </a:p>
-          <a:p xmlns:a="http://schemas.openxmlformats.org/drawingml/2006/main">
-            <a:r>
-              <a:t>Practical Test 2</a:t>
-            </a:r>
-          </a:p>
-          <a:p xmlns:a="http://schemas.openxmlformats.org/drawingml/2006/main">
-            <a:r>
-              <a:t/>
-            </a:r>
-          </a:p>
-          <a:p xmlns:a="http://schemas.openxmlformats.org/drawingml/2006/main">
-            <a:r>
-              <a:t>CONNECT</a:t>
-            </a:r>
-          </a:p>
-          <a:p xmlns:a="http://schemas.openxmlformats.org/drawingml/2006/main">
-            <a:r>
-              <a:t>Build on the preceding slide: Your evidence.</a:t>
-            </a:r>
-          </a:p>
-          <a:p xmlns:a="http://schemas.openxmlformats.org/drawingml/2006/main">
-            <a:r>
-              <a:t/>
-            </a:r>
-          </a:p>
-          <a:p xmlns:a="http://schemas.openxmlformats.org/drawingml/2006/main">
-            <a:r>
               <a:t>LECTURER CUE</a:t>
             </a:r>
           </a:p>
@@ -1072,57 +892,12 @@
           </a:p>
           <a:p xmlns:a="http://schemas.openxmlformats.org/drawingml/2006/main">
             <a:r>
-              <a:t>EXPLAIN IN ORDINARY WORDS</a:t>
-            </a:r>
-          </a:p>
-          <a:p xmlns:a="http://schemas.openxmlformats.org/drawingml/2006/main">
-            <a:r>
-              <a:t>A function is a named set of instructions. def defines it; a call runs it with inputs. Parameters are input names, arguments are supplied values, and return sends the result back.</a:t>
-            </a:r>
-          </a:p>
-          <a:p xmlns:a="http://schemas.openxmlformats.org/drawingml/2006/main">
-            <a:r>
-              <a:t/>
-            </a:r>
-          </a:p>
-          <a:p xmlns:a="http://schemas.openxmlformats.org/drawingml/2006/main">
-            <a:r>
-              <a:t>CHECK AND EXPECTED ANSWER</a:t>
-            </a:r>
-          </a:p>
-          <a:p xmlns:a="http://schemas.openxmlformats.org/drawingml/2006/main">
-            <a:r>
-              <a:t>Does print(8) return the number 8 to the caller? No; it displays 8 and returns None. A function needing a numeric result should return it.</a:t>
-            </a:r>
-          </a:p>
-          <a:p xmlns:a="http://schemas.openxmlformats.org/drawingml/2006/main">
-            <a:r>
-              <a:t/>
-            </a:r>
-          </a:p>
-          <a:p xmlns:a="http://schemas.openxmlformats.org/drawingml/2006/main">
-            <a:r>
-              <a:t>IF LEARNERS ARE STUCK</a:t>
-            </a:r>
-          </a:p>
-          <a:p xmlns:a="http://schemas.openxmlformats.org/drawingml/2006/main">
-            <a:r>
-              <a:t>Trace one call: bind input names, run the indented body, reach return, then put the returned result back into the calling expression.</a:t>
-            </a:r>
-          </a:p>
-          <a:p xmlns:a="http://schemas.openxmlformats.org/drawingml/2006/main">
-            <a:r>
-              <a:t/>
-            </a:r>
-          </a:p>
-          <a:p xmlns:a="http://schemas.openxmlformats.org/drawingml/2006/main">
-            <a:r>
-              <a:t>TEST COLLECTION RULE</a:t>
-            </a:r>
-          </a:p>
-          <a:p xmlns:a="http://schemas.openxmlformats.org/drawingml/2006/main">
-            <a:r>
-              <a:t>This deck is for rehearsal before the timed assessment. Preserve the invigilated timetable and Part A snapshot. During Part B, type answers in the notebook cell headed ## My written evidence without executing code. Collect one complete .ipynb offline; later Google upload only transports the collected work. Do not require internet or AI during the test.</a:t>
+              <a:t>TEACHING MODE</a:t>
+            </a:r>
+          </a:p>
+          <a:p xmlns:a="http://schemas.openxmlformats.org/drawingml/2006/main">
+            <a:r>
+              <a:t>Demonstrate first. Read each new symbol aloud, trace the values and compare the shown output. Learners repeat worked examples individually after class.</a:t>
             </a:r>
           </a:p>
           <a:p xmlns:a="http://schemas.openxmlformats.org/drawingml/2006/main">
@@ -1137,37 +912,22 @@
           </a:p>
           <a:p xmlns:a="http://schemas.openxmlformats.org/drawingml/2006/main">
             <a:r>
-              <a:t>Practical Test 2 continued. Move on after a learner can explain the current example or required action.</a:t>
-            </a:r>
-          </a:p>
-          <a:p xmlns:a="http://schemas.openxmlformats.org/drawingml/2006/main">
-            <a:r>
-              <a:t/>
-            </a:r>
-          </a:p>
-          <a:p xmlns:a="http://schemas.openxmlformats.org/drawingml/2006/main">
-            <a:r>
-              <a:t>TEACHING MODE</a:t>
-            </a:r>
-          </a:p>
-          <a:p xmlns:a="http://schemas.openxmlformats.org/drawingml/2006/main">
-            <a:r>
-              <a:t>Demonstrate the example directly. Explain each new name, symbol and output. Use the revision example for an individual check after class; no live partner activity is required.</a:t>
-            </a:r>
-          </a:p>
-          <a:p xmlns:a="http://schemas.openxmlformats.org/drawingml/2006/main">
-            <a:r>
-              <a:t/>
-            </a:r>
-          </a:p>
-          <a:p xmlns:a="http://schemas.openxmlformats.org/drawingml/2006/main">
-            <a:r>
-              <a:t>NEXT</a:t>
-            </a:r>
-          </a:p>
-          <a:p xmlns:a="http://schemas.openxmlformats.org/drawingml/2006/main">
-            <a:r>
               <a:t>Practical Test 2 continued.</a:t>
+            </a:r>
+          </a:p>
+          <a:p xmlns:a="http://schemas.openxmlformats.org/drawingml/2006/main">
+            <a:r>
+              <a:t/>
+            </a:r>
+          </a:p>
+          <a:p xmlns:a="http://schemas.openxmlformats.org/drawingml/2006/main">
+            <a:r>
+              <a:t>REFERENCES</a:t>
+            </a:r>
+          </a:p>
+          <a:p xmlns:a="http://schemas.openxmlformats.org/drawingml/2006/main">
+            <a:r>
+              <a:t/>
             </a:r>
           </a:p>
         </p:txBody>
@@ -1257,7 +1017,7 @@
           </a:p>
           <a:p xmlns:a="http://schemas.openxmlformats.org/drawingml/2006/main">
             <a:r>
-              <a:t>Build on Practical Test 2. Explain why this example is needed before running it.</a:t>
+              <a:t>Previous slide: Practical Test 2.</a:t>
             </a:r>
           </a:p>
           <a:p xmlns:a="http://schemas.openxmlformats.org/drawingml/2006/main">
@@ -1312,41 +1072,6 @@
           </a:p>
           <a:p xmlns:a="http://schemas.openxmlformats.org/drawingml/2006/main">
             <a:r>
-              <a:t>LECTURER DETAIL</a:t>
-            </a:r>
-          </a:p>
-          <a:p xmlns:a="http://schemas.openxmlformats.org/drawingml/2006/main">
-            <a:r>
-              <a:t>TEACHING PURPOSE</a:t>
-            </a:r>
-          </a:p>
-          <a:p xmlns:a="http://schemas.openxmlformats.org/drawingml/2006/main">
-            <a:r>
-              <a:t>Practical Test 2 continued</a:t>
-            </a:r>
-          </a:p>
-          <a:p xmlns:a="http://schemas.openxmlformats.org/drawingml/2006/main">
-            <a:r>
-              <a:t/>
-            </a:r>
-          </a:p>
-          <a:p xmlns:a="http://schemas.openxmlformats.org/drawingml/2006/main">
-            <a:r>
-              <a:t>CONNECT</a:t>
-            </a:r>
-          </a:p>
-          <a:p xmlns:a="http://schemas.openxmlformats.org/drawingml/2006/main">
-            <a:r>
-              <a:t>Build on the preceding slide: Practical Test 2.</a:t>
-            </a:r>
-          </a:p>
-          <a:p xmlns:a="http://schemas.openxmlformats.org/drawingml/2006/main">
-            <a:r>
-              <a:t/>
-            </a:r>
-          </a:p>
-          <a:p xmlns:a="http://schemas.openxmlformats.org/drawingml/2006/main">
-            <a:r>
               <a:t>LECTURER CUE</a:t>
             </a:r>
           </a:p>
@@ -1362,57 +1087,12 @@
           </a:p>
           <a:p xmlns:a="http://schemas.openxmlformats.org/drawingml/2006/main">
             <a:r>
-              <a:t>EXPLAIN IN ORDINARY WORDS</a:t>
-            </a:r>
-          </a:p>
-          <a:p xmlns:a="http://schemas.openxmlformats.org/drawingml/2006/main">
-            <a:r>
-              <a:t>A cleaning decision needs evidence, a stated rule and a before/after check. Similar rows may be genuine repeated events. Reconciliation compares totals built under the same definitions.</a:t>
-            </a:r>
-          </a:p>
-          <a:p xmlns:a="http://schemas.openxmlformats.org/drawingml/2006/main">
-            <a:r>
-              <a:t/>
-            </a:r>
-          </a:p>
-          <a:p xmlns:a="http://schemas.openxmlformats.org/drawingml/2006/main">
-            <a:r>
-              <a:t>CHECK AND EXPECTED ANSWER</a:t>
-            </a:r>
-          </a:p>
-          <a:p xmlns:a="http://schemas.openxmlformats.org/drawingml/2006/main">
-            <a:r>
-              <a:t>May we delete every repeated amount? No. Check the row identifier and the table grain first.</a:t>
-            </a:r>
-          </a:p>
-          <a:p xmlns:a="http://schemas.openxmlformats.org/drawingml/2006/main">
-            <a:r>
-              <a:t/>
-            </a:r>
-          </a:p>
-          <a:p xmlns:a="http://schemas.openxmlformats.org/drawingml/2006/main">
-            <a:r>
-              <a:t>IF LEARNERS ARE STUCK</a:t>
-            </a:r>
-          </a:p>
-          <a:p xmlns:a="http://schemas.openxmlformats.org/drawingml/2006/main">
-            <a:r>
-              <a:t>Keep raw data, record counts before and after each action, then explain any remaining difference instead of forcing totals to agree.</a:t>
-            </a:r>
-          </a:p>
-          <a:p xmlns:a="http://schemas.openxmlformats.org/drawingml/2006/main">
-            <a:r>
-              <a:t/>
-            </a:r>
-          </a:p>
-          <a:p xmlns:a="http://schemas.openxmlformats.org/drawingml/2006/main">
-            <a:r>
-              <a:t>TEST COLLECTION RULE</a:t>
-            </a:r>
-          </a:p>
-          <a:p xmlns:a="http://schemas.openxmlformats.org/drawingml/2006/main">
-            <a:r>
-              <a:t>This deck is for rehearsal before the timed assessment. Preserve the invigilated timetable and Part A snapshot. During Part B, type answers in the notebook cell headed ## My written evidence without executing code. Collect one complete .ipynb offline; later Google upload only transports the collected work. Do not require internet or AI during the test.</a:t>
+              <a:t>TEACHING MODE</a:t>
+            </a:r>
+          </a:p>
+          <a:p xmlns:a="http://schemas.openxmlformats.org/drawingml/2006/main">
+            <a:r>
+              <a:t>Demonstrate first. Read each new symbol aloud, trace the values and compare the shown output. Learners repeat worked examples individually after class.</a:t>
             </a:r>
           </a:p>
           <a:p xmlns:a="http://schemas.openxmlformats.org/drawingml/2006/main">
@@ -1427,37 +1107,22 @@
           </a:p>
           <a:p xmlns:a="http://schemas.openxmlformats.org/drawingml/2006/main">
             <a:r>
-              <a:t>Practical Test 2 continued. Move on after a learner can explain the current example or required action.</a:t>
-            </a:r>
-          </a:p>
-          <a:p xmlns:a="http://schemas.openxmlformats.org/drawingml/2006/main">
-            <a:r>
-              <a:t/>
-            </a:r>
-          </a:p>
-          <a:p xmlns:a="http://schemas.openxmlformats.org/drawingml/2006/main">
-            <a:r>
-              <a:t>TEACHING MODE</a:t>
-            </a:r>
-          </a:p>
-          <a:p xmlns:a="http://schemas.openxmlformats.org/drawingml/2006/main">
-            <a:r>
-              <a:t>Demonstrate the example directly. Explain each new name, symbol and output. Use the revision example for an individual check after class; no live partner activity is required.</a:t>
-            </a:r>
-          </a:p>
-          <a:p xmlns:a="http://schemas.openxmlformats.org/drawingml/2006/main">
-            <a:r>
-              <a:t/>
-            </a:r>
-          </a:p>
-          <a:p xmlns:a="http://schemas.openxmlformats.org/drawingml/2006/main">
-            <a:r>
-              <a:t>NEXT</a:t>
-            </a:r>
-          </a:p>
-          <a:p xmlns:a="http://schemas.openxmlformats.org/drawingml/2006/main">
-            <a:r>
               <a:t>Practical Test 2 continued.</a:t>
+            </a:r>
+          </a:p>
+          <a:p xmlns:a="http://schemas.openxmlformats.org/drawingml/2006/main">
+            <a:r>
+              <a:t/>
+            </a:r>
+          </a:p>
+          <a:p xmlns:a="http://schemas.openxmlformats.org/drawingml/2006/main">
+            <a:r>
+              <a:t>REFERENCES</a:t>
+            </a:r>
+          </a:p>
+          <a:p xmlns:a="http://schemas.openxmlformats.org/drawingml/2006/main">
+            <a:r>
+              <a:t/>
             </a:r>
           </a:p>
         </p:txBody>
@@ -1547,7 +1212,7 @@
           </a:p>
           <a:p xmlns:a="http://schemas.openxmlformats.org/drawingml/2006/main">
             <a:r>
-              <a:t>Build on Practical Test 2 continued. Explain why this example is needed before running it.</a:t>
+              <a:t>Previous slide: Practical Test 2 continued.</a:t>
             </a:r>
           </a:p>
           <a:p xmlns:a="http://schemas.openxmlformats.org/drawingml/2006/main">
@@ -1602,41 +1267,6 @@
           </a:p>
           <a:p xmlns:a="http://schemas.openxmlformats.org/drawingml/2006/main">
             <a:r>
-              <a:t>LECTURER DETAIL</a:t>
-            </a:r>
-          </a:p>
-          <a:p xmlns:a="http://schemas.openxmlformats.org/drawingml/2006/main">
-            <a:r>
-              <a:t>TEACHING PURPOSE</a:t>
-            </a:r>
-          </a:p>
-          <a:p xmlns:a="http://schemas.openxmlformats.org/drawingml/2006/main">
-            <a:r>
-              <a:t>Practical Test 2 continued</a:t>
-            </a:r>
-          </a:p>
-          <a:p xmlns:a="http://schemas.openxmlformats.org/drawingml/2006/main">
-            <a:r>
-              <a:t/>
-            </a:r>
-          </a:p>
-          <a:p xmlns:a="http://schemas.openxmlformats.org/drawingml/2006/main">
-            <a:r>
-              <a:t>CONNECT</a:t>
-            </a:r>
-          </a:p>
-          <a:p xmlns:a="http://schemas.openxmlformats.org/drawingml/2006/main">
-            <a:r>
-              <a:t>Build on the preceding slide: Practical Test 2 continued.</a:t>
-            </a:r>
-          </a:p>
-          <a:p xmlns:a="http://schemas.openxmlformats.org/drawingml/2006/main">
-            <a:r>
-              <a:t/>
-            </a:r>
-          </a:p>
-          <a:p xmlns:a="http://schemas.openxmlformats.org/drawingml/2006/main">
-            <a:r>
               <a:t>LECTURER CUE</a:t>
             </a:r>
           </a:p>
@@ -1652,57 +1282,12 @@
           </a:p>
           <a:p xmlns:a="http://schemas.openxmlformats.org/drawingml/2006/main">
             <a:r>
-              <a:t>EXPLAIN IN ORDINARY WORDS</a:t>
-            </a:r>
-          </a:p>
-          <a:p xmlns:a="http://schemas.openxmlformats.org/drawingml/2006/main">
-            <a:r>
-              <a:t>Training fits rules. Validation helps choose among rules. The final test estimates performance after choices are fixed. Information that would be unavailable at the real prediction time must stay out of the inputs.</a:t>
-            </a:r>
-          </a:p>
-          <a:p xmlns:a="http://schemas.openxmlformats.org/drawingml/2006/main">
-            <a:r>
-              <a:t/>
-            </a:r>
-          </a:p>
-          <a:p xmlns:a="http://schemas.openxmlformats.org/drawingml/2006/main">
-            <a:r>
-              <a:t>CHECK AND EXPECTED ANSWER</a:t>
-            </a:r>
-          </a:p>
-          <a:p xmlns:a="http://schemas.openxmlformats.org/drawingml/2006/main">
-            <a:r>
-              <a:t>May two readings of the same machine appear on both sides when evaluating new machines? No; split by machine. For forecasting, train on the past and evaluate later time.</a:t>
-            </a:r>
-          </a:p>
-          <a:p xmlns:a="http://schemas.openxmlformats.org/drawingml/2006/main">
-            <a:r>
-              <a:t/>
-            </a:r>
-          </a:p>
-          <a:p xmlns:a="http://schemas.openxmlformats.org/drawingml/2006/main">
-            <a:r>
-              <a:t>IF LEARNERS ARE STUCK</a:t>
-            </a:r>
-          </a:p>
-          <a:p xmlns:a="http://schemas.openxmlformats.org/drawingml/2006/main">
-            <a:r>
-              <a:t>Use three envelopes. Keep the final-test envelope closed while selecting features or settings.</a:t>
-            </a:r>
-          </a:p>
-          <a:p xmlns:a="http://schemas.openxmlformats.org/drawingml/2006/main">
-            <a:r>
-              <a:t/>
-            </a:r>
-          </a:p>
-          <a:p xmlns:a="http://schemas.openxmlformats.org/drawingml/2006/main">
-            <a:r>
-              <a:t>TEST COLLECTION RULE</a:t>
-            </a:r>
-          </a:p>
-          <a:p xmlns:a="http://schemas.openxmlformats.org/drawingml/2006/main">
-            <a:r>
-              <a:t>This deck is for rehearsal before the timed assessment. Preserve the invigilated timetable and Part A snapshot. During Part B, type answers in the notebook cell headed ## My written evidence without executing code. Collect one complete .ipynb offline; later Google upload only transports the collected work. Do not require internet or AI during the test.</a:t>
+              <a:t>TEACHING MODE</a:t>
+            </a:r>
+          </a:p>
+          <a:p xmlns:a="http://schemas.openxmlformats.org/drawingml/2006/main">
+            <a:r>
+              <a:t>Demonstrate first. Read each new symbol aloud, trace the values and compare the shown output. Learners repeat worked examples individually after class.</a:t>
             </a:r>
           </a:p>
           <a:p xmlns:a="http://schemas.openxmlformats.org/drawingml/2006/main">
@@ -1717,37 +1302,22 @@
           </a:p>
           <a:p xmlns:a="http://schemas.openxmlformats.org/drawingml/2006/main">
             <a:r>
-              <a:t>Practical Test 2 continued. Move on after a learner can explain the current example or required action.</a:t>
-            </a:r>
-          </a:p>
-          <a:p xmlns:a="http://schemas.openxmlformats.org/drawingml/2006/main">
-            <a:r>
-              <a:t/>
-            </a:r>
-          </a:p>
-          <a:p xmlns:a="http://schemas.openxmlformats.org/drawingml/2006/main">
-            <a:r>
-              <a:t>TEACHING MODE</a:t>
-            </a:r>
-          </a:p>
-          <a:p xmlns:a="http://schemas.openxmlformats.org/drawingml/2006/main">
-            <a:r>
-              <a:t>Demonstrate the example directly. Explain each new name, symbol and output. Use the revision example for an individual check after class; no live partner activity is required.</a:t>
-            </a:r>
-          </a:p>
-          <a:p xmlns:a="http://schemas.openxmlformats.org/drawingml/2006/main">
-            <a:r>
-              <a:t/>
-            </a:r>
-          </a:p>
-          <a:p xmlns:a="http://schemas.openxmlformats.org/drawingml/2006/main">
-            <a:r>
-              <a:t>NEXT</a:t>
-            </a:r>
-          </a:p>
-          <a:p xmlns:a="http://schemas.openxmlformats.org/drawingml/2006/main">
-            <a:r>
               <a:t>Practical Test 2 continued.</a:t>
+            </a:r>
+          </a:p>
+          <a:p xmlns:a="http://schemas.openxmlformats.org/drawingml/2006/main">
+            <a:r>
+              <a:t/>
+            </a:r>
+          </a:p>
+          <a:p xmlns:a="http://schemas.openxmlformats.org/drawingml/2006/main">
+            <a:r>
+              <a:t>REFERENCES</a:t>
+            </a:r>
+          </a:p>
+          <a:p xmlns:a="http://schemas.openxmlformats.org/drawingml/2006/main">
+            <a:r>
+              <a:t/>
             </a:r>
           </a:p>
         </p:txBody>
@@ -1837,7 +1407,7 @@
           </a:p>
           <a:p xmlns:a="http://schemas.openxmlformats.org/drawingml/2006/main">
             <a:r>
-              <a:t>Build on Practical Test 2 continued. Explain why this example is needed before running it.</a:t>
+              <a:t>Previous slide: Practical Test 2 continued.</a:t>
             </a:r>
           </a:p>
           <a:p xmlns:a="http://schemas.openxmlformats.org/drawingml/2006/main">
@@ -1892,41 +1462,6 @@
           </a:p>
           <a:p xmlns:a="http://schemas.openxmlformats.org/drawingml/2006/main">
             <a:r>
-              <a:t>LECTURER DETAIL</a:t>
-            </a:r>
-          </a:p>
-          <a:p xmlns:a="http://schemas.openxmlformats.org/drawingml/2006/main">
-            <a:r>
-              <a:t>TEACHING PURPOSE</a:t>
-            </a:r>
-          </a:p>
-          <a:p xmlns:a="http://schemas.openxmlformats.org/drawingml/2006/main">
-            <a:r>
-              <a:t>Practical Test 2 continued</a:t>
-            </a:r>
-          </a:p>
-          <a:p xmlns:a="http://schemas.openxmlformats.org/drawingml/2006/main">
-            <a:r>
-              <a:t/>
-            </a:r>
-          </a:p>
-          <a:p xmlns:a="http://schemas.openxmlformats.org/drawingml/2006/main">
-            <a:r>
-              <a:t>CONNECT</a:t>
-            </a:r>
-          </a:p>
-          <a:p xmlns:a="http://schemas.openxmlformats.org/drawingml/2006/main">
-            <a:r>
-              <a:t>Build on the preceding slide: Practical Test 2 continued.</a:t>
-            </a:r>
-          </a:p>
-          <a:p xmlns:a="http://schemas.openxmlformats.org/drawingml/2006/main">
-            <a:r>
-              <a:t/>
-            </a:r>
-          </a:p>
-          <a:p xmlns:a="http://schemas.openxmlformats.org/drawingml/2006/main">
-            <a:r>
               <a:t>LECTURER CUE</a:t>
             </a:r>
           </a:p>
@@ -1942,57 +1477,12 @@
           </a:p>
           <a:p xmlns:a="http://schemas.openxmlformats.org/drawingml/2006/main">
             <a:r>
-              <a:t>EXPLAIN IN ORDINARY WORDS</a:t>
-            </a:r>
-          </a:p>
-          <a:p xmlns:a="http://schemas.openxmlformats.org/drawingml/2006/main">
-            <a:r>
-              <a:t>Training fits rules. Validation helps choose among rules. The final test estimates performance after choices are fixed. Information that would be unavailable at the real prediction time must stay out of the inputs.</a:t>
-            </a:r>
-          </a:p>
-          <a:p xmlns:a="http://schemas.openxmlformats.org/drawingml/2006/main">
-            <a:r>
-              <a:t/>
-            </a:r>
-          </a:p>
-          <a:p xmlns:a="http://schemas.openxmlformats.org/drawingml/2006/main">
-            <a:r>
-              <a:t>CHECK AND EXPECTED ANSWER</a:t>
-            </a:r>
-          </a:p>
-          <a:p xmlns:a="http://schemas.openxmlformats.org/drawingml/2006/main">
-            <a:r>
-              <a:t>May two readings of the same machine appear on both sides when evaluating new machines? No; split by machine. For forecasting, train on the past and evaluate later time.</a:t>
-            </a:r>
-          </a:p>
-          <a:p xmlns:a="http://schemas.openxmlformats.org/drawingml/2006/main">
-            <a:r>
-              <a:t/>
-            </a:r>
-          </a:p>
-          <a:p xmlns:a="http://schemas.openxmlformats.org/drawingml/2006/main">
-            <a:r>
-              <a:t>IF LEARNERS ARE STUCK</a:t>
-            </a:r>
-          </a:p>
-          <a:p xmlns:a="http://schemas.openxmlformats.org/drawingml/2006/main">
-            <a:r>
-              <a:t>Use three envelopes. Keep the final-test envelope closed while selecting features or settings.</a:t>
-            </a:r>
-          </a:p>
-          <a:p xmlns:a="http://schemas.openxmlformats.org/drawingml/2006/main">
-            <a:r>
-              <a:t/>
-            </a:r>
-          </a:p>
-          <a:p xmlns:a="http://schemas.openxmlformats.org/drawingml/2006/main">
-            <a:r>
-              <a:t>TEST COLLECTION RULE</a:t>
-            </a:r>
-          </a:p>
-          <a:p xmlns:a="http://schemas.openxmlformats.org/drawingml/2006/main">
-            <a:r>
-              <a:t>This deck is for rehearsal before the timed assessment. Preserve the invigilated timetable and Part A snapshot. During Part B, type answers in the notebook cell headed ## My written evidence without executing code. Collect one complete .ipynb offline; later Google upload only transports the collected work. Do not require internet or AI during the test.</a:t>
+              <a:t>TEACHING MODE</a:t>
+            </a:r>
+          </a:p>
+          <a:p xmlns:a="http://schemas.openxmlformats.org/drawingml/2006/main">
+            <a:r>
+              <a:t>Demonstrate first. Read each new symbol aloud, trace the values and compare the shown output. Learners repeat worked examples individually after class.</a:t>
             </a:r>
           </a:p>
           <a:p xmlns:a="http://schemas.openxmlformats.org/drawingml/2006/main">
@@ -2007,37 +1497,22 @@
           </a:p>
           <a:p xmlns:a="http://schemas.openxmlformats.org/drawingml/2006/main">
             <a:r>
-              <a:t>Practical Test 2 continued. Move on after a learner can explain the current example or required action.</a:t>
-            </a:r>
-          </a:p>
-          <a:p xmlns:a="http://schemas.openxmlformats.org/drawingml/2006/main">
-            <a:r>
-              <a:t/>
-            </a:r>
-          </a:p>
-          <a:p xmlns:a="http://schemas.openxmlformats.org/drawingml/2006/main">
-            <a:r>
-              <a:t>TEACHING MODE</a:t>
-            </a:r>
-          </a:p>
-          <a:p xmlns:a="http://schemas.openxmlformats.org/drawingml/2006/main">
-            <a:r>
-              <a:t>Demonstrate the example directly. Explain each new name, symbol and output. Use the revision example for an individual check after class; no live partner activity is required.</a:t>
-            </a:r>
-          </a:p>
-          <a:p xmlns:a="http://schemas.openxmlformats.org/drawingml/2006/main">
-            <a:r>
-              <a:t/>
-            </a:r>
-          </a:p>
-          <a:p xmlns:a="http://schemas.openxmlformats.org/drawingml/2006/main">
-            <a:r>
-              <a:t>NEXT</a:t>
-            </a:r>
-          </a:p>
-          <a:p xmlns:a="http://schemas.openxmlformats.org/drawingml/2006/main">
-            <a:r>
               <a:t>Practical Test 2 continued.</a:t>
+            </a:r>
+          </a:p>
+          <a:p xmlns:a="http://schemas.openxmlformats.org/drawingml/2006/main">
+            <a:r>
+              <a:t/>
+            </a:r>
+          </a:p>
+          <a:p xmlns:a="http://schemas.openxmlformats.org/drawingml/2006/main">
+            <a:r>
+              <a:t>REFERENCES</a:t>
+            </a:r>
+          </a:p>
+          <a:p xmlns:a="http://schemas.openxmlformats.org/drawingml/2006/main">
+            <a:r>
+              <a:t/>
             </a:r>
           </a:p>
         </p:txBody>
@@ -2127,7 +1602,7 @@
           </a:p>
           <a:p xmlns:a="http://schemas.openxmlformats.org/drawingml/2006/main">
             <a:r>
-              <a:t>Build on Practical Test 2 continued. Explain why this example is needed before running it.</a:t>
+              <a:t>Previous slide: Practical Test 2 continued.</a:t>
             </a:r>
           </a:p>
           <a:p xmlns:a="http://schemas.openxmlformats.org/drawingml/2006/main">
@@ -2182,41 +1657,6 @@
           </a:p>
           <a:p xmlns:a="http://schemas.openxmlformats.org/drawingml/2006/main">
             <a:r>
-              <a:t>LECTURER DETAIL</a:t>
-            </a:r>
-          </a:p>
-          <a:p xmlns:a="http://schemas.openxmlformats.org/drawingml/2006/main">
-            <a:r>
-              <a:t>TEACHING PURPOSE</a:t>
-            </a:r>
-          </a:p>
-          <a:p xmlns:a="http://schemas.openxmlformats.org/drawingml/2006/main">
-            <a:r>
-              <a:t>Practical Test 2 continued</a:t>
-            </a:r>
-          </a:p>
-          <a:p xmlns:a="http://schemas.openxmlformats.org/drawingml/2006/main">
-            <a:r>
-              <a:t/>
-            </a:r>
-          </a:p>
-          <a:p xmlns:a="http://schemas.openxmlformats.org/drawingml/2006/main">
-            <a:r>
-              <a:t>CONNECT</a:t>
-            </a:r>
-          </a:p>
-          <a:p xmlns:a="http://schemas.openxmlformats.org/drawingml/2006/main">
-            <a:r>
-              <a:t>Build on the preceding slide: Practical Test 2 continued.</a:t>
-            </a:r>
-          </a:p>
-          <a:p xmlns:a="http://schemas.openxmlformats.org/drawingml/2006/main">
-            <a:r>
-              <a:t/>
-            </a:r>
-          </a:p>
-          <a:p xmlns:a="http://schemas.openxmlformats.org/drawingml/2006/main">
-            <a:r>
               <a:t>LECTURER CUE</a:t>
             </a:r>
           </a:p>
@@ -2232,57 +1672,12 @@
           </a:p>
           <a:p xmlns:a="http://schemas.openxmlformats.org/drawingml/2006/main">
             <a:r>
-              <a:t>EXPLAIN IN ORDINARY WORDS</a:t>
-            </a:r>
-          </a:p>
-          <a:p xmlns:a="http://schemas.openxmlformats.org/drawingml/2006/main">
-            <a:r>
-              <a:t>Cross-validation repeats training and validation on different partitions. Each fold gets a newly fitted model and preprocessing. Variation across fold scores shows sensitivity to the partition.</a:t>
-            </a:r>
-          </a:p>
-          <a:p xmlns:a="http://schemas.openxmlformats.org/drawingml/2006/main">
-            <a:r>
-              <a:t/>
-            </a:r>
-          </a:p>
-          <a:p xmlns:a="http://schemas.openxmlformats.org/drawingml/2006/main">
-            <a:r>
-              <a:t>CHECK AND EXPECTED ANSWER</a:t>
-            </a:r>
-          </a:p>
-          <a:p xmlns:a="http://schemas.openxmlformats.org/drawingml/2006/main">
-            <a:r>
-              <a:t>May preprocessing learn from all rows before the folds? No, that would give each validation fold information from outside its training portion.</a:t>
-            </a:r>
-          </a:p>
-          <a:p xmlns:a="http://schemas.openxmlformats.org/drawingml/2006/main">
-            <a:r>
-              <a:t/>
-            </a:r>
-          </a:p>
-          <a:p xmlns:a="http://schemas.openxmlformats.org/drawingml/2006/main">
-            <a:r>
-              <a:t>IF LEARNERS ARE STUCK</a:t>
-            </a:r>
-          </a:p>
-          <a:p xmlns:a="http://schemas.openxmlformats.org/drawingml/2006/main">
-            <a:r>
-              <a:t>Draw three small partitions and label who learns and who is evaluated. Fold spread is not automatically a confidence interval.</a:t>
-            </a:r>
-          </a:p>
-          <a:p xmlns:a="http://schemas.openxmlformats.org/drawingml/2006/main">
-            <a:r>
-              <a:t/>
-            </a:r>
-          </a:p>
-          <a:p xmlns:a="http://schemas.openxmlformats.org/drawingml/2006/main">
-            <a:r>
-              <a:t>TEST COLLECTION RULE</a:t>
-            </a:r>
-          </a:p>
-          <a:p xmlns:a="http://schemas.openxmlformats.org/drawingml/2006/main">
-            <a:r>
-              <a:t>This deck is for rehearsal before the timed assessment. Preserve the invigilated timetable and Part A snapshot. During Part B, type answers in the notebook cell headed ## My written evidence without executing code. Collect one complete .ipynb offline; later Google upload only transports the collected work. Do not require internet or AI during the test.</a:t>
+              <a:t>TEACHING MODE</a:t>
+            </a:r>
+          </a:p>
+          <a:p xmlns:a="http://schemas.openxmlformats.org/drawingml/2006/main">
+            <a:r>
+              <a:t>Demonstrate first. Read each new symbol aloud, trace the values and compare the shown output. Learners repeat worked examples individually after class.</a:t>
             </a:r>
           </a:p>
           <a:p xmlns:a="http://schemas.openxmlformats.org/drawingml/2006/main">
@@ -2297,37 +1692,22 @@
           </a:p>
           <a:p xmlns:a="http://schemas.openxmlformats.org/drawingml/2006/main">
             <a:r>
-              <a:t>Practical Test 2 continued. Move on after a learner can explain the current example or required action.</a:t>
-            </a:r>
-          </a:p>
-          <a:p xmlns:a="http://schemas.openxmlformats.org/drawingml/2006/main">
-            <a:r>
-              <a:t/>
-            </a:r>
-          </a:p>
-          <a:p xmlns:a="http://schemas.openxmlformats.org/drawingml/2006/main">
-            <a:r>
-              <a:t>TEACHING MODE</a:t>
-            </a:r>
-          </a:p>
-          <a:p xmlns:a="http://schemas.openxmlformats.org/drawingml/2006/main">
-            <a:r>
-              <a:t>Demonstrate the example directly. Explain each new name, symbol and output. Use the revision example for an individual check after class; no live partner activity is required.</a:t>
-            </a:r>
-          </a:p>
-          <a:p xmlns:a="http://schemas.openxmlformats.org/drawingml/2006/main">
-            <a:r>
-              <a:t/>
-            </a:r>
-          </a:p>
-          <a:p xmlns:a="http://schemas.openxmlformats.org/drawingml/2006/main">
-            <a:r>
-              <a:t>NEXT</a:t>
-            </a:r>
-          </a:p>
-          <a:p xmlns:a="http://schemas.openxmlformats.org/drawingml/2006/main">
-            <a:r>
               <a:t>Practical Test 2 continued.</a:t>
+            </a:r>
+          </a:p>
+          <a:p xmlns:a="http://schemas.openxmlformats.org/drawingml/2006/main">
+            <a:r>
+              <a:t/>
+            </a:r>
+          </a:p>
+          <a:p xmlns:a="http://schemas.openxmlformats.org/drawingml/2006/main">
+            <a:r>
+              <a:t>REFERENCES</a:t>
+            </a:r>
+          </a:p>
+          <a:p xmlns:a="http://schemas.openxmlformats.org/drawingml/2006/main">
+            <a:r>
+              <a:t/>
             </a:r>
           </a:p>
         </p:txBody>
@@ -2417,7 +1797,7 @@
           </a:p>
           <a:p xmlns:a="http://schemas.openxmlformats.org/drawingml/2006/main">
             <a:r>
-              <a:t>Build on Practical Test 2 continued. Explain why this example is needed before running it.</a:t>
+              <a:t>Previous slide: Practical Test 2 continued.</a:t>
             </a:r>
           </a:p>
           <a:p xmlns:a="http://schemas.openxmlformats.org/drawingml/2006/main">
@@ -2472,41 +1852,6 @@
           </a:p>
           <a:p xmlns:a="http://schemas.openxmlformats.org/drawingml/2006/main">
             <a:r>
-              <a:t>LECTURER DETAIL</a:t>
-            </a:r>
-          </a:p>
-          <a:p xmlns:a="http://schemas.openxmlformats.org/drawingml/2006/main">
-            <a:r>
-              <a:t>TEACHING PURPOSE</a:t>
-            </a:r>
-          </a:p>
-          <a:p xmlns:a="http://schemas.openxmlformats.org/drawingml/2006/main">
-            <a:r>
-              <a:t>Practical Test 2 continued</a:t>
-            </a:r>
-          </a:p>
-          <a:p xmlns:a="http://schemas.openxmlformats.org/drawingml/2006/main">
-            <a:r>
-              <a:t/>
-            </a:r>
-          </a:p>
-          <a:p xmlns:a="http://schemas.openxmlformats.org/drawingml/2006/main">
-            <a:r>
-              <a:t>CONNECT</a:t>
-            </a:r>
-          </a:p>
-          <a:p xmlns:a="http://schemas.openxmlformats.org/drawingml/2006/main">
-            <a:r>
-              <a:t>Build on the preceding slide: Practical Test 2 continued.</a:t>
-            </a:r>
-          </a:p>
-          <a:p xmlns:a="http://schemas.openxmlformats.org/drawingml/2006/main">
-            <a:r>
-              <a:t/>
-            </a:r>
-          </a:p>
-          <a:p xmlns:a="http://schemas.openxmlformats.org/drawingml/2006/main">
-            <a:r>
               <a:t>LECTURER CUE</a:t>
             </a:r>
           </a:p>
@@ -2522,57 +1867,12 @@
           </a:p>
           <a:p xmlns:a="http://schemas.openxmlformats.org/drawingml/2006/main">
             <a:r>
-              <a:t>EXPLAIN IN ORDINARY WORDS</a:t>
-            </a:r>
-          </a:p>
-          <a:p xmlns:a="http://schemas.openxmlformats.org/drawingml/2006/main">
-            <a:r>
-              <a:t>Read each quantity and unit before using a formula. Python calculates numbers but does not enforce physical units. Parentheses specify which operation happens first.</a:t>
-            </a:r>
-          </a:p>
-          <a:p xmlns:a="http://schemas.openxmlformats.org/drawingml/2006/main">
-            <a:r>
-              <a:t/>
-            </a:r>
-          </a:p>
-          <a:p xmlns:a="http://schemas.openxmlformats.org/drawingml/2006/main">
-            <a:r>
-              <a:t>CHECK AND EXPECTED ANSWER</a:t>
-            </a:r>
-          </a:p>
-          <a:p xmlns:a="http://schemas.openxmlformats.org/drawingml/2006/main">
-            <a:r>
-              <a:t>What is 5 m times 3 m? 15 square metres. What is 7/2 in Python? 3.5; 7//2 is 3.</a:t>
-            </a:r>
-          </a:p>
-          <a:p xmlns:a="http://schemas.openxmlformats.org/drawingml/2006/main">
-            <a:r>
-              <a:t/>
-            </a:r>
-          </a:p>
-          <a:p xmlns:a="http://schemas.openxmlformats.org/drawingml/2006/main">
-            <a:r>
-              <a:t>IF LEARNERS ARE STUCK</a:t>
-            </a:r>
-          </a:p>
-          <a:p xmlns:a="http://schemas.openxmlformats.org/drawingml/2006/main">
-            <a:r>
-              <a:t>Write the formula and units on paper, substitute small values, then translate it to Python. Check zero denominators and the issued sign convention.</a:t>
-            </a:r>
-          </a:p>
-          <a:p xmlns:a="http://schemas.openxmlformats.org/drawingml/2006/main">
-            <a:r>
-              <a:t/>
-            </a:r>
-          </a:p>
-          <a:p xmlns:a="http://schemas.openxmlformats.org/drawingml/2006/main">
-            <a:r>
-              <a:t>TEST COLLECTION RULE</a:t>
-            </a:r>
-          </a:p>
-          <a:p xmlns:a="http://schemas.openxmlformats.org/drawingml/2006/main">
-            <a:r>
-              <a:t>This deck is for rehearsal before the timed assessment. Preserve the invigilated timetable and Part A snapshot. During Part B, type answers in the notebook cell headed ## My written evidence without executing code. Collect one complete .ipynb offline; later Google upload only transports the collected work. Do not require internet or AI during the test.</a:t>
+              <a:t>TEACHING MODE</a:t>
+            </a:r>
+          </a:p>
+          <a:p xmlns:a="http://schemas.openxmlformats.org/drawingml/2006/main">
+            <a:r>
+              <a:t>Demonstrate first. Read each new symbol aloud, trace the values and compare the shown output. Learners repeat worked examples individually after class.</a:t>
             </a:r>
           </a:p>
           <a:p xmlns:a="http://schemas.openxmlformats.org/drawingml/2006/main">
@@ -2587,37 +1887,22 @@
           </a:p>
           <a:p xmlns:a="http://schemas.openxmlformats.org/drawingml/2006/main">
             <a:r>
-              <a:t>Practical Test 2 continued. Move on after a learner can explain the current example or required action.</a:t>
-            </a:r>
-          </a:p>
-          <a:p xmlns:a="http://schemas.openxmlformats.org/drawingml/2006/main">
-            <a:r>
-              <a:t/>
-            </a:r>
-          </a:p>
-          <a:p xmlns:a="http://schemas.openxmlformats.org/drawingml/2006/main">
-            <a:r>
-              <a:t>TEACHING MODE</a:t>
-            </a:r>
-          </a:p>
-          <a:p xmlns:a="http://schemas.openxmlformats.org/drawingml/2006/main">
-            <a:r>
-              <a:t>Demonstrate the example directly. Explain each new name, symbol and output. Use the revision example for an individual check after class; no live partner activity is required.</a:t>
-            </a:r>
-          </a:p>
-          <a:p xmlns:a="http://schemas.openxmlformats.org/drawingml/2006/main">
-            <a:r>
-              <a:t/>
-            </a:r>
-          </a:p>
-          <a:p xmlns:a="http://schemas.openxmlformats.org/drawingml/2006/main">
-            <a:r>
-              <a:t>NEXT</a:t>
-            </a:r>
-          </a:p>
-          <a:p xmlns:a="http://schemas.openxmlformats.org/drawingml/2006/main">
-            <a:r>
               <a:t>Practical Test 2 continued.</a:t>
+            </a:r>
+          </a:p>
+          <a:p xmlns:a="http://schemas.openxmlformats.org/drawingml/2006/main">
+            <a:r>
+              <a:t/>
+            </a:r>
+          </a:p>
+          <a:p xmlns:a="http://schemas.openxmlformats.org/drawingml/2006/main">
+            <a:r>
+              <a:t>REFERENCES</a:t>
+            </a:r>
+          </a:p>
+          <a:p xmlns:a="http://schemas.openxmlformats.org/drawingml/2006/main">
+            <a:r>
+              <a:t/>
             </a:r>
           </a:p>
         </p:txBody>
@@ -2707,7 +1992,7 @@
           </a:p>
           <a:p xmlns:a="http://schemas.openxmlformats.org/drawingml/2006/main">
             <a:r>
-              <a:t>Build on Practical Test 2 continued. Explain why this example is needed before running it.</a:t>
+              <a:t>Previous slide: Practical Test 2 continued.</a:t>
             </a:r>
           </a:p>
           <a:p xmlns:a="http://schemas.openxmlformats.org/drawingml/2006/main">
@@ -2762,41 +2047,6 @@
           </a:p>
           <a:p xmlns:a="http://schemas.openxmlformats.org/drawingml/2006/main">
             <a:r>
-              <a:t>LECTURER DETAIL</a:t>
-            </a:r>
-          </a:p>
-          <a:p xmlns:a="http://schemas.openxmlformats.org/drawingml/2006/main">
-            <a:r>
-              <a:t>TEACHING PURPOSE</a:t>
-            </a:r>
-          </a:p>
-          <a:p xmlns:a="http://schemas.openxmlformats.org/drawingml/2006/main">
-            <a:r>
-              <a:t>Practical Test 2 continued</a:t>
-            </a:r>
-          </a:p>
-          <a:p xmlns:a="http://schemas.openxmlformats.org/drawingml/2006/main">
-            <a:r>
-              <a:t/>
-            </a:r>
-          </a:p>
-          <a:p xmlns:a="http://schemas.openxmlformats.org/drawingml/2006/main">
-            <a:r>
-              <a:t>CONNECT</a:t>
-            </a:r>
-          </a:p>
-          <a:p xmlns:a="http://schemas.openxmlformats.org/drawingml/2006/main">
-            <a:r>
-              <a:t>Build on the preceding slide: Practical Test 2 continued.</a:t>
-            </a:r>
-          </a:p>
-          <a:p xmlns:a="http://schemas.openxmlformats.org/drawingml/2006/main">
-            <a:r>
-              <a:t/>
-            </a:r>
-          </a:p>
-          <a:p xmlns:a="http://schemas.openxmlformats.org/drawingml/2006/main">
-            <a:r>
               <a:t>LECTURER CUE</a:t>
             </a:r>
           </a:p>
@@ -2812,57 +2062,12 @@
           </a:p>
           <a:p xmlns:a="http://schemas.openxmlformats.org/drawingml/2006/main">
             <a:r>
-              <a:t>EXPLAIN IN ORDINARY WORDS</a:t>
-            </a:r>
-          </a:p>
-          <a:p xmlns:a="http://schemas.openxmlformats.org/drawingml/2006/main">
-            <a:r>
-              <a:t>Training fits rules. Validation helps choose among rules. The final test estimates performance after choices are fixed. Information that would be unavailable at the real prediction time must stay out of the inputs.</a:t>
-            </a:r>
-          </a:p>
-          <a:p xmlns:a="http://schemas.openxmlformats.org/drawingml/2006/main">
-            <a:r>
-              <a:t/>
-            </a:r>
-          </a:p>
-          <a:p xmlns:a="http://schemas.openxmlformats.org/drawingml/2006/main">
-            <a:r>
-              <a:t>CHECK AND EXPECTED ANSWER</a:t>
-            </a:r>
-          </a:p>
-          <a:p xmlns:a="http://schemas.openxmlformats.org/drawingml/2006/main">
-            <a:r>
-              <a:t>May two readings of the same machine appear on both sides when evaluating new machines? No; split by machine. For forecasting, train on the past and evaluate later time.</a:t>
-            </a:r>
-          </a:p>
-          <a:p xmlns:a="http://schemas.openxmlformats.org/drawingml/2006/main">
-            <a:r>
-              <a:t/>
-            </a:r>
-          </a:p>
-          <a:p xmlns:a="http://schemas.openxmlformats.org/drawingml/2006/main">
-            <a:r>
-              <a:t>IF LEARNERS ARE STUCK</a:t>
-            </a:r>
-          </a:p>
-          <a:p xmlns:a="http://schemas.openxmlformats.org/drawingml/2006/main">
-            <a:r>
-              <a:t>Use three envelopes. Keep the final-test envelope closed while selecting features or settings.</a:t>
-            </a:r>
-          </a:p>
-          <a:p xmlns:a="http://schemas.openxmlformats.org/drawingml/2006/main">
-            <a:r>
-              <a:t/>
-            </a:r>
-          </a:p>
-          <a:p xmlns:a="http://schemas.openxmlformats.org/drawingml/2006/main">
-            <a:r>
-              <a:t>TEST COLLECTION RULE</a:t>
-            </a:r>
-          </a:p>
-          <a:p xmlns:a="http://schemas.openxmlformats.org/drawingml/2006/main">
-            <a:r>
-              <a:t>This deck is for rehearsal before the timed assessment. Preserve the invigilated timetable and Part A snapshot. During Part B, type answers in the notebook cell headed ## My written evidence without executing code. Collect one complete .ipynb offline; later Google upload only transports the collected work. Do not require internet or AI during the test.</a:t>
+              <a:t>TEACHING MODE</a:t>
+            </a:r>
+          </a:p>
+          <a:p xmlns:a="http://schemas.openxmlformats.org/drawingml/2006/main">
+            <a:r>
+              <a:t>Demonstrate first. Read each new symbol aloud, trace the values and compare the shown output. Learners repeat worked examples individually after class.</a:t>
             </a:r>
           </a:p>
           <a:p xmlns:a="http://schemas.openxmlformats.org/drawingml/2006/main">
@@ -2877,37 +2082,22 @@
           </a:p>
           <a:p xmlns:a="http://schemas.openxmlformats.org/drawingml/2006/main">
             <a:r>
-              <a:t>Practical Test 2 continued. Move on after a learner can explain the current example or required action.</a:t>
-            </a:r>
-          </a:p>
-          <a:p xmlns:a="http://schemas.openxmlformats.org/drawingml/2006/main">
-            <a:r>
-              <a:t/>
-            </a:r>
-          </a:p>
-          <a:p xmlns:a="http://schemas.openxmlformats.org/drawingml/2006/main">
-            <a:r>
-              <a:t>TEACHING MODE</a:t>
-            </a:r>
-          </a:p>
-          <a:p xmlns:a="http://schemas.openxmlformats.org/drawingml/2006/main">
-            <a:r>
-              <a:t>Demonstrate the example directly. Explain each new name, symbol and output. Use the revision example for an individual check after class; no live partner activity is required.</a:t>
-            </a:r>
-          </a:p>
-          <a:p xmlns:a="http://schemas.openxmlformats.org/drawingml/2006/main">
-            <a:r>
-              <a:t/>
-            </a:r>
-          </a:p>
-          <a:p xmlns:a="http://schemas.openxmlformats.org/drawingml/2006/main">
-            <a:r>
-              <a:t>NEXT</a:t>
-            </a:r>
-          </a:p>
-          <a:p xmlns:a="http://schemas.openxmlformats.org/drawingml/2006/main">
-            <a:r>
               <a:t>Practical Test 2 continued.</a:t>
+            </a:r>
+          </a:p>
+          <a:p xmlns:a="http://schemas.openxmlformats.org/drawingml/2006/main">
+            <a:r>
+              <a:t/>
+            </a:r>
+          </a:p>
+          <a:p xmlns:a="http://schemas.openxmlformats.org/drawingml/2006/main">
+            <a:r>
+              <a:t>REFERENCES</a:t>
+            </a:r>
+          </a:p>
+          <a:p xmlns:a="http://schemas.openxmlformats.org/drawingml/2006/main">
+            <a:r>
+              <a:t/>
             </a:r>
           </a:p>
         </p:txBody>
@@ -2997,7 +2187,7 @@
           </a:p>
           <a:p xmlns:a="http://schemas.openxmlformats.org/drawingml/2006/main">
             <a:r>
-              <a:t>Build on Practical Test 2 continued. Explain why this example is needed before running it.</a:t>
+              <a:t>Previous slide: Practical Test 2 continued.</a:t>
             </a:r>
           </a:p>
           <a:p xmlns:a="http://schemas.openxmlformats.org/drawingml/2006/main">
@@ -3052,41 +2242,6 @@
           </a:p>
           <a:p xmlns:a="http://schemas.openxmlformats.org/drawingml/2006/main">
             <a:r>
-              <a:t>LECTURER DETAIL</a:t>
-            </a:r>
-          </a:p>
-          <a:p xmlns:a="http://schemas.openxmlformats.org/drawingml/2006/main">
-            <a:r>
-              <a:t>TEACHING PURPOSE</a:t>
-            </a:r>
-          </a:p>
-          <a:p xmlns:a="http://schemas.openxmlformats.org/drawingml/2006/main">
-            <a:r>
-              <a:t>Practical Test 2 continued</a:t>
-            </a:r>
-          </a:p>
-          <a:p xmlns:a="http://schemas.openxmlformats.org/drawingml/2006/main">
-            <a:r>
-              <a:t/>
-            </a:r>
-          </a:p>
-          <a:p xmlns:a="http://schemas.openxmlformats.org/drawingml/2006/main">
-            <a:r>
-              <a:t>CONNECT</a:t>
-            </a:r>
-          </a:p>
-          <a:p xmlns:a="http://schemas.openxmlformats.org/drawingml/2006/main">
-            <a:r>
-              <a:t>Build on the preceding slide: Practical Test 2 continued.</a:t>
-            </a:r>
-          </a:p>
-          <a:p xmlns:a="http://schemas.openxmlformats.org/drawingml/2006/main">
-            <a:r>
-              <a:t/>
-            </a:r>
-          </a:p>
-          <a:p xmlns:a="http://schemas.openxmlformats.org/drawingml/2006/main">
-            <a:r>
               <a:t>LECTURER CUE</a:t>
             </a:r>
           </a:p>
@@ -3102,57 +2257,12 @@
           </a:p>
           <a:p xmlns:a="http://schemas.openxmlformats.org/drawingml/2006/main">
             <a:r>
-              <a:t>EXPLAIN IN ORDINARY WORDS</a:t>
-            </a:r>
-          </a:p>
-          <a:p xmlns:a="http://schemas.openxmlformats.org/drawingml/2006/main">
-            <a:r>
-              <a:t>First remove models that fail the stated error or speed limits. Then apply the stated ranking and tie-break rules to eligible models. The smallest error alone need not decide.</a:t>
-            </a:r>
-          </a:p>
-          <a:p xmlns:a="http://schemas.openxmlformats.org/drawingml/2006/main">
-            <a:r>
-              <a:t/>
-            </a:r>
-          </a:p>
-          <a:p xmlns:a="http://schemas.openxmlformats.org/drawingml/2006/main">
-            <a:r>
-              <a:t>CHECK AND EXPECTED ANSWER</a:t>
-            </a:r>
-          </a:p>
-          <a:p xmlns:a="http://schemas.openxmlformats.org/drawingml/2006/main">
-            <a:r>
-              <a:t>If a model has the lowest error but exceeds the maximum latency, is it eligible? No.</a:t>
-            </a:r>
-          </a:p>
-          <a:p xmlns:a="http://schemas.openxmlformats.org/drawingml/2006/main">
-            <a:r>
-              <a:t/>
-            </a:r>
-          </a:p>
-          <a:p xmlns:a="http://schemas.openxmlformats.org/drawingml/2006/main">
-            <a:r>
-              <a:t>IF LEARNERS ARE STUCK</a:t>
-            </a:r>
-          </a:p>
-          <a:p xmlns:a="http://schemas.openxmlformats.org/drawingml/2006/main">
-            <a:r>
-              <a:t>Write an eligibility column and a separate ranking column. Check the exact boundary rule before sorting.</a:t>
-            </a:r>
-          </a:p>
-          <a:p xmlns:a="http://schemas.openxmlformats.org/drawingml/2006/main">
-            <a:r>
-              <a:t/>
-            </a:r>
-          </a:p>
-          <a:p xmlns:a="http://schemas.openxmlformats.org/drawingml/2006/main">
-            <a:r>
-              <a:t>TEST COLLECTION RULE</a:t>
-            </a:r>
-          </a:p>
-          <a:p xmlns:a="http://schemas.openxmlformats.org/drawingml/2006/main">
-            <a:r>
-              <a:t>This deck is for rehearsal before the timed assessment. Preserve the invigilated timetable and Part A snapshot. During Part B, type answers in the notebook cell headed ## My written evidence without executing code. Collect one complete .ipynb offline; later Google upload only transports the collected work. Do not require internet or AI during the test.</a:t>
+              <a:t>TEACHING MODE</a:t>
+            </a:r>
+          </a:p>
+          <a:p xmlns:a="http://schemas.openxmlformats.org/drawingml/2006/main">
+            <a:r>
+              <a:t>Demonstrate first. Read each new symbol aloud, trace the values and compare the shown output. Learners repeat worked examples individually after class.</a:t>
             </a:r>
           </a:p>
           <a:p xmlns:a="http://schemas.openxmlformats.org/drawingml/2006/main">
@@ -3167,37 +2277,22 @@
           </a:p>
           <a:p xmlns:a="http://schemas.openxmlformats.org/drawingml/2006/main">
             <a:r>
-              <a:t>Practical Test 2 continued. Move on after a learner can explain the current example or required action.</a:t>
-            </a:r>
-          </a:p>
-          <a:p xmlns:a="http://schemas.openxmlformats.org/drawingml/2006/main">
-            <a:r>
-              <a:t/>
-            </a:r>
-          </a:p>
-          <a:p xmlns:a="http://schemas.openxmlformats.org/drawingml/2006/main">
-            <a:r>
-              <a:t>TEACHING MODE</a:t>
-            </a:r>
-          </a:p>
-          <a:p xmlns:a="http://schemas.openxmlformats.org/drawingml/2006/main">
-            <a:r>
-              <a:t>Demonstrate the example directly. Explain each new name, symbol and output. Use the revision example for an individual check after class; no live partner activity is required.</a:t>
-            </a:r>
-          </a:p>
-          <a:p xmlns:a="http://schemas.openxmlformats.org/drawingml/2006/main">
-            <a:r>
-              <a:t/>
-            </a:r>
-          </a:p>
-          <a:p xmlns:a="http://schemas.openxmlformats.org/drawingml/2006/main">
-            <a:r>
-              <a:t>NEXT</a:t>
-            </a:r>
-          </a:p>
-          <a:p xmlns:a="http://schemas.openxmlformats.org/drawingml/2006/main">
-            <a:r>
               <a:t>Practical Test 2 continued.</a:t>
+            </a:r>
+          </a:p>
+          <a:p xmlns:a="http://schemas.openxmlformats.org/drawingml/2006/main">
+            <a:r>
+              <a:t/>
+            </a:r>
+          </a:p>
+          <a:p xmlns:a="http://schemas.openxmlformats.org/drawingml/2006/main">
+            <a:r>
+              <a:t>REFERENCES</a:t>
+            </a:r>
+          </a:p>
+          <a:p xmlns:a="http://schemas.openxmlformats.org/drawingml/2006/main">
+            <a:r>
+              <a:t/>
             </a:r>
           </a:p>
         </p:txBody>
@@ -3287,7 +2382,7 @@
           </a:p>
           <a:p xmlns:a="http://schemas.openxmlformats.org/drawingml/2006/main">
             <a:r>
-              <a:t>Build on Practical Test 2 continued. Explain why this example is needed before running it.</a:t>
+              <a:t>Previous slide: Practical Test 2 continued.</a:t>
             </a:r>
           </a:p>
           <a:p xmlns:a="http://schemas.openxmlformats.org/drawingml/2006/main">
@@ -3342,41 +2437,6 @@
           </a:p>
           <a:p xmlns:a="http://schemas.openxmlformats.org/drawingml/2006/main">
             <a:r>
-              <a:t>LECTURER DETAIL</a:t>
-            </a:r>
-          </a:p>
-          <a:p xmlns:a="http://schemas.openxmlformats.org/drawingml/2006/main">
-            <a:r>
-              <a:t>TEACHING PURPOSE</a:t>
-            </a:r>
-          </a:p>
-          <a:p xmlns:a="http://schemas.openxmlformats.org/drawingml/2006/main">
-            <a:r>
-              <a:t>Practical Test 2 continued</a:t>
-            </a:r>
-          </a:p>
-          <a:p xmlns:a="http://schemas.openxmlformats.org/drawingml/2006/main">
-            <a:r>
-              <a:t/>
-            </a:r>
-          </a:p>
-          <a:p xmlns:a="http://schemas.openxmlformats.org/drawingml/2006/main">
-            <a:r>
-              <a:t>CONNECT</a:t>
-            </a:r>
-          </a:p>
-          <a:p xmlns:a="http://schemas.openxmlformats.org/drawingml/2006/main">
-            <a:r>
-              <a:t>Build on the preceding slide: Practical Test 2 continued.</a:t>
-            </a:r>
-          </a:p>
-          <a:p xmlns:a="http://schemas.openxmlformats.org/drawingml/2006/main">
-            <a:r>
-              <a:t/>
-            </a:r>
-          </a:p>
-          <a:p xmlns:a="http://schemas.openxmlformats.org/drawingml/2006/main">
-            <a:r>
               <a:t>LECTURER CUE</a:t>
             </a:r>
           </a:p>
@@ -3392,57 +2452,12 @@
           </a:p>
           <a:p xmlns:a="http://schemas.openxmlformats.org/drawingml/2006/main">
             <a:r>
-              <a:t>EXPLAIN IN ORDINARY WORDS</a:t>
-            </a:r>
-          </a:p>
-          <a:p xmlns:a="http://schemas.openxmlformats.org/drawingml/2006/main">
-            <a:r>
-              <a:t>A list keeps items in order. Python positions start at zero. In [2,4,6], position 0 contains 2 and position 2 contains 6. A slice excludes its stop position.</a:t>
-            </a:r>
-          </a:p>
-          <a:p xmlns:a="http://schemas.openxmlformats.org/drawingml/2006/main">
-            <a:r>
-              <a:t/>
-            </a:r>
-          </a:p>
-          <a:p xmlns:a="http://schemas.openxmlformats.org/drawingml/2006/main">
-            <a:r>
-              <a:t>CHECK AND EXPECTED ANSWER</a:t>
-            </a:r>
-          </a:p>
-          <a:p xmlns:a="http://schemas.openxmlformats.org/drawingml/2006/main">
-            <a:r>
-              <a:t>What is [2,4,6][1]? 4. Is there a position 3? No.</a:t>
-            </a:r>
-          </a:p>
-          <a:p xmlns:a="http://schemas.openxmlformats.org/drawingml/2006/main">
-            <a:r>
-              <a:t/>
-            </a:r>
-          </a:p>
-          <a:p xmlns:a="http://schemas.openxmlformats.org/drawingml/2006/main">
-            <a:r>
-              <a:t>IF LEARNERS ARE STUCK</a:t>
-            </a:r>
-          </a:p>
-          <a:p xmlns:a="http://schemas.openxmlformats.org/drawingml/2006/main">
-            <a:r>
-              <a:t>Draw three numbered boxes starting at zero. Keep the position separate from the value stored in it.</a:t>
-            </a:r>
-          </a:p>
-          <a:p xmlns:a="http://schemas.openxmlformats.org/drawingml/2006/main">
-            <a:r>
-              <a:t/>
-            </a:r>
-          </a:p>
-          <a:p xmlns:a="http://schemas.openxmlformats.org/drawingml/2006/main">
-            <a:r>
-              <a:t>TEST COLLECTION RULE</a:t>
-            </a:r>
-          </a:p>
-          <a:p xmlns:a="http://schemas.openxmlformats.org/drawingml/2006/main">
-            <a:r>
-              <a:t>This deck is for rehearsal before the timed assessment. Preserve the invigilated timetable and Part A snapshot. During Part B, type answers in the notebook cell headed ## My written evidence without executing code. Collect one complete .ipynb offline; later Google upload only transports the collected work. Do not require internet or AI during the test.</a:t>
+              <a:t>TEACHING MODE</a:t>
+            </a:r>
+          </a:p>
+          <a:p xmlns:a="http://schemas.openxmlformats.org/drawingml/2006/main">
+            <a:r>
+              <a:t>Demonstrate first. Read each new symbol aloud, trace the values and compare the shown output. Learners repeat worked examples individually after class.</a:t>
             </a:r>
           </a:p>
           <a:p xmlns:a="http://schemas.openxmlformats.org/drawingml/2006/main">
@@ -3457,37 +2472,22 @@
           </a:p>
           <a:p xmlns:a="http://schemas.openxmlformats.org/drawingml/2006/main">
             <a:r>
-              <a:t>Practical Test 2 submission. Move on after a learner can explain the current example or required action.</a:t>
-            </a:r>
-          </a:p>
-          <a:p xmlns:a="http://schemas.openxmlformats.org/drawingml/2006/main">
-            <a:r>
-              <a:t/>
-            </a:r>
-          </a:p>
-          <a:p xmlns:a="http://schemas.openxmlformats.org/drawingml/2006/main">
-            <a:r>
-              <a:t>TEACHING MODE</a:t>
-            </a:r>
-          </a:p>
-          <a:p xmlns:a="http://schemas.openxmlformats.org/drawingml/2006/main">
-            <a:r>
-              <a:t>Demonstrate the example directly. Explain each new name, symbol and output. Use the revision example for an individual check after class; no live partner activity is required.</a:t>
-            </a:r>
-          </a:p>
-          <a:p xmlns:a="http://schemas.openxmlformats.org/drawingml/2006/main">
-            <a:r>
-              <a:t/>
-            </a:r>
-          </a:p>
-          <a:p xmlns:a="http://schemas.openxmlformats.org/drawingml/2006/main">
-            <a:r>
-              <a:t>NEXT</a:t>
-            </a:r>
-          </a:p>
-          <a:p xmlns:a="http://schemas.openxmlformats.org/drawingml/2006/main">
-            <a:r>
               <a:t>Practical Test 2 submission.</a:t>
+            </a:r>
+          </a:p>
+          <a:p xmlns:a="http://schemas.openxmlformats.org/drawingml/2006/main">
+            <a:r>
+              <a:t/>
+            </a:r>
+          </a:p>
+          <a:p xmlns:a="http://schemas.openxmlformats.org/drawingml/2006/main">
+            <a:r>
+              <a:t>REFERENCES</a:t>
+            </a:r>
+          </a:p>
+          <a:p xmlns:a="http://schemas.openxmlformats.org/drawingml/2006/main">
+            <a:r>
+              <a:t/>
             </a:r>
           </a:p>
         </p:txBody>
@@ -3577,7 +2577,7 @@
           </a:p>
           <a:p xmlns:a="http://schemas.openxmlformats.org/drawingml/2006/main">
             <a:r>
-              <a:t>Build on Preparing for Practical Test 2. Explain why this example is needed before running it.</a:t>
+              <a:t>Previous slide: Preparing for Practical Test 2.</a:t>
             </a:r>
           </a:p>
           <a:p xmlns:a="http://schemas.openxmlformats.org/drawingml/2006/main">
@@ -3612,41 +2612,6 @@
           </a:p>
           <a:p xmlns:a="http://schemas.openxmlformats.org/drawingml/2006/main">
             <a:r>
-              <a:t>LECTURER DETAIL</a:t>
-            </a:r>
-          </a:p>
-          <a:p xmlns:a="http://schemas.openxmlformats.org/drawingml/2006/main">
-            <a:r>
-              <a:t>TEACHING PURPOSE</a:t>
-            </a:r>
-          </a:p>
-          <a:p xmlns:a="http://schemas.openxmlformats.org/drawingml/2006/main">
-            <a:r>
-              <a:t>Today’s learning</a:t>
-            </a:r>
-          </a:p>
-          <a:p xmlns:a="http://schemas.openxmlformats.org/drawingml/2006/main">
-            <a:r>
-              <a:t/>
-            </a:r>
-          </a:p>
-          <a:p xmlns:a="http://schemas.openxmlformats.org/drawingml/2006/main">
-            <a:r>
-              <a:t>CONNECT</a:t>
-            </a:r>
-          </a:p>
-          <a:p xmlns:a="http://schemas.openxmlformats.org/drawingml/2006/main">
-            <a:r>
-              <a:t>Build on the preceding slide: Preparing for Practical Test 2.</a:t>
-            </a:r>
-          </a:p>
-          <a:p xmlns:a="http://schemas.openxmlformats.org/drawingml/2006/main">
-            <a:r>
-              <a:t/>
-            </a:r>
-          </a:p>
-          <a:p xmlns:a="http://schemas.openxmlformats.org/drawingml/2006/main">
-            <a:r>
               <a:t>LECTURER CUE</a:t>
             </a:r>
           </a:p>
@@ -3662,57 +2627,12 @@
           </a:p>
           <a:p xmlns:a="http://schemas.openxmlformats.org/drawingml/2006/main">
             <a:r>
-              <a:t>EXPLAIN IN ORDINARY WORDS</a:t>
-            </a:r>
-          </a:p>
-          <a:p xmlns:a="http://schemas.openxmlformats.org/drawingml/2006/main">
-            <a:r>
-              <a:t>Training fits rules. Validation helps choose among rules. The final test estimates performance after choices are fixed. Information that would be unavailable at the real prediction time must stay out of the inputs.</a:t>
-            </a:r>
-          </a:p>
-          <a:p xmlns:a="http://schemas.openxmlformats.org/drawingml/2006/main">
-            <a:r>
-              <a:t/>
-            </a:r>
-          </a:p>
-          <a:p xmlns:a="http://schemas.openxmlformats.org/drawingml/2006/main">
-            <a:r>
-              <a:t>CHECK AND EXPECTED ANSWER</a:t>
-            </a:r>
-          </a:p>
-          <a:p xmlns:a="http://schemas.openxmlformats.org/drawingml/2006/main">
-            <a:r>
-              <a:t>May two readings of the same machine appear on both sides when evaluating new machines? No; split by machine. For forecasting, train on the past and evaluate later time.</a:t>
-            </a:r>
-          </a:p>
-          <a:p xmlns:a="http://schemas.openxmlformats.org/drawingml/2006/main">
-            <a:r>
-              <a:t/>
-            </a:r>
-          </a:p>
-          <a:p xmlns:a="http://schemas.openxmlformats.org/drawingml/2006/main">
-            <a:r>
-              <a:t>IF LEARNERS ARE STUCK</a:t>
-            </a:r>
-          </a:p>
-          <a:p xmlns:a="http://schemas.openxmlformats.org/drawingml/2006/main">
-            <a:r>
-              <a:t>Use three envelopes. Keep the final-test envelope closed while selecting features or settings.</a:t>
-            </a:r>
-          </a:p>
-          <a:p xmlns:a="http://schemas.openxmlformats.org/drawingml/2006/main">
-            <a:r>
-              <a:t/>
-            </a:r>
-          </a:p>
-          <a:p xmlns:a="http://schemas.openxmlformats.org/drawingml/2006/main">
-            <a:r>
-              <a:t>TEST COLLECTION RULE</a:t>
-            </a:r>
-          </a:p>
-          <a:p xmlns:a="http://schemas.openxmlformats.org/drawingml/2006/main">
-            <a:r>
-              <a:t>This deck is for rehearsal before the timed assessment. Preserve the invigilated timetable and Part A snapshot. During Part B, type answers in the notebook cell headed ## My written evidence without executing code. Collect one complete .ipynb offline; later Google upload only transports the collected work. Do not require internet or AI during the test.</a:t>
+              <a:t>TEACHING MODE</a:t>
+            </a:r>
+          </a:p>
+          <a:p xmlns:a="http://schemas.openxmlformats.org/drawingml/2006/main">
+            <a:r>
+              <a:t>Demonstrate first. Read each new symbol aloud, trace the values and compare the shown output. Learners repeat worked examples individually after class.</a:t>
             </a:r>
           </a:p>
           <a:p xmlns:a="http://schemas.openxmlformats.org/drawingml/2006/main">
@@ -3727,37 +2647,22 @@
           </a:p>
           <a:p xmlns:a="http://schemas.openxmlformats.org/drawingml/2006/main">
             <a:r>
-              <a:t>Recall and a first attempt. Move on after a learner can explain the current example or required action.</a:t>
-            </a:r>
-          </a:p>
-          <a:p xmlns:a="http://schemas.openxmlformats.org/drawingml/2006/main">
-            <a:r>
-              <a:t/>
-            </a:r>
-          </a:p>
-          <a:p xmlns:a="http://schemas.openxmlformats.org/drawingml/2006/main">
-            <a:r>
-              <a:t>TEACHING MODE</a:t>
-            </a:r>
-          </a:p>
-          <a:p xmlns:a="http://schemas.openxmlformats.org/drawingml/2006/main">
-            <a:r>
-              <a:t>Demonstrate the example directly. Explain each new name, symbol and output. Use the revision example for an individual check after class; no live partner activity is required.</a:t>
-            </a:r>
-          </a:p>
-          <a:p xmlns:a="http://schemas.openxmlformats.org/drawingml/2006/main">
-            <a:r>
-              <a:t/>
-            </a:r>
-          </a:p>
-          <a:p xmlns:a="http://schemas.openxmlformats.org/drawingml/2006/main">
-            <a:r>
-              <a:t>NEXT</a:t>
-            </a:r>
-          </a:p>
-          <a:p xmlns:a="http://schemas.openxmlformats.org/drawingml/2006/main">
-            <a:r>
               <a:t>Connection to the previous lesson.</a:t>
+            </a:r>
+          </a:p>
+          <a:p xmlns:a="http://schemas.openxmlformats.org/drawingml/2006/main">
+            <a:r>
+              <a:t/>
+            </a:r>
+          </a:p>
+          <a:p xmlns:a="http://schemas.openxmlformats.org/drawingml/2006/main">
+            <a:r>
+              <a:t>REFERENCES</a:t>
+            </a:r>
+          </a:p>
+          <a:p xmlns:a="http://schemas.openxmlformats.org/drawingml/2006/main">
+            <a:r>
+              <a:t/>
             </a:r>
           </a:p>
         </p:txBody>
@@ -3847,7 +2752,7 @@
           </a:p>
           <a:p xmlns:a="http://schemas.openxmlformats.org/drawingml/2006/main">
             <a:r>
-              <a:t>Build on Practical Test 2 continued. Explain why this example is needed before running it.</a:t>
+              <a:t>Previous slide: Practical Test 2 continued.</a:t>
             </a:r>
           </a:p>
           <a:p xmlns:a="http://schemas.openxmlformats.org/drawingml/2006/main">
@@ -3902,41 +2807,6 @@
           </a:p>
           <a:p xmlns:a="http://schemas.openxmlformats.org/drawingml/2006/main">
             <a:r>
-              <a:t>LECTURER DETAIL</a:t>
-            </a:r>
-          </a:p>
-          <a:p xmlns:a="http://schemas.openxmlformats.org/drawingml/2006/main">
-            <a:r>
-              <a:t>TEACHING PURPOSE</a:t>
-            </a:r>
-          </a:p>
-          <a:p xmlns:a="http://schemas.openxmlformats.org/drawingml/2006/main">
-            <a:r>
-              <a:t>Practical Test 2 submission</a:t>
-            </a:r>
-          </a:p>
-          <a:p xmlns:a="http://schemas.openxmlformats.org/drawingml/2006/main">
-            <a:r>
-              <a:t/>
-            </a:r>
-          </a:p>
-          <a:p xmlns:a="http://schemas.openxmlformats.org/drawingml/2006/main">
-            <a:r>
-              <a:t>CONNECT</a:t>
-            </a:r>
-          </a:p>
-          <a:p xmlns:a="http://schemas.openxmlformats.org/drawingml/2006/main">
-            <a:r>
-              <a:t>Build on the preceding slide: Practical Test 2 continued.</a:t>
-            </a:r>
-          </a:p>
-          <a:p xmlns:a="http://schemas.openxmlformats.org/drawingml/2006/main">
-            <a:r>
-              <a:t/>
-            </a:r>
-          </a:p>
-          <a:p xmlns:a="http://schemas.openxmlformats.org/drawingml/2006/main">
-            <a:r>
               <a:t>LECTURER CUE</a:t>
             </a:r>
           </a:p>
@@ -3952,72 +2822,12 @@
           </a:p>
           <a:p xmlns:a="http://schemas.openxmlformats.org/drawingml/2006/main">
             <a:r>
-              <a:t>EXPLAIN IN ORDINARY WORDS</a:t>
-            </a:r>
-          </a:p>
-          <a:p xmlns:a="http://schemas.openxmlformats.org/drawingml/2006/main">
-            <a:r>
-              <a:t>A list keeps items in order. Python positions start at zero. In [2,4,6], position 0 contains 2 and position 2 contains 6. A slice excludes its stop position.</a:t>
-            </a:r>
-          </a:p>
-          <a:p xmlns:a="http://schemas.openxmlformats.org/drawingml/2006/main">
-            <a:r>
-              <a:t/>
-            </a:r>
-          </a:p>
-          <a:p xmlns:a="http://schemas.openxmlformats.org/drawingml/2006/main">
-            <a:r>
-              <a:t>CHECK AND EXPECTED ANSWER</a:t>
-            </a:r>
-          </a:p>
-          <a:p xmlns:a="http://schemas.openxmlformats.org/drawingml/2006/main">
-            <a:r>
-              <a:t>What is [2,4,6][1]? 4. Is there a position 3? No.</a:t>
-            </a:r>
-          </a:p>
-          <a:p xmlns:a="http://schemas.openxmlformats.org/drawingml/2006/main">
-            <a:r>
-              <a:t/>
-            </a:r>
-          </a:p>
-          <a:p xmlns:a="http://schemas.openxmlformats.org/drawingml/2006/main">
-            <a:r>
-              <a:t>IF LEARNERS ARE STUCK</a:t>
-            </a:r>
-          </a:p>
-          <a:p xmlns:a="http://schemas.openxmlformats.org/drawingml/2006/main">
-            <a:r>
-              <a:t>Draw three numbered boxes starting at zero. Keep the position separate from the value stored in it.</a:t>
-            </a:r>
-          </a:p>
-          <a:p xmlns:a="http://schemas.openxmlformats.org/drawingml/2006/main">
-            <a:r>
-              <a:t/>
-            </a:r>
-          </a:p>
-          <a:p xmlns:a="http://schemas.openxmlformats.org/drawingml/2006/main">
-            <a:r>
-              <a:t>ASSIGNMENT HANDOVER</a:t>
-            </a:r>
-          </a:p>
-          <a:p xmlns:a="http://schemas.openxmlformats.org/drawingml/2006/main">
-            <a:r>
-              <a:t>Open the matching public student guide and show the exact starter filename, required outputs and upload set. Ask one learner to repeat what to submit and where. IUEA Student Registration Number is required freeform text; learners enter their own number. A saved repository is not a submitted form. Read the live deadline and keep the submission confirmation. Do not release an assessment that is still awaiting grading validation.</a:t>
-            </a:r>
-          </a:p>
-          <a:p xmlns:a="http://schemas.openxmlformats.org/drawingml/2006/main">
-            <a:r>
-              <a:t/>
-            </a:r>
-          </a:p>
-          <a:p xmlns:a="http://schemas.openxmlformats.org/drawingml/2006/main">
-            <a:r>
-              <a:t>TEST COLLECTION RULE</a:t>
-            </a:r>
-          </a:p>
-          <a:p xmlns:a="http://schemas.openxmlformats.org/drawingml/2006/main">
-            <a:r>
-              <a:t>This deck is for rehearsal before the timed assessment. Preserve the invigilated timetable and Part A snapshot. During Part B, type answers in the notebook cell headed ## My written evidence without executing code. Collect one complete .ipynb offline; later Google upload only transports the collected work. Do not require internet or AI during the test.</a:t>
+              <a:t>TEACHING MODE</a:t>
+            </a:r>
+          </a:p>
+          <a:p xmlns:a="http://schemas.openxmlformats.org/drawingml/2006/main">
+            <a:r>
+              <a:t>Demonstrate first. Read each new symbol aloud, trace the values and compare the shown output. Learners repeat worked examples individually after class.</a:t>
             </a:r>
           </a:p>
           <a:p xmlns:a="http://schemas.openxmlformats.org/drawingml/2006/main">
@@ -4032,37 +2842,22 @@
           </a:p>
           <a:p xmlns:a="http://schemas.openxmlformats.org/drawingml/2006/main">
             <a:r>
-              <a:t>Before you leave. Move on after a learner can explain the current example or required action.</a:t>
-            </a:r>
-          </a:p>
-          <a:p xmlns:a="http://schemas.openxmlformats.org/drawingml/2006/main">
-            <a:r>
-              <a:t/>
-            </a:r>
-          </a:p>
-          <a:p xmlns:a="http://schemas.openxmlformats.org/drawingml/2006/main">
-            <a:r>
-              <a:t>TEACHING MODE</a:t>
-            </a:r>
-          </a:p>
-          <a:p xmlns:a="http://schemas.openxmlformats.org/drawingml/2006/main">
-            <a:r>
-              <a:t>Demonstrate the example directly. Explain each new name, symbol and output. Use the revision example for an individual check after class; no live partner activity is required.</a:t>
-            </a:r>
-          </a:p>
-          <a:p xmlns:a="http://schemas.openxmlformats.org/drawingml/2006/main">
-            <a:r>
-              <a:t/>
-            </a:r>
-          </a:p>
-          <a:p xmlns:a="http://schemas.openxmlformats.org/drawingml/2006/main">
-            <a:r>
-              <a:t>NEXT</a:t>
-            </a:r>
-          </a:p>
-          <a:p xmlns:a="http://schemas.openxmlformats.org/drawingml/2006/main">
-            <a:r>
               <a:t>Before you leave.</a:t>
+            </a:r>
+          </a:p>
+          <a:p xmlns:a="http://schemas.openxmlformats.org/drawingml/2006/main">
+            <a:r>
+              <a:t/>
+            </a:r>
+          </a:p>
+          <a:p xmlns:a="http://schemas.openxmlformats.org/drawingml/2006/main">
+            <a:r>
+              <a:t>REFERENCES</a:t>
+            </a:r>
+          </a:p>
+          <a:p xmlns:a="http://schemas.openxmlformats.org/drawingml/2006/main">
+            <a:r>
+              <a:t/>
             </a:r>
           </a:p>
         </p:txBody>
@@ -4152,7 +2947,7 @@
           </a:p>
           <a:p xmlns:a="http://schemas.openxmlformats.org/drawingml/2006/main">
             <a:r>
-              <a:t>Build on Practical Test 2 submission. Explain why this example is needed before running it.</a:t>
+              <a:t>Previous slide: Practical Test 2 submission.</a:t>
             </a:r>
           </a:p>
           <a:p xmlns:a="http://schemas.openxmlformats.org/drawingml/2006/main">
@@ -4187,41 +2982,6 @@
           </a:p>
           <a:p xmlns:a="http://schemas.openxmlformats.org/drawingml/2006/main">
             <a:r>
-              <a:t>LECTURER DETAIL</a:t>
-            </a:r>
-          </a:p>
-          <a:p xmlns:a="http://schemas.openxmlformats.org/drawingml/2006/main">
-            <a:r>
-              <a:t>TEACHING PURPOSE</a:t>
-            </a:r>
-          </a:p>
-          <a:p xmlns:a="http://schemas.openxmlformats.org/drawingml/2006/main">
-            <a:r>
-              <a:t>Before you leave</a:t>
-            </a:r>
-          </a:p>
-          <a:p xmlns:a="http://schemas.openxmlformats.org/drawingml/2006/main">
-            <a:r>
-              <a:t/>
-            </a:r>
-          </a:p>
-          <a:p xmlns:a="http://schemas.openxmlformats.org/drawingml/2006/main">
-            <a:r>
-              <a:t>CONNECT</a:t>
-            </a:r>
-          </a:p>
-          <a:p xmlns:a="http://schemas.openxmlformats.org/drawingml/2006/main">
-            <a:r>
-              <a:t>Build on the preceding slide: Practical Test 2 submission.</a:t>
-            </a:r>
-          </a:p>
-          <a:p xmlns:a="http://schemas.openxmlformats.org/drawingml/2006/main">
-            <a:r>
-              <a:t/>
-            </a:r>
-          </a:p>
-          <a:p xmlns:a="http://schemas.openxmlformats.org/drawingml/2006/main">
-            <a:r>
               <a:t>LECTURER CUE</a:t>
             </a:r>
           </a:p>
@@ -4237,72 +2997,12 @@
           </a:p>
           <a:p xmlns:a="http://schemas.openxmlformats.org/drawingml/2006/main">
             <a:r>
-              <a:t>EXPLAIN IN ORDINARY WORDS</a:t>
-            </a:r>
-          </a:p>
-          <a:p xmlns:a="http://schemas.openxmlformats.org/drawingml/2006/main">
-            <a:r>
-              <a:t>Training fits rules. Validation helps choose among rules. The final test estimates performance after choices are fixed. Information that would be unavailable at the real prediction time must stay out of the inputs.</a:t>
-            </a:r>
-          </a:p>
-          <a:p xmlns:a="http://schemas.openxmlformats.org/drawingml/2006/main">
-            <a:r>
-              <a:t/>
-            </a:r>
-          </a:p>
-          <a:p xmlns:a="http://schemas.openxmlformats.org/drawingml/2006/main">
-            <a:r>
-              <a:t>CHECK AND EXPECTED ANSWER</a:t>
-            </a:r>
-          </a:p>
-          <a:p xmlns:a="http://schemas.openxmlformats.org/drawingml/2006/main">
-            <a:r>
-              <a:t>May two readings of the same machine appear on both sides when evaluating new machines? No; split by machine. For forecasting, train on the past and evaluate later time.</a:t>
-            </a:r>
-          </a:p>
-          <a:p xmlns:a="http://schemas.openxmlformats.org/drawingml/2006/main">
-            <a:r>
-              <a:t/>
-            </a:r>
-          </a:p>
-          <a:p xmlns:a="http://schemas.openxmlformats.org/drawingml/2006/main">
-            <a:r>
-              <a:t>IF LEARNERS ARE STUCK</a:t>
-            </a:r>
-          </a:p>
-          <a:p xmlns:a="http://schemas.openxmlformats.org/drawingml/2006/main">
-            <a:r>
-              <a:t>Use three envelopes. Keep the final-test envelope closed while selecting features or settings.</a:t>
-            </a:r>
-          </a:p>
-          <a:p xmlns:a="http://schemas.openxmlformats.org/drawingml/2006/main">
-            <a:r>
-              <a:t/>
-            </a:r>
-          </a:p>
-          <a:p xmlns:a="http://schemas.openxmlformats.org/drawingml/2006/main">
-            <a:r>
-              <a:t>TEST COLLECTION RULE</a:t>
-            </a:r>
-          </a:p>
-          <a:p xmlns:a="http://schemas.openxmlformats.org/drawingml/2006/main">
-            <a:r>
-              <a:t>This deck is for rehearsal before the timed assessment. Preserve the invigilated timetable and Part A snapshot. During Part B, type answers in the notebook cell headed ## My written evidence without executing code. Collect one complete .ipynb offline; later Google upload only transports the collected work. Do not require internet or AI during the test.</a:t>
-            </a:r>
-          </a:p>
-          <a:p xmlns:a="http://schemas.openxmlformats.org/drawingml/2006/main">
-            <a:r>
-              <a:t/>
-            </a:r>
-          </a:p>
-          <a:p xmlns:a="http://schemas.openxmlformats.org/drawingml/2006/main">
-            <a:r>
               <a:t>TEACHING MODE</a:t>
             </a:r>
           </a:p>
           <a:p xmlns:a="http://schemas.openxmlformats.org/drawingml/2006/main">
             <a:r>
-              <a:t>Demonstrate the example directly. Explain each new name, symbol and output. Use the revision example for an individual check after class; no live partner activity is required.</a:t>
+              <a:t>Demonstrate first. Read each new symbol aloud, trace the values and compare the shown output. Learners repeat worked examples individually after class.</a:t>
             </a:r>
           </a:p>
           <a:p xmlns:a="http://schemas.openxmlformats.org/drawingml/2006/main">
@@ -4318,6 +3018,21 @@
           <a:p xmlns:a="http://schemas.openxmlformats.org/drawingml/2006/main">
             <a:r>
               <a:t>independent revision and the issued task.</a:t>
+            </a:r>
+          </a:p>
+          <a:p xmlns:a="http://schemas.openxmlformats.org/drawingml/2006/main">
+            <a:r>
+              <a:t/>
+            </a:r>
+          </a:p>
+          <a:p xmlns:a="http://schemas.openxmlformats.org/drawingml/2006/main">
+            <a:r>
+              <a:t>REFERENCES</a:t>
+            </a:r>
+          </a:p>
+          <a:p xmlns:a="http://schemas.openxmlformats.org/drawingml/2006/main">
+            <a:r>
+              <a:t/>
             </a:r>
           </a:p>
         </p:txBody>
@@ -4407,7 +3122,7 @@
           </a:p>
           <a:p xmlns:a="http://schemas.openxmlformats.org/drawingml/2006/main">
             <a:r>
-              <a:t>Build on Today’s learning. Explain why this example is needed before running it.</a:t>
+              <a:t>Previous slide: Today’s learning.</a:t>
             </a:r>
           </a:p>
           <a:p xmlns:a="http://schemas.openxmlformats.org/drawingml/2006/main">
@@ -4432,41 +3147,6 @@
           </a:p>
           <a:p xmlns:a="http://schemas.openxmlformats.org/drawingml/2006/main">
             <a:r>
-              <a:t>LECTURER DETAIL</a:t>
-            </a:r>
-          </a:p>
-          <a:p xmlns:a="http://schemas.openxmlformats.org/drawingml/2006/main">
-            <a:r>
-              <a:t>TEACHING PURPOSE</a:t>
-            </a:r>
-          </a:p>
-          <a:p xmlns:a="http://schemas.openxmlformats.org/drawingml/2006/main">
-            <a:r>
-              <a:t>Recall and a first attempt</a:t>
-            </a:r>
-          </a:p>
-          <a:p xmlns:a="http://schemas.openxmlformats.org/drawingml/2006/main">
-            <a:r>
-              <a:t/>
-            </a:r>
-          </a:p>
-          <a:p xmlns:a="http://schemas.openxmlformats.org/drawingml/2006/main">
-            <a:r>
-              <a:t>CONNECT</a:t>
-            </a:r>
-          </a:p>
-          <a:p xmlns:a="http://schemas.openxmlformats.org/drawingml/2006/main">
-            <a:r>
-              <a:t>Build on the preceding slide: Today’s learning.</a:t>
-            </a:r>
-          </a:p>
-          <a:p xmlns:a="http://schemas.openxmlformats.org/drawingml/2006/main">
-            <a:r>
-              <a:t/>
-            </a:r>
-          </a:p>
-          <a:p xmlns:a="http://schemas.openxmlformats.org/drawingml/2006/main">
-            <a:r>
               <a:t>LECTURER CUE</a:t>
             </a:r>
           </a:p>
@@ -4482,57 +3162,12 @@
           </a:p>
           <a:p xmlns:a="http://schemas.openxmlformats.org/drawingml/2006/main">
             <a:r>
-              <a:t>EXPLAIN IN ORDINARY WORDS</a:t>
-            </a:r>
-          </a:p>
-          <a:p xmlns:a="http://schemas.openxmlformats.org/drawingml/2006/main">
-            <a:r>
-              <a:t>Name the positive class first. Actual is what happened; predicted is the model decision. Precision asks how many predicted positives were right. Recall asks how many actual positives were found.</a:t>
-            </a:r>
-          </a:p>
-          <a:p xmlns:a="http://schemas.openxmlformats.org/drawingml/2006/main">
-            <a:r>
-              <a:t/>
-            </a:r>
-          </a:p>
-          <a:p xmlns:a="http://schemas.openxmlformats.org/drawingml/2006/main">
-            <a:r>
-              <a:t>CHECK AND EXPECTED ANSWER</a:t>
-            </a:r>
-          </a:p>
-          <a:p xmlns:a="http://schemas.openxmlformats.org/drawingml/2006/main">
-            <a:r>
-              <a:t>With TP=2, FP=1, FN=2: precision=2/3 and recall=2/4. A missed actual positive is a false negative.</a:t>
-            </a:r>
-          </a:p>
-          <a:p xmlns:a="http://schemas.openxmlformats.org/drawingml/2006/main">
-            <a:r>
-              <a:t/>
-            </a:r>
-          </a:p>
-          <a:p xmlns:a="http://schemas.openxmlformats.org/drawingml/2006/main">
-            <a:r>
-              <a:t>IF LEARNERS ARE STUCK</a:t>
-            </a:r>
-          </a:p>
-          <a:p xmlns:a="http://schemas.openxmlformats.org/drawingml/2006/main">
-            <a:r>
-              <a:t>Draw actual/predicted headings. Place one case at a time before calculating a fraction. Explain the task rule for a zero denominator.</a:t>
-            </a:r>
-          </a:p>
-          <a:p xmlns:a="http://schemas.openxmlformats.org/drawingml/2006/main">
-            <a:r>
-              <a:t/>
-            </a:r>
-          </a:p>
-          <a:p xmlns:a="http://schemas.openxmlformats.org/drawingml/2006/main">
-            <a:r>
-              <a:t>TEST COLLECTION RULE</a:t>
-            </a:r>
-          </a:p>
-          <a:p xmlns:a="http://schemas.openxmlformats.org/drawingml/2006/main">
-            <a:r>
-              <a:t>This deck is for rehearsal before the timed assessment. Preserve the invigilated timetable and Part A snapshot. During Part B, type answers in the notebook cell headed ## My written evidence without executing code. Collect one complete .ipynb offline; later Google upload only transports the collected work. Do not require internet or AI during the test.</a:t>
+              <a:t>TEACHING MODE</a:t>
+            </a:r>
+          </a:p>
+          <a:p xmlns:a="http://schemas.openxmlformats.org/drawingml/2006/main">
+            <a:r>
+              <a:t>Demonstrate first. Read each new symbol aloud, trace the values and compare the shown output. Learners repeat worked examples individually after class.</a:t>
             </a:r>
           </a:p>
           <a:p xmlns:a="http://schemas.openxmlformats.org/drawingml/2006/main">
@@ -4547,37 +3182,22 @@
           </a:p>
           <a:p xmlns:a="http://schemas.openxmlformats.org/drawingml/2006/main">
             <a:r>
-              <a:t>Preparation happens before the test. Move on after a learner can explain the current example or required action.</a:t>
-            </a:r>
-          </a:p>
-          <a:p xmlns:a="http://schemas.openxmlformats.org/drawingml/2006/main">
-            <a:r>
-              <a:t/>
-            </a:r>
-          </a:p>
-          <a:p xmlns:a="http://schemas.openxmlformats.org/drawingml/2006/main">
-            <a:r>
-              <a:t>TEACHING MODE</a:t>
-            </a:r>
-          </a:p>
-          <a:p xmlns:a="http://schemas.openxmlformats.org/drawingml/2006/main">
-            <a:r>
-              <a:t>Demonstrate the example directly. Explain each new name, symbol and output. Use the revision example for an individual check after class; no live partner activity is required.</a:t>
-            </a:r>
-          </a:p>
-          <a:p xmlns:a="http://schemas.openxmlformats.org/drawingml/2006/main">
-            <a:r>
-              <a:t/>
-            </a:r>
-          </a:p>
-          <a:p xmlns:a="http://schemas.openxmlformats.org/drawingml/2006/main">
-            <a:r>
-              <a:t>NEXT</a:t>
-            </a:r>
-          </a:p>
-          <a:p xmlns:a="http://schemas.openxmlformats.org/drawingml/2006/main">
-            <a:r>
               <a:t>Preparation happens before the test.</a:t>
+            </a:r>
+          </a:p>
+          <a:p xmlns:a="http://schemas.openxmlformats.org/drawingml/2006/main">
+            <a:r>
+              <a:t/>
+            </a:r>
+          </a:p>
+          <a:p xmlns:a="http://schemas.openxmlformats.org/drawingml/2006/main">
+            <a:r>
+              <a:t>REFERENCES</a:t>
+            </a:r>
+          </a:p>
+          <a:p xmlns:a="http://schemas.openxmlformats.org/drawingml/2006/main">
+            <a:r>
+              <a:t/>
             </a:r>
           </a:p>
         </p:txBody>
@@ -4667,7 +3287,7 @@
           </a:p>
           <a:p xmlns:a="http://schemas.openxmlformats.org/drawingml/2006/main">
             <a:r>
-              <a:t>Build on Connection to the previous lesson. Explain why this example is needed before running it.</a:t>
+              <a:t>Previous slide: Connection to the previous lesson.</a:t>
             </a:r>
           </a:p>
           <a:p xmlns:a="http://schemas.openxmlformats.org/drawingml/2006/main">
@@ -4712,41 +3332,6 @@
           </a:p>
           <a:p xmlns:a="http://schemas.openxmlformats.org/drawingml/2006/main">
             <a:r>
-              <a:t>LECTURER DETAIL</a:t>
-            </a:r>
-          </a:p>
-          <a:p xmlns:a="http://schemas.openxmlformats.org/drawingml/2006/main">
-            <a:r>
-              <a:t>TEACHING PURPOSE</a:t>
-            </a:r>
-          </a:p>
-          <a:p xmlns:a="http://schemas.openxmlformats.org/drawingml/2006/main">
-            <a:r>
-              <a:t>Preparation happens before the test</a:t>
-            </a:r>
-          </a:p>
-          <a:p xmlns:a="http://schemas.openxmlformats.org/drawingml/2006/main">
-            <a:r>
-              <a:t/>
-            </a:r>
-          </a:p>
-          <a:p xmlns:a="http://schemas.openxmlformats.org/drawingml/2006/main">
-            <a:r>
-              <a:t>CONNECT</a:t>
-            </a:r>
-          </a:p>
-          <a:p xmlns:a="http://schemas.openxmlformats.org/drawingml/2006/main">
-            <a:r>
-              <a:t>Build on the preceding slide: Recall and a first attempt.</a:t>
-            </a:r>
-          </a:p>
-          <a:p xmlns:a="http://schemas.openxmlformats.org/drawingml/2006/main">
-            <a:r>
-              <a:t/>
-            </a:r>
-          </a:p>
-          <a:p xmlns:a="http://schemas.openxmlformats.org/drawingml/2006/main">
-            <a:r>
               <a:t>LECTURER CUE</a:t>
             </a:r>
           </a:p>
@@ -4762,57 +3347,12 @@
           </a:p>
           <a:p xmlns:a="http://schemas.openxmlformats.org/drawingml/2006/main">
             <a:r>
-              <a:t>EXPLAIN IN ORDINARY WORDS</a:t>
-            </a:r>
-          </a:p>
-          <a:p xmlns:a="http://schemas.openxmlformats.org/drawingml/2006/main">
-            <a:r>
-              <a:t>Training fits rules. Validation helps choose among rules. The final test estimates performance after choices are fixed. Information that would be unavailable at the real prediction time must stay out of the inputs.</a:t>
-            </a:r>
-          </a:p>
-          <a:p xmlns:a="http://schemas.openxmlformats.org/drawingml/2006/main">
-            <a:r>
-              <a:t/>
-            </a:r>
-          </a:p>
-          <a:p xmlns:a="http://schemas.openxmlformats.org/drawingml/2006/main">
-            <a:r>
-              <a:t>CHECK AND EXPECTED ANSWER</a:t>
-            </a:r>
-          </a:p>
-          <a:p xmlns:a="http://schemas.openxmlformats.org/drawingml/2006/main">
-            <a:r>
-              <a:t>May two readings of the same machine appear on both sides when evaluating new machines? No; split by machine. For forecasting, train on the past and evaluate later time.</a:t>
-            </a:r>
-          </a:p>
-          <a:p xmlns:a="http://schemas.openxmlformats.org/drawingml/2006/main">
-            <a:r>
-              <a:t/>
-            </a:r>
-          </a:p>
-          <a:p xmlns:a="http://schemas.openxmlformats.org/drawingml/2006/main">
-            <a:r>
-              <a:t>IF LEARNERS ARE STUCK</a:t>
-            </a:r>
-          </a:p>
-          <a:p xmlns:a="http://schemas.openxmlformats.org/drawingml/2006/main">
-            <a:r>
-              <a:t>Use three envelopes. Keep the final-test envelope closed while selecting features or settings.</a:t>
-            </a:r>
-          </a:p>
-          <a:p xmlns:a="http://schemas.openxmlformats.org/drawingml/2006/main">
-            <a:r>
-              <a:t/>
-            </a:r>
-          </a:p>
-          <a:p xmlns:a="http://schemas.openxmlformats.org/drawingml/2006/main">
-            <a:r>
-              <a:t>TEST COLLECTION RULE</a:t>
-            </a:r>
-          </a:p>
-          <a:p xmlns:a="http://schemas.openxmlformats.org/drawingml/2006/main">
-            <a:r>
-              <a:t>This deck is for rehearsal before the timed assessment. Preserve the invigilated timetable and Part A snapshot. During Part B, type answers in the notebook cell headed ## My written evidence without executing code. Collect one complete .ipynb offline; later Google upload only transports the collected work. Do not require internet or AI during the test.</a:t>
+              <a:t>TEACHING MODE</a:t>
+            </a:r>
+          </a:p>
+          <a:p xmlns:a="http://schemas.openxmlformats.org/drawingml/2006/main">
+            <a:r>
+              <a:t>Demonstrate first. Read each new symbol aloud, trace the values and compare the shown output. Learners repeat worked examples individually after class.</a:t>
             </a:r>
           </a:p>
           <a:p xmlns:a="http://schemas.openxmlformats.org/drawingml/2006/main">
@@ -4827,37 +3367,22 @@
           </a:p>
           <a:p xmlns:a="http://schemas.openxmlformats.org/drawingml/2006/main">
             <a:r>
-              <a:t>Rehearse the offline save procedure. Move on after a learner can explain the current example or required action.</a:t>
-            </a:r>
-          </a:p>
-          <a:p xmlns:a="http://schemas.openxmlformats.org/drawingml/2006/main">
-            <a:r>
-              <a:t/>
-            </a:r>
-          </a:p>
-          <a:p xmlns:a="http://schemas.openxmlformats.org/drawingml/2006/main">
-            <a:r>
-              <a:t>TEACHING MODE</a:t>
-            </a:r>
-          </a:p>
-          <a:p xmlns:a="http://schemas.openxmlformats.org/drawingml/2006/main">
-            <a:r>
-              <a:t>Demonstrate the example directly. Explain each new name, symbol and output. Use the revision example for an individual check after class; no live partner activity is required.</a:t>
-            </a:r>
-          </a:p>
-          <a:p xmlns:a="http://schemas.openxmlformats.org/drawingml/2006/main">
-            <a:r>
-              <a:t/>
-            </a:r>
-          </a:p>
-          <a:p xmlns:a="http://schemas.openxmlformats.org/drawingml/2006/main">
-            <a:r>
-              <a:t>NEXT</a:t>
-            </a:r>
-          </a:p>
-          <a:p xmlns:a="http://schemas.openxmlformats.org/drawingml/2006/main">
-            <a:r>
               <a:t>Rehearse the offline save procedure.</a:t>
+            </a:r>
+          </a:p>
+          <a:p xmlns:a="http://schemas.openxmlformats.org/drawingml/2006/main">
+            <a:r>
+              <a:t/>
+            </a:r>
+          </a:p>
+          <a:p xmlns:a="http://schemas.openxmlformats.org/drawingml/2006/main">
+            <a:r>
+              <a:t>REFERENCES</a:t>
+            </a:r>
+          </a:p>
+          <a:p xmlns:a="http://schemas.openxmlformats.org/drawingml/2006/main">
+            <a:r>
+              <a:t/>
             </a:r>
           </a:p>
         </p:txBody>
@@ -4947,7 +3472,7 @@
           </a:p>
           <a:p xmlns:a="http://schemas.openxmlformats.org/drawingml/2006/main">
             <a:r>
-              <a:t>Build on Preparation happens before the test. Explain why this example is needed before running it.</a:t>
+              <a:t>Previous slide: Preparation happens before the test.</a:t>
             </a:r>
           </a:p>
           <a:p xmlns:a="http://schemas.openxmlformats.org/drawingml/2006/main">
@@ -4992,41 +3517,6 @@
           </a:p>
           <a:p xmlns:a="http://schemas.openxmlformats.org/drawingml/2006/main">
             <a:r>
-              <a:t>LECTURER DETAIL</a:t>
-            </a:r>
-          </a:p>
-          <a:p xmlns:a="http://schemas.openxmlformats.org/drawingml/2006/main">
-            <a:r>
-              <a:t>TEACHING PURPOSE</a:t>
-            </a:r>
-          </a:p>
-          <a:p xmlns:a="http://schemas.openxmlformats.org/drawingml/2006/main">
-            <a:r>
-              <a:t>Rehearse the offline save procedure</a:t>
-            </a:r>
-          </a:p>
-          <a:p xmlns:a="http://schemas.openxmlformats.org/drawingml/2006/main">
-            <a:r>
-              <a:t/>
-            </a:r>
-          </a:p>
-          <a:p xmlns:a="http://schemas.openxmlformats.org/drawingml/2006/main">
-            <a:r>
-              <a:t>CONNECT</a:t>
-            </a:r>
-          </a:p>
-          <a:p xmlns:a="http://schemas.openxmlformats.org/drawingml/2006/main">
-            <a:r>
-              <a:t>Build on the preceding slide: Preparation happens before the test.</a:t>
-            </a:r>
-          </a:p>
-          <a:p xmlns:a="http://schemas.openxmlformats.org/drawingml/2006/main">
-            <a:r>
-              <a:t/>
-            </a:r>
-          </a:p>
-          <a:p xmlns:a="http://schemas.openxmlformats.org/drawingml/2006/main">
-            <a:r>
               <a:t>LECTURER CUE</a:t>
             </a:r>
           </a:p>
@@ -5042,57 +3532,12 @@
           </a:p>
           <a:p xmlns:a="http://schemas.openxmlformats.org/drawingml/2006/main">
             <a:r>
-              <a:t>EXPLAIN IN ORDINARY WORDS</a:t>
-            </a:r>
-          </a:p>
-          <a:p xmlns:a="http://schemas.openxmlformats.org/drawingml/2006/main">
-            <a:r>
-              <a:t>A notebook contains code cells and explanatory text cells. The runtime remembers values from cells that actually ran, which may differ from their visual order.</a:t>
-            </a:r>
-          </a:p>
-          <a:p xmlns:a="http://schemas.openxmlformats.org/drawingml/2006/main">
-            <a:r>
-              <a:t/>
-            </a:r>
-          </a:p>
-          <a:p xmlns:a="http://schemas.openxmlformats.org/drawingml/2006/main">
-            <a:r>
-              <a:t>CHECK AND EXPECTED ANSWER</a:t>
-            </a:r>
-          </a:p>
-          <a:p xmlns:a="http://schemas.openxmlformats.org/drawingml/2006/main">
-            <a:r>
-              <a:t>Does editing a cell update a value already stored in memory? No; the cell must run.</a:t>
-            </a:r>
-          </a:p>
-          <a:p xmlns:a="http://schemas.openxmlformats.org/drawingml/2006/main">
-            <a:r>
-              <a:t/>
-            </a:r>
-          </a:p>
-          <a:p xmlns:a="http://schemas.openxmlformats.org/drawingml/2006/main">
-            <a:r>
-              <a:t>IF LEARNERS ARE STUCK</a:t>
-            </a:r>
-          </a:p>
-          <a:p xmlns:a="http://schemas.openxmlformats.org/drawingml/2006/main">
-            <a:r>
-              <a:t>Outside an assessment restriction, restart and run from the top after loading data. Fix the first error before later cells; save the successful notebook.</a:t>
-            </a:r>
-          </a:p>
-          <a:p xmlns:a="http://schemas.openxmlformats.org/drawingml/2006/main">
-            <a:r>
-              <a:t/>
-            </a:r>
-          </a:p>
-          <a:p xmlns:a="http://schemas.openxmlformats.org/drawingml/2006/main">
-            <a:r>
-              <a:t>TEST COLLECTION RULE</a:t>
-            </a:r>
-          </a:p>
-          <a:p xmlns:a="http://schemas.openxmlformats.org/drawingml/2006/main">
-            <a:r>
-              <a:t>This deck is for rehearsal before the timed assessment. Preserve the invigilated timetable and Part A snapshot. During Part B, type answers in the notebook cell headed ## My written evidence without executing code. Collect one complete .ipynb offline; later Google upload only transports the collected work. Do not require internet or AI during the test.</a:t>
+              <a:t>TEACHING MODE</a:t>
+            </a:r>
+          </a:p>
+          <a:p xmlns:a="http://schemas.openxmlformats.org/drawingml/2006/main">
+            <a:r>
+              <a:t>Demonstrate first. Read each new symbol aloud, trace the values and compare the shown output. Learners repeat worked examples individually after class.</a:t>
             </a:r>
           </a:p>
           <a:p xmlns:a="http://schemas.openxmlformats.org/drawingml/2006/main">
@@ -5107,37 +3552,22 @@
           </a:p>
           <a:p xmlns:a="http://schemas.openxmlformats.org/drawingml/2006/main">
             <a:r>
-              <a:t>A result needs an explanation. Move on after a learner can explain the current example or required action.</a:t>
-            </a:r>
-          </a:p>
-          <a:p xmlns:a="http://schemas.openxmlformats.org/drawingml/2006/main">
-            <a:r>
-              <a:t/>
-            </a:r>
-          </a:p>
-          <a:p xmlns:a="http://schemas.openxmlformats.org/drawingml/2006/main">
-            <a:r>
-              <a:t>TEACHING MODE</a:t>
-            </a:r>
-          </a:p>
-          <a:p xmlns:a="http://schemas.openxmlformats.org/drawingml/2006/main">
-            <a:r>
-              <a:t>Demonstrate the example directly. Explain each new name, symbol and output. Use the revision example for an individual check after class; no live partner activity is required.</a:t>
-            </a:r>
-          </a:p>
-          <a:p xmlns:a="http://schemas.openxmlformats.org/drawingml/2006/main">
-            <a:r>
-              <a:t/>
-            </a:r>
-          </a:p>
-          <a:p xmlns:a="http://schemas.openxmlformats.org/drawingml/2006/main">
-            <a:r>
-              <a:t>NEXT</a:t>
-            </a:r>
-          </a:p>
-          <a:p xmlns:a="http://schemas.openxmlformats.org/drawingml/2006/main">
-            <a:r>
               <a:t>A result needs an explanation.</a:t>
+            </a:r>
+          </a:p>
+          <a:p xmlns:a="http://schemas.openxmlformats.org/drawingml/2006/main">
+            <a:r>
+              <a:t/>
+            </a:r>
+          </a:p>
+          <a:p xmlns:a="http://schemas.openxmlformats.org/drawingml/2006/main">
+            <a:r>
+              <a:t>REFERENCES</a:t>
+            </a:r>
+          </a:p>
+          <a:p xmlns:a="http://schemas.openxmlformats.org/drawingml/2006/main">
+            <a:r>
+              <a:t/>
             </a:r>
           </a:p>
         </p:txBody>
@@ -5227,7 +3657,7 @@
           </a:p>
           <a:p xmlns:a="http://schemas.openxmlformats.org/drawingml/2006/main">
             <a:r>
-              <a:t>Build on Rehearse the offline save procedure. Explain why this example is needed before running it.</a:t>
+              <a:t>Previous slide: Rehearse the offline save procedure.</a:t>
             </a:r>
           </a:p>
           <a:p xmlns:a="http://schemas.openxmlformats.org/drawingml/2006/main">
@@ -5272,41 +3702,6 @@
           </a:p>
           <a:p xmlns:a="http://schemas.openxmlformats.org/drawingml/2006/main">
             <a:r>
-              <a:t>LECTURER DETAIL</a:t>
-            </a:r>
-          </a:p>
-          <a:p xmlns:a="http://schemas.openxmlformats.org/drawingml/2006/main">
-            <a:r>
-              <a:t>TEACHING PURPOSE</a:t>
-            </a:r>
-          </a:p>
-          <a:p xmlns:a="http://schemas.openxmlformats.org/drawingml/2006/main">
-            <a:r>
-              <a:t>A result needs an explanation</a:t>
-            </a:r>
-          </a:p>
-          <a:p xmlns:a="http://schemas.openxmlformats.org/drawingml/2006/main">
-            <a:r>
-              <a:t/>
-            </a:r>
-          </a:p>
-          <a:p xmlns:a="http://schemas.openxmlformats.org/drawingml/2006/main">
-            <a:r>
-              <a:t>CONNECT</a:t>
-            </a:r>
-          </a:p>
-          <a:p xmlns:a="http://schemas.openxmlformats.org/drawingml/2006/main">
-            <a:r>
-              <a:t>Build on the preceding slide: Rehearse the offline save procedure.</a:t>
-            </a:r>
-          </a:p>
-          <a:p xmlns:a="http://schemas.openxmlformats.org/drawingml/2006/main">
-            <a:r>
-              <a:t/>
-            </a:r>
-          </a:p>
-          <a:p xmlns:a="http://schemas.openxmlformats.org/drawingml/2006/main">
-            <a:r>
               <a:t>LECTURER CUE</a:t>
             </a:r>
           </a:p>
@@ -5322,57 +3717,12 @@
           </a:p>
           <a:p xmlns:a="http://schemas.openxmlformats.org/drawingml/2006/main">
             <a:r>
-              <a:t>EXPLAIN IN ORDINARY WORDS</a:t>
-            </a:r>
-          </a:p>
-          <a:p xmlns:a="http://schemas.openxmlformats.org/drawingml/2006/main">
-            <a:r>
-              <a:t>Read each quantity and unit before using a formula. Python calculates numbers but does not enforce physical units. Parentheses specify which operation happens first.</a:t>
-            </a:r>
-          </a:p>
-          <a:p xmlns:a="http://schemas.openxmlformats.org/drawingml/2006/main">
-            <a:r>
-              <a:t/>
-            </a:r>
-          </a:p>
-          <a:p xmlns:a="http://schemas.openxmlformats.org/drawingml/2006/main">
-            <a:r>
-              <a:t>CHECK AND EXPECTED ANSWER</a:t>
-            </a:r>
-          </a:p>
-          <a:p xmlns:a="http://schemas.openxmlformats.org/drawingml/2006/main">
-            <a:r>
-              <a:t>What is 5 m times 3 m? 15 square metres. What is 7/2 in Python? 3.5; 7//2 is 3.</a:t>
-            </a:r>
-          </a:p>
-          <a:p xmlns:a="http://schemas.openxmlformats.org/drawingml/2006/main">
-            <a:r>
-              <a:t/>
-            </a:r>
-          </a:p>
-          <a:p xmlns:a="http://schemas.openxmlformats.org/drawingml/2006/main">
-            <a:r>
-              <a:t>IF LEARNERS ARE STUCK</a:t>
-            </a:r>
-          </a:p>
-          <a:p xmlns:a="http://schemas.openxmlformats.org/drawingml/2006/main">
-            <a:r>
-              <a:t>Write the formula and units on paper, substitute small values, then translate it to Python. Check zero denominators and the issued sign convention.</a:t>
-            </a:r>
-          </a:p>
-          <a:p xmlns:a="http://schemas.openxmlformats.org/drawingml/2006/main">
-            <a:r>
-              <a:t/>
-            </a:r>
-          </a:p>
-          <a:p xmlns:a="http://schemas.openxmlformats.org/drawingml/2006/main">
-            <a:r>
-              <a:t>TEST COLLECTION RULE</a:t>
-            </a:r>
-          </a:p>
-          <a:p xmlns:a="http://schemas.openxmlformats.org/drawingml/2006/main">
-            <a:r>
-              <a:t>This deck is for rehearsal before the timed assessment. Preserve the invigilated timetable and Part A snapshot. During Part B, type answers in the notebook cell headed ## My written evidence without executing code. Collect one complete .ipynb offline; later Google upload only transports the collected work. Do not require internet or AI during the test.</a:t>
+              <a:t>TEACHING MODE</a:t>
+            </a:r>
+          </a:p>
+          <a:p xmlns:a="http://schemas.openxmlformats.org/drawingml/2006/main">
+            <a:r>
+              <a:t>Demonstrate first. Read each new symbol aloud, trace the values and compare the shown output. Learners repeat worked examples individually after class.</a:t>
             </a:r>
           </a:p>
           <a:p xmlns:a="http://schemas.openxmlformats.org/drawingml/2006/main">
@@ -5387,37 +3737,22 @@
           </a:p>
           <a:p xmlns:a="http://schemas.openxmlformats.org/drawingml/2006/main">
             <a:r>
-              <a:t>Practice before test day. Move on after a learner can explain the current example or required action.</a:t>
-            </a:r>
-          </a:p>
-          <a:p xmlns:a="http://schemas.openxmlformats.org/drawingml/2006/main">
-            <a:r>
-              <a:t/>
-            </a:r>
-          </a:p>
-          <a:p xmlns:a="http://schemas.openxmlformats.org/drawingml/2006/main">
-            <a:r>
-              <a:t>TEACHING MODE</a:t>
-            </a:r>
-          </a:p>
-          <a:p xmlns:a="http://schemas.openxmlformats.org/drawingml/2006/main">
-            <a:r>
-              <a:t>Demonstrate the example directly. Explain each new name, symbol and output. Use the revision example for an individual check after class; no live partner activity is required.</a:t>
-            </a:r>
-          </a:p>
-          <a:p xmlns:a="http://schemas.openxmlformats.org/drawingml/2006/main">
-            <a:r>
-              <a:t/>
-            </a:r>
-          </a:p>
-          <a:p xmlns:a="http://schemas.openxmlformats.org/drawingml/2006/main">
-            <a:r>
-              <a:t>NEXT</a:t>
-            </a:r>
-          </a:p>
-          <a:p xmlns:a="http://schemas.openxmlformats.org/drawingml/2006/main">
-            <a:r>
               <a:t>Practice before test day.</a:t>
+            </a:r>
+          </a:p>
+          <a:p xmlns:a="http://schemas.openxmlformats.org/drawingml/2006/main">
+            <a:r>
+              <a:t/>
+            </a:r>
+          </a:p>
+          <a:p xmlns:a="http://schemas.openxmlformats.org/drawingml/2006/main">
+            <a:r>
+              <a:t>REFERENCES</a:t>
+            </a:r>
+          </a:p>
+          <a:p xmlns:a="http://schemas.openxmlformats.org/drawingml/2006/main">
+            <a:r>
+              <a:t/>
             </a:r>
           </a:p>
         </p:txBody>
@@ -5507,7 +3842,7 @@
           </a:p>
           <a:p xmlns:a="http://schemas.openxmlformats.org/drawingml/2006/main">
             <a:r>
-              <a:t>Build on A result needs an explanation. Explain why this example is needed before running it.</a:t>
+              <a:t>Previous slide: A result needs an explanation.</a:t>
             </a:r>
           </a:p>
           <a:p xmlns:a="http://schemas.openxmlformats.org/drawingml/2006/main">
@@ -5522,6 +3857,76 @@
           </a:p>
           <a:p xmlns:a="http://schemas.openxmlformats.org/drawingml/2006/main">
             <a:r>
+              <a:t>Read the code in this order:</a:t>
+            </a:r>
+          </a:p>
+          <a:p xmlns:a="http://schemas.openxmlformats.org/drawingml/2006/main">
+            <a:r>
+              <a:t>actual = [4, 8]</a:t>
+            </a:r>
+          </a:p>
+          <a:p xmlns:a="http://schemas.openxmlformats.org/drawingml/2006/main">
+            <a:r>
+              <a:t>predicted = [5, 6]</a:t>
+            </a:r>
+          </a:p>
+          <a:p xmlns:a="http://schemas.openxmlformats.org/drawingml/2006/main">
+            <a:r>
+              <a:t>errors = []</a:t>
+            </a:r>
+          </a:p>
+          <a:p xmlns:a="http://schemas.openxmlformats.org/drawingml/2006/main">
+            <a:r>
+              <a:t>for a, p in zip(actual, predicted):</a:t>
+            </a:r>
+          </a:p>
+          <a:p xmlns:a="http://schemas.openxmlformats.org/drawingml/2006/main">
+            <a:r>
+              <a:t>    errors.append(abs(a - p))</a:t>
+            </a:r>
+          </a:p>
+          <a:p xmlns:a="http://schemas.openxmlformats.org/drawingml/2006/main">
+            <a:r>
+              <a:t>print(sum(errors) / len(errors))</a:t>
+            </a:r>
+          </a:p>
+          <a:p xmlns:a="http://schemas.openxmlformats.org/drawingml/2006/main">
+            <a:r>
+              <a:t/>
+            </a:r>
+          </a:p>
+          <a:p xmlns:a="http://schemas.openxmlformats.org/drawingml/2006/main">
+            <a:r>
+              <a:t>for takes the next item. The indented block repeats.</a:t>
+            </a:r>
+          </a:p>
+          <a:p xmlns:a="http://schemas.openxmlformats.org/drawingml/2006/main">
+            <a:r>
+              <a:t/>
+            </a:r>
+          </a:p>
+          <a:p xmlns:a="http://schemas.openxmlformats.org/drawingml/2006/main">
+            <a:r>
+              <a:t>zip pairs items at matching positions in these equal-length lists.</a:t>
+            </a:r>
+          </a:p>
+          <a:p xmlns:a="http://schemas.openxmlformats.org/drawingml/2006/main">
+            <a:r>
+              <a:t/>
+            </a:r>
+          </a:p>
+          <a:p xmlns:a="http://schemas.openxmlformats.org/drawingml/2006/main">
+            <a:r>
+              <a:t>print displays a value below the cell.</a:t>
+            </a:r>
+          </a:p>
+          <a:p xmlns:a="http://schemas.openxmlformats.org/drawingml/2006/main">
+            <a:r>
+              <a:t/>
+            </a:r>
+          </a:p>
+          <a:p xmlns:a="http://schemas.openxmlformats.org/drawingml/2006/main">
+            <a:r>
               <a:t>Read top to bottom. Run the complete example in the matching practice notebook.</a:t>
             </a:r>
           </a:p>
@@ -5532,41 +3937,6 @@
           </a:p>
           <a:p xmlns:a="http://schemas.openxmlformats.org/drawingml/2006/main">
             <a:r>
-              <a:t>LECTURER DETAIL</a:t>
-            </a:r>
-          </a:p>
-          <a:p xmlns:a="http://schemas.openxmlformats.org/drawingml/2006/main">
-            <a:r>
-              <a:t>TEACHING PURPOSE</a:t>
-            </a:r>
-          </a:p>
-          <a:p xmlns:a="http://schemas.openxmlformats.org/drawingml/2006/main">
-            <a:r>
-              <a:t>Practice before test day</a:t>
-            </a:r>
-          </a:p>
-          <a:p xmlns:a="http://schemas.openxmlformats.org/drawingml/2006/main">
-            <a:r>
-              <a:t/>
-            </a:r>
-          </a:p>
-          <a:p xmlns:a="http://schemas.openxmlformats.org/drawingml/2006/main">
-            <a:r>
-              <a:t>CONNECT</a:t>
-            </a:r>
-          </a:p>
-          <a:p xmlns:a="http://schemas.openxmlformats.org/drawingml/2006/main">
-            <a:r>
-              <a:t>Build on the preceding slide: A result needs an explanation.</a:t>
-            </a:r>
-          </a:p>
-          <a:p xmlns:a="http://schemas.openxmlformats.org/drawingml/2006/main">
-            <a:r>
-              <a:t/>
-            </a:r>
-          </a:p>
-          <a:p xmlns:a="http://schemas.openxmlformats.org/drawingml/2006/main">
-            <a:r>
               <a:t>LECTURER CUE</a:t>
             </a:r>
           </a:p>
@@ -5582,87 +3952,12 @@
           </a:p>
           <a:p xmlns:a="http://schemas.openxmlformats.org/drawingml/2006/main">
             <a:r>
-              <a:t>EXPLAIN IN ORDINARY WORDS</a:t>
-            </a:r>
-          </a:p>
-          <a:p xmlns:a="http://schemas.openxmlformats.org/drawingml/2006/main">
-            <a:r>
-              <a:t>A list keeps items in order. Python positions start at zero. In [2,4,6], position 0 contains 2 and position 2 contains 6. A slice excludes its stop position.</a:t>
-            </a:r>
-          </a:p>
-          <a:p xmlns:a="http://schemas.openxmlformats.org/drawingml/2006/main">
-            <a:r>
-              <a:t/>
-            </a:r>
-          </a:p>
-          <a:p xmlns:a="http://schemas.openxmlformats.org/drawingml/2006/main">
-            <a:r>
-              <a:t>CHECK AND EXPECTED ANSWER</a:t>
-            </a:r>
-          </a:p>
-          <a:p xmlns:a="http://schemas.openxmlformats.org/drawingml/2006/main">
-            <a:r>
-              <a:t>What is [2,4,6][1]? 4. Is there a position 3? No.</a:t>
-            </a:r>
-          </a:p>
-          <a:p xmlns:a="http://schemas.openxmlformats.org/drawingml/2006/main">
-            <a:r>
-              <a:t/>
-            </a:r>
-          </a:p>
-          <a:p xmlns:a="http://schemas.openxmlformats.org/drawingml/2006/main">
-            <a:r>
-              <a:t>IF LEARNERS ARE STUCK</a:t>
-            </a:r>
-          </a:p>
-          <a:p xmlns:a="http://schemas.openxmlformats.org/drawingml/2006/main">
-            <a:r>
-              <a:t>Draw three numbered boxes starting at zero. Keep the position separate from the value stored in it.</a:t>
-            </a:r>
-          </a:p>
-          <a:p xmlns:a="http://schemas.openxmlformats.org/drawingml/2006/main">
-            <a:r>
-              <a:t/>
-            </a:r>
-          </a:p>
-          <a:p xmlns:a="http://schemas.openxmlformats.org/drawingml/2006/main">
-            <a:r>
-              <a:t>WALK THROUGH THIS CODE</a:t>
-            </a:r>
-          </a:p>
-          <a:p xmlns:a="http://schemas.openxmlformats.org/drawingml/2006/main">
-            <a:r>
-              <a:t>for takes the next item. The indented block repeats.</a:t>
-            </a:r>
-          </a:p>
-          <a:p xmlns:a="http://schemas.openxmlformats.org/drawingml/2006/main">
-            <a:r>
-              <a:t>zip pairs items at matching positions in these equal-length lists.</a:t>
-            </a:r>
-          </a:p>
-          <a:p xmlns:a="http://schemas.openxmlformats.org/drawingml/2006/main">
-            <a:r>
-              <a:t>print displays a value below the cell.</a:t>
-            </a:r>
-          </a:p>
-          <a:p xmlns:a="http://schemas.openxmlformats.org/drawingml/2006/main">
-            <a:r>
-              <a:t>Read the displayed lines in order, with the preceding code block if this example continues. Ask for the next value before running. The complete matching example is in guided_practice.ipynb; do not type a fragment into a new empty notebook.</a:t>
-            </a:r>
-          </a:p>
-          <a:p xmlns:a="http://schemas.openxmlformats.org/drawingml/2006/main">
-            <a:r>
-              <a:t/>
-            </a:r>
-          </a:p>
-          <a:p xmlns:a="http://schemas.openxmlformats.org/drawingml/2006/main">
-            <a:r>
-              <a:t>TEST COLLECTION RULE</a:t>
-            </a:r>
-          </a:p>
-          <a:p xmlns:a="http://schemas.openxmlformats.org/drawingml/2006/main">
-            <a:r>
-              <a:t>This deck is for rehearsal before the timed assessment. Preserve the invigilated timetable and Part A snapshot. During Part B, type answers in the notebook cell headed ## My written evidence without executing code. Collect one complete .ipynb offline; later Google upload only transports the collected work. Do not require internet or AI during the test.</a:t>
+              <a:t>TEACHING MODE</a:t>
+            </a:r>
+          </a:p>
+          <a:p xmlns:a="http://schemas.openxmlformats.org/drawingml/2006/main">
+            <a:r>
+              <a:t>Demonstrate first. Read each new symbol aloud, trace the values and compare the shown output. Learners repeat worked examples individually after class.</a:t>
             </a:r>
           </a:p>
           <a:p xmlns:a="http://schemas.openxmlformats.org/drawingml/2006/main">
@@ -5677,37 +3972,22 @@
           </a:p>
           <a:p xmlns:a="http://schemas.openxmlformats.org/drawingml/2006/main">
             <a:r>
-              <a:t>Rehearsal before Practical Test 2. Move on after a learner can explain the current example or required action.</a:t>
-            </a:r>
-          </a:p>
-          <a:p xmlns:a="http://schemas.openxmlformats.org/drawingml/2006/main">
-            <a:r>
-              <a:t/>
-            </a:r>
-          </a:p>
-          <a:p xmlns:a="http://schemas.openxmlformats.org/drawingml/2006/main">
-            <a:r>
-              <a:t>TEACHING MODE</a:t>
-            </a:r>
-          </a:p>
-          <a:p xmlns:a="http://schemas.openxmlformats.org/drawingml/2006/main">
-            <a:r>
-              <a:t>Demonstrate the example directly. Explain each new name, symbol and output. Use the revision example for an individual check after class; no live partner activity is required.</a:t>
-            </a:r>
-          </a:p>
-          <a:p xmlns:a="http://schemas.openxmlformats.org/drawingml/2006/main">
-            <a:r>
-              <a:t/>
-            </a:r>
-          </a:p>
-          <a:p xmlns:a="http://schemas.openxmlformats.org/drawingml/2006/main">
-            <a:r>
-              <a:t>NEXT</a:t>
-            </a:r>
-          </a:p>
-          <a:p xmlns:a="http://schemas.openxmlformats.org/drawingml/2006/main">
-            <a:r>
               <a:t>Test session.</a:t>
+            </a:r>
+          </a:p>
+          <a:p xmlns:a="http://schemas.openxmlformats.org/drawingml/2006/main">
+            <a:r>
+              <a:t/>
+            </a:r>
+          </a:p>
+          <a:p xmlns:a="http://schemas.openxmlformats.org/drawingml/2006/main">
+            <a:r>
+              <a:t>REFERENCES</a:t>
+            </a:r>
+          </a:p>
+          <a:p xmlns:a="http://schemas.openxmlformats.org/drawingml/2006/main">
+            <a:r>
+              <a:t/>
             </a:r>
           </a:p>
         </p:txBody>
@@ -5797,7 +4077,7 @@
           </a:p>
           <a:p xmlns:a="http://schemas.openxmlformats.org/drawingml/2006/main">
             <a:r>
-              <a:t>Build on Practice before test day. Explain why this example is needed before running it.</a:t>
+              <a:t>Previous slide: Practice before test day.</a:t>
             </a:r>
           </a:p>
           <a:p xmlns:a="http://schemas.openxmlformats.org/drawingml/2006/main">
@@ -5852,41 +4132,6 @@
           </a:p>
           <a:p xmlns:a="http://schemas.openxmlformats.org/drawingml/2006/main">
             <a:r>
-              <a:t>LECTURER DETAIL</a:t>
-            </a:r>
-          </a:p>
-          <a:p xmlns:a="http://schemas.openxmlformats.org/drawingml/2006/main">
-            <a:r>
-              <a:t>TEACHING PURPOSE</a:t>
-            </a:r>
-          </a:p>
-          <a:p xmlns:a="http://schemas.openxmlformats.org/drawingml/2006/main">
-            <a:r>
-              <a:t>Test session</a:t>
-            </a:r>
-          </a:p>
-          <a:p xmlns:a="http://schemas.openxmlformats.org/drawingml/2006/main">
-            <a:r>
-              <a:t/>
-            </a:r>
-          </a:p>
-          <a:p xmlns:a="http://schemas.openxmlformats.org/drawingml/2006/main">
-            <a:r>
-              <a:t>CONNECT</a:t>
-            </a:r>
-          </a:p>
-          <a:p xmlns:a="http://schemas.openxmlformats.org/drawingml/2006/main">
-            <a:r>
-              <a:t>Build on the preceding slide: What the activity shows.</a:t>
-            </a:r>
-          </a:p>
-          <a:p xmlns:a="http://schemas.openxmlformats.org/drawingml/2006/main">
-            <a:r>
-              <a:t/>
-            </a:r>
-          </a:p>
-          <a:p xmlns:a="http://schemas.openxmlformats.org/drawingml/2006/main">
-            <a:r>
               <a:t>LECTURER CUE</a:t>
             </a:r>
           </a:p>
@@ -5902,72 +4147,12 @@
           </a:p>
           <a:p xmlns:a="http://schemas.openxmlformats.org/drawingml/2006/main">
             <a:r>
-              <a:t>EXPLAIN IN ORDINARY WORDS</a:t>
-            </a:r>
-          </a:p>
-          <a:p xmlns:a="http://schemas.openxmlformats.org/drawingml/2006/main">
-            <a:r>
-              <a:t>A list keeps items in order. Python positions start at zero. In [2,4,6], position 0 contains 2 and position 2 contains 6. A slice excludes its stop position.</a:t>
-            </a:r>
-          </a:p>
-          <a:p xmlns:a="http://schemas.openxmlformats.org/drawingml/2006/main">
-            <a:r>
-              <a:t/>
-            </a:r>
-          </a:p>
-          <a:p xmlns:a="http://schemas.openxmlformats.org/drawingml/2006/main">
-            <a:r>
-              <a:t>CHECK AND EXPECTED ANSWER</a:t>
-            </a:r>
-          </a:p>
-          <a:p xmlns:a="http://schemas.openxmlformats.org/drawingml/2006/main">
-            <a:r>
-              <a:t>What is [2,4,6][1]? 4. Is there a position 3? No.</a:t>
-            </a:r>
-          </a:p>
-          <a:p xmlns:a="http://schemas.openxmlformats.org/drawingml/2006/main">
-            <a:r>
-              <a:t/>
-            </a:r>
-          </a:p>
-          <a:p xmlns:a="http://schemas.openxmlformats.org/drawingml/2006/main">
-            <a:r>
-              <a:t>IF LEARNERS ARE STUCK</a:t>
-            </a:r>
-          </a:p>
-          <a:p xmlns:a="http://schemas.openxmlformats.org/drawingml/2006/main">
-            <a:r>
-              <a:t>Draw three numbered boxes starting at zero. Keep the position separate from the value stored in it.</a:t>
-            </a:r>
-          </a:p>
-          <a:p xmlns:a="http://schemas.openxmlformats.org/drawingml/2006/main">
-            <a:r>
-              <a:t/>
-            </a:r>
-          </a:p>
-          <a:p xmlns:a="http://schemas.openxmlformats.org/drawingml/2006/main">
-            <a:r>
-              <a:t>ASSIGNMENT HANDOVER</a:t>
-            </a:r>
-          </a:p>
-          <a:p xmlns:a="http://schemas.openxmlformats.org/drawingml/2006/main">
-            <a:r>
-              <a:t>Open the matching public student guide and show the exact starter filename, required outputs and upload set. Ask one learner to repeat what to submit and where. IUEA Student Registration Number is required freeform text; learners enter their own number. A saved repository is not a submitted form. Read the live deadline and keep the submission confirmation. Do not release an assessment that is still awaiting grading validation.</a:t>
-            </a:r>
-          </a:p>
-          <a:p xmlns:a="http://schemas.openxmlformats.org/drawingml/2006/main">
-            <a:r>
-              <a:t/>
-            </a:r>
-          </a:p>
-          <a:p xmlns:a="http://schemas.openxmlformats.org/drawingml/2006/main">
-            <a:r>
-              <a:t>TEST COLLECTION RULE</a:t>
-            </a:r>
-          </a:p>
-          <a:p xmlns:a="http://schemas.openxmlformats.org/drawingml/2006/main">
-            <a:r>
-              <a:t>This deck is for rehearsal before the timed assessment. Preserve the invigilated timetable and Part A snapshot. During Part B, type answers in the notebook cell headed ## My written evidence without executing code. Collect one complete .ipynb offline; later Google upload only transports the collected work. Do not require internet or AI during the test.</a:t>
+              <a:t>TEACHING MODE</a:t>
+            </a:r>
+          </a:p>
+          <a:p xmlns:a="http://schemas.openxmlformats.org/drawingml/2006/main">
+            <a:r>
+              <a:t>Demonstrate first. Read each new symbol aloud, trace the values and compare the shown output. Learners repeat worked examples individually after class.</a:t>
             </a:r>
           </a:p>
           <a:p xmlns:a="http://schemas.openxmlformats.org/drawingml/2006/main">
@@ -5982,37 +4167,22 @@
           </a:p>
           <a:p xmlns:a="http://schemas.openxmlformats.org/drawingml/2006/main">
             <a:r>
-              <a:t>Preparation checkpoint. Move on after a learner can explain the current example or required action.</a:t>
-            </a:r>
-          </a:p>
-          <a:p xmlns:a="http://schemas.openxmlformats.org/drawingml/2006/main">
-            <a:r>
-              <a:t/>
-            </a:r>
-          </a:p>
-          <a:p xmlns:a="http://schemas.openxmlformats.org/drawingml/2006/main">
-            <a:r>
-              <a:t>TEACHING MODE</a:t>
-            </a:r>
-          </a:p>
-          <a:p xmlns:a="http://schemas.openxmlformats.org/drawingml/2006/main">
-            <a:r>
-              <a:t>Demonstrate the example directly. Explain each new name, symbol and output. Use the revision example for an individual check after class; no live partner activity is required.</a:t>
-            </a:r>
-          </a:p>
-          <a:p xmlns:a="http://schemas.openxmlformats.org/drawingml/2006/main">
-            <a:r>
-              <a:t/>
-            </a:r>
-          </a:p>
-          <a:p xmlns:a="http://schemas.openxmlformats.org/drawingml/2006/main">
-            <a:r>
-              <a:t>NEXT</a:t>
-            </a:r>
-          </a:p>
-          <a:p xmlns:a="http://schemas.openxmlformats.org/drawingml/2006/main">
-            <a:r>
               <a:t>Preparation checkpoint.</a:t>
+            </a:r>
+          </a:p>
+          <a:p xmlns:a="http://schemas.openxmlformats.org/drawingml/2006/main">
+            <a:r>
+              <a:t/>
+            </a:r>
+          </a:p>
+          <a:p xmlns:a="http://schemas.openxmlformats.org/drawingml/2006/main">
+            <a:r>
+              <a:t>REFERENCES</a:t>
+            </a:r>
+          </a:p>
+          <a:p xmlns:a="http://schemas.openxmlformats.org/drawingml/2006/main">
+            <a:r>
+              <a:t/>
             </a:r>
           </a:p>
         </p:txBody>
@@ -6102,7 +4272,7 @@
           </a:p>
           <a:p xmlns:a="http://schemas.openxmlformats.org/drawingml/2006/main">
             <a:r>
-              <a:t>Build on Test session. Explain why this example is needed before running it.</a:t>
+              <a:t>Previous slide: Test session.</a:t>
             </a:r>
           </a:p>
           <a:p xmlns:a="http://schemas.openxmlformats.org/drawingml/2006/main">
@@ -6127,41 +4297,6 @@
           </a:p>
           <a:p xmlns:a="http://schemas.openxmlformats.org/drawingml/2006/main">
             <a:r>
-              <a:t>LECTURER DETAIL</a:t>
-            </a:r>
-          </a:p>
-          <a:p xmlns:a="http://schemas.openxmlformats.org/drawingml/2006/main">
-            <a:r>
-              <a:t>TEACHING PURPOSE</a:t>
-            </a:r>
-          </a:p>
-          <a:p xmlns:a="http://schemas.openxmlformats.org/drawingml/2006/main">
-            <a:r>
-              <a:t>Preparation checkpoint</a:t>
-            </a:r>
-          </a:p>
-          <a:p xmlns:a="http://schemas.openxmlformats.org/drawingml/2006/main">
-            <a:r>
-              <a:t/>
-            </a:r>
-          </a:p>
-          <a:p xmlns:a="http://schemas.openxmlformats.org/drawingml/2006/main">
-            <a:r>
-              <a:t>CONNECT</a:t>
-            </a:r>
-          </a:p>
-          <a:p xmlns:a="http://schemas.openxmlformats.org/drawingml/2006/main">
-            <a:r>
-              <a:t>Build on the preceding slide: Test session.</a:t>
-            </a:r>
-          </a:p>
-          <a:p xmlns:a="http://schemas.openxmlformats.org/drawingml/2006/main">
-            <a:r>
-              <a:t/>
-            </a:r>
-          </a:p>
-          <a:p xmlns:a="http://schemas.openxmlformats.org/drawingml/2006/main">
-            <a:r>
               <a:t>LECTURER CUE</a:t>
             </a:r>
           </a:p>
@@ -6177,12 +4312,12 @@
           </a:p>
           <a:p xmlns:a="http://schemas.openxmlformats.org/drawingml/2006/main">
             <a:r>
-              <a:t>TEST COLLECTION RULE</a:t>
-            </a:r>
-          </a:p>
-          <a:p xmlns:a="http://schemas.openxmlformats.org/drawingml/2006/main">
-            <a:r>
-              <a:t>This deck is for rehearsal before the timed assessment. Preserve the invigilated timetable and Part A snapshot. During Part B, type answers in the notebook cell headed ## My written evidence without executing code. Collect one complete .ipynb offline; later Google upload only transports the collected work. Do not require internet or AI during the test.</a:t>
+              <a:t>TEACHING MODE</a:t>
+            </a:r>
+          </a:p>
+          <a:p xmlns:a="http://schemas.openxmlformats.org/drawingml/2006/main">
+            <a:r>
+              <a:t>Demonstrate first. Read each new symbol aloud, trace the values and compare the shown output. Learners repeat worked examples individually after class.</a:t>
             </a:r>
           </a:p>
           <a:p xmlns:a="http://schemas.openxmlformats.org/drawingml/2006/main">
@@ -6197,37 +4332,22 @@
           </a:p>
           <a:p xmlns:a="http://schemas.openxmlformats.org/drawingml/2006/main">
             <a:r>
-              <a:t>Your evidence. Move on after a learner can explain the current example or required action.</a:t>
-            </a:r>
-          </a:p>
-          <a:p xmlns:a="http://schemas.openxmlformats.org/drawingml/2006/main">
-            <a:r>
-              <a:t/>
-            </a:r>
-          </a:p>
-          <a:p xmlns:a="http://schemas.openxmlformats.org/drawingml/2006/main">
-            <a:r>
-              <a:t>TEACHING MODE</a:t>
-            </a:r>
-          </a:p>
-          <a:p xmlns:a="http://schemas.openxmlformats.org/drawingml/2006/main">
-            <a:r>
-              <a:t>Demonstrate the example directly. Explain each new name, symbol and output. Use the revision example for an individual check after class; no live partner activity is required.</a:t>
-            </a:r>
-          </a:p>
-          <a:p xmlns:a="http://schemas.openxmlformats.org/drawingml/2006/main">
-            <a:r>
-              <a:t/>
-            </a:r>
-          </a:p>
-          <a:p xmlns:a="http://schemas.openxmlformats.org/drawingml/2006/main">
-            <a:r>
-              <a:t>NEXT</a:t>
-            </a:r>
-          </a:p>
-          <a:p xmlns:a="http://schemas.openxmlformats.org/drawingml/2006/main">
-            <a:r>
               <a:t>Your evidence.</a:t>
+            </a:r>
+          </a:p>
+          <a:p xmlns:a="http://schemas.openxmlformats.org/drawingml/2006/main">
+            <a:r>
+              <a:t/>
+            </a:r>
+          </a:p>
+          <a:p xmlns:a="http://schemas.openxmlformats.org/drawingml/2006/main">
+            <a:r>
+              <a:t>REFERENCES</a:t>
+            </a:r>
+          </a:p>
+          <a:p xmlns:a="http://schemas.openxmlformats.org/drawingml/2006/main">
+            <a:r>
+              <a:t/>
             </a:r>
           </a:p>
         </p:txBody>
@@ -6274,7 +4394,7 @@
           <p:cNvPr id="4" name="Accent rule">
             <a:extLst xmlns:a="http://schemas.openxmlformats.org/drawingml/2006/main">
               <a:ext uri="{FF2B5EF4-FFF2-40B4-BE49-F238E27FC236}">
-                <a16:creationId xmlns:a16="http://schemas.microsoft.com/office/drawing/2014/main" id="{DB526305-9F5F-4030-BB05-318D474D57B8}"/>
+                <a16:creationId xmlns:a16="http://schemas.microsoft.com/office/drawing/2014/main" id="{57489A11-EE04-4C2D-9567-8FEA9E600AEE}"/>
               </a:ext>
             </a:extLst>
           </p:cNvPr>
@@ -6305,7 +4425,7 @@
           <p:cNvPr id="2" name="Title">
             <a:extLst xmlns:a="http://schemas.openxmlformats.org/drawingml/2006/main">
               <a:ext uri="{FF2B5EF4-FFF2-40B4-BE49-F238E27FC236}">
-                <a16:creationId xmlns:a16="http://schemas.microsoft.com/office/drawing/2014/main" id="{AFB7AC9A-93C1-4847-9FEE-BB15410A45C1}"/>
+                <a16:creationId xmlns:a16="http://schemas.microsoft.com/office/drawing/2014/main" id="{62462ED6-14B5-4022-B826-AFBC8B4A6396}"/>
               </a:ext>
             </a:extLst>
           </p:cNvPr>
@@ -6452,7 +4572,7 @@
           <p:cNvPr id="3" name="Subtitle">
             <a:extLst xmlns:a="http://schemas.openxmlformats.org/drawingml/2006/main">
               <a:ext uri="{FF2B5EF4-FFF2-40B4-BE49-F238E27FC236}">
-                <a16:creationId xmlns:a16="http://schemas.microsoft.com/office/drawing/2014/main" id="{F6A04424-B2C7-460F-89EA-522A66E0D67E}"/>
+                <a16:creationId xmlns:a16="http://schemas.microsoft.com/office/drawing/2014/main" id="{7326698A-AC56-4A91-9F20-F3102AAAA7AD}"/>
               </a:ext>
             </a:extLst>
           </p:cNvPr>
@@ -6616,7 +4736,7 @@
           <p:cNvPr id="3" name="Accent rule">
             <a:extLst xmlns:a="http://schemas.openxmlformats.org/drawingml/2006/main">
               <a:ext uri="{FF2B5EF4-FFF2-40B4-BE49-F238E27FC236}">
-                <a16:creationId xmlns:a16="http://schemas.microsoft.com/office/drawing/2014/main" id="{2BBEFE20-0CB0-455B-B9F2-393DBCCCF411}"/>
+                <a16:creationId xmlns:a16="http://schemas.microsoft.com/office/drawing/2014/main" id="{DC1AAE3C-08B4-4290-9CBD-A6D0FC76E64B}"/>
               </a:ext>
             </a:extLst>
           </p:cNvPr>
@@ -6647,7 +4767,7 @@
           <p:cNvPr id="2" name="Section title">
             <a:extLst xmlns:a="http://schemas.openxmlformats.org/drawingml/2006/main">
               <a:ext uri="{FF2B5EF4-FFF2-40B4-BE49-F238E27FC236}">
-                <a16:creationId xmlns:a16="http://schemas.microsoft.com/office/drawing/2014/main" id="{0FB69621-E483-4453-8C99-14D2CB62BC97}"/>
+                <a16:creationId xmlns:a16="http://schemas.microsoft.com/office/drawing/2014/main" id="{18CD6348-18A2-4EB1-B5B2-8C26CF6D39BC}"/>
               </a:ext>
             </a:extLst>
           </p:cNvPr>
@@ -6811,7 +4931,7 @@
           <p:cNvPr id="4" name="Accent rule">
             <a:extLst xmlns:a="http://schemas.openxmlformats.org/drawingml/2006/main">
               <a:ext uri="{FF2B5EF4-FFF2-40B4-BE49-F238E27FC236}">
-                <a16:creationId xmlns:a16="http://schemas.microsoft.com/office/drawing/2014/main" id="{933238C5-4863-480A-8C99-8B1EF9CBF182}"/>
+                <a16:creationId xmlns:a16="http://schemas.microsoft.com/office/drawing/2014/main" id="{47CA64FF-BED6-4F26-A566-BAEA7E39D5EE}"/>
               </a:ext>
             </a:extLst>
           </p:cNvPr>
@@ -6842,7 +4962,7 @@
           <p:cNvPr id="2" name="Title">
             <a:extLst xmlns:a="http://schemas.openxmlformats.org/drawingml/2006/main">
               <a:ext uri="{FF2B5EF4-FFF2-40B4-BE49-F238E27FC236}">
-                <a16:creationId xmlns:a16="http://schemas.microsoft.com/office/drawing/2014/main" id="{DFB82D95-9534-4F29-820F-BF1A7B6F8D2C}"/>
+                <a16:creationId xmlns:a16="http://schemas.microsoft.com/office/drawing/2014/main" id="{1DD8FFA1-61BC-4B4C-8D1B-72D07FA3CB76}"/>
               </a:ext>
             </a:extLst>
           </p:cNvPr>
@@ -6989,7 +5109,7 @@
           <p:cNvPr id="3" name="Body">
             <a:extLst xmlns:a="http://schemas.openxmlformats.org/drawingml/2006/main">
               <a:ext uri="{FF2B5EF4-FFF2-40B4-BE49-F238E27FC236}">
-                <a16:creationId xmlns:a16="http://schemas.microsoft.com/office/drawing/2014/main" id="{9126BC8E-9506-4D17-85A1-A97220DC279F}"/>
+                <a16:creationId xmlns:a16="http://schemas.microsoft.com/office/drawing/2014/main" id="{B77A6AE9-51ED-4113-8B55-80E1F6D8929A}"/>
               </a:ext>
             </a:extLst>
           </p:cNvPr>
@@ -7153,7 +5273,7 @@
           <p:cNvPr id="5" name="Accent rule">
             <a:extLst xmlns:a="http://schemas.openxmlformats.org/drawingml/2006/main">
               <a:ext uri="{FF2B5EF4-FFF2-40B4-BE49-F238E27FC236}">
-                <a16:creationId xmlns:a16="http://schemas.microsoft.com/office/drawing/2014/main" id="{A552EA00-7515-4C22-86E5-50A7603F8BA7}"/>
+                <a16:creationId xmlns:a16="http://schemas.microsoft.com/office/drawing/2014/main" id="{5262A570-3410-4236-8151-8649197FFC6A}"/>
               </a:ext>
             </a:extLst>
           </p:cNvPr>
@@ -7184,7 +5304,7 @@
           <p:cNvPr id="2" name="Title">
             <a:extLst xmlns:a="http://schemas.openxmlformats.org/drawingml/2006/main">
               <a:ext uri="{FF2B5EF4-FFF2-40B4-BE49-F238E27FC236}">
-                <a16:creationId xmlns:a16="http://schemas.microsoft.com/office/drawing/2014/main" id="{403DDFAF-B4BC-4776-8488-B1C8B0CE7D2F}"/>
+                <a16:creationId xmlns:a16="http://schemas.microsoft.com/office/drawing/2014/main" id="{0968D496-9CF9-42FB-975E-7012A5D0BE0F}"/>
               </a:ext>
             </a:extLst>
           </p:cNvPr>
@@ -7331,7 +5451,7 @@
           <p:cNvPr id="3" name="Left column">
             <a:extLst xmlns:a="http://schemas.openxmlformats.org/drawingml/2006/main">
               <a:ext uri="{FF2B5EF4-FFF2-40B4-BE49-F238E27FC236}">
-                <a16:creationId xmlns:a16="http://schemas.microsoft.com/office/drawing/2014/main" id="{84DD9494-DE87-4F89-B2EC-62832E6C1C48}"/>
+                <a16:creationId xmlns:a16="http://schemas.microsoft.com/office/drawing/2014/main" id="{68308A9F-C067-4EB3-A804-8DD43DC45AD8}"/>
               </a:ext>
             </a:extLst>
           </p:cNvPr>
@@ -7478,7 +5598,7 @@
           <p:cNvPr id="4" name="Right column">
             <a:extLst xmlns:a="http://schemas.openxmlformats.org/drawingml/2006/main">
               <a:ext uri="{FF2B5EF4-FFF2-40B4-BE49-F238E27FC236}">
-                <a16:creationId xmlns:a16="http://schemas.microsoft.com/office/drawing/2014/main" id="{F57E632A-E303-41C7-9401-D1D2B9BCB3EA}"/>
+                <a16:creationId xmlns:a16="http://schemas.microsoft.com/office/drawing/2014/main" id="{78FBC93C-68A3-4BBF-8377-E851DDEB6547}"/>
               </a:ext>
             </a:extLst>
           </p:cNvPr>
@@ -7642,7 +5762,7 @@
           <p:cNvPr id="4" name="Accent rule">
             <a:extLst xmlns:a="http://schemas.openxmlformats.org/drawingml/2006/main">
               <a:ext uri="{FF2B5EF4-FFF2-40B4-BE49-F238E27FC236}">
-                <a16:creationId xmlns:a16="http://schemas.microsoft.com/office/drawing/2014/main" id="{0B9CEDB7-61C1-47F6-996B-FA84EA53F3B9}"/>
+                <a16:creationId xmlns:a16="http://schemas.microsoft.com/office/drawing/2014/main" id="{685F5FC1-6593-44A6-9624-9199C0A7BF20}"/>
               </a:ext>
             </a:extLst>
           </p:cNvPr>
@@ -7673,7 +5793,7 @@
           <p:cNvPr id="2" name="Title">
             <a:extLst xmlns:a="http://schemas.openxmlformats.org/drawingml/2006/main">
               <a:ext uri="{FF2B5EF4-FFF2-40B4-BE49-F238E27FC236}">
-                <a16:creationId xmlns:a16="http://schemas.microsoft.com/office/drawing/2014/main" id="{7A0D833E-7071-43D0-BF30-67E759B6FB80}"/>
+                <a16:creationId xmlns:a16="http://schemas.microsoft.com/office/drawing/2014/main" id="{286FCAD8-12CE-4DF3-BEE1-662C3DB0FB3C}"/>
               </a:ext>
             </a:extLst>
           </p:cNvPr>
@@ -7820,7 +5940,7 @@
           <p:cNvPr id="3" name="Left column">
             <a:extLst xmlns:a="http://schemas.openxmlformats.org/drawingml/2006/main">
               <a:ext uri="{FF2B5EF4-FFF2-40B4-BE49-F238E27FC236}">
-                <a16:creationId xmlns:a16="http://schemas.microsoft.com/office/drawing/2014/main" id="{7BC5E83B-D996-46D0-9CA6-326E9E9E953B}"/>
+                <a16:creationId xmlns:a16="http://schemas.microsoft.com/office/drawing/2014/main" id="{D6795292-876E-4165-B165-CE2BAF053F10}"/>
               </a:ext>
             </a:extLst>
           </p:cNvPr>
@@ -8005,12 +6125,12 @@
   </p:cSld>
   <p:clrMap bg1="lt1" tx1="dk1" bg2="lt2" tx2="dk2" accent1="accent1" accent2="accent2" accent3="accent3" accent4="accent4" accent5="accent5" accent6="accent6" hlink="hlink" folHlink="folHlink"/>
   <p:sldLayoutIdLst>
-    <p:sldLayoutId xmlns:r="http://schemas.openxmlformats.org/officeDocument/2006/relationships" id="2147483649" r:id="R618bfedfe65b4a84"/>
-    <p:sldLayoutId xmlns:r="http://schemas.openxmlformats.org/officeDocument/2006/relationships" id="2147483650" r:id="R9fa106e6e5b04ec9"/>
-    <p:sldLayoutId xmlns:r="http://schemas.openxmlformats.org/officeDocument/2006/relationships" id="2147483651" r:id="Rf7c0c58f3c644a20"/>
-    <p:sldLayoutId xmlns:r="http://schemas.openxmlformats.org/officeDocument/2006/relationships" id="2147483652" r:id="R0dc252db2acf49c4"/>
-    <p:sldLayoutId xmlns:r="http://schemas.openxmlformats.org/officeDocument/2006/relationships" id="2147483653" r:id="Rbdfbe695efa143c9"/>
-    <p:sldLayoutId xmlns:r="http://schemas.openxmlformats.org/officeDocument/2006/relationships" id="2147483654" r:id="Rfbae8285f1304507"/>
+    <p:sldLayoutId xmlns:r="http://schemas.openxmlformats.org/officeDocument/2006/relationships" id="2147483649" r:id="Ref27c657b5f14fa8"/>
+    <p:sldLayoutId xmlns:r="http://schemas.openxmlformats.org/officeDocument/2006/relationships" id="2147483650" r:id="R047d23f63c9d4944"/>
+    <p:sldLayoutId xmlns:r="http://schemas.openxmlformats.org/officeDocument/2006/relationships" id="2147483651" r:id="R4c2213d8d01d4fc4"/>
+    <p:sldLayoutId xmlns:r="http://schemas.openxmlformats.org/officeDocument/2006/relationships" id="2147483652" r:id="R4ed392958ae5413b"/>
+    <p:sldLayoutId xmlns:r="http://schemas.openxmlformats.org/officeDocument/2006/relationships" id="2147483653" r:id="R3bacaf94844d4b15"/>
+    <p:sldLayoutId xmlns:r="http://schemas.openxmlformats.org/officeDocument/2006/relationships" id="2147483654" r:id="R220519eb74ba4c32"/>
   </p:sldLayoutIdLst>
   <p:txStyles>
     <p:titleStyle>
@@ -8565,7 +6685,7 @@
           <p:nvPr/>
         </p:nvPicPr>
         <p:blipFill>
-          <a:blip xmlns:r="http://schemas.openxmlformats.org/officeDocument/2006/relationships" xmlns:a="http://schemas.openxmlformats.org/drawingml/2006/main" r:embed="R3af468343ee74cba"/>
+          <a:blip xmlns:r="http://schemas.openxmlformats.org/officeDocument/2006/relationships" xmlns:a="http://schemas.openxmlformats.org/drawingml/2006/main" r:embed="Rb59e2904b5344f3c"/>
           <a:stretch xmlns:a="http://schemas.openxmlformats.org/drawingml/2006/main"/>
         </p:blipFill>
         <p:spPr>
@@ -8583,7 +6703,7 @@
           <p:cNvPr id="2" name="">
             <a:extLst xmlns:a="http://schemas.openxmlformats.org/drawingml/2006/main">
               <a:ext uri="{FF2B5EF4-FFF2-40B4-BE49-F238E27FC236}">
-                <a16:creationId xmlns:a16="http://schemas.microsoft.com/office/drawing/2014/main" id="{8E4159C3-B446-4F7E-9227-F3D4D398153B}"/>
+                <a16:creationId xmlns:a16="http://schemas.microsoft.com/office/drawing/2014/main" id="{F4080934-B324-438D-8C44-29CE702F2FB0}"/>
               </a:ext>
             </a:extLst>
           </p:cNvPr>
@@ -8613,7 +6733,7 @@
           <p:cNvPr id="3" name="">
             <a:extLst xmlns:a="http://schemas.openxmlformats.org/drawingml/2006/main">
               <a:ext uri="{FF2B5EF4-FFF2-40B4-BE49-F238E27FC236}">
-                <a16:creationId xmlns:a16="http://schemas.microsoft.com/office/drawing/2014/main" id="{70ECD7FF-40A3-446A-B3AD-B34B7FCF55CC}"/>
+                <a16:creationId xmlns:a16="http://schemas.microsoft.com/office/drawing/2014/main" id="{DA3C01C9-B97B-49F6-A180-BADFB16C8034}"/>
               </a:ext>
             </a:extLst>
           </p:cNvPr>
@@ -8670,7 +6790,7 @@
           <p:cNvPr id="4" name="">
             <a:extLst xmlns:a="http://schemas.openxmlformats.org/drawingml/2006/main">
               <a:ext uri="{FF2B5EF4-FFF2-40B4-BE49-F238E27FC236}">
-                <a16:creationId xmlns:a16="http://schemas.microsoft.com/office/drawing/2014/main" id="{2F6A6B39-4AD5-4759-BF87-4A3F0AB40B57}"/>
+                <a16:creationId xmlns:a16="http://schemas.microsoft.com/office/drawing/2014/main" id="{1C47A81E-8395-4447-8166-12CC8537F9E2}"/>
               </a:ext>
             </a:extLst>
           </p:cNvPr>
@@ -8727,7 +6847,7 @@
           <p:cNvPr id="5" name="">
             <a:extLst xmlns:a="http://schemas.openxmlformats.org/drawingml/2006/main">
               <a:ext uri="{FF2B5EF4-FFF2-40B4-BE49-F238E27FC236}">
-                <a16:creationId xmlns:a16="http://schemas.microsoft.com/office/drawing/2014/main" id="{1E2BA8F2-7DC2-4F4D-9D7E-5AA83BB18D73}"/>
+                <a16:creationId xmlns:a16="http://schemas.microsoft.com/office/drawing/2014/main" id="{AB4B5075-43FE-4EDA-A005-9A25305399CA}"/>
               </a:ext>
             </a:extLst>
           </p:cNvPr>
@@ -8784,7 +6904,7 @@
           <p:cNvPr id="6" name="">
             <a:extLst xmlns:a="http://schemas.openxmlformats.org/drawingml/2006/main">
               <a:ext uri="{FF2B5EF4-FFF2-40B4-BE49-F238E27FC236}">
-                <a16:creationId xmlns:a16="http://schemas.microsoft.com/office/drawing/2014/main" id="{8EF9F2D4-2F41-48E5-92F3-15CC87D91DE8}"/>
+                <a16:creationId xmlns:a16="http://schemas.microsoft.com/office/drawing/2014/main" id="{157BD897-DFAE-4C3F-A1BF-EF3F9B32342E}"/>
               </a:ext>
             </a:extLst>
           </p:cNvPr>
@@ -8862,7 +6982,7 @@
     </p:spTree>
     <p:extLst>
       <p:ext uri="{BB962C8B-B14F-4D97-AF65-F5344CB8AC3E}">
-        <p14:creationId xmlns:p14="http://schemas.microsoft.com/office/powerpoint/2010/main" val="1880708617"/>
+        <p14:creationId xmlns:p14="http://schemas.microsoft.com/office/powerpoint/2010/main" val="1076579437"/>
       </p:ext>
     </p:extLst>
   </p:cSld>
@@ -8893,7 +7013,7 @@
           <p:cNvPr id="9" name="">
             <a:extLst xmlns:a="http://schemas.openxmlformats.org/drawingml/2006/main">
               <a:ext uri="{FF2B5EF4-FFF2-40B4-BE49-F238E27FC236}">
-                <a16:creationId xmlns:a16="http://schemas.microsoft.com/office/drawing/2014/main" id="{2988689A-170A-47CB-953B-4F7DC37415EE}"/>
+                <a16:creationId xmlns:a16="http://schemas.microsoft.com/office/drawing/2014/main" id="{0680F357-830C-473B-A3A3-8C490F7922C3}"/>
               </a:ext>
             </a:extLst>
           </p:cNvPr>
@@ -8923,7 +7043,7 @@
           <p:cNvPr id="2" name="">
             <a:extLst xmlns:a="http://schemas.openxmlformats.org/drawingml/2006/main">
               <a:ext uri="{FF2B5EF4-FFF2-40B4-BE49-F238E27FC236}">
-                <a16:creationId xmlns:a16="http://schemas.microsoft.com/office/drawing/2014/main" id="{EF0F5C85-1905-4111-BE4C-88EBEA31A672}"/>
+                <a16:creationId xmlns:a16="http://schemas.microsoft.com/office/drawing/2014/main" id="{256941B9-A95B-41EF-9E5D-9CB59C7275E8}"/>
               </a:ext>
             </a:extLst>
           </p:cNvPr>
@@ -8980,7 +7100,7 @@
           <p:cNvPr id="3" name="">
             <a:extLst xmlns:a="http://schemas.openxmlformats.org/drawingml/2006/main">
               <a:ext uri="{FF2B5EF4-FFF2-40B4-BE49-F238E27FC236}">
-                <a16:creationId xmlns:a16="http://schemas.microsoft.com/office/drawing/2014/main" id="{7047E8CE-1F06-4A76-BE1D-37DA206D420D}"/>
+                <a16:creationId xmlns:a16="http://schemas.microsoft.com/office/drawing/2014/main" id="{FA3F3A2B-FB6C-4A9A-AD55-37C9DE543EBD}"/>
               </a:ext>
             </a:extLst>
           </p:cNvPr>
@@ -9037,7 +7157,7 @@
           <p:cNvPr id="4" name="">
             <a:extLst xmlns:a="http://schemas.openxmlformats.org/drawingml/2006/main">
               <a:ext uri="{FF2B5EF4-FFF2-40B4-BE49-F238E27FC236}">
-                <a16:creationId xmlns:a16="http://schemas.microsoft.com/office/drawing/2014/main" id="{D17B4611-0EE4-40C2-84BC-20A1A54EF1DF}"/>
+                <a16:creationId xmlns:a16="http://schemas.microsoft.com/office/drawing/2014/main" id="{E3A3B6F3-F098-486C-87A7-86BED7213DF7}"/>
               </a:ext>
             </a:extLst>
           </p:cNvPr>
@@ -9094,7 +7214,7 @@
           <p:cNvPr id="5" name="">
             <a:extLst xmlns:a="http://schemas.openxmlformats.org/drawingml/2006/main">
               <a:ext uri="{FF2B5EF4-FFF2-40B4-BE49-F238E27FC236}">
-                <a16:creationId xmlns:a16="http://schemas.microsoft.com/office/drawing/2014/main" id="{63129C62-4F7B-446E-A301-0A13E3E42ABE}"/>
+                <a16:creationId xmlns:a16="http://schemas.microsoft.com/office/drawing/2014/main" id="{5A252070-1F2F-4977-AC11-D25F565D3AA1}"/>
               </a:ext>
             </a:extLst>
           </p:cNvPr>
@@ -9151,7 +7271,7 @@
           <p:cNvPr id="6" name="">
             <a:extLst xmlns:a="http://schemas.openxmlformats.org/drawingml/2006/main">
               <a:ext uri="{FF2B5EF4-FFF2-40B4-BE49-F238E27FC236}">
-                <a16:creationId xmlns:a16="http://schemas.microsoft.com/office/drawing/2014/main" id="{D8D3BBE9-7F59-47C2-BA00-C400DC12DE0E}"/>
+                <a16:creationId xmlns:a16="http://schemas.microsoft.com/office/drawing/2014/main" id="{38695CCC-5A48-4420-8331-51C3101C22DC}"/>
               </a:ext>
             </a:extLst>
           </p:cNvPr>
@@ -9208,7 +7328,7 @@
           <p:cNvPr id="7" name="">
             <a:extLst xmlns:a="http://schemas.openxmlformats.org/drawingml/2006/main">
               <a:ext uri="{FF2B5EF4-FFF2-40B4-BE49-F238E27FC236}">
-                <a16:creationId xmlns:a16="http://schemas.microsoft.com/office/drawing/2014/main" id="{7CCFF910-F5C1-4080-B0B9-9FDBED14E60E}"/>
+                <a16:creationId xmlns:a16="http://schemas.microsoft.com/office/drawing/2014/main" id="{0959497C-DF65-4109-81A5-EE773A4F2E9E}"/>
               </a:ext>
             </a:extLst>
           </p:cNvPr>
@@ -9265,7 +7385,7 @@
           <p:cNvPr id="8" name="">
             <a:extLst xmlns:a="http://schemas.openxmlformats.org/drawingml/2006/main">
               <a:ext uri="{FF2B5EF4-FFF2-40B4-BE49-F238E27FC236}">
-                <a16:creationId xmlns:a16="http://schemas.microsoft.com/office/drawing/2014/main" id="{47030E5D-84FD-4390-8FA1-B9CEF7E88589}"/>
+                <a16:creationId xmlns:a16="http://schemas.microsoft.com/office/drawing/2014/main" id="{536DBA31-9428-4798-8E2B-C89A99F83092}"/>
               </a:ext>
             </a:extLst>
           </p:cNvPr>
@@ -9320,7 +7440,7 @@
     </p:spTree>
     <p:extLst>
       <p:ext uri="{BB962C8B-B14F-4D97-AF65-F5344CB8AC3E}">
-        <p14:creationId xmlns:p14="http://schemas.microsoft.com/office/powerpoint/2010/main" val="1738047935"/>
+        <p14:creationId xmlns:p14="http://schemas.microsoft.com/office/powerpoint/2010/main" val="1359771417"/>
       </p:ext>
     </p:extLst>
   </p:cSld>
@@ -9351,7 +7471,7 @@
           <p:cNvPr id="13" name="">
             <a:extLst xmlns:a="http://schemas.openxmlformats.org/drawingml/2006/main">
               <a:ext uri="{FF2B5EF4-FFF2-40B4-BE49-F238E27FC236}">
-                <a16:creationId xmlns:a16="http://schemas.microsoft.com/office/drawing/2014/main" id="{8D4B942C-0CAF-46E2-BD5B-216237BDC1AB}"/>
+                <a16:creationId xmlns:a16="http://schemas.microsoft.com/office/drawing/2014/main" id="{751EB413-F1C0-487C-98DE-33BF76BFC2CE}"/>
               </a:ext>
             </a:extLst>
           </p:cNvPr>
@@ -9381,7 +7501,7 @@
           <p:cNvPr id="2" name="">
             <a:extLst xmlns:a="http://schemas.openxmlformats.org/drawingml/2006/main">
               <a:ext uri="{FF2B5EF4-FFF2-40B4-BE49-F238E27FC236}">
-                <a16:creationId xmlns:a16="http://schemas.microsoft.com/office/drawing/2014/main" id="{9D83ACE9-009B-4E25-A64D-A03D66F700B2}"/>
+                <a16:creationId xmlns:a16="http://schemas.microsoft.com/office/drawing/2014/main" id="{5E18C6A8-FA94-4A2A-85F4-F077F8503EAD}"/>
               </a:ext>
             </a:extLst>
           </p:cNvPr>
@@ -9438,7 +7558,7 @@
           <p:cNvPr id="3" name="">
             <a:extLst xmlns:a="http://schemas.openxmlformats.org/drawingml/2006/main">
               <a:ext uri="{FF2B5EF4-FFF2-40B4-BE49-F238E27FC236}">
-                <a16:creationId xmlns:a16="http://schemas.microsoft.com/office/drawing/2014/main" id="{5EFF2919-5B4C-44CF-94AB-9D65572BC6A1}"/>
+                <a16:creationId xmlns:a16="http://schemas.microsoft.com/office/drawing/2014/main" id="{AB449E64-0145-4E96-BD1C-0F54CEDAD0C0}"/>
               </a:ext>
             </a:extLst>
           </p:cNvPr>
@@ -9495,7 +7615,7 @@
           <p:cNvPr id="4" name="">
             <a:extLst xmlns:a="http://schemas.openxmlformats.org/drawingml/2006/main">
               <a:ext uri="{FF2B5EF4-FFF2-40B4-BE49-F238E27FC236}">
-                <a16:creationId xmlns:a16="http://schemas.microsoft.com/office/drawing/2014/main" id="{5068FA8B-13DD-44D3-A7CA-BD3AE7C67EF2}"/>
+                <a16:creationId xmlns:a16="http://schemas.microsoft.com/office/drawing/2014/main" id="{FB48AF4A-7F53-448B-8E5A-4CC553E43E67}"/>
               </a:ext>
             </a:extLst>
           </p:cNvPr>
@@ -9552,7 +7672,7 @@
           <p:cNvPr id="5" name="">
             <a:extLst xmlns:a="http://schemas.openxmlformats.org/drawingml/2006/main">
               <a:ext uri="{FF2B5EF4-FFF2-40B4-BE49-F238E27FC236}">
-                <a16:creationId xmlns:a16="http://schemas.microsoft.com/office/drawing/2014/main" id="{5F4279C9-C15E-45D5-B33E-F417BD8AC682}"/>
+                <a16:creationId xmlns:a16="http://schemas.microsoft.com/office/drawing/2014/main" id="{A2E414D2-9ADC-435F-9A89-5AC21EE90479}"/>
               </a:ext>
             </a:extLst>
           </p:cNvPr>
@@ -9609,7 +7729,7 @@
           <p:cNvPr id="6" name="">
             <a:extLst xmlns:a="http://schemas.openxmlformats.org/drawingml/2006/main">
               <a:ext uri="{FF2B5EF4-FFF2-40B4-BE49-F238E27FC236}">
-                <a16:creationId xmlns:a16="http://schemas.microsoft.com/office/drawing/2014/main" id="{6C6B56F2-D8A3-480D-B81B-DAF98EC0EE7D}"/>
+                <a16:creationId xmlns:a16="http://schemas.microsoft.com/office/drawing/2014/main" id="{F32BDCE0-AE2C-43CE-906A-9B7719FE8131}"/>
               </a:ext>
             </a:extLst>
           </p:cNvPr>
@@ -9666,7 +7786,7 @@
           <p:cNvPr id="7" name="">
             <a:extLst xmlns:a="http://schemas.openxmlformats.org/drawingml/2006/main">
               <a:ext uri="{FF2B5EF4-FFF2-40B4-BE49-F238E27FC236}">
-                <a16:creationId xmlns:a16="http://schemas.microsoft.com/office/drawing/2014/main" id="{08002F30-E5AB-4352-AB8F-62A1DC4FB149}"/>
+                <a16:creationId xmlns:a16="http://schemas.microsoft.com/office/drawing/2014/main" id="{5C2AAB43-1A3D-4508-93D5-054E38C4DB38}"/>
               </a:ext>
             </a:extLst>
           </p:cNvPr>
@@ -9723,7 +7843,7 @@
           <p:cNvPr id="8" name="">
             <a:extLst xmlns:a="http://schemas.openxmlformats.org/drawingml/2006/main">
               <a:ext uri="{FF2B5EF4-FFF2-40B4-BE49-F238E27FC236}">
-                <a16:creationId xmlns:a16="http://schemas.microsoft.com/office/drawing/2014/main" id="{E42DAE87-BE6F-4DCF-80B8-92C5264AF69C}"/>
+                <a16:creationId xmlns:a16="http://schemas.microsoft.com/office/drawing/2014/main" id="{0E7C6707-8A06-46BE-98CA-E86898EAFC29}"/>
               </a:ext>
             </a:extLst>
           </p:cNvPr>
@@ -9780,7 +7900,7 @@
           <p:cNvPr id="9" name="">
             <a:extLst xmlns:a="http://schemas.openxmlformats.org/drawingml/2006/main">
               <a:ext uri="{FF2B5EF4-FFF2-40B4-BE49-F238E27FC236}">
-                <a16:creationId xmlns:a16="http://schemas.microsoft.com/office/drawing/2014/main" id="{3472DEDA-D001-4DE5-A1F4-608B761E929D}"/>
+                <a16:creationId xmlns:a16="http://schemas.microsoft.com/office/drawing/2014/main" id="{86DDA879-105D-43E1-A55C-CE548EECF6AE}"/>
               </a:ext>
             </a:extLst>
           </p:cNvPr>
@@ -9837,7 +7957,7 @@
           <p:cNvPr id="10" name="">
             <a:extLst xmlns:a="http://schemas.openxmlformats.org/drawingml/2006/main">
               <a:ext uri="{FF2B5EF4-FFF2-40B4-BE49-F238E27FC236}">
-                <a16:creationId xmlns:a16="http://schemas.microsoft.com/office/drawing/2014/main" id="{C14C782F-8002-42EE-B1D6-77B28734938B}"/>
+                <a16:creationId xmlns:a16="http://schemas.microsoft.com/office/drawing/2014/main" id="{A95D906B-6A2B-40E5-A55B-F5C27EF40145}"/>
               </a:ext>
             </a:extLst>
           </p:cNvPr>
@@ -9894,7 +8014,7 @@
           <p:cNvPr id="11" name="">
             <a:extLst xmlns:a="http://schemas.openxmlformats.org/drawingml/2006/main">
               <a:ext uri="{FF2B5EF4-FFF2-40B4-BE49-F238E27FC236}">
-                <a16:creationId xmlns:a16="http://schemas.microsoft.com/office/drawing/2014/main" id="{B3C39D87-2A11-47F8-BC78-0B2D51A861FF}"/>
+                <a16:creationId xmlns:a16="http://schemas.microsoft.com/office/drawing/2014/main" id="{45CA1487-1524-4B2F-B9DC-F87C9E27AF40}"/>
               </a:ext>
             </a:extLst>
           </p:cNvPr>
@@ -9951,7 +8071,7 @@
           <p:cNvPr id="12" name="">
             <a:extLst xmlns:a="http://schemas.openxmlformats.org/drawingml/2006/main">
               <a:ext uri="{FF2B5EF4-FFF2-40B4-BE49-F238E27FC236}">
-                <a16:creationId xmlns:a16="http://schemas.microsoft.com/office/drawing/2014/main" id="{2F05AEAB-8C11-430A-BA23-0908BCD98F63}"/>
+                <a16:creationId xmlns:a16="http://schemas.microsoft.com/office/drawing/2014/main" id="{917FD8D8-F3D2-4238-B63E-E128ED4DF8CE}"/>
               </a:ext>
             </a:extLst>
           </p:cNvPr>
@@ -10006,7 +8126,7 @@
     </p:spTree>
     <p:extLst>
       <p:ext uri="{BB962C8B-B14F-4D97-AF65-F5344CB8AC3E}">
-        <p14:creationId xmlns:p14="http://schemas.microsoft.com/office/powerpoint/2010/main" val="1382776224"/>
+        <p14:creationId xmlns:p14="http://schemas.microsoft.com/office/powerpoint/2010/main" val="196590696"/>
       </p:ext>
     </p:extLst>
   </p:cSld>
@@ -10037,7 +8157,7 @@
           <p:cNvPr id="13" name="">
             <a:extLst xmlns:a="http://schemas.openxmlformats.org/drawingml/2006/main">
               <a:ext uri="{FF2B5EF4-FFF2-40B4-BE49-F238E27FC236}">
-                <a16:creationId xmlns:a16="http://schemas.microsoft.com/office/drawing/2014/main" id="{A4045B10-5428-4627-98E4-DBAF3B82188D}"/>
+                <a16:creationId xmlns:a16="http://schemas.microsoft.com/office/drawing/2014/main" id="{ADD6C68F-7E06-4976-96A7-33E9D6CC2A34}"/>
               </a:ext>
             </a:extLst>
           </p:cNvPr>
@@ -10067,7 +8187,7 @@
           <p:cNvPr id="2" name="">
             <a:extLst xmlns:a="http://schemas.openxmlformats.org/drawingml/2006/main">
               <a:ext uri="{FF2B5EF4-FFF2-40B4-BE49-F238E27FC236}">
-                <a16:creationId xmlns:a16="http://schemas.microsoft.com/office/drawing/2014/main" id="{031B4082-F141-481C-8627-34A6BE0F3F3F}"/>
+                <a16:creationId xmlns:a16="http://schemas.microsoft.com/office/drawing/2014/main" id="{7D148B50-0E00-4041-AC62-7A0AD787ADD5}"/>
               </a:ext>
             </a:extLst>
           </p:cNvPr>
@@ -10124,7 +8244,7 @@
           <p:cNvPr id="3" name="">
             <a:extLst xmlns:a="http://schemas.openxmlformats.org/drawingml/2006/main">
               <a:ext uri="{FF2B5EF4-FFF2-40B4-BE49-F238E27FC236}">
-                <a16:creationId xmlns:a16="http://schemas.microsoft.com/office/drawing/2014/main" id="{F7F3DD72-07E1-4AD3-8750-1F01D484A0BB}"/>
+                <a16:creationId xmlns:a16="http://schemas.microsoft.com/office/drawing/2014/main" id="{B1DA397E-8AD5-434E-88EA-2BF5A9C97962}"/>
               </a:ext>
             </a:extLst>
           </p:cNvPr>
@@ -10181,7 +8301,7 @@
           <p:cNvPr id="4" name="">
             <a:extLst xmlns:a="http://schemas.openxmlformats.org/drawingml/2006/main">
               <a:ext uri="{FF2B5EF4-FFF2-40B4-BE49-F238E27FC236}">
-                <a16:creationId xmlns:a16="http://schemas.microsoft.com/office/drawing/2014/main" id="{39097840-8485-4C87-8C8F-4AE055E763D0}"/>
+                <a16:creationId xmlns:a16="http://schemas.microsoft.com/office/drawing/2014/main" id="{247E5E5C-B0DB-4485-AB6D-952A44517782}"/>
               </a:ext>
             </a:extLst>
           </p:cNvPr>
@@ -10238,7 +8358,7 @@
           <p:cNvPr id="5" name="">
             <a:extLst xmlns:a="http://schemas.openxmlformats.org/drawingml/2006/main">
               <a:ext uri="{FF2B5EF4-FFF2-40B4-BE49-F238E27FC236}">
-                <a16:creationId xmlns:a16="http://schemas.microsoft.com/office/drawing/2014/main" id="{4B4685AD-ED5D-482D-98F1-54C8821FC713}"/>
+                <a16:creationId xmlns:a16="http://schemas.microsoft.com/office/drawing/2014/main" id="{0F8AA364-6C24-422F-A6D6-4662DB1D8F20}"/>
               </a:ext>
             </a:extLst>
           </p:cNvPr>
@@ -10295,7 +8415,7 @@
           <p:cNvPr id="6" name="">
             <a:extLst xmlns:a="http://schemas.openxmlformats.org/drawingml/2006/main">
               <a:ext uri="{FF2B5EF4-FFF2-40B4-BE49-F238E27FC236}">
-                <a16:creationId xmlns:a16="http://schemas.microsoft.com/office/drawing/2014/main" id="{6D745AC1-77C9-4B06-9C77-444C3342EC8F}"/>
+                <a16:creationId xmlns:a16="http://schemas.microsoft.com/office/drawing/2014/main" id="{E53B34CC-D73F-49B9-A50D-505E5FCD6B29}"/>
               </a:ext>
             </a:extLst>
           </p:cNvPr>
@@ -10352,7 +8472,7 @@
           <p:cNvPr id="7" name="">
             <a:extLst xmlns:a="http://schemas.openxmlformats.org/drawingml/2006/main">
               <a:ext uri="{FF2B5EF4-FFF2-40B4-BE49-F238E27FC236}">
-                <a16:creationId xmlns:a16="http://schemas.microsoft.com/office/drawing/2014/main" id="{499B127A-BAB6-40AE-A6D1-80BD5BFA7CB4}"/>
+                <a16:creationId xmlns:a16="http://schemas.microsoft.com/office/drawing/2014/main" id="{C077C841-7908-466D-9B03-16F4CF1559F7}"/>
               </a:ext>
             </a:extLst>
           </p:cNvPr>
@@ -10409,7 +8529,7 @@
           <p:cNvPr id="8" name="">
             <a:extLst xmlns:a="http://schemas.openxmlformats.org/drawingml/2006/main">
               <a:ext uri="{FF2B5EF4-FFF2-40B4-BE49-F238E27FC236}">
-                <a16:creationId xmlns:a16="http://schemas.microsoft.com/office/drawing/2014/main" id="{F23A9FAB-A272-4A09-933C-8D46C91C66B3}"/>
+                <a16:creationId xmlns:a16="http://schemas.microsoft.com/office/drawing/2014/main" id="{B39589FF-F69F-4A58-8B63-F3773E4F1757}"/>
               </a:ext>
             </a:extLst>
           </p:cNvPr>
@@ -10466,7 +8586,7 @@
           <p:cNvPr id="9" name="">
             <a:extLst xmlns:a="http://schemas.openxmlformats.org/drawingml/2006/main">
               <a:ext uri="{FF2B5EF4-FFF2-40B4-BE49-F238E27FC236}">
-                <a16:creationId xmlns:a16="http://schemas.microsoft.com/office/drawing/2014/main" id="{00E6A383-CEE3-4FEC-A629-B3723E2F198A}"/>
+                <a16:creationId xmlns:a16="http://schemas.microsoft.com/office/drawing/2014/main" id="{FCD1450B-FA66-4BEE-B246-9A26CF2EE17D}"/>
               </a:ext>
             </a:extLst>
           </p:cNvPr>
@@ -10523,7 +8643,7 @@
           <p:cNvPr id="10" name="">
             <a:extLst xmlns:a="http://schemas.openxmlformats.org/drawingml/2006/main">
               <a:ext uri="{FF2B5EF4-FFF2-40B4-BE49-F238E27FC236}">
-                <a16:creationId xmlns:a16="http://schemas.microsoft.com/office/drawing/2014/main" id="{80BE5C48-1A1D-402B-B128-796F564A9990}"/>
+                <a16:creationId xmlns:a16="http://schemas.microsoft.com/office/drawing/2014/main" id="{20A41A59-ABDB-4904-8D72-03F24CD38F26}"/>
               </a:ext>
             </a:extLst>
           </p:cNvPr>
@@ -10580,7 +8700,7 @@
           <p:cNvPr id="11" name="">
             <a:extLst xmlns:a="http://schemas.openxmlformats.org/drawingml/2006/main">
               <a:ext uri="{FF2B5EF4-FFF2-40B4-BE49-F238E27FC236}">
-                <a16:creationId xmlns:a16="http://schemas.microsoft.com/office/drawing/2014/main" id="{D530076F-97A5-473F-A242-B9E0DD6C687F}"/>
+                <a16:creationId xmlns:a16="http://schemas.microsoft.com/office/drawing/2014/main" id="{634160E8-FD48-45ED-9A7C-B6109513E984}"/>
               </a:ext>
             </a:extLst>
           </p:cNvPr>
@@ -10637,7 +8757,7 @@
           <p:cNvPr id="12" name="">
             <a:extLst xmlns:a="http://schemas.openxmlformats.org/drawingml/2006/main">
               <a:ext uri="{FF2B5EF4-FFF2-40B4-BE49-F238E27FC236}">
-                <a16:creationId xmlns:a16="http://schemas.microsoft.com/office/drawing/2014/main" id="{89AD376C-0EBD-4A98-9445-A6796B051694}"/>
+                <a16:creationId xmlns:a16="http://schemas.microsoft.com/office/drawing/2014/main" id="{9A385513-E2EC-4A78-B315-C4ADD2E046FF}"/>
               </a:ext>
             </a:extLst>
           </p:cNvPr>
@@ -10692,7 +8812,7 @@
     </p:spTree>
     <p:extLst>
       <p:ext uri="{BB962C8B-B14F-4D97-AF65-F5344CB8AC3E}">
-        <p14:creationId xmlns:p14="http://schemas.microsoft.com/office/powerpoint/2010/main" val="1591134933"/>
+        <p14:creationId xmlns:p14="http://schemas.microsoft.com/office/powerpoint/2010/main" val="1908184149"/>
       </p:ext>
     </p:extLst>
   </p:cSld>
@@ -10723,7 +8843,7 @@
           <p:cNvPr id="13" name="">
             <a:extLst xmlns:a="http://schemas.openxmlformats.org/drawingml/2006/main">
               <a:ext uri="{FF2B5EF4-FFF2-40B4-BE49-F238E27FC236}">
-                <a16:creationId xmlns:a16="http://schemas.microsoft.com/office/drawing/2014/main" id="{735240C3-F137-434F-8C4B-FA0EF05B4DF8}"/>
+                <a16:creationId xmlns:a16="http://schemas.microsoft.com/office/drawing/2014/main" id="{2B72B14F-757D-4AC3-9482-1CA67E84ED02}"/>
               </a:ext>
             </a:extLst>
           </p:cNvPr>
@@ -10753,7 +8873,7 @@
           <p:cNvPr id="2" name="">
             <a:extLst xmlns:a="http://schemas.openxmlformats.org/drawingml/2006/main">
               <a:ext uri="{FF2B5EF4-FFF2-40B4-BE49-F238E27FC236}">
-                <a16:creationId xmlns:a16="http://schemas.microsoft.com/office/drawing/2014/main" id="{29D2227A-7B8D-44FB-9FB6-3E487ABF8469}"/>
+                <a16:creationId xmlns:a16="http://schemas.microsoft.com/office/drawing/2014/main" id="{8E8ACB2D-C38C-47DD-A0BF-9BA7DA2141A0}"/>
               </a:ext>
             </a:extLst>
           </p:cNvPr>
@@ -10810,7 +8930,7 @@
           <p:cNvPr id="3" name="">
             <a:extLst xmlns:a="http://schemas.openxmlformats.org/drawingml/2006/main">
               <a:ext uri="{FF2B5EF4-FFF2-40B4-BE49-F238E27FC236}">
-                <a16:creationId xmlns:a16="http://schemas.microsoft.com/office/drawing/2014/main" id="{1B9AFAA2-D5F4-46CF-A933-762FBA67622F}"/>
+                <a16:creationId xmlns:a16="http://schemas.microsoft.com/office/drawing/2014/main" id="{067CE6FE-3673-4435-A251-6B922C2FAE0F}"/>
               </a:ext>
             </a:extLst>
           </p:cNvPr>
@@ -10867,7 +8987,7 @@
           <p:cNvPr id="4" name="">
             <a:extLst xmlns:a="http://schemas.openxmlformats.org/drawingml/2006/main">
               <a:ext uri="{FF2B5EF4-FFF2-40B4-BE49-F238E27FC236}">
-                <a16:creationId xmlns:a16="http://schemas.microsoft.com/office/drawing/2014/main" id="{76ACFD76-FC10-4591-8EB5-A344010A00FB}"/>
+                <a16:creationId xmlns:a16="http://schemas.microsoft.com/office/drawing/2014/main" id="{EE7CE9CD-FF27-446E-9B60-72B8C3EDF6A2}"/>
               </a:ext>
             </a:extLst>
           </p:cNvPr>
@@ -10924,7 +9044,7 @@
           <p:cNvPr id="5" name="">
             <a:extLst xmlns:a="http://schemas.openxmlformats.org/drawingml/2006/main">
               <a:ext uri="{FF2B5EF4-FFF2-40B4-BE49-F238E27FC236}">
-                <a16:creationId xmlns:a16="http://schemas.microsoft.com/office/drawing/2014/main" id="{8841C834-70EA-4E1E-A0D7-14F30B9D47C5}"/>
+                <a16:creationId xmlns:a16="http://schemas.microsoft.com/office/drawing/2014/main" id="{D545F690-E919-46B5-8C41-674E4E46850C}"/>
               </a:ext>
             </a:extLst>
           </p:cNvPr>
@@ -10981,7 +9101,7 @@
           <p:cNvPr id="6" name="">
             <a:extLst xmlns:a="http://schemas.openxmlformats.org/drawingml/2006/main">
               <a:ext uri="{FF2B5EF4-FFF2-40B4-BE49-F238E27FC236}">
-                <a16:creationId xmlns:a16="http://schemas.microsoft.com/office/drawing/2014/main" id="{D060EC16-2FF7-413D-AC65-9E968359CDD8}"/>
+                <a16:creationId xmlns:a16="http://schemas.microsoft.com/office/drawing/2014/main" id="{DEE5F6BA-CF59-40F2-81C9-57347D57B71B}"/>
               </a:ext>
             </a:extLst>
           </p:cNvPr>
@@ -11038,7 +9158,7 @@
           <p:cNvPr id="7" name="">
             <a:extLst xmlns:a="http://schemas.openxmlformats.org/drawingml/2006/main">
               <a:ext uri="{FF2B5EF4-FFF2-40B4-BE49-F238E27FC236}">
-                <a16:creationId xmlns:a16="http://schemas.microsoft.com/office/drawing/2014/main" id="{E867AD2C-A558-4CF3-8F6E-91152E13C065}"/>
+                <a16:creationId xmlns:a16="http://schemas.microsoft.com/office/drawing/2014/main" id="{D2924AF8-AA2F-4204-BC8A-6B536980DAC3}"/>
               </a:ext>
             </a:extLst>
           </p:cNvPr>
@@ -11095,7 +9215,7 @@
           <p:cNvPr id="8" name="">
             <a:extLst xmlns:a="http://schemas.openxmlformats.org/drawingml/2006/main">
               <a:ext uri="{FF2B5EF4-FFF2-40B4-BE49-F238E27FC236}">
-                <a16:creationId xmlns:a16="http://schemas.microsoft.com/office/drawing/2014/main" id="{132F0877-DA37-41DF-8A58-2BF932A1B3D4}"/>
+                <a16:creationId xmlns:a16="http://schemas.microsoft.com/office/drawing/2014/main" id="{A8876A77-4C65-4202-A210-37B206B919FA}"/>
               </a:ext>
             </a:extLst>
           </p:cNvPr>
@@ -11152,7 +9272,7 @@
           <p:cNvPr id="9" name="">
             <a:extLst xmlns:a="http://schemas.openxmlformats.org/drawingml/2006/main">
               <a:ext uri="{FF2B5EF4-FFF2-40B4-BE49-F238E27FC236}">
-                <a16:creationId xmlns:a16="http://schemas.microsoft.com/office/drawing/2014/main" id="{7358E982-05D0-4735-8BC1-3DEC7C89B58D}"/>
+                <a16:creationId xmlns:a16="http://schemas.microsoft.com/office/drawing/2014/main" id="{81A2B07E-3772-434B-B507-31C180731041}"/>
               </a:ext>
             </a:extLst>
           </p:cNvPr>
@@ -11209,7 +9329,7 @@
           <p:cNvPr id="10" name="">
             <a:extLst xmlns:a="http://schemas.openxmlformats.org/drawingml/2006/main">
               <a:ext uri="{FF2B5EF4-FFF2-40B4-BE49-F238E27FC236}">
-                <a16:creationId xmlns:a16="http://schemas.microsoft.com/office/drawing/2014/main" id="{E75C3AF6-59E8-4955-9485-F6EBDD71C5F4}"/>
+                <a16:creationId xmlns:a16="http://schemas.microsoft.com/office/drawing/2014/main" id="{F87667AD-75AE-40ED-A82A-E4E1C49D8FA4}"/>
               </a:ext>
             </a:extLst>
           </p:cNvPr>
@@ -11266,7 +9386,7 @@
           <p:cNvPr id="11" name="">
             <a:extLst xmlns:a="http://schemas.openxmlformats.org/drawingml/2006/main">
               <a:ext uri="{FF2B5EF4-FFF2-40B4-BE49-F238E27FC236}">
-                <a16:creationId xmlns:a16="http://schemas.microsoft.com/office/drawing/2014/main" id="{DC48D97B-DCFA-4933-84F8-3159421B2E94}"/>
+                <a16:creationId xmlns:a16="http://schemas.microsoft.com/office/drawing/2014/main" id="{FEC43C3A-BC8D-46AA-A3F3-81B125C025F1}"/>
               </a:ext>
             </a:extLst>
           </p:cNvPr>
@@ -11323,7 +9443,7 @@
           <p:cNvPr id="12" name="">
             <a:extLst xmlns:a="http://schemas.openxmlformats.org/drawingml/2006/main">
               <a:ext uri="{FF2B5EF4-FFF2-40B4-BE49-F238E27FC236}">
-                <a16:creationId xmlns:a16="http://schemas.microsoft.com/office/drawing/2014/main" id="{5FDAD692-7A5B-460A-890A-04B8FC927EA6}"/>
+                <a16:creationId xmlns:a16="http://schemas.microsoft.com/office/drawing/2014/main" id="{D08B3F2F-8EB7-48C2-92C6-E585AF756166}"/>
               </a:ext>
             </a:extLst>
           </p:cNvPr>
@@ -11378,7 +9498,7 @@
     </p:spTree>
     <p:extLst>
       <p:ext uri="{BB962C8B-B14F-4D97-AF65-F5344CB8AC3E}">
-        <p14:creationId xmlns:p14="http://schemas.microsoft.com/office/powerpoint/2010/main" val="585258076"/>
+        <p14:creationId xmlns:p14="http://schemas.microsoft.com/office/powerpoint/2010/main" val="1166232446"/>
       </p:ext>
     </p:extLst>
   </p:cSld>
@@ -11409,7 +9529,7 @@
           <p:cNvPr id="13" name="">
             <a:extLst xmlns:a="http://schemas.openxmlformats.org/drawingml/2006/main">
               <a:ext uri="{FF2B5EF4-FFF2-40B4-BE49-F238E27FC236}">
-                <a16:creationId xmlns:a16="http://schemas.microsoft.com/office/drawing/2014/main" id="{51A1D9DE-6964-4941-B58B-8C53D41C321F}"/>
+                <a16:creationId xmlns:a16="http://schemas.microsoft.com/office/drawing/2014/main" id="{1417A180-4E30-4362-B8DA-A5AC5279F0E4}"/>
               </a:ext>
             </a:extLst>
           </p:cNvPr>
@@ -11439,7 +9559,7 @@
           <p:cNvPr id="2" name="">
             <a:extLst xmlns:a="http://schemas.openxmlformats.org/drawingml/2006/main">
               <a:ext uri="{FF2B5EF4-FFF2-40B4-BE49-F238E27FC236}">
-                <a16:creationId xmlns:a16="http://schemas.microsoft.com/office/drawing/2014/main" id="{B607A2AC-FFDA-4482-83B5-3F31EE6069C2}"/>
+                <a16:creationId xmlns:a16="http://schemas.microsoft.com/office/drawing/2014/main" id="{714A2B1B-E09E-46A1-A0CD-1314037E275A}"/>
               </a:ext>
             </a:extLst>
           </p:cNvPr>
@@ -11496,7 +9616,7 @@
           <p:cNvPr id="3" name="">
             <a:extLst xmlns:a="http://schemas.openxmlformats.org/drawingml/2006/main">
               <a:ext uri="{FF2B5EF4-FFF2-40B4-BE49-F238E27FC236}">
-                <a16:creationId xmlns:a16="http://schemas.microsoft.com/office/drawing/2014/main" id="{0C9CF1EB-B1AB-4CDE-8AC9-1E1459D6D0B2}"/>
+                <a16:creationId xmlns:a16="http://schemas.microsoft.com/office/drawing/2014/main" id="{B2BE429A-E61C-4D3B-909B-2ECB12EE0690}"/>
               </a:ext>
             </a:extLst>
           </p:cNvPr>
@@ -11553,7 +9673,7 @@
           <p:cNvPr id="4" name="">
             <a:extLst xmlns:a="http://schemas.openxmlformats.org/drawingml/2006/main">
               <a:ext uri="{FF2B5EF4-FFF2-40B4-BE49-F238E27FC236}">
-                <a16:creationId xmlns:a16="http://schemas.microsoft.com/office/drawing/2014/main" id="{51980447-3C80-4645-8AF7-063235F4C987}"/>
+                <a16:creationId xmlns:a16="http://schemas.microsoft.com/office/drawing/2014/main" id="{18E68DDE-2606-4BAE-84C4-6FFC144CCC0C}"/>
               </a:ext>
             </a:extLst>
           </p:cNvPr>
@@ -11610,7 +9730,7 @@
           <p:cNvPr id="5" name="">
             <a:extLst xmlns:a="http://schemas.openxmlformats.org/drawingml/2006/main">
               <a:ext uri="{FF2B5EF4-FFF2-40B4-BE49-F238E27FC236}">
-                <a16:creationId xmlns:a16="http://schemas.microsoft.com/office/drawing/2014/main" id="{79F4F0E1-A6B5-42F5-98B5-9128BC4967FD}"/>
+                <a16:creationId xmlns:a16="http://schemas.microsoft.com/office/drawing/2014/main" id="{BFB74CAE-17C7-42B7-893D-B752E01436BB}"/>
               </a:ext>
             </a:extLst>
           </p:cNvPr>
@@ -11667,7 +9787,7 @@
           <p:cNvPr id="6" name="">
             <a:extLst xmlns:a="http://schemas.openxmlformats.org/drawingml/2006/main">
               <a:ext uri="{FF2B5EF4-FFF2-40B4-BE49-F238E27FC236}">
-                <a16:creationId xmlns:a16="http://schemas.microsoft.com/office/drawing/2014/main" id="{88731A46-A113-430D-A6CA-506E83F1A8DE}"/>
+                <a16:creationId xmlns:a16="http://schemas.microsoft.com/office/drawing/2014/main" id="{D37D89C7-E433-41D2-BC53-2D83EB1D3644}"/>
               </a:ext>
             </a:extLst>
           </p:cNvPr>
@@ -11724,7 +9844,7 @@
           <p:cNvPr id="7" name="">
             <a:extLst xmlns:a="http://schemas.openxmlformats.org/drawingml/2006/main">
               <a:ext uri="{FF2B5EF4-FFF2-40B4-BE49-F238E27FC236}">
-                <a16:creationId xmlns:a16="http://schemas.microsoft.com/office/drawing/2014/main" id="{E8E498F0-BAEB-4DED-B724-B0757F5911C7}"/>
+                <a16:creationId xmlns:a16="http://schemas.microsoft.com/office/drawing/2014/main" id="{20D1B4B2-36C3-4E63-BD32-312BD6B5D3BB}"/>
               </a:ext>
             </a:extLst>
           </p:cNvPr>
@@ -11781,7 +9901,7 @@
           <p:cNvPr id="8" name="">
             <a:extLst xmlns:a="http://schemas.openxmlformats.org/drawingml/2006/main">
               <a:ext uri="{FF2B5EF4-FFF2-40B4-BE49-F238E27FC236}">
-                <a16:creationId xmlns:a16="http://schemas.microsoft.com/office/drawing/2014/main" id="{BD4BC03D-49A7-4678-98B5-8C0A2ED8875E}"/>
+                <a16:creationId xmlns:a16="http://schemas.microsoft.com/office/drawing/2014/main" id="{F04B44AF-0E38-475D-B15C-5844AE19159C}"/>
               </a:ext>
             </a:extLst>
           </p:cNvPr>
@@ -11838,7 +9958,7 @@
           <p:cNvPr id="9" name="">
             <a:extLst xmlns:a="http://schemas.openxmlformats.org/drawingml/2006/main">
               <a:ext uri="{FF2B5EF4-FFF2-40B4-BE49-F238E27FC236}">
-                <a16:creationId xmlns:a16="http://schemas.microsoft.com/office/drawing/2014/main" id="{4351C14D-C579-4B0C-A66A-C9428F46B1AC}"/>
+                <a16:creationId xmlns:a16="http://schemas.microsoft.com/office/drawing/2014/main" id="{990969BE-8B2B-4A08-89FE-B97A6077E468}"/>
               </a:ext>
             </a:extLst>
           </p:cNvPr>
@@ -11895,7 +10015,7 @@
           <p:cNvPr id="10" name="">
             <a:extLst xmlns:a="http://schemas.openxmlformats.org/drawingml/2006/main">
               <a:ext uri="{FF2B5EF4-FFF2-40B4-BE49-F238E27FC236}">
-                <a16:creationId xmlns:a16="http://schemas.microsoft.com/office/drawing/2014/main" id="{14BDA9F9-6629-467D-BB52-113845DA80DD}"/>
+                <a16:creationId xmlns:a16="http://schemas.microsoft.com/office/drawing/2014/main" id="{1C973D7A-11E5-4BFE-9914-840A49E74B28}"/>
               </a:ext>
             </a:extLst>
           </p:cNvPr>
@@ -11952,7 +10072,7 @@
           <p:cNvPr id="11" name="">
             <a:extLst xmlns:a="http://schemas.openxmlformats.org/drawingml/2006/main">
               <a:ext uri="{FF2B5EF4-FFF2-40B4-BE49-F238E27FC236}">
-                <a16:creationId xmlns:a16="http://schemas.microsoft.com/office/drawing/2014/main" id="{2B1B05E2-ECEF-46AA-A09C-E5C5C04E9708}"/>
+                <a16:creationId xmlns:a16="http://schemas.microsoft.com/office/drawing/2014/main" id="{07A61095-1871-4E67-87E8-760B5AA184B9}"/>
               </a:ext>
             </a:extLst>
           </p:cNvPr>
@@ -12009,7 +10129,7 @@
           <p:cNvPr id="12" name="">
             <a:extLst xmlns:a="http://schemas.openxmlformats.org/drawingml/2006/main">
               <a:ext uri="{FF2B5EF4-FFF2-40B4-BE49-F238E27FC236}">
-                <a16:creationId xmlns:a16="http://schemas.microsoft.com/office/drawing/2014/main" id="{1391D7DD-A735-4416-9D78-E6FEE693C0A6}"/>
+                <a16:creationId xmlns:a16="http://schemas.microsoft.com/office/drawing/2014/main" id="{AEA88640-7171-4059-B7DD-4295EE658B9C}"/>
               </a:ext>
             </a:extLst>
           </p:cNvPr>
@@ -12064,7 +10184,7 @@
     </p:spTree>
     <p:extLst>
       <p:ext uri="{BB962C8B-B14F-4D97-AF65-F5344CB8AC3E}">
-        <p14:creationId xmlns:p14="http://schemas.microsoft.com/office/powerpoint/2010/main" val="1778926891"/>
+        <p14:creationId xmlns:p14="http://schemas.microsoft.com/office/powerpoint/2010/main" val="1918413195"/>
       </p:ext>
     </p:extLst>
   </p:cSld>
@@ -12095,7 +10215,7 @@
           <p:cNvPr id="13" name="">
             <a:extLst xmlns:a="http://schemas.openxmlformats.org/drawingml/2006/main">
               <a:ext uri="{FF2B5EF4-FFF2-40B4-BE49-F238E27FC236}">
-                <a16:creationId xmlns:a16="http://schemas.microsoft.com/office/drawing/2014/main" id="{CBFB7217-E7A9-4CED-902F-861A9C357C43}"/>
+                <a16:creationId xmlns:a16="http://schemas.microsoft.com/office/drawing/2014/main" id="{EE1887F4-91A4-4ACD-87CB-AEE9205CC5B7}"/>
               </a:ext>
             </a:extLst>
           </p:cNvPr>
@@ -12125,7 +10245,7 @@
           <p:cNvPr id="2" name="">
             <a:extLst xmlns:a="http://schemas.openxmlformats.org/drawingml/2006/main">
               <a:ext uri="{FF2B5EF4-FFF2-40B4-BE49-F238E27FC236}">
-                <a16:creationId xmlns:a16="http://schemas.microsoft.com/office/drawing/2014/main" id="{42DB972E-8C7D-44C8-A6A6-58CFE20D07B1}"/>
+                <a16:creationId xmlns:a16="http://schemas.microsoft.com/office/drawing/2014/main" id="{636EB171-95B4-41F6-80D6-BBD69AE3166C}"/>
               </a:ext>
             </a:extLst>
           </p:cNvPr>
@@ -12182,7 +10302,7 @@
           <p:cNvPr id="3" name="">
             <a:extLst xmlns:a="http://schemas.openxmlformats.org/drawingml/2006/main">
               <a:ext uri="{FF2B5EF4-FFF2-40B4-BE49-F238E27FC236}">
-                <a16:creationId xmlns:a16="http://schemas.microsoft.com/office/drawing/2014/main" id="{242FCC8F-3F0A-42B2-8B76-6D28FE3B7D41}"/>
+                <a16:creationId xmlns:a16="http://schemas.microsoft.com/office/drawing/2014/main" id="{9E72F449-FC56-4444-B93F-3E57FE90F4BF}"/>
               </a:ext>
             </a:extLst>
           </p:cNvPr>
@@ -12239,7 +10359,7 @@
           <p:cNvPr id="4" name="">
             <a:extLst xmlns:a="http://schemas.openxmlformats.org/drawingml/2006/main">
               <a:ext uri="{FF2B5EF4-FFF2-40B4-BE49-F238E27FC236}">
-                <a16:creationId xmlns:a16="http://schemas.microsoft.com/office/drawing/2014/main" id="{9DB1F214-A4A1-4E1A-8F99-87D8A9671816}"/>
+                <a16:creationId xmlns:a16="http://schemas.microsoft.com/office/drawing/2014/main" id="{19AB9621-D234-4E57-BEE9-8FCADFC9598E}"/>
               </a:ext>
             </a:extLst>
           </p:cNvPr>
@@ -12296,7 +10416,7 @@
           <p:cNvPr id="5" name="">
             <a:extLst xmlns:a="http://schemas.openxmlformats.org/drawingml/2006/main">
               <a:ext uri="{FF2B5EF4-FFF2-40B4-BE49-F238E27FC236}">
-                <a16:creationId xmlns:a16="http://schemas.microsoft.com/office/drawing/2014/main" id="{87E75F24-B380-495A-BAD2-897D3855EA4E}"/>
+                <a16:creationId xmlns:a16="http://schemas.microsoft.com/office/drawing/2014/main" id="{DF8E9793-A56E-4BE3-B005-88D6E0F5E2A3}"/>
               </a:ext>
             </a:extLst>
           </p:cNvPr>
@@ -12353,7 +10473,7 @@
           <p:cNvPr id="6" name="">
             <a:extLst xmlns:a="http://schemas.openxmlformats.org/drawingml/2006/main">
               <a:ext uri="{FF2B5EF4-FFF2-40B4-BE49-F238E27FC236}">
-                <a16:creationId xmlns:a16="http://schemas.microsoft.com/office/drawing/2014/main" id="{7AA4AD5B-877B-498E-B6A3-0D985F89ABD0}"/>
+                <a16:creationId xmlns:a16="http://schemas.microsoft.com/office/drawing/2014/main" id="{A01506C2-03B0-4B28-BB1C-A1F39FF97FB4}"/>
               </a:ext>
             </a:extLst>
           </p:cNvPr>
@@ -12410,7 +10530,7 @@
           <p:cNvPr id="7" name="">
             <a:extLst xmlns:a="http://schemas.openxmlformats.org/drawingml/2006/main">
               <a:ext uri="{FF2B5EF4-FFF2-40B4-BE49-F238E27FC236}">
-                <a16:creationId xmlns:a16="http://schemas.microsoft.com/office/drawing/2014/main" id="{8CF930D4-D3D7-49C9-8F8A-FEABA77A8C3F}"/>
+                <a16:creationId xmlns:a16="http://schemas.microsoft.com/office/drawing/2014/main" id="{95A498D2-F1C5-442C-A9AA-4E243F67A384}"/>
               </a:ext>
             </a:extLst>
           </p:cNvPr>
@@ -12467,7 +10587,7 @@
           <p:cNvPr id="8" name="">
             <a:extLst xmlns:a="http://schemas.openxmlformats.org/drawingml/2006/main">
               <a:ext uri="{FF2B5EF4-FFF2-40B4-BE49-F238E27FC236}">
-                <a16:creationId xmlns:a16="http://schemas.microsoft.com/office/drawing/2014/main" id="{09C21936-2DB5-4E94-8698-132854A6C222}"/>
+                <a16:creationId xmlns:a16="http://schemas.microsoft.com/office/drawing/2014/main" id="{2C22A868-BBE0-4885-A680-B13499072DAE}"/>
               </a:ext>
             </a:extLst>
           </p:cNvPr>
@@ -12524,7 +10644,7 @@
           <p:cNvPr id="9" name="">
             <a:extLst xmlns:a="http://schemas.openxmlformats.org/drawingml/2006/main">
               <a:ext uri="{FF2B5EF4-FFF2-40B4-BE49-F238E27FC236}">
-                <a16:creationId xmlns:a16="http://schemas.microsoft.com/office/drawing/2014/main" id="{7073A615-D334-4128-B0B3-65E329790CB2}"/>
+                <a16:creationId xmlns:a16="http://schemas.microsoft.com/office/drawing/2014/main" id="{EEE96D4B-0A4B-4DE2-8958-ABE1D0DA583C}"/>
               </a:ext>
             </a:extLst>
           </p:cNvPr>
@@ -12581,7 +10701,7 @@
           <p:cNvPr id="10" name="">
             <a:extLst xmlns:a="http://schemas.openxmlformats.org/drawingml/2006/main">
               <a:ext uri="{FF2B5EF4-FFF2-40B4-BE49-F238E27FC236}">
-                <a16:creationId xmlns:a16="http://schemas.microsoft.com/office/drawing/2014/main" id="{F88CEA78-FF32-412D-A448-B3C6A5FE977D}"/>
+                <a16:creationId xmlns:a16="http://schemas.microsoft.com/office/drawing/2014/main" id="{3C484BFD-AD2E-4B73-8D85-B36F2D246F49}"/>
               </a:ext>
             </a:extLst>
           </p:cNvPr>
@@ -12638,7 +10758,7 @@
           <p:cNvPr id="11" name="">
             <a:extLst xmlns:a="http://schemas.openxmlformats.org/drawingml/2006/main">
               <a:ext uri="{FF2B5EF4-FFF2-40B4-BE49-F238E27FC236}">
-                <a16:creationId xmlns:a16="http://schemas.microsoft.com/office/drawing/2014/main" id="{F1CE541A-61A9-4B54-A53E-4C0CB406C378}"/>
+                <a16:creationId xmlns:a16="http://schemas.microsoft.com/office/drawing/2014/main" id="{9B6AB8E8-8380-4082-905A-15426F785E16}"/>
               </a:ext>
             </a:extLst>
           </p:cNvPr>
@@ -12695,7 +10815,7 @@
           <p:cNvPr id="12" name="">
             <a:extLst xmlns:a="http://schemas.openxmlformats.org/drawingml/2006/main">
               <a:ext uri="{FF2B5EF4-FFF2-40B4-BE49-F238E27FC236}">
-                <a16:creationId xmlns:a16="http://schemas.microsoft.com/office/drawing/2014/main" id="{63AD7DD0-2BD4-4875-ABB1-6A3B40C59A82}"/>
+                <a16:creationId xmlns:a16="http://schemas.microsoft.com/office/drawing/2014/main" id="{738F2856-CD61-45BC-BA3C-28CF84042548}"/>
               </a:ext>
             </a:extLst>
           </p:cNvPr>
@@ -12750,7 +10870,7 @@
     </p:spTree>
     <p:extLst>
       <p:ext uri="{BB962C8B-B14F-4D97-AF65-F5344CB8AC3E}">
-        <p14:creationId xmlns:p14="http://schemas.microsoft.com/office/powerpoint/2010/main" val="352811707"/>
+        <p14:creationId xmlns:p14="http://schemas.microsoft.com/office/powerpoint/2010/main" val="19947117"/>
       </p:ext>
     </p:extLst>
   </p:cSld>
@@ -12781,7 +10901,7 @@
           <p:cNvPr id="13" name="">
             <a:extLst xmlns:a="http://schemas.openxmlformats.org/drawingml/2006/main">
               <a:ext uri="{FF2B5EF4-FFF2-40B4-BE49-F238E27FC236}">
-                <a16:creationId xmlns:a16="http://schemas.microsoft.com/office/drawing/2014/main" id="{35BD1814-06B1-4119-ABB1-A094F31075D6}"/>
+                <a16:creationId xmlns:a16="http://schemas.microsoft.com/office/drawing/2014/main" id="{CB611F22-22DE-4493-9576-17E73DD7E0E9}"/>
               </a:ext>
             </a:extLst>
           </p:cNvPr>
@@ -12811,7 +10931,7 @@
           <p:cNvPr id="2" name="">
             <a:extLst xmlns:a="http://schemas.openxmlformats.org/drawingml/2006/main">
               <a:ext uri="{FF2B5EF4-FFF2-40B4-BE49-F238E27FC236}">
-                <a16:creationId xmlns:a16="http://schemas.microsoft.com/office/drawing/2014/main" id="{F5D13C17-EC3C-45E1-B16C-85E23BC9F04D}"/>
+                <a16:creationId xmlns:a16="http://schemas.microsoft.com/office/drawing/2014/main" id="{8970ED2B-55FB-4670-99BD-3817F5507BB3}"/>
               </a:ext>
             </a:extLst>
           </p:cNvPr>
@@ -12868,7 +10988,7 @@
           <p:cNvPr id="3" name="">
             <a:extLst xmlns:a="http://schemas.openxmlformats.org/drawingml/2006/main">
               <a:ext uri="{FF2B5EF4-FFF2-40B4-BE49-F238E27FC236}">
-                <a16:creationId xmlns:a16="http://schemas.microsoft.com/office/drawing/2014/main" id="{BE11C5F9-1B1E-4DF1-9964-ACE29F314DFB}"/>
+                <a16:creationId xmlns:a16="http://schemas.microsoft.com/office/drawing/2014/main" id="{E7568DFC-D337-4FDD-8EBF-06461C37DF98}"/>
               </a:ext>
             </a:extLst>
           </p:cNvPr>
@@ -12925,7 +11045,7 @@
           <p:cNvPr id="4" name="">
             <a:extLst xmlns:a="http://schemas.openxmlformats.org/drawingml/2006/main">
               <a:ext uri="{FF2B5EF4-FFF2-40B4-BE49-F238E27FC236}">
-                <a16:creationId xmlns:a16="http://schemas.microsoft.com/office/drawing/2014/main" id="{E210DB64-D416-497E-933F-3C0DC82244F3}"/>
+                <a16:creationId xmlns:a16="http://schemas.microsoft.com/office/drawing/2014/main" id="{0262B333-819F-4E22-88A9-E8BB11B39B14}"/>
               </a:ext>
             </a:extLst>
           </p:cNvPr>
@@ -12982,7 +11102,7 @@
           <p:cNvPr id="5" name="">
             <a:extLst xmlns:a="http://schemas.openxmlformats.org/drawingml/2006/main">
               <a:ext uri="{FF2B5EF4-FFF2-40B4-BE49-F238E27FC236}">
-                <a16:creationId xmlns:a16="http://schemas.microsoft.com/office/drawing/2014/main" id="{1E9786A2-FF27-4190-81E6-19E4CC23A74D}"/>
+                <a16:creationId xmlns:a16="http://schemas.microsoft.com/office/drawing/2014/main" id="{8E5FADCF-D079-498F-B9F3-9A502BC00D88}"/>
               </a:ext>
             </a:extLst>
           </p:cNvPr>
@@ -13039,7 +11159,7 @@
           <p:cNvPr id="6" name="">
             <a:extLst xmlns:a="http://schemas.openxmlformats.org/drawingml/2006/main">
               <a:ext uri="{FF2B5EF4-FFF2-40B4-BE49-F238E27FC236}">
-                <a16:creationId xmlns:a16="http://schemas.microsoft.com/office/drawing/2014/main" id="{ADDF5571-9EE5-4508-8DEC-06EB565A8419}"/>
+                <a16:creationId xmlns:a16="http://schemas.microsoft.com/office/drawing/2014/main" id="{35CF3824-7910-46D6-B4E9-B26B0E5B03F0}"/>
               </a:ext>
             </a:extLst>
           </p:cNvPr>
@@ -13096,7 +11216,7 @@
           <p:cNvPr id="7" name="">
             <a:extLst xmlns:a="http://schemas.openxmlformats.org/drawingml/2006/main">
               <a:ext uri="{FF2B5EF4-FFF2-40B4-BE49-F238E27FC236}">
-                <a16:creationId xmlns:a16="http://schemas.microsoft.com/office/drawing/2014/main" id="{8B0E8697-8232-4A1C-A962-004A8A06A973}"/>
+                <a16:creationId xmlns:a16="http://schemas.microsoft.com/office/drawing/2014/main" id="{5708E45A-A51F-46A1-B33F-4DC31048B700}"/>
               </a:ext>
             </a:extLst>
           </p:cNvPr>
@@ -13153,7 +11273,7 @@
           <p:cNvPr id="8" name="">
             <a:extLst xmlns:a="http://schemas.openxmlformats.org/drawingml/2006/main">
               <a:ext uri="{FF2B5EF4-FFF2-40B4-BE49-F238E27FC236}">
-                <a16:creationId xmlns:a16="http://schemas.microsoft.com/office/drawing/2014/main" id="{7D0C9A2C-9560-4F9C-90A3-AD454B3BEDB2}"/>
+                <a16:creationId xmlns:a16="http://schemas.microsoft.com/office/drawing/2014/main" id="{C4F4C6B1-0972-4A32-B2A0-9347868ABBAF}"/>
               </a:ext>
             </a:extLst>
           </p:cNvPr>
@@ -13210,7 +11330,7 @@
           <p:cNvPr id="9" name="">
             <a:extLst xmlns:a="http://schemas.openxmlformats.org/drawingml/2006/main">
               <a:ext uri="{FF2B5EF4-FFF2-40B4-BE49-F238E27FC236}">
-                <a16:creationId xmlns:a16="http://schemas.microsoft.com/office/drawing/2014/main" id="{343C1B44-AE94-48CE-A1A9-F7FB205E7B04}"/>
+                <a16:creationId xmlns:a16="http://schemas.microsoft.com/office/drawing/2014/main" id="{CD668F5C-FC59-4021-83BB-59AE996C4476}"/>
               </a:ext>
             </a:extLst>
           </p:cNvPr>
@@ -13267,7 +11387,7 @@
           <p:cNvPr id="10" name="">
             <a:extLst xmlns:a="http://schemas.openxmlformats.org/drawingml/2006/main">
               <a:ext uri="{FF2B5EF4-FFF2-40B4-BE49-F238E27FC236}">
-                <a16:creationId xmlns:a16="http://schemas.microsoft.com/office/drawing/2014/main" id="{ABE439FA-F2E2-49BE-A76D-CE7E488D0A68}"/>
+                <a16:creationId xmlns:a16="http://schemas.microsoft.com/office/drawing/2014/main" id="{2718D99B-5F66-4342-B755-B79765D48942}"/>
               </a:ext>
             </a:extLst>
           </p:cNvPr>
@@ -13324,7 +11444,7 @@
           <p:cNvPr id="11" name="">
             <a:extLst xmlns:a="http://schemas.openxmlformats.org/drawingml/2006/main">
               <a:ext uri="{FF2B5EF4-FFF2-40B4-BE49-F238E27FC236}">
-                <a16:creationId xmlns:a16="http://schemas.microsoft.com/office/drawing/2014/main" id="{81336FF4-06F6-4457-9301-483E8FBDD6D5}"/>
+                <a16:creationId xmlns:a16="http://schemas.microsoft.com/office/drawing/2014/main" id="{0C888E15-B3E3-448C-9094-4FD9702D2844}"/>
               </a:ext>
             </a:extLst>
           </p:cNvPr>
@@ -13381,7 +11501,7 @@
           <p:cNvPr id="12" name="">
             <a:extLst xmlns:a="http://schemas.openxmlformats.org/drawingml/2006/main">
               <a:ext uri="{FF2B5EF4-FFF2-40B4-BE49-F238E27FC236}">
-                <a16:creationId xmlns:a16="http://schemas.microsoft.com/office/drawing/2014/main" id="{DC34DC4B-6554-4267-8810-93493461BD4F}"/>
+                <a16:creationId xmlns:a16="http://schemas.microsoft.com/office/drawing/2014/main" id="{95626C68-A66E-4C40-8223-F4D00E4196DD}"/>
               </a:ext>
             </a:extLst>
           </p:cNvPr>
@@ -13436,7 +11556,7 @@
     </p:spTree>
     <p:extLst>
       <p:ext uri="{BB962C8B-B14F-4D97-AF65-F5344CB8AC3E}">
-        <p14:creationId xmlns:p14="http://schemas.microsoft.com/office/powerpoint/2010/main" val="2049155081"/>
+        <p14:creationId xmlns:p14="http://schemas.microsoft.com/office/powerpoint/2010/main" val="2069961487"/>
       </p:ext>
     </p:extLst>
   </p:cSld>
@@ -13467,7 +11587,7 @@
           <p:cNvPr id="13" name="">
             <a:extLst xmlns:a="http://schemas.openxmlformats.org/drawingml/2006/main">
               <a:ext uri="{FF2B5EF4-FFF2-40B4-BE49-F238E27FC236}">
-                <a16:creationId xmlns:a16="http://schemas.microsoft.com/office/drawing/2014/main" id="{12B52AB7-B78D-4799-8899-4C0416667676}"/>
+                <a16:creationId xmlns:a16="http://schemas.microsoft.com/office/drawing/2014/main" id="{F2AC62A7-E97A-4294-B2C5-EC9681E7ED91}"/>
               </a:ext>
             </a:extLst>
           </p:cNvPr>
@@ -13497,7 +11617,7 @@
           <p:cNvPr id="2" name="">
             <a:extLst xmlns:a="http://schemas.openxmlformats.org/drawingml/2006/main">
               <a:ext uri="{FF2B5EF4-FFF2-40B4-BE49-F238E27FC236}">
-                <a16:creationId xmlns:a16="http://schemas.microsoft.com/office/drawing/2014/main" id="{353CA24A-280B-487E-8863-3160C506F089}"/>
+                <a16:creationId xmlns:a16="http://schemas.microsoft.com/office/drawing/2014/main" id="{36D16D00-1BBE-4234-A601-07884AEFDD12}"/>
               </a:ext>
             </a:extLst>
           </p:cNvPr>
@@ -13554,7 +11674,7 @@
           <p:cNvPr id="3" name="">
             <a:extLst xmlns:a="http://schemas.openxmlformats.org/drawingml/2006/main">
               <a:ext uri="{FF2B5EF4-FFF2-40B4-BE49-F238E27FC236}">
-                <a16:creationId xmlns:a16="http://schemas.microsoft.com/office/drawing/2014/main" id="{0FDD2296-5F80-404F-9F27-862B88469A36}"/>
+                <a16:creationId xmlns:a16="http://schemas.microsoft.com/office/drawing/2014/main" id="{1DE6B2D7-E116-40B3-89F0-279B660E0E23}"/>
               </a:ext>
             </a:extLst>
           </p:cNvPr>
@@ -13611,7 +11731,7 @@
           <p:cNvPr id="4" name="">
             <a:extLst xmlns:a="http://schemas.openxmlformats.org/drawingml/2006/main">
               <a:ext uri="{FF2B5EF4-FFF2-40B4-BE49-F238E27FC236}">
-                <a16:creationId xmlns:a16="http://schemas.microsoft.com/office/drawing/2014/main" id="{B1252345-1998-4E37-8F09-8661398CE028}"/>
+                <a16:creationId xmlns:a16="http://schemas.microsoft.com/office/drawing/2014/main" id="{95F06CA9-EDC1-4CD1-BB94-8ABE061BBCF2}"/>
               </a:ext>
             </a:extLst>
           </p:cNvPr>
@@ -13668,7 +11788,7 @@
           <p:cNvPr id="5" name="">
             <a:extLst xmlns:a="http://schemas.openxmlformats.org/drawingml/2006/main">
               <a:ext uri="{FF2B5EF4-FFF2-40B4-BE49-F238E27FC236}">
-                <a16:creationId xmlns:a16="http://schemas.microsoft.com/office/drawing/2014/main" id="{5F2943AD-D905-4501-90DC-15F7831A7FCD}"/>
+                <a16:creationId xmlns:a16="http://schemas.microsoft.com/office/drawing/2014/main" id="{CE36CC73-ADFA-419D-B704-D6EA9FB43B00}"/>
               </a:ext>
             </a:extLst>
           </p:cNvPr>
@@ -13725,7 +11845,7 @@
           <p:cNvPr id="6" name="">
             <a:extLst xmlns:a="http://schemas.openxmlformats.org/drawingml/2006/main">
               <a:ext uri="{FF2B5EF4-FFF2-40B4-BE49-F238E27FC236}">
-                <a16:creationId xmlns:a16="http://schemas.microsoft.com/office/drawing/2014/main" id="{5ABEB341-AD55-4EEF-977E-1BAD8974F896}"/>
+                <a16:creationId xmlns:a16="http://schemas.microsoft.com/office/drawing/2014/main" id="{D102D132-E8F3-4443-95B3-FE95D57E412A}"/>
               </a:ext>
             </a:extLst>
           </p:cNvPr>
@@ -13782,7 +11902,7 @@
           <p:cNvPr id="7" name="">
             <a:extLst xmlns:a="http://schemas.openxmlformats.org/drawingml/2006/main">
               <a:ext uri="{FF2B5EF4-FFF2-40B4-BE49-F238E27FC236}">
-                <a16:creationId xmlns:a16="http://schemas.microsoft.com/office/drawing/2014/main" id="{7498A991-18C5-49E1-BE5E-A8E00D9CBEAD}"/>
+                <a16:creationId xmlns:a16="http://schemas.microsoft.com/office/drawing/2014/main" id="{99311D66-243D-430B-89A6-700EC8050415}"/>
               </a:ext>
             </a:extLst>
           </p:cNvPr>
@@ -13839,7 +11959,7 @@
           <p:cNvPr id="8" name="">
             <a:extLst xmlns:a="http://schemas.openxmlformats.org/drawingml/2006/main">
               <a:ext uri="{FF2B5EF4-FFF2-40B4-BE49-F238E27FC236}">
-                <a16:creationId xmlns:a16="http://schemas.microsoft.com/office/drawing/2014/main" id="{AC24695B-4C6A-41A9-A521-001A3865117C}"/>
+                <a16:creationId xmlns:a16="http://schemas.microsoft.com/office/drawing/2014/main" id="{02B5DA14-EC77-4D8F-B750-1EE3F4407183}"/>
               </a:ext>
             </a:extLst>
           </p:cNvPr>
@@ -13896,7 +12016,7 @@
           <p:cNvPr id="9" name="">
             <a:extLst xmlns:a="http://schemas.openxmlformats.org/drawingml/2006/main">
               <a:ext uri="{FF2B5EF4-FFF2-40B4-BE49-F238E27FC236}">
-                <a16:creationId xmlns:a16="http://schemas.microsoft.com/office/drawing/2014/main" id="{C8E0F5ED-8560-4DE7-A612-2B170BEAD582}"/>
+                <a16:creationId xmlns:a16="http://schemas.microsoft.com/office/drawing/2014/main" id="{C4350F97-6A4F-4DA3-8A74-6E0DDABC5732}"/>
               </a:ext>
             </a:extLst>
           </p:cNvPr>
@@ -13953,7 +12073,7 @@
           <p:cNvPr id="10" name="">
             <a:extLst xmlns:a="http://schemas.openxmlformats.org/drawingml/2006/main">
               <a:ext uri="{FF2B5EF4-FFF2-40B4-BE49-F238E27FC236}">
-                <a16:creationId xmlns:a16="http://schemas.microsoft.com/office/drawing/2014/main" id="{474F1B8D-46EC-4B09-A82F-95E430154C99}"/>
+                <a16:creationId xmlns:a16="http://schemas.microsoft.com/office/drawing/2014/main" id="{D5F45A72-5417-4640-ABD0-61540FE251A3}"/>
               </a:ext>
             </a:extLst>
           </p:cNvPr>
@@ -14010,7 +12130,7 @@
           <p:cNvPr id="11" name="">
             <a:extLst xmlns:a="http://schemas.openxmlformats.org/drawingml/2006/main">
               <a:ext uri="{FF2B5EF4-FFF2-40B4-BE49-F238E27FC236}">
-                <a16:creationId xmlns:a16="http://schemas.microsoft.com/office/drawing/2014/main" id="{F311CAB9-BEDF-4A02-AE0B-B9847A7051AD}"/>
+                <a16:creationId xmlns:a16="http://schemas.microsoft.com/office/drawing/2014/main" id="{906CF75D-D9C0-4492-9FE6-EB40DFBBA47D}"/>
               </a:ext>
             </a:extLst>
           </p:cNvPr>
@@ -14067,7 +12187,7 @@
           <p:cNvPr id="12" name="">
             <a:extLst xmlns:a="http://schemas.openxmlformats.org/drawingml/2006/main">
               <a:ext uri="{FF2B5EF4-FFF2-40B4-BE49-F238E27FC236}">
-                <a16:creationId xmlns:a16="http://schemas.microsoft.com/office/drawing/2014/main" id="{C322A890-D856-4F8D-A2A3-E5877B0DFEE2}"/>
+                <a16:creationId xmlns:a16="http://schemas.microsoft.com/office/drawing/2014/main" id="{C60C0AC4-75B7-4563-825E-69F1F5C3E2FC}"/>
               </a:ext>
             </a:extLst>
           </p:cNvPr>
@@ -14122,7 +12242,7 @@
     </p:spTree>
     <p:extLst>
       <p:ext uri="{BB962C8B-B14F-4D97-AF65-F5344CB8AC3E}">
-        <p14:creationId xmlns:p14="http://schemas.microsoft.com/office/powerpoint/2010/main" val="55933400"/>
+        <p14:creationId xmlns:p14="http://schemas.microsoft.com/office/powerpoint/2010/main" val="263306219"/>
       </p:ext>
     </p:extLst>
   </p:cSld>
@@ -14153,7 +12273,7 @@
           <p:cNvPr id="13" name="">
             <a:extLst xmlns:a="http://schemas.openxmlformats.org/drawingml/2006/main">
               <a:ext uri="{FF2B5EF4-FFF2-40B4-BE49-F238E27FC236}">
-                <a16:creationId xmlns:a16="http://schemas.microsoft.com/office/drawing/2014/main" id="{1A6F3375-46C5-44BD-A242-DFFED9693231}"/>
+                <a16:creationId xmlns:a16="http://schemas.microsoft.com/office/drawing/2014/main" id="{E1B99DE1-49C3-4E61-9580-552F4EBF4894}"/>
               </a:ext>
             </a:extLst>
           </p:cNvPr>
@@ -14183,7 +12303,7 @@
           <p:cNvPr id="2" name="">
             <a:extLst xmlns:a="http://schemas.openxmlformats.org/drawingml/2006/main">
               <a:ext uri="{FF2B5EF4-FFF2-40B4-BE49-F238E27FC236}">
-                <a16:creationId xmlns:a16="http://schemas.microsoft.com/office/drawing/2014/main" id="{8B44577D-64C4-4BDE-92FE-57D770536818}"/>
+                <a16:creationId xmlns:a16="http://schemas.microsoft.com/office/drawing/2014/main" id="{0DB243FA-B0CE-4868-A252-1AC96773A0F7}"/>
               </a:ext>
             </a:extLst>
           </p:cNvPr>
@@ -14240,7 +12360,7 @@
           <p:cNvPr id="3" name="">
             <a:extLst xmlns:a="http://schemas.openxmlformats.org/drawingml/2006/main">
               <a:ext uri="{FF2B5EF4-FFF2-40B4-BE49-F238E27FC236}">
-                <a16:creationId xmlns:a16="http://schemas.microsoft.com/office/drawing/2014/main" id="{2211272C-3C79-4C48-9BB3-FAFB83967EDE}"/>
+                <a16:creationId xmlns:a16="http://schemas.microsoft.com/office/drawing/2014/main" id="{1E00AAB6-1227-40A0-AE2B-83DD75F342B7}"/>
               </a:ext>
             </a:extLst>
           </p:cNvPr>
@@ -14297,7 +12417,7 @@
           <p:cNvPr id="4" name="">
             <a:extLst xmlns:a="http://schemas.openxmlformats.org/drawingml/2006/main">
               <a:ext uri="{FF2B5EF4-FFF2-40B4-BE49-F238E27FC236}">
-                <a16:creationId xmlns:a16="http://schemas.microsoft.com/office/drawing/2014/main" id="{5A2163BA-6298-4EC6-93B7-E61A3DC05A42}"/>
+                <a16:creationId xmlns:a16="http://schemas.microsoft.com/office/drawing/2014/main" id="{664E52D3-5226-44A1-95E6-AC72F2B7B250}"/>
               </a:ext>
             </a:extLst>
           </p:cNvPr>
@@ -14354,7 +12474,7 @@
           <p:cNvPr id="5" name="">
             <a:extLst xmlns:a="http://schemas.openxmlformats.org/drawingml/2006/main">
               <a:ext uri="{FF2B5EF4-FFF2-40B4-BE49-F238E27FC236}">
-                <a16:creationId xmlns:a16="http://schemas.microsoft.com/office/drawing/2014/main" id="{F19330B0-7937-4F62-9CB2-642C4D6743D7}"/>
+                <a16:creationId xmlns:a16="http://schemas.microsoft.com/office/drawing/2014/main" id="{B295CB1C-2489-463F-9199-2FD28A13A5C9}"/>
               </a:ext>
             </a:extLst>
           </p:cNvPr>
@@ -14411,7 +12531,7 @@
           <p:cNvPr id="6" name="">
             <a:extLst xmlns:a="http://schemas.openxmlformats.org/drawingml/2006/main">
               <a:ext uri="{FF2B5EF4-FFF2-40B4-BE49-F238E27FC236}">
-                <a16:creationId xmlns:a16="http://schemas.microsoft.com/office/drawing/2014/main" id="{18226E62-6C29-43B6-B342-F272CE1D14BA}"/>
+                <a16:creationId xmlns:a16="http://schemas.microsoft.com/office/drawing/2014/main" id="{5E5760F8-B60D-4561-B343-C1AF1F415482}"/>
               </a:ext>
             </a:extLst>
           </p:cNvPr>
@@ -14468,7 +12588,7 @@
           <p:cNvPr id="7" name="">
             <a:extLst xmlns:a="http://schemas.openxmlformats.org/drawingml/2006/main">
               <a:ext uri="{FF2B5EF4-FFF2-40B4-BE49-F238E27FC236}">
-                <a16:creationId xmlns:a16="http://schemas.microsoft.com/office/drawing/2014/main" id="{9AE78A40-642B-4D2A-AF69-F9B2CD2B7F9B}"/>
+                <a16:creationId xmlns:a16="http://schemas.microsoft.com/office/drawing/2014/main" id="{4AEB7C61-CD5E-42D3-BAA5-B0AEC47A1F59}"/>
               </a:ext>
             </a:extLst>
           </p:cNvPr>
@@ -14525,7 +12645,7 @@
           <p:cNvPr id="8" name="">
             <a:extLst xmlns:a="http://schemas.openxmlformats.org/drawingml/2006/main">
               <a:ext uri="{FF2B5EF4-FFF2-40B4-BE49-F238E27FC236}">
-                <a16:creationId xmlns:a16="http://schemas.microsoft.com/office/drawing/2014/main" id="{619141D2-5775-488A-8CF9-DDEDE1F959D6}"/>
+                <a16:creationId xmlns:a16="http://schemas.microsoft.com/office/drawing/2014/main" id="{A9A42F58-6750-4E24-BA4B-6DBDF929E8C7}"/>
               </a:ext>
             </a:extLst>
           </p:cNvPr>
@@ -14582,7 +12702,7 @@
           <p:cNvPr id="9" name="">
             <a:extLst xmlns:a="http://schemas.openxmlformats.org/drawingml/2006/main">
               <a:ext uri="{FF2B5EF4-FFF2-40B4-BE49-F238E27FC236}">
-                <a16:creationId xmlns:a16="http://schemas.microsoft.com/office/drawing/2014/main" id="{3149EFDD-0399-41EC-A256-313CD976BFA9}"/>
+                <a16:creationId xmlns:a16="http://schemas.microsoft.com/office/drawing/2014/main" id="{8FF3EA4B-9D95-4223-847E-DDF197B164D2}"/>
               </a:ext>
             </a:extLst>
           </p:cNvPr>
@@ -14639,7 +12759,7 @@
           <p:cNvPr id="10" name="">
             <a:extLst xmlns:a="http://schemas.openxmlformats.org/drawingml/2006/main">
               <a:ext uri="{FF2B5EF4-FFF2-40B4-BE49-F238E27FC236}">
-                <a16:creationId xmlns:a16="http://schemas.microsoft.com/office/drawing/2014/main" id="{7DE4280C-736D-4D7D-B464-47450539AE3B}"/>
+                <a16:creationId xmlns:a16="http://schemas.microsoft.com/office/drawing/2014/main" id="{FAE50482-C1AA-4B80-A8B7-3D2A06FACEEF}"/>
               </a:ext>
             </a:extLst>
           </p:cNvPr>
@@ -14696,7 +12816,7 @@
           <p:cNvPr id="11" name="">
             <a:extLst xmlns:a="http://schemas.openxmlformats.org/drawingml/2006/main">
               <a:ext uri="{FF2B5EF4-FFF2-40B4-BE49-F238E27FC236}">
-                <a16:creationId xmlns:a16="http://schemas.microsoft.com/office/drawing/2014/main" id="{70867AFC-390A-4550-B455-944B892E9A0B}"/>
+                <a16:creationId xmlns:a16="http://schemas.microsoft.com/office/drawing/2014/main" id="{531AA415-FF96-4197-8348-C77DD9D733D7}"/>
               </a:ext>
             </a:extLst>
           </p:cNvPr>
@@ -14753,7 +12873,7 @@
           <p:cNvPr id="12" name="">
             <a:extLst xmlns:a="http://schemas.openxmlformats.org/drawingml/2006/main">
               <a:ext uri="{FF2B5EF4-FFF2-40B4-BE49-F238E27FC236}">
-                <a16:creationId xmlns:a16="http://schemas.microsoft.com/office/drawing/2014/main" id="{113E6FDC-C6D3-4195-97F1-3E422E368566}"/>
+                <a16:creationId xmlns:a16="http://schemas.microsoft.com/office/drawing/2014/main" id="{5205CE5B-7FAC-4E74-8C50-16B346B85C47}"/>
               </a:ext>
             </a:extLst>
           </p:cNvPr>
@@ -14808,7 +12928,7 @@
     </p:spTree>
     <p:extLst>
       <p:ext uri="{BB962C8B-B14F-4D97-AF65-F5344CB8AC3E}">
-        <p14:creationId xmlns:p14="http://schemas.microsoft.com/office/powerpoint/2010/main" val="244630767"/>
+        <p14:creationId xmlns:p14="http://schemas.microsoft.com/office/powerpoint/2010/main" val="2123661075"/>
       </p:ext>
     </p:extLst>
   </p:cSld>
@@ -14839,7 +12959,7 @@
           <p:cNvPr id="13" name="">
             <a:extLst xmlns:a="http://schemas.openxmlformats.org/drawingml/2006/main">
               <a:ext uri="{FF2B5EF4-FFF2-40B4-BE49-F238E27FC236}">
-                <a16:creationId xmlns:a16="http://schemas.microsoft.com/office/drawing/2014/main" id="{D785E740-A83B-4F00-96FC-53620DCF4BA4}"/>
+                <a16:creationId xmlns:a16="http://schemas.microsoft.com/office/drawing/2014/main" id="{6D3F249B-4906-4C7F-A7F0-3D7B640A8C17}"/>
               </a:ext>
             </a:extLst>
           </p:cNvPr>
@@ -14869,7 +12989,7 @@
           <p:cNvPr id="2" name="">
             <a:extLst xmlns:a="http://schemas.openxmlformats.org/drawingml/2006/main">
               <a:ext uri="{FF2B5EF4-FFF2-40B4-BE49-F238E27FC236}">
-                <a16:creationId xmlns:a16="http://schemas.microsoft.com/office/drawing/2014/main" id="{A24F96F2-13E1-499C-A7B8-621927F009E9}"/>
+                <a16:creationId xmlns:a16="http://schemas.microsoft.com/office/drawing/2014/main" id="{A22E4F9F-4D5B-4AD0-B380-0537EB20FED8}"/>
               </a:ext>
             </a:extLst>
           </p:cNvPr>
@@ -14926,7 +13046,7 @@
           <p:cNvPr id="3" name="">
             <a:extLst xmlns:a="http://schemas.openxmlformats.org/drawingml/2006/main">
               <a:ext uri="{FF2B5EF4-FFF2-40B4-BE49-F238E27FC236}">
-                <a16:creationId xmlns:a16="http://schemas.microsoft.com/office/drawing/2014/main" id="{60CA09BF-CAA4-4413-A2ED-4B84EA81747D}"/>
+                <a16:creationId xmlns:a16="http://schemas.microsoft.com/office/drawing/2014/main" id="{5F043471-0AC3-445B-AE56-DA1ED9B33E18}"/>
               </a:ext>
             </a:extLst>
           </p:cNvPr>
@@ -14983,7 +13103,7 @@
           <p:cNvPr id="4" name="">
             <a:extLst xmlns:a="http://schemas.openxmlformats.org/drawingml/2006/main">
               <a:ext uri="{FF2B5EF4-FFF2-40B4-BE49-F238E27FC236}">
-                <a16:creationId xmlns:a16="http://schemas.microsoft.com/office/drawing/2014/main" id="{B2EC4630-ECB5-4213-8610-CE1A90855B02}"/>
+                <a16:creationId xmlns:a16="http://schemas.microsoft.com/office/drawing/2014/main" id="{BA585F39-CB30-45E0-99D1-E1CC6A5FD5C4}"/>
               </a:ext>
             </a:extLst>
           </p:cNvPr>
@@ -15040,7 +13160,7 @@
           <p:cNvPr id="5" name="">
             <a:extLst xmlns:a="http://schemas.openxmlformats.org/drawingml/2006/main">
               <a:ext uri="{FF2B5EF4-FFF2-40B4-BE49-F238E27FC236}">
-                <a16:creationId xmlns:a16="http://schemas.microsoft.com/office/drawing/2014/main" id="{2F2E8232-AC45-4C2E-B81A-BE0561650B39}"/>
+                <a16:creationId xmlns:a16="http://schemas.microsoft.com/office/drawing/2014/main" id="{E1497122-9E2F-452B-A472-13C8946E5613}"/>
               </a:ext>
             </a:extLst>
           </p:cNvPr>
@@ -15097,7 +13217,7 @@
           <p:cNvPr id="6" name="">
             <a:extLst xmlns:a="http://schemas.openxmlformats.org/drawingml/2006/main">
               <a:ext uri="{FF2B5EF4-FFF2-40B4-BE49-F238E27FC236}">
-                <a16:creationId xmlns:a16="http://schemas.microsoft.com/office/drawing/2014/main" id="{7D9BFCA9-D767-420A-AB4F-A897AB28DC0B}"/>
+                <a16:creationId xmlns:a16="http://schemas.microsoft.com/office/drawing/2014/main" id="{6E712BBB-F94D-4620-B5BD-0B451A4F930F}"/>
               </a:ext>
             </a:extLst>
           </p:cNvPr>
@@ -15154,7 +13274,7 @@
           <p:cNvPr id="7" name="">
             <a:extLst xmlns:a="http://schemas.openxmlformats.org/drawingml/2006/main">
               <a:ext uri="{FF2B5EF4-FFF2-40B4-BE49-F238E27FC236}">
-                <a16:creationId xmlns:a16="http://schemas.microsoft.com/office/drawing/2014/main" id="{AE654F9F-DD21-4086-9B49-7EB96C61DB94}"/>
+                <a16:creationId xmlns:a16="http://schemas.microsoft.com/office/drawing/2014/main" id="{7CF86278-7D72-456B-BF8E-63A775B61782}"/>
               </a:ext>
             </a:extLst>
           </p:cNvPr>
@@ -15211,7 +13331,7 @@
           <p:cNvPr id="8" name="">
             <a:extLst xmlns:a="http://schemas.openxmlformats.org/drawingml/2006/main">
               <a:ext uri="{FF2B5EF4-FFF2-40B4-BE49-F238E27FC236}">
-                <a16:creationId xmlns:a16="http://schemas.microsoft.com/office/drawing/2014/main" id="{A43315D4-CE1B-4981-978E-836CD5604D4E}"/>
+                <a16:creationId xmlns:a16="http://schemas.microsoft.com/office/drawing/2014/main" id="{CA6DFED5-B807-4A3E-AD30-88A6E49939D7}"/>
               </a:ext>
             </a:extLst>
           </p:cNvPr>
@@ -15268,7 +13388,7 @@
           <p:cNvPr id="9" name="">
             <a:extLst xmlns:a="http://schemas.openxmlformats.org/drawingml/2006/main">
               <a:ext uri="{FF2B5EF4-FFF2-40B4-BE49-F238E27FC236}">
-                <a16:creationId xmlns:a16="http://schemas.microsoft.com/office/drawing/2014/main" id="{089C7468-8EDB-4DF1-9DF1-CD0750F743D4}"/>
+                <a16:creationId xmlns:a16="http://schemas.microsoft.com/office/drawing/2014/main" id="{55AA9F86-9800-4A71-A19A-EB59C382A501}"/>
               </a:ext>
             </a:extLst>
           </p:cNvPr>
@@ -15325,7 +13445,7 @@
           <p:cNvPr id="10" name="">
             <a:extLst xmlns:a="http://schemas.openxmlformats.org/drawingml/2006/main">
               <a:ext uri="{FF2B5EF4-FFF2-40B4-BE49-F238E27FC236}">
-                <a16:creationId xmlns:a16="http://schemas.microsoft.com/office/drawing/2014/main" id="{95CE0753-A043-4EA8-8286-F88C64CE79CD}"/>
+                <a16:creationId xmlns:a16="http://schemas.microsoft.com/office/drawing/2014/main" id="{0907C1BF-727F-4C68-BC93-A7D4B1311B41}"/>
               </a:ext>
             </a:extLst>
           </p:cNvPr>
@@ -15382,7 +13502,7 @@
           <p:cNvPr id="11" name="">
             <a:extLst xmlns:a="http://schemas.openxmlformats.org/drawingml/2006/main">
               <a:ext uri="{FF2B5EF4-FFF2-40B4-BE49-F238E27FC236}">
-                <a16:creationId xmlns:a16="http://schemas.microsoft.com/office/drawing/2014/main" id="{8A43A7CB-4BD6-4E37-ACFE-D5B81E60297E}"/>
+                <a16:creationId xmlns:a16="http://schemas.microsoft.com/office/drawing/2014/main" id="{E1D8396F-0D50-4A35-9A91-FC93D1B1CB2A}"/>
               </a:ext>
             </a:extLst>
           </p:cNvPr>
@@ -15439,7 +13559,7 @@
           <p:cNvPr id="12" name="">
             <a:extLst xmlns:a="http://schemas.openxmlformats.org/drawingml/2006/main">
               <a:ext uri="{FF2B5EF4-FFF2-40B4-BE49-F238E27FC236}">
-                <a16:creationId xmlns:a16="http://schemas.microsoft.com/office/drawing/2014/main" id="{635E7EEF-841E-4C69-B089-414D4C6A2ABA}"/>
+                <a16:creationId xmlns:a16="http://schemas.microsoft.com/office/drawing/2014/main" id="{A0F76BB1-1B93-4055-A4F5-3D9BFA76AADD}"/>
               </a:ext>
             </a:extLst>
           </p:cNvPr>
@@ -15494,7 +13614,7 @@
     </p:spTree>
     <p:extLst>
       <p:ext uri="{BB962C8B-B14F-4D97-AF65-F5344CB8AC3E}">
-        <p14:creationId xmlns:p14="http://schemas.microsoft.com/office/powerpoint/2010/main" val="323461948"/>
+        <p14:creationId xmlns:p14="http://schemas.microsoft.com/office/powerpoint/2010/main" val="1766091055"/>
       </p:ext>
     </p:extLst>
   </p:cSld>
@@ -15525,7 +13645,7 @@
           <p:cNvPr id="10" name="">
             <a:extLst xmlns:a="http://schemas.openxmlformats.org/drawingml/2006/main">
               <a:ext uri="{FF2B5EF4-FFF2-40B4-BE49-F238E27FC236}">
-                <a16:creationId xmlns:a16="http://schemas.microsoft.com/office/drawing/2014/main" id="{645686CE-13FB-4D88-8BF4-0FAEDBFEFE12}"/>
+                <a16:creationId xmlns:a16="http://schemas.microsoft.com/office/drawing/2014/main" id="{ED3D238A-7B81-4B41-8FD3-396E4445AEB0}"/>
               </a:ext>
             </a:extLst>
           </p:cNvPr>
@@ -15555,7 +13675,7 @@
           <p:cNvPr id="2" name="">
             <a:extLst xmlns:a="http://schemas.openxmlformats.org/drawingml/2006/main">
               <a:ext uri="{FF2B5EF4-FFF2-40B4-BE49-F238E27FC236}">
-                <a16:creationId xmlns:a16="http://schemas.microsoft.com/office/drawing/2014/main" id="{2DC78469-D000-465D-BE9C-3719E031568E}"/>
+                <a16:creationId xmlns:a16="http://schemas.microsoft.com/office/drawing/2014/main" id="{4558F8B4-8DA2-440F-B688-D6FD6FB9DF3B}"/>
               </a:ext>
             </a:extLst>
           </p:cNvPr>
@@ -15612,7 +13732,7 @@
           <p:cNvPr id="3" name="">
             <a:extLst xmlns:a="http://schemas.openxmlformats.org/drawingml/2006/main">
               <a:ext uri="{FF2B5EF4-FFF2-40B4-BE49-F238E27FC236}">
-                <a16:creationId xmlns:a16="http://schemas.microsoft.com/office/drawing/2014/main" id="{2DAAD956-D7EA-4026-9B1F-4719193A20A7}"/>
+                <a16:creationId xmlns:a16="http://schemas.microsoft.com/office/drawing/2014/main" id="{0A30BE8E-91C5-4942-9311-C9672CC7C91E}"/>
               </a:ext>
             </a:extLst>
           </p:cNvPr>
@@ -15669,7 +13789,7 @@
           <p:cNvPr id="4" name="">
             <a:extLst xmlns:a="http://schemas.openxmlformats.org/drawingml/2006/main">
               <a:ext uri="{FF2B5EF4-FFF2-40B4-BE49-F238E27FC236}">
-                <a16:creationId xmlns:a16="http://schemas.microsoft.com/office/drawing/2014/main" id="{105D90FD-1B37-4559-9A53-DEF4B6A5EB99}"/>
+                <a16:creationId xmlns:a16="http://schemas.microsoft.com/office/drawing/2014/main" id="{6FCEE364-BE4A-49BB-8C7A-BF77551B6D42}"/>
               </a:ext>
             </a:extLst>
           </p:cNvPr>
@@ -15699,7 +13819,7 @@
           <p:cNvPr id="5" name="">
             <a:extLst xmlns:a="http://schemas.openxmlformats.org/drawingml/2006/main">
               <a:ext uri="{FF2B5EF4-FFF2-40B4-BE49-F238E27FC236}">
-                <a16:creationId xmlns:a16="http://schemas.microsoft.com/office/drawing/2014/main" id="{16FE9FE4-6AE8-48A1-851B-62D4D05CBDA7}"/>
+                <a16:creationId xmlns:a16="http://schemas.microsoft.com/office/drawing/2014/main" id="{C7A212BA-722B-4FE3-9073-E12F8EAC8720}"/>
               </a:ext>
             </a:extLst>
           </p:cNvPr>
@@ -15756,7 +13876,7 @@
           <p:cNvPr id="6" name="">
             <a:extLst xmlns:a="http://schemas.openxmlformats.org/drawingml/2006/main">
               <a:ext uri="{FF2B5EF4-FFF2-40B4-BE49-F238E27FC236}">
-                <a16:creationId xmlns:a16="http://schemas.microsoft.com/office/drawing/2014/main" id="{110F8C5F-1477-43BC-A3E5-2821723F5A59}"/>
+                <a16:creationId xmlns:a16="http://schemas.microsoft.com/office/drawing/2014/main" id="{5BC799C0-7926-4F37-A2F0-093FCDE0C55E}"/>
               </a:ext>
             </a:extLst>
           </p:cNvPr>
@@ -15841,7 +13961,7 @@
           <p:cNvPr id="7" name="">
             <a:extLst xmlns:a="http://schemas.openxmlformats.org/drawingml/2006/main">
               <a:ext uri="{FF2B5EF4-FFF2-40B4-BE49-F238E27FC236}">
-                <a16:creationId xmlns:a16="http://schemas.microsoft.com/office/drawing/2014/main" id="{2790D00E-5FB6-4B24-BE7C-2807B2E27EA7}"/>
+                <a16:creationId xmlns:a16="http://schemas.microsoft.com/office/drawing/2014/main" id="{5A6FB1D3-DBCE-41FC-AA59-7390D8E8A0D1}"/>
               </a:ext>
             </a:extLst>
           </p:cNvPr>
@@ -15898,7 +14018,7 @@
           <p:cNvPr id="8" name="">
             <a:extLst xmlns:a="http://schemas.openxmlformats.org/drawingml/2006/main">
               <a:ext uri="{FF2B5EF4-FFF2-40B4-BE49-F238E27FC236}">
-                <a16:creationId xmlns:a16="http://schemas.microsoft.com/office/drawing/2014/main" id="{EACF33C4-1DB0-41B0-901E-7D431BAF19E9}"/>
+                <a16:creationId xmlns:a16="http://schemas.microsoft.com/office/drawing/2014/main" id="{F9D97610-F53E-4C7A-9EC5-E5B8B0DDE9BA}"/>
               </a:ext>
             </a:extLst>
           </p:cNvPr>
@@ -15955,7 +14075,7 @@
           <p:cNvPr id="9" name="">
             <a:extLst xmlns:a="http://schemas.openxmlformats.org/drawingml/2006/main">
               <a:ext uri="{FF2B5EF4-FFF2-40B4-BE49-F238E27FC236}">
-                <a16:creationId xmlns:a16="http://schemas.microsoft.com/office/drawing/2014/main" id="{6A8BA1EA-E4B9-4DB5-BAE7-B91EFEDBC30E}"/>
+                <a16:creationId xmlns:a16="http://schemas.microsoft.com/office/drawing/2014/main" id="{26FFBB41-7E11-4A62-9437-390B68EEB95B}"/>
               </a:ext>
             </a:extLst>
           </p:cNvPr>
@@ -16010,7 +14130,7 @@
     </p:spTree>
     <p:extLst>
       <p:ext uri="{BB962C8B-B14F-4D97-AF65-F5344CB8AC3E}">
-        <p14:creationId xmlns:p14="http://schemas.microsoft.com/office/powerpoint/2010/main" val="1170709388"/>
+        <p14:creationId xmlns:p14="http://schemas.microsoft.com/office/powerpoint/2010/main" val="1996245140"/>
       </p:ext>
     </p:extLst>
   </p:cSld>
@@ -16041,7 +14161,7 @@
           <p:cNvPr id="16" name="">
             <a:extLst xmlns:a="http://schemas.openxmlformats.org/drawingml/2006/main">
               <a:ext uri="{FF2B5EF4-FFF2-40B4-BE49-F238E27FC236}">
-                <a16:creationId xmlns:a16="http://schemas.microsoft.com/office/drawing/2014/main" id="{EB3DF2A7-DEFD-442D-B670-BF2BDD6782BA}"/>
+                <a16:creationId xmlns:a16="http://schemas.microsoft.com/office/drawing/2014/main" id="{A67C519E-9486-46DD-B574-95E8308EE087}"/>
               </a:ext>
             </a:extLst>
           </p:cNvPr>
@@ -16071,7 +14191,7 @@
           <p:cNvPr id="2" name="">
             <a:extLst xmlns:a="http://schemas.openxmlformats.org/drawingml/2006/main">
               <a:ext uri="{FF2B5EF4-FFF2-40B4-BE49-F238E27FC236}">
-                <a16:creationId xmlns:a16="http://schemas.microsoft.com/office/drawing/2014/main" id="{EA1D6A2D-67CE-415B-B9F0-723DA82E97FD}"/>
+                <a16:creationId xmlns:a16="http://schemas.microsoft.com/office/drawing/2014/main" id="{EEAC58CB-E95F-47DA-AC3A-5A44030EDA23}"/>
               </a:ext>
             </a:extLst>
           </p:cNvPr>
@@ -16128,7 +14248,7 @@
           <p:cNvPr id="3" name="">
             <a:extLst xmlns:a="http://schemas.openxmlformats.org/drawingml/2006/main">
               <a:ext uri="{FF2B5EF4-FFF2-40B4-BE49-F238E27FC236}">
-                <a16:creationId xmlns:a16="http://schemas.microsoft.com/office/drawing/2014/main" id="{ED8736EC-1CA6-4BAB-9EA2-8AFFE981A5E6}"/>
+                <a16:creationId xmlns:a16="http://schemas.microsoft.com/office/drawing/2014/main" id="{61D99271-4022-4582-9CA5-771A897A9FCA}"/>
               </a:ext>
             </a:extLst>
           </p:cNvPr>
@@ -16185,7 +14305,7 @@
           <p:cNvPr id="4" name="">
             <a:extLst xmlns:a="http://schemas.openxmlformats.org/drawingml/2006/main">
               <a:ext uri="{FF2B5EF4-FFF2-40B4-BE49-F238E27FC236}">
-                <a16:creationId xmlns:a16="http://schemas.microsoft.com/office/drawing/2014/main" id="{1D9B85FB-9DEC-43C3-B267-68184683932B}"/>
+                <a16:creationId xmlns:a16="http://schemas.microsoft.com/office/drawing/2014/main" id="{5D639463-5EA1-46C0-B4F8-78E9BE5DA781}"/>
               </a:ext>
             </a:extLst>
           </p:cNvPr>
@@ -16242,7 +14362,7 @@
           <p:cNvPr id="5" name="">
             <a:extLst xmlns:a="http://schemas.openxmlformats.org/drawingml/2006/main">
               <a:ext uri="{FF2B5EF4-FFF2-40B4-BE49-F238E27FC236}">
-                <a16:creationId xmlns:a16="http://schemas.microsoft.com/office/drawing/2014/main" id="{4A51C28F-E625-4DA8-B0EF-EAE2EF12B3B9}"/>
+                <a16:creationId xmlns:a16="http://schemas.microsoft.com/office/drawing/2014/main" id="{6FBCAD4B-EA17-444B-9B22-EE5A466B20F1}"/>
               </a:ext>
             </a:extLst>
           </p:cNvPr>
@@ -16299,7 +14419,7 @@
           <p:cNvPr id="6" name="">
             <a:extLst xmlns:a="http://schemas.openxmlformats.org/drawingml/2006/main">
               <a:ext uri="{FF2B5EF4-FFF2-40B4-BE49-F238E27FC236}">
-                <a16:creationId xmlns:a16="http://schemas.microsoft.com/office/drawing/2014/main" id="{7ADF161C-D21F-404E-B937-828D4BF4D898}"/>
+                <a16:creationId xmlns:a16="http://schemas.microsoft.com/office/drawing/2014/main" id="{CA6793DC-9BA9-41C4-AEB2-7A2233185CA9}"/>
               </a:ext>
             </a:extLst>
           </p:cNvPr>
@@ -16356,7 +14476,7 @@
           <p:cNvPr id="7" name="">
             <a:extLst xmlns:a="http://schemas.openxmlformats.org/drawingml/2006/main">
               <a:ext uri="{FF2B5EF4-FFF2-40B4-BE49-F238E27FC236}">
-                <a16:creationId xmlns:a16="http://schemas.microsoft.com/office/drawing/2014/main" id="{E2FB1936-D756-4847-918C-50C579D539EC}"/>
+                <a16:creationId xmlns:a16="http://schemas.microsoft.com/office/drawing/2014/main" id="{78811EFF-A7F4-4B8E-B55E-6738EC3794C7}"/>
               </a:ext>
             </a:extLst>
           </p:cNvPr>
@@ -16413,7 +14533,7 @@
           <p:cNvPr id="8" name="">
             <a:extLst xmlns:a="http://schemas.openxmlformats.org/drawingml/2006/main">
               <a:ext uri="{FF2B5EF4-FFF2-40B4-BE49-F238E27FC236}">
-                <a16:creationId xmlns:a16="http://schemas.microsoft.com/office/drawing/2014/main" id="{CCAA9BE4-47B4-41E8-8210-C9A80D055356}"/>
+                <a16:creationId xmlns:a16="http://schemas.microsoft.com/office/drawing/2014/main" id="{2C74C2EF-C8CC-4F54-9E42-AF64FD75C333}"/>
               </a:ext>
             </a:extLst>
           </p:cNvPr>
@@ -16470,7 +14590,7 @@
           <p:cNvPr id="9" name="">
             <a:extLst xmlns:a="http://schemas.openxmlformats.org/drawingml/2006/main">
               <a:ext uri="{FF2B5EF4-FFF2-40B4-BE49-F238E27FC236}">
-                <a16:creationId xmlns:a16="http://schemas.microsoft.com/office/drawing/2014/main" id="{87827F82-CB0A-4145-A966-8FA8877B93E9}"/>
+                <a16:creationId xmlns:a16="http://schemas.microsoft.com/office/drawing/2014/main" id="{AD321286-E34E-4E6D-89F5-3BDD39528D62}"/>
               </a:ext>
             </a:extLst>
           </p:cNvPr>
@@ -16527,7 +14647,7 @@
           <p:cNvPr id="10" name="">
             <a:extLst xmlns:a="http://schemas.openxmlformats.org/drawingml/2006/main">
               <a:ext uri="{FF2B5EF4-FFF2-40B4-BE49-F238E27FC236}">
-                <a16:creationId xmlns:a16="http://schemas.microsoft.com/office/drawing/2014/main" id="{6264FD4D-F508-4F8E-A9EB-2556A56A19A1}"/>
+                <a16:creationId xmlns:a16="http://schemas.microsoft.com/office/drawing/2014/main" id="{959DBFCC-5F8D-4647-A2DB-D4DB9EEC9642}"/>
               </a:ext>
             </a:extLst>
           </p:cNvPr>
@@ -16584,7 +14704,7 @@
           <p:cNvPr id="11" name="">
             <a:extLst xmlns:a="http://schemas.openxmlformats.org/drawingml/2006/main">
               <a:ext uri="{FF2B5EF4-FFF2-40B4-BE49-F238E27FC236}">
-                <a16:creationId xmlns:a16="http://schemas.microsoft.com/office/drawing/2014/main" id="{79F71570-2D47-45DC-B28D-E9FCA8F0F005}"/>
+                <a16:creationId xmlns:a16="http://schemas.microsoft.com/office/drawing/2014/main" id="{E37747B0-1EAD-44EC-8CE1-AA08557941C8}"/>
               </a:ext>
             </a:extLst>
           </p:cNvPr>
@@ -16641,7 +14761,7 @@
           <p:cNvPr id="12" name="">
             <a:extLst xmlns:a="http://schemas.openxmlformats.org/drawingml/2006/main">
               <a:ext uri="{FF2B5EF4-FFF2-40B4-BE49-F238E27FC236}">
-                <a16:creationId xmlns:a16="http://schemas.microsoft.com/office/drawing/2014/main" id="{3CA3D5A1-2D3F-4516-8EAA-0455720FD627}"/>
+                <a16:creationId xmlns:a16="http://schemas.microsoft.com/office/drawing/2014/main" id="{D55E3300-CB13-4F6E-A925-27FFE31D55BB}"/>
               </a:ext>
             </a:extLst>
           </p:cNvPr>
@@ -16671,7 +14791,7 @@
           <p:cNvPr id="13" name="">
             <a:extLst xmlns:a="http://schemas.openxmlformats.org/drawingml/2006/main">
               <a:ext uri="{FF2B5EF4-FFF2-40B4-BE49-F238E27FC236}">
-                <a16:creationId xmlns:a16="http://schemas.microsoft.com/office/drawing/2014/main" id="{E63AF2F1-D9BB-4974-8546-C03CDB76C539}"/>
+                <a16:creationId xmlns:a16="http://schemas.microsoft.com/office/drawing/2014/main" id="{3A544D52-68D8-49F3-B06B-0D6997F3F642}"/>
               </a:ext>
             </a:extLst>
           </p:cNvPr>
@@ -16717,7 +14837,7 @@
                 <a:latin typeface="Calibri"/>
                 <a:ea typeface="Calibri"/>
                 <a:cs typeface="Calibri"/>
-                <a:hlinkClick xmlns:r="http://schemas.openxmlformats.org/officeDocument/2006/relationships" r:id="R34022bc06dc14b0f"/>
+                <a:hlinkClick xmlns:r="http://schemas.openxmlformats.org/officeDocument/2006/relationships" r:id="R9308fbaef3924a7b"/>
               </a:rPr>
               <a:t>Open TEST2 assignment form</a:t>
             </a:r>
@@ -16729,7 +14849,7 @@
           <p:cNvPr id="14" name="">
             <a:extLst xmlns:a="http://schemas.openxmlformats.org/drawingml/2006/main">
               <a:ext uri="{FF2B5EF4-FFF2-40B4-BE49-F238E27FC236}">
-                <a16:creationId xmlns:a16="http://schemas.microsoft.com/office/drawing/2014/main" id="{723EC04D-3722-4D55-B026-6C44BAA2794B}"/>
+                <a16:creationId xmlns:a16="http://schemas.microsoft.com/office/drawing/2014/main" id="{886FA8B4-B6B1-4643-922F-3BCC2A0B68DD}"/>
               </a:ext>
             </a:extLst>
           </p:cNvPr>
@@ -16786,7 +14906,7 @@
           <p:cNvPr id="15" name="">
             <a:extLst xmlns:a="http://schemas.openxmlformats.org/drawingml/2006/main">
               <a:ext uri="{FF2B5EF4-FFF2-40B4-BE49-F238E27FC236}">
-                <a16:creationId xmlns:a16="http://schemas.microsoft.com/office/drawing/2014/main" id="{2E3AAFA1-2D3E-48FF-AD6E-3BF0F0E618BF}"/>
+                <a16:creationId xmlns:a16="http://schemas.microsoft.com/office/drawing/2014/main" id="{EB5513C7-C83D-44E4-BC43-AE625F06F369}"/>
               </a:ext>
             </a:extLst>
           </p:cNvPr>
@@ -16841,7 +14961,7 @@
     </p:spTree>
     <p:extLst>
       <p:ext uri="{BB962C8B-B14F-4D97-AF65-F5344CB8AC3E}">
-        <p14:creationId xmlns:p14="http://schemas.microsoft.com/office/powerpoint/2010/main" val="1940958171"/>
+        <p14:creationId xmlns:p14="http://schemas.microsoft.com/office/powerpoint/2010/main" val="1315042738"/>
       </p:ext>
     </p:extLst>
   </p:cSld>
@@ -16872,7 +14992,7 @@
           <p:cNvPr id="7" name="">
             <a:extLst xmlns:a="http://schemas.openxmlformats.org/drawingml/2006/main">
               <a:ext uri="{FF2B5EF4-FFF2-40B4-BE49-F238E27FC236}">
-                <a16:creationId xmlns:a16="http://schemas.microsoft.com/office/drawing/2014/main" id="{46D1C3D7-7A9E-4FB5-B740-86CB327D479F}"/>
+                <a16:creationId xmlns:a16="http://schemas.microsoft.com/office/drawing/2014/main" id="{10708445-F976-424F-9766-89754AC6EB4A}"/>
               </a:ext>
             </a:extLst>
           </p:cNvPr>
@@ -16929,7 +15049,7 @@
           <p:cNvPr id="2" name="">
             <a:extLst xmlns:a="http://schemas.openxmlformats.org/drawingml/2006/main">
               <a:ext uri="{FF2B5EF4-FFF2-40B4-BE49-F238E27FC236}">
-                <a16:creationId xmlns:a16="http://schemas.microsoft.com/office/drawing/2014/main" id="{DB2F6060-6510-4816-94D0-B7231784EBEB}"/>
+                <a16:creationId xmlns:a16="http://schemas.microsoft.com/office/drawing/2014/main" id="{55D6DC44-B656-4BA0-8B20-D5833A5A5E72}"/>
               </a:ext>
             </a:extLst>
           </p:cNvPr>
@@ -16986,7 +15106,7 @@
           <p:cNvPr id="3" name="">
             <a:extLst xmlns:a="http://schemas.openxmlformats.org/drawingml/2006/main">
               <a:ext uri="{FF2B5EF4-FFF2-40B4-BE49-F238E27FC236}">
-                <a16:creationId xmlns:a16="http://schemas.microsoft.com/office/drawing/2014/main" id="{FB5CB9B1-0949-4BBC-B03E-239D74F5F3F6}"/>
+                <a16:creationId xmlns:a16="http://schemas.microsoft.com/office/drawing/2014/main" id="{3BB87E24-16D5-41DD-8782-7A4DBD7521F9}"/>
               </a:ext>
             </a:extLst>
           </p:cNvPr>
@@ -17043,7 +15163,7 @@
           <p:cNvPr id="4" name="">
             <a:extLst xmlns:a="http://schemas.openxmlformats.org/drawingml/2006/main">
               <a:ext uri="{FF2B5EF4-FFF2-40B4-BE49-F238E27FC236}">
-                <a16:creationId xmlns:a16="http://schemas.microsoft.com/office/drawing/2014/main" id="{B5B6611B-3785-4697-8CB1-006D4DFFF298}"/>
+                <a16:creationId xmlns:a16="http://schemas.microsoft.com/office/drawing/2014/main" id="{9D3797E9-1CAC-422F-87C8-3AED53FE4246}"/>
               </a:ext>
             </a:extLst>
           </p:cNvPr>
@@ -17128,7 +15248,7 @@
           <p:cNvPr id="5" name="">
             <a:extLst xmlns:a="http://schemas.openxmlformats.org/drawingml/2006/main">
               <a:ext uri="{FF2B5EF4-FFF2-40B4-BE49-F238E27FC236}">
-                <a16:creationId xmlns:a16="http://schemas.microsoft.com/office/drawing/2014/main" id="{ADEA9BF5-5C62-4776-9512-7418E49486CA}"/>
+                <a16:creationId xmlns:a16="http://schemas.microsoft.com/office/drawing/2014/main" id="{99D8CD31-F433-40BA-BF98-FA72B185AD92}"/>
               </a:ext>
             </a:extLst>
           </p:cNvPr>
@@ -17185,7 +15305,7 @@
           <p:cNvPr id="6" name="">
             <a:extLst xmlns:a="http://schemas.openxmlformats.org/drawingml/2006/main">
               <a:ext uri="{FF2B5EF4-FFF2-40B4-BE49-F238E27FC236}">
-                <a16:creationId xmlns:a16="http://schemas.microsoft.com/office/drawing/2014/main" id="{1F3478AA-A312-4AF5-9098-632CB055A6EA}"/>
+                <a16:creationId xmlns:a16="http://schemas.microsoft.com/office/drawing/2014/main" id="{795151FB-EA9F-490C-A234-1CF8D6A697F4}"/>
               </a:ext>
             </a:extLst>
           </p:cNvPr>
@@ -17240,7 +15360,7 @@
     </p:spTree>
     <p:extLst>
       <p:ext uri="{BB962C8B-B14F-4D97-AF65-F5344CB8AC3E}">
-        <p14:creationId xmlns:p14="http://schemas.microsoft.com/office/powerpoint/2010/main" val="1275172441"/>
+        <p14:creationId xmlns:p14="http://schemas.microsoft.com/office/powerpoint/2010/main" val="828353580"/>
       </p:ext>
     </p:extLst>
   </p:cSld>
@@ -17271,7 +15391,7 @@
           <p:cNvPr id="7" name="">
             <a:extLst xmlns:a="http://schemas.openxmlformats.org/drawingml/2006/main">
               <a:ext uri="{FF2B5EF4-FFF2-40B4-BE49-F238E27FC236}">
-                <a16:creationId xmlns:a16="http://schemas.microsoft.com/office/drawing/2014/main" id="{ECF9892B-F5FA-40DA-9733-226E95BDC2DF}"/>
+                <a16:creationId xmlns:a16="http://schemas.microsoft.com/office/drawing/2014/main" id="{6DB9C1B2-698E-43E8-9804-ECBC173F1B9C}"/>
               </a:ext>
             </a:extLst>
           </p:cNvPr>
@@ -17301,7 +15421,7 @@
           <p:cNvPr id="2" name="">
             <a:extLst xmlns:a="http://schemas.openxmlformats.org/drawingml/2006/main">
               <a:ext uri="{FF2B5EF4-FFF2-40B4-BE49-F238E27FC236}">
-                <a16:creationId xmlns:a16="http://schemas.microsoft.com/office/drawing/2014/main" id="{CF5F6C4B-CAB0-415B-A250-70C3A3D1FD0E}"/>
+                <a16:creationId xmlns:a16="http://schemas.microsoft.com/office/drawing/2014/main" id="{D27AF573-34BF-402E-BA83-E804FF7BE027}"/>
               </a:ext>
             </a:extLst>
           </p:cNvPr>
@@ -17358,7 +15478,7 @@
           <p:cNvPr id="3" name="">
             <a:extLst xmlns:a="http://schemas.openxmlformats.org/drawingml/2006/main">
               <a:ext uri="{FF2B5EF4-FFF2-40B4-BE49-F238E27FC236}">
-                <a16:creationId xmlns:a16="http://schemas.microsoft.com/office/drawing/2014/main" id="{5463A795-E4A9-4E45-BC3D-CD89E8FF4581}"/>
+                <a16:creationId xmlns:a16="http://schemas.microsoft.com/office/drawing/2014/main" id="{5A410516-B05D-46F2-8D5A-C59AFC628165}"/>
               </a:ext>
             </a:extLst>
           </p:cNvPr>
@@ -17415,7 +15535,7 @@
           <p:cNvPr id="4" name="">
             <a:extLst xmlns:a="http://schemas.openxmlformats.org/drawingml/2006/main">
               <a:ext uri="{FF2B5EF4-FFF2-40B4-BE49-F238E27FC236}">
-                <a16:creationId xmlns:a16="http://schemas.microsoft.com/office/drawing/2014/main" id="{71034522-AA0E-4EC9-82DA-80903127F382}"/>
+                <a16:creationId xmlns:a16="http://schemas.microsoft.com/office/drawing/2014/main" id="{C3D4FFF8-CCCB-4A76-82AA-086A627FD9AD}"/>
               </a:ext>
             </a:extLst>
           </p:cNvPr>
@@ -17445,7 +15565,7 @@
           <p:cNvPr id="5" name="">
             <a:extLst xmlns:a="http://schemas.openxmlformats.org/drawingml/2006/main">
               <a:ext uri="{FF2B5EF4-FFF2-40B4-BE49-F238E27FC236}">
-                <a16:creationId xmlns:a16="http://schemas.microsoft.com/office/drawing/2014/main" id="{BFBE41F6-3689-448C-B4CF-A82AE8D7DCF8}"/>
+                <a16:creationId xmlns:a16="http://schemas.microsoft.com/office/drawing/2014/main" id="{7948D49C-CFF1-43ED-8CB0-7098CE91C7B4}"/>
               </a:ext>
             </a:extLst>
           </p:cNvPr>
@@ -17502,7 +15622,7 @@
           <p:cNvPr id="6" name="">
             <a:extLst xmlns:a="http://schemas.openxmlformats.org/drawingml/2006/main">
               <a:ext uri="{FF2B5EF4-FFF2-40B4-BE49-F238E27FC236}">
-                <a16:creationId xmlns:a16="http://schemas.microsoft.com/office/drawing/2014/main" id="{9B5B484D-CFB6-4637-9341-2AA0C559787B}"/>
+                <a16:creationId xmlns:a16="http://schemas.microsoft.com/office/drawing/2014/main" id="{3B83FC0C-154C-4D8E-A620-022C8980B5AA}"/>
               </a:ext>
             </a:extLst>
           </p:cNvPr>
@@ -17557,7 +15677,7 @@
     </p:spTree>
     <p:extLst>
       <p:ext uri="{BB962C8B-B14F-4D97-AF65-F5344CB8AC3E}">
-        <p14:creationId xmlns:p14="http://schemas.microsoft.com/office/powerpoint/2010/main" val="1565914064"/>
+        <p14:creationId xmlns:p14="http://schemas.microsoft.com/office/powerpoint/2010/main" val="1225209087"/>
       </p:ext>
     </p:extLst>
   </p:cSld>
@@ -17588,7 +15708,7 @@
           <p:cNvPr id="11" name="">
             <a:extLst xmlns:a="http://schemas.openxmlformats.org/drawingml/2006/main">
               <a:ext uri="{FF2B5EF4-FFF2-40B4-BE49-F238E27FC236}">
-                <a16:creationId xmlns:a16="http://schemas.microsoft.com/office/drawing/2014/main" id="{A8E69374-7D6C-46B0-A0B1-22ABA82E5C98}"/>
+                <a16:creationId xmlns:a16="http://schemas.microsoft.com/office/drawing/2014/main" id="{FA18EDEE-A8DA-4E9D-BED7-FC73B28CF698}"/>
               </a:ext>
             </a:extLst>
           </p:cNvPr>
@@ -17618,7 +15738,7 @@
           <p:cNvPr id="2" name="">
             <a:extLst xmlns:a="http://schemas.openxmlformats.org/drawingml/2006/main">
               <a:ext uri="{FF2B5EF4-FFF2-40B4-BE49-F238E27FC236}">
-                <a16:creationId xmlns:a16="http://schemas.microsoft.com/office/drawing/2014/main" id="{7CFCBA22-F589-4E86-ACD6-CBF3200D098F}"/>
+                <a16:creationId xmlns:a16="http://schemas.microsoft.com/office/drawing/2014/main" id="{117D3404-94D6-41E2-9370-B70E7A43B8ED}"/>
               </a:ext>
             </a:extLst>
           </p:cNvPr>
@@ -17675,7 +15795,7 @@
           <p:cNvPr id="3" name="">
             <a:extLst xmlns:a="http://schemas.openxmlformats.org/drawingml/2006/main">
               <a:ext uri="{FF2B5EF4-FFF2-40B4-BE49-F238E27FC236}">
-                <a16:creationId xmlns:a16="http://schemas.microsoft.com/office/drawing/2014/main" id="{C36016CE-F96B-4A32-9BFD-8C9FDADCAB90}"/>
+                <a16:creationId xmlns:a16="http://schemas.microsoft.com/office/drawing/2014/main" id="{A9AEA81E-97A5-461D-95F5-343728F804CB}"/>
               </a:ext>
             </a:extLst>
           </p:cNvPr>
@@ -17732,7 +15852,7 @@
           <p:cNvPr id="4" name="">
             <a:extLst xmlns:a="http://schemas.openxmlformats.org/drawingml/2006/main">
               <a:ext uri="{FF2B5EF4-FFF2-40B4-BE49-F238E27FC236}">
-                <a16:creationId xmlns:a16="http://schemas.microsoft.com/office/drawing/2014/main" id="{84E60096-23BD-45B0-AC49-F1C1EF936FD0}"/>
+                <a16:creationId xmlns:a16="http://schemas.microsoft.com/office/drawing/2014/main" id="{9826C024-56AA-4372-A53F-40B61EC956D8}"/>
               </a:ext>
             </a:extLst>
           </p:cNvPr>
@@ -17789,7 +15909,7 @@
           <p:cNvPr id="5" name="">
             <a:extLst xmlns:a="http://schemas.openxmlformats.org/drawingml/2006/main">
               <a:ext uri="{FF2B5EF4-FFF2-40B4-BE49-F238E27FC236}">
-                <a16:creationId xmlns:a16="http://schemas.microsoft.com/office/drawing/2014/main" id="{6A0F759D-1371-440E-A721-A4B1E024631F}"/>
+                <a16:creationId xmlns:a16="http://schemas.microsoft.com/office/drawing/2014/main" id="{D7FD0220-F628-4D24-9A03-9C140FC2C216}"/>
               </a:ext>
             </a:extLst>
           </p:cNvPr>
@@ -17846,7 +15966,7 @@
           <p:cNvPr id="6" name="">
             <a:extLst xmlns:a="http://schemas.openxmlformats.org/drawingml/2006/main">
               <a:ext uri="{FF2B5EF4-FFF2-40B4-BE49-F238E27FC236}">
-                <a16:creationId xmlns:a16="http://schemas.microsoft.com/office/drawing/2014/main" id="{AEFD632B-6915-42D1-B226-D7F280E97701}"/>
+                <a16:creationId xmlns:a16="http://schemas.microsoft.com/office/drawing/2014/main" id="{ED54508F-6C3E-4126-B787-7A993C5C9FC2}"/>
               </a:ext>
             </a:extLst>
           </p:cNvPr>
@@ -17903,7 +16023,7 @@
           <p:cNvPr id="7" name="">
             <a:extLst xmlns:a="http://schemas.openxmlformats.org/drawingml/2006/main">
               <a:ext uri="{FF2B5EF4-FFF2-40B4-BE49-F238E27FC236}">
-                <a16:creationId xmlns:a16="http://schemas.microsoft.com/office/drawing/2014/main" id="{9D31118C-6E75-45AC-BCA4-70339ADCB7C7}"/>
+                <a16:creationId xmlns:a16="http://schemas.microsoft.com/office/drawing/2014/main" id="{6786D73F-8925-4069-9E47-137C9166E1CE}"/>
               </a:ext>
             </a:extLst>
           </p:cNvPr>
@@ -17960,7 +16080,7 @@
           <p:cNvPr id="8" name="">
             <a:extLst xmlns:a="http://schemas.openxmlformats.org/drawingml/2006/main">
               <a:ext uri="{FF2B5EF4-FFF2-40B4-BE49-F238E27FC236}">
-                <a16:creationId xmlns:a16="http://schemas.microsoft.com/office/drawing/2014/main" id="{A45E5870-E34B-453B-9239-8D894B58F046}"/>
+                <a16:creationId xmlns:a16="http://schemas.microsoft.com/office/drawing/2014/main" id="{4C172CD3-8793-428E-B725-77D10A4B1258}"/>
               </a:ext>
             </a:extLst>
           </p:cNvPr>
@@ -18017,7 +16137,7 @@
           <p:cNvPr id="9" name="">
             <a:extLst xmlns:a="http://schemas.openxmlformats.org/drawingml/2006/main">
               <a:ext uri="{FF2B5EF4-FFF2-40B4-BE49-F238E27FC236}">
-                <a16:creationId xmlns:a16="http://schemas.microsoft.com/office/drawing/2014/main" id="{1375426F-83F7-4ED1-A936-F28D0E03FCFE}"/>
+                <a16:creationId xmlns:a16="http://schemas.microsoft.com/office/drawing/2014/main" id="{E716B093-CF7C-4A6F-B30B-AA5ADFD09605}"/>
               </a:ext>
             </a:extLst>
           </p:cNvPr>
@@ -18074,7 +16194,7 @@
           <p:cNvPr id="10" name="">
             <a:extLst xmlns:a="http://schemas.openxmlformats.org/drawingml/2006/main">
               <a:ext uri="{FF2B5EF4-FFF2-40B4-BE49-F238E27FC236}">
-                <a16:creationId xmlns:a16="http://schemas.microsoft.com/office/drawing/2014/main" id="{A59082CF-F87E-48AB-AED3-426C00672B78}"/>
+                <a16:creationId xmlns:a16="http://schemas.microsoft.com/office/drawing/2014/main" id="{9B5A1AC8-4C3F-4FD9-BC8B-836445D217CF}"/>
               </a:ext>
             </a:extLst>
           </p:cNvPr>
@@ -18129,7 +16249,7 @@
     </p:spTree>
     <p:extLst>
       <p:ext uri="{BB962C8B-B14F-4D97-AF65-F5344CB8AC3E}">
-        <p14:creationId xmlns:p14="http://schemas.microsoft.com/office/powerpoint/2010/main" val="150852210"/>
+        <p14:creationId xmlns:p14="http://schemas.microsoft.com/office/powerpoint/2010/main" val="212828518"/>
       </p:ext>
     </p:extLst>
   </p:cSld>
@@ -18160,7 +16280,7 @@
           <p:cNvPr id="11" name="">
             <a:extLst xmlns:a="http://schemas.openxmlformats.org/drawingml/2006/main">
               <a:ext uri="{FF2B5EF4-FFF2-40B4-BE49-F238E27FC236}">
-                <a16:creationId xmlns:a16="http://schemas.microsoft.com/office/drawing/2014/main" id="{9D1EF8C1-7B5F-4128-967E-674C46DA0940}"/>
+                <a16:creationId xmlns:a16="http://schemas.microsoft.com/office/drawing/2014/main" id="{4DEE6A2C-9E08-4BCA-AAB5-6AD5C735ABC6}"/>
               </a:ext>
             </a:extLst>
           </p:cNvPr>
@@ -18190,7 +16310,7 @@
           <p:cNvPr id="2" name="">
             <a:extLst xmlns:a="http://schemas.openxmlformats.org/drawingml/2006/main">
               <a:ext uri="{FF2B5EF4-FFF2-40B4-BE49-F238E27FC236}">
-                <a16:creationId xmlns:a16="http://schemas.microsoft.com/office/drawing/2014/main" id="{E1F59A40-95E5-4FF9-BF4C-1618316095A0}"/>
+                <a16:creationId xmlns:a16="http://schemas.microsoft.com/office/drawing/2014/main" id="{2AC71255-3760-4908-BD90-13668E25FFDF}"/>
               </a:ext>
             </a:extLst>
           </p:cNvPr>
@@ -18247,7 +16367,7 @@
           <p:cNvPr id="3" name="">
             <a:extLst xmlns:a="http://schemas.openxmlformats.org/drawingml/2006/main">
               <a:ext uri="{FF2B5EF4-FFF2-40B4-BE49-F238E27FC236}">
-                <a16:creationId xmlns:a16="http://schemas.microsoft.com/office/drawing/2014/main" id="{C767CF96-D360-4F64-9436-EEA9BE877DEB}"/>
+                <a16:creationId xmlns:a16="http://schemas.microsoft.com/office/drawing/2014/main" id="{0BB28A78-9E1A-4A60-8DE5-48A32DE13E2D}"/>
               </a:ext>
             </a:extLst>
           </p:cNvPr>
@@ -18304,7 +16424,7 @@
           <p:cNvPr id="4" name="">
             <a:extLst xmlns:a="http://schemas.openxmlformats.org/drawingml/2006/main">
               <a:ext uri="{FF2B5EF4-FFF2-40B4-BE49-F238E27FC236}">
-                <a16:creationId xmlns:a16="http://schemas.microsoft.com/office/drawing/2014/main" id="{17997F18-AD96-4BC1-A7CE-822076092226}"/>
+                <a16:creationId xmlns:a16="http://schemas.microsoft.com/office/drawing/2014/main" id="{344AB5A8-CBA7-4AA3-9E46-1B3F1F90E1B6}"/>
               </a:ext>
             </a:extLst>
           </p:cNvPr>
@@ -18361,7 +16481,7 @@
           <p:cNvPr id="5" name="">
             <a:extLst xmlns:a="http://schemas.openxmlformats.org/drawingml/2006/main">
               <a:ext uri="{FF2B5EF4-FFF2-40B4-BE49-F238E27FC236}">
-                <a16:creationId xmlns:a16="http://schemas.microsoft.com/office/drawing/2014/main" id="{95D8E97C-EADA-4BA5-B2E0-04D23A3C845F}"/>
+                <a16:creationId xmlns:a16="http://schemas.microsoft.com/office/drawing/2014/main" id="{0FC03F88-8278-469C-A9C4-994CB323EA93}"/>
               </a:ext>
             </a:extLst>
           </p:cNvPr>
@@ -18418,7 +16538,7 @@
           <p:cNvPr id="6" name="">
             <a:extLst xmlns:a="http://schemas.openxmlformats.org/drawingml/2006/main">
               <a:ext uri="{FF2B5EF4-FFF2-40B4-BE49-F238E27FC236}">
-                <a16:creationId xmlns:a16="http://schemas.microsoft.com/office/drawing/2014/main" id="{C9AB8F29-1CE3-407F-AB34-9D306AB21464}"/>
+                <a16:creationId xmlns:a16="http://schemas.microsoft.com/office/drawing/2014/main" id="{E77352A9-AAFC-4729-A261-BA5D67CDE6F3}"/>
               </a:ext>
             </a:extLst>
           </p:cNvPr>
@@ -18475,7 +16595,7 @@
           <p:cNvPr id="7" name="">
             <a:extLst xmlns:a="http://schemas.openxmlformats.org/drawingml/2006/main">
               <a:ext uri="{FF2B5EF4-FFF2-40B4-BE49-F238E27FC236}">
-                <a16:creationId xmlns:a16="http://schemas.microsoft.com/office/drawing/2014/main" id="{7A097C7A-F79C-42A2-A68B-0649C8F489FA}"/>
+                <a16:creationId xmlns:a16="http://schemas.microsoft.com/office/drawing/2014/main" id="{84915EA2-C887-4F2F-9AE9-C8A897368B5F}"/>
               </a:ext>
             </a:extLst>
           </p:cNvPr>
@@ -18532,7 +16652,7 @@
           <p:cNvPr id="8" name="">
             <a:extLst xmlns:a="http://schemas.openxmlformats.org/drawingml/2006/main">
               <a:ext uri="{FF2B5EF4-FFF2-40B4-BE49-F238E27FC236}">
-                <a16:creationId xmlns:a16="http://schemas.microsoft.com/office/drawing/2014/main" id="{B033CFB1-7A5D-4D60-9E9F-42812E3353B7}"/>
+                <a16:creationId xmlns:a16="http://schemas.microsoft.com/office/drawing/2014/main" id="{3F63426E-47AB-4BFA-9EC7-2F84D2B628A7}"/>
               </a:ext>
             </a:extLst>
           </p:cNvPr>
@@ -18589,7 +16709,7 @@
           <p:cNvPr id="9" name="">
             <a:extLst xmlns:a="http://schemas.openxmlformats.org/drawingml/2006/main">
               <a:ext uri="{FF2B5EF4-FFF2-40B4-BE49-F238E27FC236}">
-                <a16:creationId xmlns:a16="http://schemas.microsoft.com/office/drawing/2014/main" id="{9D8FEFF6-3DB0-4DEE-98C7-DECDD11631DC}"/>
+                <a16:creationId xmlns:a16="http://schemas.microsoft.com/office/drawing/2014/main" id="{19BC05D5-0B9A-4844-A2E2-D41328FBB50A}"/>
               </a:ext>
             </a:extLst>
           </p:cNvPr>
@@ -18646,7 +16766,7 @@
           <p:cNvPr id="10" name="">
             <a:extLst xmlns:a="http://schemas.openxmlformats.org/drawingml/2006/main">
               <a:ext uri="{FF2B5EF4-FFF2-40B4-BE49-F238E27FC236}">
-                <a16:creationId xmlns:a16="http://schemas.microsoft.com/office/drawing/2014/main" id="{7C911DC6-D19C-4C3A-B560-491CF133535F}"/>
+                <a16:creationId xmlns:a16="http://schemas.microsoft.com/office/drawing/2014/main" id="{13B69A9E-93BE-4B87-AB23-E3C387EB2C1C}"/>
               </a:ext>
             </a:extLst>
           </p:cNvPr>
@@ -18701,7 +16821,7 @@
     </p:spTree>
     <p:extLst>
       <p:ext uri="{BB962C8B-B14F-4D97-AF65-F5344CB8AC3E}">
-        <p14:creationId xmlns:p14="http://schemas.microsoft.com/office/powerpoint/2010/main" val="734657360"/>
+        <p14:creationId xmlns:p14="http://schemas.microsoft.com/office/powerpoint/2010/main" val="1890811241"/>
       </p:ext>
     </p:extLst>
   </p:cSld>
@@ -18732,7 +16852,7 @@
           <p:cNvPr id="11" name="">
             <a:extLst xmlns:a="http://schemas.openxmlformats.org/drawingml/2006/main">
               <a:ext uri="{FF2B5EF4-FFF2-40B4-BE49-F238E27FC236}">
-                <a16:creationId xmlns:a16="http://schemas.microsoft.com/office/drawing/2014/main" id="{846200F6-8662-4F9E-AAE4-0B2381BF6795}"/>
+                <a16:creationId xmlns:a16="http://schemas.microsoft.com/office/drawing/2014/main" id="{BAA82A67-D69D-4FB0-BA31-2849E0FEDBB1}"/>
               </a:ext>
             </a:extLst>
           </p:cNvPr>
@@ -18762,7 +16882,7 @@
           <p:cNvPr id="2" name="">
             <a:extLst xmlns:a="http://schemas.openxmlformats.org/drawingml/2006/main">
               <a:ext uri="{FF2B5EF4-FFF2-40B4-BE49-F238E27FC236}">
-                <a16:creationId xmlns:a16="http://schemas.microsoft.com/office/drawing/2014/main" id="{E6F7E05E-E9DB-4583-9B1C-4132EE511DE9}"/>
+                <a16:creationId xmlns:a16="http://schemas.microsoft.com/office/drawing/2014/main" id="{415DE2B4-3081-4E1F-AF9E-A0012640E5B2}"/>
               </a:ext>
             </a:extLst>
           </p:cNvPr>
@@ -18819,7 +16939,7 @@
           <p:cNvPr id="3" name="">
             <a:extLst xmlns:a="http://schemas.openxmlformats.org/drawingml/2006/main">
               <a:ext uri="{FF2B5EF4-FFF2-40B4-BE49-F238E27FC236}">
-                <a16:creationId xmlns:a16="http://schemas.microsoft.com/office/drawing/2014/main" id="{47DE8243-A048-45DB-BFDD-47B845746F0F}"/>
+                <a16:creationId xmlns:a16="http://schemas.microsoft.com/office/drawing/2014/main" id="{25EC502B-72A9-42C2-94C3-C87377A30A79}"/>
               </a:ext>
             </a:extLst>
           </p:cNvPr>
@@ -18876,7 +16996,7 @@
           <p:cNvPr id="4" name="">
             <a:extLst xmlns:a="http://schemas.openxmlformats.org/drawingml/2006/main">
               <a:ext uri="{FF2B5EF4-FFF2-40B4-BE49-F238E27FC236}">
-                <a16:creationId xmlns:a16="http://schemas.microsoft.com/office/drawing/2014/main" id="{2C0B98A0-B4AF-44B8-98BA-84E003E356EA}"/>
+                <a16:creationId xmlns:a16="http://schemas.microsoft.com/office/drawing/2014/main" id="{AD573D9D-BF99-4AAB-AA7B-9F4761474B4B}"/>
               </a:ext>
             </a:extLst>
           </p:cNvPr>
@@ -18933,7 +17053,7 @@
           <p:cNvPr id="5" name="">
             <a:extLst xmlns:a="http://schemas.openxmlformats.org/drawingml/2006/main">
               <a:ext uri="{FF2B5EF4-FFF2-40B4-BE49-F238E27FC236}">
-                <a16:creationId xmlns:a16="http://schemas.microsoft.com/office/drawing/2014/main" id="{01DE0098-1890-42AD-8865-9FED06A57E36}"/>
+                <a16:creationId xmlns:a16="http://schemas.microsoft.com/office/drawing/2014/main" id="{7881423D-A75A-4923-820E-0C863A2A1137}"/>
               </a:ext>
             </a:extLst>
           </p:cNvPr>
@@ -18990,7 +17110,7 @@
           <p:cNvPr id="6" name="">
             <a:extLst xmlns:a="http://schemas.openxmlformats.org/drawingml/2006/main">
               <a:ext uri="{FF2B5EF4-FFF2-40B4-BE49-F238E27FC236}">
-                <a16:creationId xmlns:a16="http://schemas.microsoft.com/office/drawing/2014/main" id="{55568B37-DC68-4351-8904-5F068A5B367C}"/>
+                <a16:creationId xmlns:a16="http://schemas.microsoft.com/office/drawing/2014/main" id="{CF8D9269-94A4-4B0D-9469-57F8F01E6D4D}"/>
               </a:ext>
             </a:extLst>
           </p:cNvPr>
@@ -19047,7 +17167,7 @@
           <p:cNvPr id="7" name="">
             <a:extLst xmlns:a="http://schemas.openxmlformats.org/drawingml/2006/main">
               <a:ext uri="{FF2B5EF4-FFF2-40B4-BE49-F238E27FC236}">
-                <a16:creationId xmlns:a16="http://schemas.microsoft.com/office/drawing/2014/main" id="{9AEB10F9-7DE1-4CD6-AA27-26CE7AF6CAED}"/>
+                <a16:creationId xmlns:a16="http://schemas.microsoft.com/office/drawing/2014/main" id="{D511D24F-1501-47A4-881E-7313FDB4810E}"/>
               </a:ext>
             </a:extLst>
           </p:cNvPr>
@@ -19104,7 +17224,7 @@
           <p:cNvPr id="8" name="">
             <a:extLst xmlns:a="http://schemas.openxmlformats.org/drawingml/2006/main">
               <a:ext uri="{FF2B5EF4-FFF2-40B4-BE49-F238E27FC236}">
-                <a16:creationId xmlns:a16="http://schemas.microsoft.com/office/drawing/2014/main" id="{5F7F9731-649E-4E73-8DA0-A6F128BAB7B5}"/>
+                <a16:creationId xmlns:a16="http://schemas.microsoft.com/office/drawing/2014/main" id="{6BFF061F-D016-47D3-9381-ACA5DDC6CA89}"/>
               </a:ext>
             </a:extLst>
           </p:cNvPr>
@@ -19161,7 +17281,7 @@
           <p:cNvPr id="9" name="">
             <a:extLst xmlns:a="http://schemas.openxmlformats.org/drawingml/2006/main">
               <a:ext uri="{FF2B5EF4-FFF2-40B4-BE49-F238E27FC236}">
-                <a16:creationId xmlns:a16="http://schemas.microsoft.com/office/drawing/2014/main" id="{5D8A3C31-0B39-4606-BDD9-77CD10EA4464}"/>
+                <a16:creationId xmlns:a16="http://schemas.microsoft.com/office/drawing/2014/main" id="{17D5D775-2E8B-496F-B4CD-34864EBCF687}"/>
               </a:ext>
             </a:extLst>
           </p:cNvPr>
@@ -19218,7 +17338,7 @@
           <p:cNvPr id="10" name="">
             <a:extLst xmlns:a="http://schemas.openxmlformats.org/drawingml/2006/main">
               <a:ext uri="{FF2B5EF4-FFF2-40B4-BE49-F238E27FC236}">
-                <a16:creationId xmlns:a16="http://schemas.microsoft.com/office/drawing/2014/main" id="{E56B93AB-8927-418A-9496-793720B56A84}"/>
+                <a16:creationId xmlns:a16="http://schemas.microsoft.com/office/drawing/2014/main" id="{958F6F73-20CC-46B3-AD0B-79753E2AF597}"/>
               </a:ext>
             </a:extLst>
           </p:cNvPr>
@@ -19273,7 +17393,7 @@
     </p:spTree>
     <p:extLst>
       <p:ext uri="{BB962C8B-B14F-4D97-AF65-F5344CB8AC3E}">
-        <p14:creationId xmlns:p14="http://schemas.microsoft.com/office/powerpoint/2010/main" val="1612053125"/>
+        <p14:creationId xmlns:p14="http://schemas.microsoft.com/office/powerpoint/2010/main" val="477602496"/>
       </p:ext>
     </p:extLst>
   </p:cSld>
@@ -19304,7 +17424,7 @@
           <p:cNvPr id="12" name="">
             <a:extLst xmlns:a="http://schemas.openxmlformats.org/drawingml/2006/main">
               <a:ext uri="{FF2B5EF4-FFF2-40B4-BE49-F238E27FC236}">
-                <a16:creationId xmlns:a16="http://schemas.microsoft.com/office/drawing/2014/main" id="{8CF65C7F-621C-4FCF-9E37-EBF09DDA0E56}"/>
+                <a16:creationId xmlns:a16="http://schemas.microsoft.com/office/drawing/2014/main" id="{62902885-0707-49BD-B555-BCA0878D5A79}"/>
               </a:ext>
             </a:extLst>
           </p:cNvPr>
@@ -19334,7 +17454,7 @@
           <p:cNvPr id="2" name="">
             <a:extLst xmlns:a="http://schemas.openxmlformats.org/drawingml/2006/main">
               <a:ext uri="{FF2B5EF4-FFF2-40B4-BE49-F238E27FC236}">
-                <a16:creationId xmlns:a16="http://schemas.microsoft.com/office/drawing/2014/main" id="{7F577395-CDB0-4E48-A8DD-BE4425F274F1}"/>
+                <a16:creationId xmlns:a16="http://schemas.microsoft.com/office/drawing/2014/main" id="{21872139-629C-4A3A-8EBE-FAA76C26D2BA}"/>
               </a:ext>
             </a:extLst>
           </p:cNvPr>
@@ -19391,7 +17511,7 @@
           <p:cNvPr id="3" name="">
             <a:extLst xmlns:a="http://schemas.openxmlformats.org/drawingml/2006/main">
               <a:ext uri="{FF2B5EF4-FFF2-40B4-BE49-F238E27FC236}">
-                <a16:creationId xmlns:a16="http://schemas.microsoft.com/office/drawing/2014/main" id="{762213B8-BDAB-4A6A-986B-0340259418F5}"/>
+                <a16:creationId xmlns:a16="http://schemas.microsoft.com/office/drawing/2014/main" id="{A4C73877-07F0-45F5-9BF1-768E25FFB537}"/>
               </a:ext>
             </a:extLst>
           </p:cNvPr>
@@ -19448,7 +17568,7 @@
           <p:cNvPr id="4" name="">
             <a:extLst xmlns:a="http://schemas.openxmlformats.org/drawingml/2006/main">
               <a:ext uri="{FF2B5EF4-FFF2-40B4-BE49-F238E27FC236}">
-                <a16:creationId xmlns:a16="http://schemas.microsoft.com/office/drawing/2014/main" id="{492841F1-BE7A-42B7-89B0-9F54E31E014D}"/>
+                <a16:creationId xmlns:a16="http://schemas.microsoft.com/office/drawing/2014/main" id="{300D2FB9-8792-4B0F-8CEE-9B942A57C3E3}"/>
               </a:ext>
             </a:extLst>
           </p:cNvPr>
@@ -19478,7 +17598,7 @@
           <p:cNvPr id="5" name="">
             <a:extLst xmlns:a="http://schemas.openxmlformats.org/drawingml/2006/main">
               <a:ext uri="{FF2B5EF4-FFF2-40B4-BE49-F238E27FC236}">
-                <a16:creationId xmlns:a16="http://schemas.microsoft.com/office/drawing/2014/main" id="{25816C68-1A71-4F2D-963B-28A678A65E56}"/>
+                <a16:creationId xmlns:a16="http://schemas.microsoft.com/office/drawing/2014/main" id="{EF63EEA9-E135-4635-8EC6-C63B1F7E4C46}"/>
               </a:ext>
             </a:extLst>
           </p:cNvPr>
@@ -19661,7 +17781,7 @@
           <p:cNvPr id="6" name="">
             <a:extLst xmlns:a="http://schemas.openxmlformats.org/drawingml/2006/main">
               <a:ext uri="{FF2B5EF4-FFF2-40B4-BE49-F238E27FC236}">
-                <a16:creationId xmlns:a16="http://schemas.microsoft.com/office/drawing/2014/main" id="{4311F456-FE96-4E2B-827E-07FC258E1E2E}"/>
+                <a16:creationId xmlns:a16="http://schemas.microsoft.com/office/drawing/2014/main" id="{B0A6BC7C-CCFD-46BA-BC70-0D596DBA795B}"/>
               </a:ext>
             </a:extLst>
           </p:cNvPr>
@@ -19718,7 +17838,7 @@
           <p:cNvPr id="7" name="">
             <a:extLst xmlns:a="http://schemas.openxmlformats.org/drawingml/2006/main">
               <a:ext uri="{FF2B5EF4-FFF2-40B4-BE49-F238E27FC236}">
-                <a16:creationId xmlns:a16="http://schemas.microsoft.com/office/drawing/2014/main" id="{BBB76950-480B-4738-B276-87C3AC50C6CD}"/>
+                <a16:creationId xmlns:a16="http://schemas.microsoft.com/office/drawing/2014/main" id="{B337D6B2-EE3A-4B09-ADCD-2EC89F430594}"/>
               </a:ext>
             </a:extLst>
           </p:cNvPr>
@@ -19775,7 +17895,7 @@
           <p:cNvPr id="8" name="">
             <a:extLst xmlns:a="http://schemas.openxmlformats.org/drawingml/2006/main">
               <a:ext uri="{FF2B5EF4-FFF2-40B4-BE49-F238E27FC236}">
-                <a16:creationId xmlns:a16="http://schemas.microsoft.com/office/drawing/2014/main" id="{54A68D1D-E306-433A-ACD9-A73C1080003A}"/>
+                <a16:creationId xmlns:a16="http://schemas.microsoft.com/office/drawing/2014/main" id="{5E01E730-67B4-4F52-9EA7-B0AB4E29E1D3}"/>
               </a:ext>
             </a:extLst>
           </p:cNvPr>
@@ -19832,7 +17952,7 @@
           <p:cNvPr id="9" name="">
             <a:extLst xmlns:a="http://schemas.openxmlformats.org/drawingml/2006/main">
               <a:ext uri="{FF2B5EF4-FFF2-40B4-BE49-F238E27FC236}">
-                <a16:creationId xmlns:a16="http://schemas.microsoft.com/office/drawing/2014/main" id="{903A3002-AB7D-413B-B6F8-C9FC838CFE78}"/>
+                <a16:creationId xmlns:a16="http://schemas.microsoft.com/office/drawing/2014/main" id="{098B8DD3-B3A0-4574-8B93-E4137A98B13C}"/>
               </a:ext>
             </a:extLst>
           </p:cNvPr>
@@ -19889,7 +18009,7 @@
           <p:cNvPr id="10" name="">
             <a:extLst xmlns:a="http://schemas.openxmlformats.org/drawingml/2006/main">
               <a:ext uri="{FF2B5EF4-FFF2-40B4-BE49-F238E27FC236}">
-                <a16:creationId xmlns:a16="http://schemas.microsoft.com/office/drawing/2014/main" id="{8178DD02-2AC0-491C-971E-912E3496DEE8}"/>
+                <a16:creationId xmlns:a16="http://schemas.microsoft.com/office/drawing/2014/main" id="{2DC2716E-4E0E-43C9-AEE0-1913C0A1481E}"/>
               </a:ext>
             </a:extLst>
           </p:cNvPr>
@@ -19946,7 +18066,7 @@
           <p:cNvPr id="11" name="">
             <a:extLst xmlns:a="http://schemas.openxmlformats.org/drawingml/2006/main">
               <a:ext uri="{FF2B5EF4-FFF2-40B4-BE49-F238E27FC236}">
-                <a16:creationId xmlns:a16="http://schemas.microsoft.com/office/drawing/2014/main" id="{D3B3CB2D-174B-4773-8668-0A829EBBAC4E}"/>
+                <a16:creationId xmlns:a16="http://schemas.microsoft.com/office/drawing/2014/main" id="{24299770-E7A5-41DC-992C-841C83FB26F5}"/>
               </a:ext>
             </a:extLst>
           </p:cNvPr>
@@ -20001,7 +18121,7 @@
     </p:spTree>
     <p:extLst>
       <p:ext uri="{BB962C8B-B14F-4D97-AF65-F5344CB8AC3E}">
-        <p14:creationId xmlns:p14="http://schemas.microsoft.com/office/powerpoint/2010/main" val="1959154045"/>
+        <p14:creationId xmlns:p14="http://schemas.microsoft.com/office/powerpoint/2010/main" val="723731599"/>
       </p:ext>
     </p:extLst>
   </p:cSld>
@@ -20032,7 +18152,7 @@
           <p:cNvPr id="13" name="">
             <a:extLst xmlns:a="http://schemas.openxmlformats.org/drawingml/2006/main">
               <a:ext uri="{FF2B5EF4-FFF2-40B4-BE49-F238E27FC236}">
-                <a16:creationId xmlns:a16="http://schemas.microsoft.com/office/drawing/2014/main" id="{14E80E48-F232-4417-BA61-74B3696821CE}"/>
+                <a16:creationId xmlns:a16="http://schemas.microsoft.com/office/drawing/2014/main" id="{C6B09132-FDC6-464D-B5D5-73F6CDFA9A22}"/>
               </a:ext>
             </a:extLst>
           </p:cNvPr>
@@ -20062,7 +18182,7 @@
           <p:cNvPr id="2" name="">
             <a:extLst xmlns:a="http://schemas.openxmlformats.org/drawingml/2006/main">
               <a:ext uri="{FF2B5EF4-FFF2-40B4-BE49-F238E27FC236}">
-                <a16:creationId xmlns:a16="http://schemas.microsoft.com/office/drawing/2014/main" id="{1CC8B679-9D34-484C-A02A-31678F2CBB34}"/>
+                <a16:creationId xmlns:a16="http://schemas.microsoft.com/office/drawing/2014/main" id="{E892B5C5-0DFD-4A2D-8E07-B8C719DE6F74}"/>
               </a:ext>
             </a:extLst>
           </p:cNvPr>
@@ -20119,7 +18239,7 @@
           <p:cNvPr id="3" name="">
             <a:extLst xmlns:a="http://schemas.openxmlformats.org/drawingml/2006/main">
               <a:ext uri="{FF2B5EF4-FFF2-40B4-BE49-F238E27FC236}">
-                <a16:creationId xmlns:a16="http://schemas.microsoft.com/office/drawing/2014/main" id="{8B0A91F4-1CD8-4E74-9EB4-EA46121664EC}"/>
+                <a16:creationId xmlns:a16="http://schemas.microsoft.com/office/drawing/2014/main" id="{12D503BF-291C-4601-A341-3FCFD98DF4B3}"/>
               </a:ext>
             </a:extLst>
           </p:cNvPr>
@@ -20176,7 +18296,7 @@
           <p:cNvPr id="4" name="">
             <a:extLst xmlns:a="http://schemas.openxmlformats.org/drawingml/2006/main">
               <a:ext uri="{FF2B5EF4-FFF2-40B4-BE49-F238E27FC236}">
-                <a16:creationId xmlns:a16="http://schemas.microsoft.com/office/drawing/2014/main" id="{59A2B78C-6D3E-49E0-B2D8-5C5299C6C6B7}"/>
+                <a16:creationId xmlns:a16="http://schemas.microsoft.com/office/drawing/2014/main" id="{CFB7FD5A-4A38-4F32-8241-6BEB036DC12F}"/>
               </a:ext>
             </a:extLst>
           </p:cNvPr>
@@ -20233,7 +18353,7 @@
           <p:cNvPr id="5" name="">
             <a:extLst xmlns:a="http://schemas.openxmlformats.org/drawingml/2006/main">
               <a:ext uri="{FF2B5EF4-FFF2-40B4-BE49-F238E27FC236}">
-                <a16:creationId xmlns:a16="http://schemas.microsoft.com/office/drawing/2014/main" id="{ECA2EEFF-F733-47B1-81F0-61F5137D085F}"/>
+                <a16:creationId xmlns:a16="http://schemas.microsoft.com/office/drawing/2014/main" id="{7C2D9AF7-F6BA-456E-81B1-253C2D65A6F1}"/>
               </a:ext>
             </a:extLst>
           </p:cNvPr>
@@ -20290,7 +18410,7 @@
           <p:cNvPr id="6" name="">
             <a:extLst xmlns:a="http://schemas.openxmlformats.org/drawingml/2006/main">
               <a:ext uri="{FF2B5EF4-FFF2-40B4-BE49-F238E27FC236}">
-                <a16:creationId xmlns:a16="http://schemas.microsoft.com/office/drawing/2014/main" id="{E5D83415-D5AC-4AB1-8ED0-75681F7C9EBF}"/>
+                <a16:creationId xmlns:a16="http://schemas.microsoft.com/office/drawing/2014/main" id="{2068DB4E-9402-47DD-A634-6CD771B804F0}"/>
               </a:ext>
             </a:extLst>
           </p:cNvPr>
@@ -20347,7 +18467,7 @@
           <p:cNvPr id="7" name="">
             <a:extLst xmlns:a="http://schemas.openxmlformats.org/drawingml/2006/main">
               <a:ext uri="{FF2B5EF4-FFF2-40B4-BE49-F238E27FC236}">
-                <a16:creationId xmlns:a16="http://schemas.microsoft.com/office/drawing/2014/main" id="{7D01D806-8D35-4874-B2D4-7ABDED5F6E9A}"/>
+                <a16:creationId xmlns:a16="http://schemas.microsoft.com/office/drawing/2014/main" id="{3C30D389-66C9-4276-A71F-F3D41A423610}"/>
               </a:ext>
             </a:extLst>
           </p:cNvPr>
@@ -20404,7 +18524,7 @@
           <p:cNvPr id="8" name="">
             <a:extLst xmlns:a="http://schemas.openxmlformats.org/drawingml/2006/main">
               <a:ext uri="{FF2B5EF4-FFF2-40B4-BE49-F238E27FC236}">
-                <a16:creationId xmlns:a16="http://schemas.microsoft.com/office/drawing/2014/main" id="{B6D0F4C7-0EB7-4B33-96B4-CC23CEF72713}"/>
+                <a16:creationId xmlns:a16="http://schemas.microsoft.com/office/drawing/2014/main" id="{F3096FAE-5FA3-45EE-ABC1-D9C5EBA24346}"/>
               </a:ext>
             </a:extLst>
           </p:cNvPr>
@@ -20461,7 +18581,7 @@
           <p:cNvPr id="9" name="">
             <a:extLst xmlns:a="http://schemas.openxmlformats.org/drawingml/2006/main">
               <a:ext uri="{FF2B5EF4-FFF2-40B4-BE49-F238E27FC236}">
-                <a16:creationId xmlns:a16="http://schemas.microsoft.com/office/drawing/2014/main" id="{F089509B-31D7-4EF4-B067-AE50D7A56E4D}"/>
+                <a16:creationId xmlns:a16="http://schemas.microsoft.com/office/drawing/2014/main" id="{C426231B-14C6-47A8-AB19-B9F5420FE6D4}"/>
               </a:ext>
             </a:extLst>
           </p:cNvPr>
@@ -20518,7 +18638,7 @@
           <p:cNvPr id="10" name="">
             <a:extLst xmlns:a="http://schemas.openxmlformats.org/drawingml/2006/main">
               <a:ext uri="{FF2B5EF4-FFF2-40B4-BE49-F238E27FC236}">
-                <a16:creationId xmlns:a16="http://schemas.microsoft.com/office/drawing/2014/main" id="{5F378177-DE14-457C-9859-7D685DBBE586}"/>
+                <a16:creationId xmlns:a16="http://schemas.microsoft.com/office/drawing/2014/main" id="{3144D7E3-A265-43B4-B78B-F356E551444F}"/>
               </a:ext>
             </a:extLst>
           </p:cNvPr>
@@ -20575,7 +18695,7 @@
           <p:cNvPr id="11" name="">
             <a:extLst xmlns:a="http://schemas.openxmlformats.org/drawingml/2006/main">
               <a:ext uri="{FF2B5EF4-FFF2-40B4-BE49-F238E27FC236}">
-                <a16:creationId xmlns:a16="http://schemas.microsoft.com/office/drawing/2014/main" id="{5B806DFF-CF3E-4112-B9D3-CA8F2198D12D}"/>
+                <a16:creationId xmlns:a16="http://schemas.microsoft.com/office/drawing/2014/main" id="{82FE6A36-5759-4B71-8132-BF43863A5AF1}"/>
               </a:ext>
             </a:extLst>
           </p:cNvPr>
@@ -20632,7 +18752,7 @@
           <p:cNvPr id="12" name="">
             <a:extLst xmlns:a="http://schemas.openxmlformats.org/drawingml/2006/main">
               <a:ext uri="{FF2B5EF4-FFF2-40B4-BE49-F238E27FC236}">
-                <a16:creationId xmlns:a16="http://schemas.microsoft.com/office/drawing/2014/main" id="{2CEF8C6C-39F8-4903-8E94-37C2482623EE}"/>
+                <a16:creationId xmlns:a16="http://schemas.microsoft.com/office/drawing/2014/main" id="{CF0CFE59-9CEC-44B9-81D8-7F7ABFDB65DB}"/>
               </a:ext>
             </a:extLst>
           </p:cNvPr>
@@ -20687,7 +18807,7 @@
     </p:spTree>
     <p:extLst>
       <p:ext uri="{BB962C8B-B14F-4D97-AF65-F5344CB8AC3E}">
-        <p14:creationId xmlns:p14="http://schemas.microsoft.com/office/powerpoint/2010/main" val="1657700331"/>
+        <p14:creationId xmlns:p14="http://schemas.microsoft.com/office/powerpoint/2010/main" val="849953547"/>
       </p:ext>
     </p:extLst>
   </p:cSld>
@@ -20718,7 +18838,7 @@
           <p:cNvPr id="7" name="">
             <a:extLst xmlns:a="http://schemas.openxmlformats.org/drawingml/2006/main">
               <a:ext uri="{FF2B5EF4-FFF2-40B4-BE49-F238E27FC236}">
-                <a16:creationId xmlns:a16="http://schemas.microsoft.com/office/drawing/2014/main" id="{D3E6BA5B-E31F-4A90-8CE6-76D48CA8C469}"/>
+                <a16:creationId xmlns:a16="http://schemas.microsoft.com/office/drawing/2014/main" id="{F02CA113-12DE-4265-A96F-6A863245A5F2}"/>
               </a:ext>
             </a:extLst>
           </p:cNvPr>
@@ -20748,7 +18868,7 @@
           <p:cNvPr id="2" name="">
             <a:extLst xmlns:a="http://schemas.openxmlformats.org/drawingml/2006/main">
               <a:ext uri="{FF2B5EF4-FFF2-40B4-BE49-F238E27FC236}">
-                <a16:creationId xmlns:a16="http://schemas.microsoft.com/office/drawing/2014/main" id="{70BD8E04-518B-4376-B49B-B8EC8AA5E6FA}"/>
+                <a16:creationId xmlns:a16="http://schemas.microsoft.com/office/drawing/2014/main" id="{15B6D02C-788B-4D60-B5C1-F86A14B9095A}"/>
               </a:ext>
             </a:extLst>
           </p:cNvPr>
@@ -20805,7 +18925,7 @@
           <p:cNvPr id="3" name="">
             <a:extLst xmlns:a="http://schemas.openxmlformats.org/drawingml/2006/main">
               <a:ext uri="{FF2B5EF4-FFF2-40B4-BE49-F238E27FC236}">
-                <a16:creationId xmlns:a16="http://schemas.microsoft.com/office/drawing/2014/main" id="{1E8E7A8F-55F7-40AE-9164-2EEDA93D0CB2}"/>
+                <a16:creationId xmlns:a16="http://schemas.microsoft.com/office/drawing/2014/main" id="{47710D72-283F-4CAE-AD3D-23760BADE4D5}"/>
               </a:ext>
             </a:extLst>
           </p:cNvPr>
@@ -20862,7 +18982,7 @@
           <p:cNvPr id="4" name="">
             <a:extLst xmlns:a="http://schemas.openxmlformats.org/drawingml/2006/main">
               <a:ext uri="{FF2B5EF4-FFF2-40B4-BE49-F238E27FC236}">
-                <a16:creationId xmlns:a16="http://schemas.microsoft.com/office/drawing/2014/main" id="{52C210E1-22DB-45ED-A08E-B8F3243F8582}"/>
+                <a16:creationId xmlns:a16="http://schemas.microsoft.com/office/drawing/2014/main" id="{861497D9-26B3-4E37-B4E0-52CAAE6324CC}"/>
               </a:ext>
             </a:extLst>
           </p:cNvPr>
@@ -20892,7 +19012,7 @@
           <p:cNvPr id="5" name="">
             <a:extLst xmlns:a="http://schemas.openxmlformats.org/drawingml/2006/main">
               <a:ext uri="{FF2B5EF4-FFF2-40B4-BE49-F238E27FC236}">
-                <a16:creationId xmlns:a16="http://schemas.microsoft.com/office/drawing/2014/main" id="{EC042D46-83AA-4EDB-A9CA-734AFE0F4DF4}"/>
+                <a16:creationId xmlns:a16="http://schemas.microsoft.com/office/drawing/2014/main" id="{B6A81E48-073D-4A70-A0C9-CE3AEBA11A90}"/>
               </a:ext>
             </a:extLst>
           </p:cNvPr>
@@ -20949,7 +19069,7 @@
           <p:cNvPr id="6" name="">
             <a:extLst xmlns:a="http://schemas.openxmlformats.org/drawingml/2006/main">
               <a:ext uri="{FF2B5EF4-FFF2-40B4-BE49-F238E27FC236}">
-                <a16:creationId xmlns:a16="http://schemas.microsoft.com/office/drawing/2014/main" id="{758FBE4D-6261-43C1-9BD4-40BE1F188E84}"/>
+                <a16:creationId xmlns:a16="http://schemas.microsoft.com/office/drawing/2014/main" id="{DC3405AB-BEE5-47B2-8B0A-CB9C662DF98F}"/>
               </a:ext>
             </a:extLst>
           </p:cNvPr>
@@ -21004,7 +19124,7 @@
     </p:spTree>
     <p:extLst>
       <p:ext uri="{BB962C8B-B14F-4D97-AF65-F5344CB8AC3E}">
-        <p14:creationId xmlns:p14="http://schemas.microsoft.com/office/powerpoint/2010/main" val="1700496101"/>
+        <p14:creationId xmlns:p14="http://schemas.microsoft.com/office/powerpoint/2010/main" val="1854645229"/>
       </p:ext>
     </p:extLst>
   </p:cSld>

--- a/IUEA_Teaching_Plan/decks/CML3112_Week14_Design_Infrastructure.pptx
+++ b/IUEA_Teaching_Plan/decks/CML3112_Week14_Design_Infrastructure.pptx
@@ -423,7 +423,7 @@
 </file>
 
 <file path=ppt/notesSlides/notesSlide1.xml><?xml version="1.0" encoding="utf-8"?>
-<p:notes xmlns:p="http://schemas.openxmlformats.org/presentationml/2006/main">
+<p:notes xmlns:a="http://schemas.openxmlformats.org/drawingml/2006/main" xmlns:p="http://schemas.openxmlformats.org/presentationml/2006/main">
   <p:cSld>
     <p:spTree>
       <p:nvGrpSpPr>
@@ -432,13 +432,13 @@
         <p:nvPr/>
       </p:nvGrpSpPr>
       <p:grpSpPr>
-        <a:xfrm xmlns:a="http://schemas.openxmlformats.org/drawingml/2006/main"/>
+        <a:xfrm/>
       </p:grpSpPr>
       <p:sp>
         <p:nvSpPr>
           <p:cNvPr id="2" name="Slide Image Placeholder 1"/>
           <p:cNvSpPr>
-            <a:spLocks xmlns:a="http://schemas.openxmlformats.org/drawingml/2006/main" noGrp="1"/>
+            <a:spLocks noGrp="1"/>
           </p:cNvSpPr>
           <p:nvPr>
             <p:ph type="sldImg" idx="0"/>
@@ -450,7 +450,7 @@
         <p:nvSpPr>
           <p:cNvPr id="3" name="Notes Placeholder 2"/>
           <p:cNvSpPr>
-            <a:spLocks xmlns:a="http://schemas.openxmlformats.org/drawingml/2006/main" noGrp="1"/>
+            <a:spLocks noGrp="1"/>
           </p:cNvSpPr>
           <p:nvPr>
             <p:ph type="body" idx="1"/>
@@ -458,106 +458,91 @@
         </p:nvSpPr>
         <p:spPr/>
         <p:txBody>
-          <a:bodyPr xmlns:a="http://schemas.openxmlformats.org/drawingml/2006/main"/>
-          <a:lstStyle xmlns:a="http://schemas.openxmlformats.org/drawingml/2006/main"/>
-          <a:p xmlns:a="http://schemas.openxmlformats.org/drawingml/2006/main">
-            <a:r>
-              <a:t>PURPOSE</a:t>
-            </a:r>
-          </a:p>
-          <a:p xmlns:a="http://schemas.openxmlformats.org/drawingml/2006/main">
+          <a:bodyPr/>
+          <a:lstStyle/>
+          <a:p>
             <a:r>
               <a:t>Preparing for Practical Test 2</a:t>
             </a:r>
           </a:p>
-          <a:p xmlns:a="http://schemas.openxmlformats.org/drawingml/2006/main">
+          <a:p>
+            <a:r>
+              <a:t>CML3112, Week 14, slide 1</a:t>
+            </a:r>
+          </a:p>
+          <a:p>
             <a:r>
               <a:t/>
             </a:r>
           </a:p>
-          <a:p xmlns:a="http://schemas.openxmlformats.org/drawingml/2006/main">
-            <a:r>
-              <a:t>CONNECT</a:t>
-            </a:r>
-          </a:p>
-          <a:p xmlns:a="http://schemas.openxmlformats.org/drawingml/2006/main">
-            <a:r>
-              <a:t>Previous slide: the preceding week.</a:t>
-            </a:r>
-          </a:p>
-          <a:p xmlns:a="http://schemas.openxmlformats.org/drawingml/2006/main">
+          <a:p>
+            <a:r>
+              <a:t>Explanation to give</a:t>
+            </a:r>
+          </a:p>
+          <a:p>
+            <a:r>
+              <a:t>Prepare for Test 2 by rehearsing the previously taught modelling decisions and the offline evidence workflow. Do not turn the assessed period into a worked lesson.</a:t>
+            </a:r>
+          </a:p>
+          <a:p>
             <a:r>
               <a:t/>
             </a:r>
           </a:p>
-          <a:p xmlns:a="http://schemas.openxmlformats.org/drawingml/2006/main">
-            <a:r>
-              <a:t>EXPLAIN</a:t>
-            </a:r>
-          </a:p>
-          <a:p xmlns:a="http://schemas.openxmlformats.org/drawingml/2006/main">
+          <a:p>
+            <a:r>
+              <a:t>Worked illustration / lecturer answer</a:t>
+            </a:r>
+          </a:p>
+          <a:p>
+            <a:r>
+              <a:t>Part B is typed reasoning in the same notebook, with code execution prohibited. The invigilated collection is authoritative; a later upload only transports that snapshot.</a:t>
+            </a:r>
+          </a:p>
+          <a:p>
+            <a:r>
+              <a:t/>
+            </a:r>
+          </a:p>
+          <a:p>
+            <a:r>
+              <a:t>Misconception to address</a:t>
+            </a:r>
+          </a:p>
+          <a:p>
+            <a:r>
+              <a:t>Use this as an orientation to the lesson. Terms and syntax will be unpacked on their own slides; students do not need to know them in advance.</a:t>
+            </a:r>
+          </a:p>
+          <a:p>
+            <a:r>
+              <a:t/>
+            </a:r>
+          </a:p>
+          <a:p>
+            <a:r>
+              <a:t>On this slide</a:t>
+            </a:r>
+          </a:p>
+          <a:p>
             <a:r>
               <a:t>Civil Engineering and Architecture</a:t>
             </a:r>
           </a:p>
-          <a:p xmlns:a="http://schemas.openxmlformats.org/drawingml/2006/main">
+          <a:p>
             <a:r>
               <a:t/>
             </a:r>
           </a:p>
-          <a:p xmlns:a="http://schemas.openxmlformats.org/drawingml/2006/main">
-            <a:r>
-              <a:t>LECTURER CUE</a:t>
-            </a:r>
-          </a:p>
-          <a:p xmlns:a="http://schemas.openxmlformats.org/drawingml/2006/main">
-            <a:r>
-              <a:t>Read the specific public requirement shown on this slide. Explain the input, output and evidence before independent work; do not work the assessed answer for the class.</a:t>
-            </a:r>
-          </a:p>
-          <a:p xmlns:a="http://schemas.openxmlformats.org/drawingml/2006/main">
-            <a:r>
-              <a:t/>
-            </a:r>
-          </a:p>
-          <a:p xmlns:a="http://schemas.openxmlformats.org/drawingml/2006/main">
-            <a:r>
-              <a:t>TEACHING MODE</a:t>
-            </a:r>
-          </a:p>
-          <a:p xmlns:a="http://schemas.openxmlformats.org/drawingml/2006/main">
-            <a:r>
-              <a:t>Demonstrate first. Read each new symbol aloud, trace the values and compare the shown output. Learners repeat worked examples individually after class.</a:t>
-            </a:r>
-          </a:p>
-          <a:p xmlns:a="http://schemas.openxmlformats.org/drawingml/2006/main">
-            <a:r>
-              <a:t/>
-            </a:r>
-          </a:p>
-          <a:p xmlns:a="http://schemas.openxmlformats.org/drawingml/2006/main">
-            <a:r>
-              <a:t>NEXT</a:t>
-            </a:r>
-          </a:p>
-          <a:p xmlns:a="http://schemas.openxmlformats.org/drawingml/2006/main">
-            <a:r>
-              <a:t>Today’s learning.</a:t>
-            </a:r>
-          </a:p>
-          <a:p xmlns:a="http://schemas.openxmlformats.org/drawingml/2006/main">
-            <a:r>
-              <a:t/>
-            </a:r>
-          </a:p>
-          <a:p xmlns:a="http://schemas.openxmlformats.org/drawingml/2006/main">
-            <a:r>
-              <a:t>REFERENCES</a:t>
-            </a:r>
-          </a:p>
-          <a:p xmlns:a="http://schemas.openxmlformats.org/drawingml/2006/main">
-            <a:r>
-              <a:t/>
+          <a:p>
+            <a:r>
+              <a:t>Continue to</a:t>
+            </a:r>
+          </a:p>
+          <a:p>
+            <a:r>
+              <a:t>Today’s learning</a:t>
             </a:r>
           </a:p>
         </p:txBody>
@@ -566,7 +551,7 @@
         <p:nvSpPr>
           <p:cNvPr id="4" name="Slide Number Placeholder 3"/>
           <p:cNvSpPr>
-            <a:spLocks xmlns:a="http://schemas.openxmlformats.org/drawingml/2006/main" noGrp="1"/>
+            <a:spLocks noGrp="1"/>
           </p:cNvSpPr>
           <p:nvPr>
             <p:ph type="sldNum" idx="5"/>
@@ -574,21 +559,21 @@
         </p:nvSpPr>
         <p:spPr/>
         <p:txBody>
-          <a:bodyPr xmlns:a="http://schemas.openxmlformats.org/drawingml/2006/main"/>
-          <a:lstStyle xmlns:a="http://schemas.openxmlformats.org/drawingml/2006/main"/>
-          <a:p xmlns:a="http://schemas.openxmlformats.org/drawingml/2006/main"/>
+          <a:bodyPr/>
+          <a:lstStyle/>
+          <a:p/>
         </p:txBody>
       </p:sp>
     </p:spTree>
   </p:cSld>
   <p:clrMapOvr>
-    <a:masterClrMapping xmlns:a="http://schemas.openxmlformats.org/drawingml/2006/main"/>
+    <a:masterClrMapping/>
   </p:clrMapOvr>
 </p:notes>
 </file>
 
 <file path=ppt/notesSlides/notesSlide10.xml><?xml version="1.0" encoding="utf-8"?>
-<p:notes xmlns:p="http://schemas.openxmlformats.org/presentationml/2006/main">
+<p:notes xmlns:a="http://schemas.openxmlformats.org/drawingml/2006/main" xmlns:p="http://schemas.openxmlformats.org/presentationml/2006/main">
   <p:cSld>
     <p:spTree>
       <p:nvGrpSpPr>
@@ -597,13 +582,13 @@
         <p:nvPr/>
       </p:nvGrpSpPr>
       <p:grpSpPr>
-        <a:xfrm xmlns:a="http://schemas.openxmlformats.org/drawingml/2006/main"/>
+        <a:xfrm/>
       </p:grpSpPr>
       <p:sp>
         <p:nvSpPr>
           <p:cNvPr id="2" name="Slide Image Placeholder 1"/>
           <p:cNvSpPr>
-            <a:spLocks xmlns:a="http://schemas.openxmlformats.org/drawingml/2006/main" noGrp="1"/>
+            <a:spLocks noGrp="1"/>
           </p:cNvSpPr>
           <p:nvPr>
             <p:ph type="sldImg" idx="0"/>
@@ -615,7 +600,7 @@
         <p:nvSpPr>
           <p:cNvPr id="3" name="Notes Placeholder 2"/>
           <p:cNvSpPr>
-            <a:spLocks xmlns:a="http://schemas.openxmlformats.org/drawingml/2006/main" noGrp="1"/>
+            <a:spLocks noGrp="1"/>
           </p:cNvSpPr>
           <p:nvPr>
             <p:ph type="body" idx="1"/>
@@ -623,116 +608,101 @@
         </p:nvSpPr>
         <p:spPr/>
         <p:txBody>
-          <a:bodyPr xmlns:a="http://schemas.openxmlformats.org/drawingml/2006/main"/>
-          <a:lstStyle xmlns:a="http://schemas.openxmlformats.org/drawingml/2006/main"/>
-          <a:p xmlns:a="http://schemas.openxmlformats.org/drawingml/2006/main">
-            <a:r>
-              <a:t>PURPOSE</a:t>
-            </a:r>
-          </a:p>
-          <a:p xmlns:a="http://schemas.openxmlformats.org/drawingml/2006/main">
+          <a:bodyPr/>
+          <a:lstStyle/>
+          <a:p>
             <a:r>
               <a:t>Your evidence</a:t>
             </a:r>
           </a:p>
-          <a:p xmlns:a="http://schemas.openxmlformats.org/drawingml/2006/main">
+          <a:p>
+            <a:r>
+              <a:t>CML3112, Week 14, slide 10</a:t>
+            </a:r>
+          </a:p>
+          <a:p>
             <a:r>
               <a:t/>
             </a:r>
           </a:p>
-          <a:p xmlns:a="http://schemas.openxmlformats.org/drawingml/2006/main">
-            <a:r>
-              <a:t>CONNECT</a:t>
-            </a:r>
-          </a:p>
-          <a:p xmlns:a="http://schemas.openxmlformats.org/drawingml/2006/main">
-            <a:r>
-              <a:t>Previous slide: Preparation checkpoint.</a:t>
-            </a:r>
-          </a:p>
-          <a:p xmlns:a="http://schemas.openxmlformats.org/drawingml/2006/main">
+          <a:p>
+            <a:r>
+              <a:t>Explanation to give</a:t>
+            </a:r>
+          </a:p>
+          <a:p>
+            <a:r>
+              <a:t>Show the offline save location and reopen the file before test day. Identify both the code cells and the markdown cell headed My written evidence.</a:t>
+            </a:r>
+          </a:p>
+          <a:p>
             <a:r>
               <a:t/>
             </a:r>
           </a:p>
-          <a:p xmlns:a="http://schemas.openxmlformats.org/drawingml/2006/main">
-            <a:r>
-              <a:t>EXPLAIN</a:t>
-            </a:r>
-          </a:p>
-          <a:p xmlns:a="http://schemas.openxmlformats.org/drawingml/2006/main">
+          <a:p>
+            <a:r>
+              <a:t>Worked illustration / lecturer answer</a:t>
+            </a:r>
+          </a:p>
+          <a:p>
+            <a:r>
+              <a:t>Use a separate practice notebook for rehearsal. Students should locate the actual .ipynb on disk rather than rely on a browser tab or cloud link.</a:t>
+            </a:r>
+          </a:p>
+          <a:p>
+            <a:r>
+              <a:t/>
+            </a:r>
+          </a:p>
+          <a:p>
+            <a:r>
+              <a:t>Misconception to address</a:t>
+            </a:r>
+          </a:p>
+          <a:p>
+            <a:r>
+              <a:t>During the assessed period, report technical failures immediately and follow the invigilator’s instructions. Do not introduce new modelling code or online resources.</a:t>
+            </a:r>
+          </a:p>
+          <a:p>
+            <a:r>
+              <a:t/>
+            </a:r>
+          </a:p>
+          <a:p>
+            <a:r>
+              <a:t>On this slide</a:t>
+            </a:r>
+          </a:p>
+          <a:p>
             <a:r>
               <a:t>Use TEST2’s official brief, interfaces, time allocation, permitted resources and packet requirements.</a:t>
             </a:r>
           </a:p>
-          <a:p xmlns:a="http://schemas.openxmlformats.org/drawingml/2006/main">
+          <a:p>
             <a:r>
               <a:t/>
             </a:r>
           </a:p>
-          <a:p xmlns:a="http://schemas.openxmlformats.org/drawingml/2006/main">
+          <a:p>
             <a:r>
               <a:t>Follow the test instructions issued by your lecturer.</a:t>
             </a:r>
           </a:p>
-          <a:p xmlns:a="http://schemas.openxmlformats.org/drawingml/2006/main">
+          <a:p>
             <a:r>
               <a:t/>
             </a:r>
           </a:p>
-          <a:p xmlns:a="http://schemas.openxmlformats.org/drawingml/2006/main">
-            <a:r>
-              <a:t>LECTURER CUE</a:t>
-            </a:r>
-          </a:p>
-          <a:p xmlns:a="http://schemas.openxmlformats.org/drawingml/2006/main">
-            <a:r>
-              <a:t>Read the specific public requirement shown on this slide. Explain the input, output and evidence before independent work; do not work the assessed answer for the class.</a:t>
-            </a:r>
-          </a:p>
-          <a:p xmlns:a="http://schemas.openxmlformats.org/drawingml/2006/main">
-            <a:r>
-              <a:t/>
-            </a:r>
-          </a:p>
-          <a:p xmlns:a="http://schemas.openxmlformats.org/drawingml/2006/main">
-            <a:r>
-              <a:t>TEACHING MODE</a:t>
-            </a:r>
-          </a:p>
-          <a:p xmlns:a="http://schemas.openxmlformats.org/drawingml/2006/main">
-            <a:r>
-              <a:t>Demonstrate first. Read each new symbol aloud, trace the values and compare the shown output. Learners repeat worked examples individually after class.</a:t>
-            </a:r>
-          </a:p>
-          <a:p xmlns:a="http://schemas.openxmlformats.org/drawingml/2006/main">
-            <a:r>
-              <a:t/>
-            </a:r>
-          </a:p>
-          <a:p xmlns:a="http://schemas.openxmlformats.org/drawingml/2006/main">
-            <a:r>
-              <a:t>NEXT</a:t>
-            </a:r>
-          </a:p>
-          <a:p xmlns:a="http://schemas.openxmlformats.org/drawingml/2006/main">
-            <a:r>
-              <a:t>Practical Test 2.</a:t>
-            </a:r>
-          </a:p>
-          <a:p xmlns:a="http://schemas.openxmlformats.org/drawingml/2006/main">
-            <a:r>
-              <a:t/>
-            </a:r>
-          </a:p>
-          <a:p xmlns:a="http://schemas.openxmlformats.org/drawingml/2006/main">
-            <a:r>
-              <a:t>REFERENCES</a:t>
-            </a:r>
-          </a:p>
-          <a:p xmlns:a="http://schemas.openxmlformats.org/drawingml/2006/main">
-            <a:r>
-              <a:t/>
+          <a:p>
+            <a:r>
+              <a:t>Continue to</a:t>
+            </a:r>
+          </a:p>
+          <a:p>
+            <a:r>
+              <a:t>Practical Test 2</a:t>
             </a:r>
           </a:p>
         </p:txBody>
@@ -741,7 +711,7 @@
         <p:nvSpPr>
           <p:cNvPr id="4" name="Slide Number Placeholder 3"/>
           <p:cNvSpPr>
-            <a:spLocks xmlns:a="http://schemas.openxmlformats.org/drawingml/2006/main" noGrp="1"/>
+            <a:spLocks noGrp="1"/>
           </p:cNvSpPr>
           <p:nvPr>
             <p:ph type="sldNum" idx="5"/>
@@ -749,21 +719,21 @@
         </p:nvSpPr>
         <p:spPr/>
         <p:txBody>
-          <a:bodyPr xmlns:a="http://schemas.openxmlformats.org/drawingml/2006/main"/>
-          <a:lstStyle xmlns:a="http://schemas.openxmlformats.org/drawingml/2006/main"/>
-          <a:p xmlns:a="http://schemas.openxmlformats.org/drawingml/2006/main"/>
+          <a:bodyPr/>
+          <a:lstStyle/>
+          <a:p/>
         </p:txBody>
       </p:sp>
     </p:spTree>
   </p:cSld>
   <p:clrMapOvr>
-    <a:masterClrMapping xmlns:a="http://schemas.openxmlformats.org/drawingml/2006/main"/>
+    <a:masterClrMapping/>
   </p:clrMapOvr>
 </p:notes>
 </file>
 
 <file path=ppt/notesSlides/notesSlide11.xml><?xml version="1.0" encoding="utf-8"?>
-<p:notes xmlns:p="http://schemas.openxmlformats.org/presentationml/2006/main">
+<p:notes xmlns:a="http://schemas.openxmlformats.org/drawingml/2006/main" xmlns:p="http://schemas.openxmlformats.org/presentationml/2006/main">
   <p:cSld>
     <p:spTree>
       <p:nvGrpSpPr>
@@ -772,13 +742,13 @@
         <p:nvPr/>
       </p:nvGrpSpPr>
       <p:grpSpPr>
-        <a:xfrm xmlns:a="http://schemas.openxmlformats.org/drawingml/2006/main"/>
+        <a:xfrm/>
       </p:grpSpPr>
       <p:sp>
         <p:nvSpPr>
           <p:cNvPr id="2" name="Slide Image Placeholder 1"/>
           <p:cNvSpPr>
-            <a:spLocks xmlns:a="http://schemas.openxmlformats.org/drawingml/2006/main" noGrp="1"/>
+            <a:spLocks noGrp="1"/>
           </p:cNvSpPr>
           <p:nvPr>
             <p:ph type="sldImg" idx="0"/>
@@ -790,7 +760,7 @@
         <p:nvSpPr>
           <p:cNvPr id="3" name="Notes Placeholder 2"/>
           <p:cNvSpPr>
-            <a:spLocks xmlns:a="http://schemas.openxmlformats.org/drawingml/2006/main" noGrp="1"/>
+            <a:spLocks noGrp="1"/>
           </p:cNvSpPr>
           <p:nvPr>
             <p:ph type="body" idx="1"/>
@@ -798,136 +768,121 @@
         </p:nvSpPr>
         <p:spPr/>
         <p:txBody>
-          <a:bodyPr xmlns:a="http://schemas.openxmlformats.org/drawingml/2006/main"/>
-          <a:lstStyle xmlns:a="http://schemas.openxmlformats.org/drawingml/2006/main"/>
-          <a:p xmlns:a="http://schemas.openxmlformats.org/drawingml/2006/main">
-            <a:r>
-              <a:t>PURPOSE</a:t>
-            </a:r>
-          </a:p>
-          <a:p xmlns:a="http://schemas.openxmlformats.org/drawingml/2006/main">
+          <a:bodyPr/>
+          <a:lstStyle/>
+          <a:p>
             <a:r>
               <a:t>Practical Test 2</a:t>
             </a:r>
           </a:p>
-          <a:p xmlns:a="http://schemas.openxmlformats.org/drawingml/2006/main">
+          <a:p>
+            <a:r>
+              <a:t>CML3112, Week 14, slide 11</a:t>
+            </a:r>
+          </a:p>
+          <a:p>
             <a:r>
               <a:t/>
             </a:r>
           </a:p>
-          <a:p xmlns:a="http://schemas.openxmlformats.org/drawingml/2006/main">
-            <a:r>
-              <a:t>CONNECT</a:t>
-            </a:r>
-          </a:p>
-          <a:p xmlns:a="http://schemas.openxmlformats.org/drawingml/2006/main">
-            <a:r>
-              <a:t>Previous slide: Your evidence.</a:t>
-            </a:r>
-          </a:p>
-          <a:p xmlns:a="http://schemas.openxmlformats.org/drawingml/2006/main">
+          <a:p>
+            <a:r>
+              <a:t>Explanation to give</a:t>
+            </a:r>
+          </a:p>
+          <a:p>
+            <a:r>
+              <a:t>Show the actual markdown answer cell headed My written evidence. This is where the learner explains the choices and the supplied scenario in their own words.</a:t>
+            </a:r>
+          </a:p>
+          <a:p>
             <a:r>
               <a:t/>
             </a:r>
           </a:p>
-          <a:p xmlns:a="http://schemas.openxmlformats.org/drawingml/2006/main">
-            <a:r>
-              <a:t>EXPLAIN</a:t>
-            </a:r>
-          </a:p>
-          <a:p xmlns:a="http://schemas.openxmlformats.org/drawingml/2006/main">
+          <a:p>
+            <a:r>
+              <a:t>Worked illustration / lecturer answer</a:t>
+            </a:r>
+          </a:p>
+          <a:p>
+            <a:r>
+              <a:t>A useful explanation connects a decision to a named result and its limitation: for example, why a training-only median avoids using evaluation information. Describe supplied scenario figures as supplied, not as measurements the learner produced.</a:t>
+            </a:r>
+          </a:p>
+          <a:p>
+            <a:r>
+              <a:t/>
+            </a:r>
+          </a:p>
+          <a:p>
+            <a:r>
+              <a:t>Misconception to address</a:t>
+            </a:r>
+          </a:p>
+          <a:p>
+            <a:r>
+              <a:t>Prompts and copied code comments do not substitute for the learner’s reasoning. Weekly work and tests use the notebook; projects also require their separate readable report.</a:t>
+            </a:r>
+          </a:p>
+          <a:p>
+            <a:r>
+              <a:t/>
+            </a:r>
+          </a:p>
+          <a:p>
+            <a:r>
+              <a:t>On this slide</a:t>
+            </a:r>
+          </a:p>
+          <a:p>
             <a:r>
               <a:t>Write your own explanation in the markdown cell headed `## My written evidence`.</a:t>
             </a:r>
           </a:p>
-          <a:p xmlns:a="http://schemas.openxmlformats.org/drawingml/2006/main">
+          <a:p>
             <a:r>
               <a:t/>
             </a:r>
           </a:p>
-          <a:p xmlns:a="http://schemas.openxmlformats.org/drawingml/2006/main">
+          <a:p>
             <a:r>
               <a:t>Keep that heading.</a:t>
             </a:r>
           </a:p>
-          <a:p xmlns:a="http://schemas.openxmlformats.org/drawingml/2006/main">
+          <a:p>
             <a:r>
               <a:t/>
             </a:r>
           </a:p>
-          <a:p xmlns:a="http://schemas.openxmlformats.org/drawingml/2006/main">
+          <a:p>
             <a:r>
               <a:t>Task prompts and code comments are excluded from reasoning marks.</a:t>
             </a:r>
           </a:p>
-          <a:p xmlns:a="http://schemas.openxmlformats.org/drawingml/2006/main">
+          <a:p>
             <a:r>
               <a:t/>
             </a:r>
           </a:p>
-          <a:p xmlns:a="http://schemas.openxmlformats.org/drawingml/2006/main">
+          <a:p>
             <a:r>
               <a:t>Complete every original rubric criterion below, not just the checked functions.</a:t>
             </a:r>
           </a:p>
-          <a:p xmlns:a="http://schemas.openxmlformats.org/drawingml/2006/main">
+          <a:p>
             <a:r>
               <a:t/>
             </a:r>
           </a:p>
-          <a:p xmlns:a="http://schemas.openxmlformats.org/drawingml/2006/main">
-            <a:r>
-              <a:t>LECTURER CUE</a:t>
-            </a:r>
-          </a:p>
-          <a:p xmlns:a="http://schemas.openxmlformats.org/drawingml/2006/main">
-            <a:r>
-              <a:t>Read the specific public requirement shown on this slide. Explain the input, output and evidence before independent work; do not work the assessed answer for the class.</a:t>
-            </a:r>
-          </a:p>
-          <a:p xmlns:a="http://schemas.openxmlformats.org/drawingml/2006/main">
-            <a:r>
-              <a:t/>
-            </a:r>
-          </a:p>
-          <a:p xmlns:a="http://schemas.openxmlformats.org/drawingml/2006/main">
-            <a:r>
-              <a:t>TEACHING MODE</a:t>
-            </a:r>
-          </a:p>
-          <a:p xmlns:a="http://schemas.openxmlformats.org/drawingml/2006/main">
-            <a:r>
-              <a:t>Demonstrate first. Read each new symbol aloud, trace the values and compare the shown output. Learners repeat worked examples individually after class.</a:t>
-            </a:r>
-          </a:p>
-          <a:p xmlns:a="http://schemas.openxmlformats.org/drawingml/2006/main">
-            <a:r>
-              <a:t/>
-            </a:r>
-          </a:p>
-          <a:p xmlns:a="http://schemas.openxmlformats.org/drawingml/2006/main">
-            <a:r>
-              <a:t>NEXT</a:t>
-            </a:r>
-          </a:p>
-          <a:p xmlns:a="http://schemas.openxmlformats.org/drawingml/2006/main">
-            <a:r>
-              <a:t>Practical Test 2 continued.</a:t>
-            </a:r>
-          </a:p>
-          <a:p xmlns:a="http://schemas.openxmlformats.org/drawingml/2006/main">
-            <a:r>
-              <a:t/>
-            </a:r>
-          </a:p>
-          <a:p xmlns:a="http://schemas.openxmlformats.org/drawingml/2006/main">
-            <a:r>
-              <a:t>REFERENCES</a:t>
-            </a:r>
-          </a:p>
-          <a:p xmlns:a="http://schemas.openxmlformats.org/drawingml/2006/main">
-            <a:r>
-              <a:t/>
+          <a:p>
+            <a:r>
+              <a:t>Continue to</a:t>
+            </a:r>
+          </a:p>
+          <a:p>
+            <a:r>
+              <a:t>Practical Test 2 continued</a:t>
             </a:r>
           </a:p>
         </p:txBody>
@@ -936,7 +891,7 @@
         <p:nvSpPr>
           <p:cNvPr id="4" name="Slide Number Placeholder 3"/>
           <p:cNvSpPr>
-            <a:spLocks xmlns:a="http://schemas.openxmlformats.org/drawingml/2006/main" noGrp="1"/>
+            <a:spLocks noGrp="1"/>
           </p:cNvSpPr>
           <p:nvPr>
             <p:ph type="sldNum" idx="5"/>
@@ -944,21 +899,21 @@
         </p:nvSpPr>
         <p:spPr/>
         <p:txBody>
-          <a:bodyPr xmlns:a="http://schemas.openxmlformats.org/drawingml/2006/main"/>
-          <a:lstStyle xmlns:a="http://schemas.openxmlformats.org/drawingml/2006/main"/>
-          <a:p xmlns:a="http://schemas.openxmlformats.org/drawingml/2006/main"/>
+          <a:bodyPr/>
+          <a:lstStyle/>
+          <a:p/>
         </p:txBody>
       </p:sp>
     </p:spTree>
   </p:cSld>
   <p:clrMapOvr>
-    <a:masterClrMapping xmlns:a="http://schemas.openxmlformats.org/drawingml/2006/main"/>
+    <a:masterClrMapping/>
   </p:clrMapOvr>
 </p:notes>
 </file>
 
 <file path=ppt/notesSlides/notesSlide12.xml><?xml version="1.0" encoding="utf-8"?>
-<p:notes xmlns:p="http://schemas.openxmlformats.org/presentationml/2006/main">
+<p:notes xmlns:a="http://schemas.openxmlformats.org/drawingml/2006/main" xmlns:p="http://schemas.openxmlformats.org/presentationml/2006/main">
   <p:cSld>
     <p:spTree>
       <p:nvGrpSpPr>
@@ -967,13 +922,13 @@
         <p:nvPr/>
       </p:nvGrpSpPr>
       <p:grpSpPr>
-        <a:xfrm xmlns:a="http://schemas.openxmlformats.org/drawingml/2006/main"/>
+        <a:xfrm/>
       </p:grpSpPr>
       <p:sp>
         <p:nvSpPr>
           <p:cNvPr id="2" name="Slide Image Placeholder 1"/>
           <p:cNvSpPr>
-            <a:spLocks xmlns:a="http://schemas.openxmlformats.org/drawingml/2006/main" noGrp="1"/>
+            <a:spLocks noGrp="1"/>
           </p:cNvSpPr>
           <p:nvPr>
             <p:ph type="sldImg" idx="0"/>
@@ -985,7 +940,7 @@
         <p:nvSpPr>
           <p:cNvPr id="3" name="Notes Placeholder 2"/>
           <p:cNvSpPr>
-            <a:spLocks xmlns:a="http://schemas.openxmlformats.org/drawingml/2006/main" noGrp="1"/>
+            <a:spLocks noGrp="1"/>
           </p:cNvSpPr>
           <p:nvPr>
             <p:ph type="body" idx="1"/>
@@ -993,136 +948,121 @@
         </p:nvSpPr>
         <p:spPr/>
         <p:txBody>
-          <a:bodyPr xmlns:a="http://schemas.openxmlformats.org/drawingml/2006/main"/>
-          <a:lstStyle xmlns:a="http://schemas.openxmlformats.org/drawingml/2006/main"/>
-          <a:p xmlns:a="http://schemas.openxmlformats.org/drawingml/2006/main">
-            <a:r>
-              <a:t>PURPOSE</a:t>
-            </a:r>
-          </a:p>
-          <a:p xmlns:a="http://schemas.openxmlformats.org/drawingml/2006/main">
+          <a:bodyPr/>
+          <a:lstStyle/>
+          <a:p>
             <a:r>
               <a:t>Practical Test 2 continued</a:t>
             </a:r>
           </a:p>
-          <a:p xmlns:a="http://schemas.openxmlformats.org/drawingml/2006/main">
+          <a:p>
+            <a:r>
+              <a:t>CML3112, Week 14, slide 12</a:t>
+            </a:r>
+          </a:p>
+          <a:p>
             <a:r>
               <a:t/>
             </a:r>
           </a:p>
-          <a:p xmlns:a="http://schemas.openxmlformats.org/drawingml/2006/main">
-            <a:r>
-              <a:t>CONNECT</a:t>
-            </a:r>
-          </a:p>
-          <a:p xmlns:a="http://schemas.openxmlformats.org/drawingml/2006/main">
-            <a:r>
-              <a:t>Previous slide: Practical Test 2.</a:t>
-            </a:r>
-          </a:p>
-          <a:p xmlns:a="http://schemas.openxmlformats.org/drawingml/2006/main">
+          <a:p>
+            <a:r>
+              <a:t>Explanation to give</a:t>
+            </a:r>
+          </a:p>
+          <a:p>
+            <a:r>
+              <a:t>A chart must answer a stated question and show the actual data result. Explain what one mark represents and label both the quantity and unit before stating the finding.</a:t>
+            </a:r>
+          </a:p>
+          <a:p>
             <a:r>
               <a:t/>
             </a:r>
           </a:p>
-          <a:p xmlns:a="http://schemas.openxmlformats.org/drawingml/2006/main">
-            <a:r>
-              <a:t>EXPLAIN</a:t>
-            </a:r>
-          </a:p>
-          <a:p xmlns:a="http://schemas.openxmlformats.org/drawingml/2006/main">
+          <a:p>
+            <a:r>
+              <a:t>Worked illustration / lecturer answer</a:t>
+            </a:r>
+          </a:p>
+          <a:p>
+            <a:r>
+              <a:t>A useful caption names the group or sample, the observed difference and the relevant unit. A limitation states what the plotted observations cannot establish, such as causation or performance at a new site.</a:t>
+            </a:r>
+          </a:p>
+          <a:p>
+            <a:r>
+              <a:t/>
+            </a:r>
+          </a:p>
+          <a:p>
+            <a:r>
+              <a:t>Misconception to address</a:t>
+            </a:r>
+          </a:p>
+          <a:p>
+            <a:r>
+              <a:t>Text claiming “a chart was made” is not the required chart. Check the exact number and kinds required on this slide and in the assessment guide.</a:t>
+            </a:r>
+          </a:p>
+          <a:p>
+            <a:r>
+              <a:t/>
+            </a:r>
+          </a:p>
+          <a:p>
+            <a:r>
+              <a:t>On this slide</a:t>
+            </a:r>
+          </a:p>
+          <a:p>
             <a:r>
               <a:t>Include profiling, justified cleaning, question-led charts and your engineering recommendation where required.</a:t>
             </a:r>
           </a:p>
-          <a:p xmlns:a="http://schemas.openxmlformats.org/drawingml/2006/main">
+          <a:p>
             <a:r>
               <a:t/>
             </a:r>
           </a:p>
-          <a:p xmlns:a="http://schemas.openxmlformats.org/drawingml/2006/main">
+          <a:p>
             <a:r>
               <a:t>Keep raw data.</a:t>
             </a:r>
           </a:p>
-          <a:p xmlns:a="http://schemas.openxmlformats.org/drawingml/2006/main">
+          <a:p>
             <a:r>
               <a:t/>
             </a:r>
           </a:p>
-          <a:p xmlns:a="http://schemas.openxmlformats.org/drawingml/2006/main">
+          <a:p>
             <a:r>
               <a:t>State units and distinguish correlation from causation.</a:t>
             </a:r>
           </a:p>
-          <a:p xmlns:a="http://schemas.openxmlformats.org/drawingml/2006/main">
+          <a:p>
             <a:r>
               <a:t/>
             </a:r>
           </a:p>
-          <a:p xmlns:a="http://schemas.openxmlformats.org/drawingml/2006/main">
+          <a:p>
             <a:r>
               <a:t>Charts must be actual labelled figures in the notebook, not claims that charts exist.</a:t>
             </a:r>
           </a:p>
-          <a:p xmlns:a="http://schemas.openxmlformats.org/drawingml/2006/main">
+          <a:p>
             <a:r>
               <a:t/>
             </a:r>
           </a:p>
-          <a:p xmlns:a="http://schemas.openxmlformats.org/drawingml/2006/main">
-            <a:r>
-              <a:t>LECTURER CUE</a:t>
-            </a:r>
-          </a:p>
-          <a:p xmlns:a="http://schemas.openxmlformats.org/drawingml/2006/main">
-            <a:r>
-              <a:t>Read the specific public requirement shown on this slide. Explain the input, output and evidence before independent work; do not work the assessed answer for the class.</a:t>
-            </a:r>
-          </a:p>
-          <a:p xmlns:a="http://schemas.openxmlformats.org/drawingml/2006/main">
-            <a:r>
-              <a:t/>
-            </a:r>
-          </a:p>
-          <a:p xmlns:a="http://schemas.openxmlformats.org/drawingml/2006/main">
-            <a:r>
-              <a:t>TEACHING MODE</a:t>
-            </a:r>
-          </a:p>
-          <a:p xmlns:a="http://schemas.openxmlformats.org/drawingml/2006/main">
-            <a:r>
-              <a:t>Demonstrate first. Read each new symbol aloud, trace the values and compare the shown output. Learners repeat worked examples individually after class.</a:t>
-            </a:r>
-          </a:p>
-          <a:p xmlns:a="http://schemas.openxmlformats.org/drawingml/2006/main">
-            <a:r>
-              <a:t/>
-            </a:r>
-          </a:p>
-          <a:p xmlns:a="http://schemas.openxmlformats.org/drawingml/2006/main">
-            <a:r>
-              <a:t>NEXT</a:t>
-            </a:r>
-          </a:p>
-          <a:p xmlns:a="http://schemas.openxmlformats.org/drawingml/2006/main">
-            <a:r>
-              <a:t>Practical Test 2 continued.</a:t>
-            </a:r>
-          </a:p>
-          <a:p xmlns:a="http://schemas.openxmlformats.org/drawingml/2006/main">
-            <a:r>
-              <a:t/>
-            </a:r>
-          </a:p>
-          <a:p xmlns:a="http://schemas.openxmlformats.org/drawingml/2006/main">
-            <a:r>
-              <a:t>REFERENCES</a:t>
-            </a:r>
-          </a:p>
-          <a:p xmlns:a="http://schemas.openxmlformats.org/drawingml/2006/main">
-            <a:r>
-              <a:t/>
+          <a:p>
+            <a:r>
+              <a:t>Continue to</a:t>
+            </a:r>
+          </a:p>
+          <a:p>
+            <a:r>
+              <a:t>Practical Test 2 continued</a:t>
             </a:r>
           </a:p>
         </p:txBody>
@@ -1131,7 +1071,7 @@
         <p:nvSpPr>
           <p:cNvPr id="4" name="Slide Number Placeholder 3"/>
           <p:cNvSpPr>
-            <a:spLocks xmlns:a="http://schemas.openxmlformats.org/drawingml/2006/main" noGrp="1"/>
+            <a:spLocks noGrp="1"/>
           </p:cNvSpPr>
           <p:nvPr>
             <p:ph type="sldNum" idx="5"/>
@@ -1139,21 +1079,21 @@
         </p:nvSpPr>
         <p:spPr/>
         <p:txBody>
-          <a:bodyPr xmlns:a="http://schemas.openxmlformats.org/drawingml/2006/main"/>
-          <a:lstStyle xmlns:a="http://schemas.openxmlformats.org/drawingml/2006/main"/>
-          <a:p xmlns:a="http://schemas.openxmlformats.org/drawingml/2006/main"/>
+          <a:bodyPr/>
+          <a:lstStyle/>
+          <a:p/>
         </p:txBody>
       </p:sp>
     </p:spTree>
   </p:cSld>
   <p:clrMapOvr>
-    <a:masterClrMapping xmlns:a="http://schemas.openxmlformats.org/drawingml/2006/main"/>
+    <a:masterClrMapping/>
   </p:clrMapOvr>
 </p:notes>
 </file>
 
 <file path=ppt/notesSlides/notesSlide13.xml><?xml version="1.0" encoding="utf-8"?>
-<p:notes xmlns:p="http://schemas.openxmlformats.org/presentationml/2006/main">
+<p:notes xmlns:a="http://schemas.openxmlformats.org/drawingml/2006/main" xmlns:p="http://schemas.openxmlformats.org/presentationml/2006/main">
   <p:cSld>
     <p:spTree>
       <p:nvGrpSpPr>
@@ -1162,13 +1102,13 @@
         <p:nvPr/>
       </p:nvGrpSpPr>
       <p:grpSpPr>
-        <a:xfrm xmlns:a="http://schemas.openxmlformats.org/drawingml/2006/main"/>
+        <a:xfrm/>
       </p:grpSpPr>
       <p:sp>
         <p:nvSpPr>
           <p:cNvPr id="2" name="Slide Image Placeholder 1"/>
           <p:cNvSpPr>
-            <a:spLocks xmlns:a="http://schemas.openxmlformats.org/drawingml/2006/main" noGrp="1"/>
+            <a:spLocks noGrp="1"/>
           </p:cNvSpPr>
           <p:nvPr>
             <p:ph type="sldImg" idx="0"/>
@@ -1180,7 +1120,7 @@
         <p:nvSpPr>
           <p:cNvPr id="3" name="Notes Placeholder 2"/>
           <p:cNvSpPr>
-            <a:spLocks xmlns:a="http://schemas.openxmlformats.org/drawingml/2006/main" noGrp="1"/>
+            <a:spLocks noGrp="1"/>
           </p:cNvSpPr>
           <p:nvPr>
             <p:ph type="body" idx="1"/>
@@ -1188,136 +1128,121 @@
         </p:nvSpPr>
         <p:spPr/>
         <p:txBody>
-          <a:bodyPr xmlns:a="http://schemas.openxmlformats.org/drawingml/2006/main"/>
-          <a:lstStyle xmlns:a="http://schemas.openxmlformats.org/drawingml/2006/main"/>
-          <a:p xmlns:a="http://schemas.openxmlformats.org/drawingml/2006/main">
-            <a:r>
-              <a:t>PURPOSE</a:t>
-            </a:r>
-          </a:p>
-          <a:p xmlns:a="http://schemas.openxmlformats.org/drawingml/2006/main">
+          <a:bodyPr/>
+          <a:lstStyle/>
+          <a:p>
             <a:r>
               <a:t>Practical Test 2 continued</a:t>
             </a:r>
           </a:p>
-          <a:p xmlns:a="http://schemas.openxmlformats.org/drawingml/2006/main">
+          <a:p>
+            <a:r>
+              <a:t>CML3112, Week 14, slide 13</a:t>
+            </a:r>
+          </a:p>
+          <a:p>
             <a:r>
               <a:t/>
             </a:r>
           </a:p>
-          <a:p xmlns:a="http://schemas.openxmlformats.org/drawingml/2006/main">
-            <a:r>
-              <a:t>CONNECT</a:t>
-            </a:r>
-          </a:p>
-          <a:p xmlns:a="http://schemas.openxmlformats.org/drawingml/2006/main">
-            <a:r>
-              <a:t>Previous slide: Practical Test 2 continued.</a:t>
-            </a:r>
-          </a:p>
-          <a:p xmlns:a="http://schemas.openxmlformats.org/drawingml/2006/main">
+          <a:p>
+            <a:r>
+              <a:t>Explanation to give</a:t>
+            </a:r>
+          </a:p>
+          <a:p>
+            <a:r>
+              <a:t>Explain the order: partition data using the stated protocol, fit preparation on training data, fit models, compare on validation data and leave final test data untouched until choices are fixed.</a:t>
+            </a:r>
+          </a:p>
+          <a:p>
             <a:r>
               <a:t/>
             </a:r>
           </a:p>
-          <a:p xmlns:a="http://schemas.openxmlformats.org/drawingml/2006/main">
-            <a:r>
-              <a:t>EXPLAIN</a:t>
-            </a:r>
-          </a:p>
-          <a:p xmlns:a="http://schemas.openxmlformats.org/drawingml/2006/main">
+          <a:p>
+            <a:r>
+              <a:t>Worked illustration / lecturer answer</a:t>
+            </a:r>
+          </a:p>
+          <a:p>
+            <a:r>
+              <a:t>Compare models on identical held-out observations with the same metric and preprocessing rules. Each cross-validation training fold learns its own preparation values.</a:t>
+            </a:r>
+          </a:p>
+          <a:p>
+            <a:r>
+              <a:t/>
+            </a:r>
+          </a:p>
+          <a:p>
+            <a:r>
+              <a:t>Misconception to address</a:t>
+            </a:r>
+          </a:p>
+          <a:p>
+            <a:r>
+              <a:t>A written claim of no leakage must agree with the executable split and fitting code. Follow the published execution requirement for any criterion linked to the split check.</a:t>
+            </a:r>
+          </a:p>
+          <a:p>
+            <a:r>
+              <a:t/>
+            </a:r>
+          </a:p>
+          <a:p>
+            <a:r>
+              <a:t>On this slide</a:t>
+            </a:r>
+          </a:p>
+          <a:p>
             <a:r>
               <a:t>Include captions and readable written evidence in the notebook.</a:t>
             </a:r>
           </a:p>
-          <a:p xmlns:a="http://schemas.openxmlformats.org/drawingml/2006/main">
+          <a:p>
             <a:r>
               <a:t/>
             </a:r>
           </a:p>
-          <a:p xmlns:a="http://schemas.openxmlformats.org/drawingml/2006/main">
+          <a:p>
             <a:r>
               <a:t>Task framing (10.0 total): The ML task is correctly identified, the target named, and regression vs classification correctly chosen and justified.</a:t>
             </a:r>
           </a:p>
-          <a:p xmlns:a="http://schemas.openxmlformats.org/drawingml/2006/main">
+          <a:p>
             <a:r>
               <a:t/>
             </a:r>
           </a:p>
-          <a:p xmlns:a="http://schemas.openxmlformats.org/drawingml/2006/main">
+          <a:p>
             <a:r>
               <a:t>Data preparation &amp; leakage control (20.0 total): Cleaning and encoding appropriate.</a:t>
             </a:r>
           </a:p>
-          <a:p xmlns:a="http://schemas.openxmlformats.org/drawingml/2006/main">
+          <a:p>
             <a:r>
               <a:t/>
             </a:r>
           </a:p>
-          <a:p xmlns:a="http://schemas.openxmlformats.org/drawingml/2006/main">
+          <a:p>
             <a:r>
               <a:t>Split made before any fitting.</a:t>
             </a:r>
           </a:p>
-          <a:p xmlns:a="http://schemas.openxmlformats.org/drawingml/2006/main">
+          <a:p>
             <a:r>
               <a:t/>
             </a:r>
           </a:p>
-          <a:p xmlns:a="http://schemas.openxmlformats.org/drawingml/2006/main">
-            <a:r>
-              <a:t>LECTURER CUE</a:t>
-            </a:r>
-          </a:p>
-          <a:p xmlns:a="http://schemas.openxmlformats.org/drawingml/2006/main">
-            <a:r>
-              <a:t>Read the specific public requirement shown on this slide. Explain the input, output and evidence before independent work; do not work the assessed answer for the class.</a:t>
-            </a:r>
-          </a:p>
-          <a:p xmlns:a="http://schemas.openxmlformats.org/drawingml/2006/main">
-            <a:r>
-              <a:t/>
-            </a:r>
-          </a:p>
-          <a:p xmlns:a="http://schemas.openxmlformats.org/drawingml/2006/main">
-            <a:r>
-              <a:t>TEACHING MODE</a:t>
-            </a:r>
-          </a:p>
-          <a:p xmlns:a="http://schemas.openxmlformats.org/drawingml/2006/main">
-            <a:r>
-              <a:t>Demonstrate first. Read each new symbol aloud, trace the values and compare the shown output. Learners repeat worked examples individually after class.</a:t>
-            </a:r>
-          </a:p>
-          <a:p xmlns:a="http://schemas.openxmlformats.org/drawingml/2006/main">
-            <a:r>
-              <a:t/>
-            </a:r>
-          </a:p>
-          <a:p xmlns:a="http://schemas.openxmlformats.org/drawingml/2006/main">
-            <a:r>
-              <a:t>NEXT</a:t>
-            </a:r>
-          </a:p>
-          <a:p xmlns:a="http://schemas.openxmlformats.org/drawingml/2006/main">
-            <a:r>
-              <a:t>Practical Test 2 continued.</a:t>
-            </a:r>
-          </a:p>
-          <a:p xmlns:a="http://schemas.openxmlformats.org/drawingml/2006/main">
-            <a:r>
-              <a:t/>
-            </a:r>
-          </a:p>
-          <a:p xmlns:a="http://schemas.openxmlformats.org/drawingml/2006/main">
-            <a:r>
-              <a:t>REFERENCES</a:t>
-            </a:r>
-          </a:p>
-          <a:p xmlns:a="http://schemas.openxmlformats.org/drawingml/2006/main">
-            <a:r>
-              <a:t/>
+          <a:p>
+            <a:r>
+              <a:t>Continue to</a:t>
+            </a:r>
+          </a:p>
+          <a:p>
+            <a:r>
+              <a:t>Practical Test 2 continued</a:t>
             </a:r>
           </a:p>
         </p:txBody>
@@ -1326,7 +1251,7 @@
         <p:nvSpPr>
           <p:cNvPr id="4" name="Slide Number Placeholder 3"/>
           <p:cNvSpPr>
-            <a:spLocks xmlns:a="http://schemas.openxmlformats.org/drawingml/2006/main" noGrp="1"/>
+            <a:spLocks noGrp="1"/>
           </p:cNvSpPr>
           <p:nvPr>
             <p:ph type="sldNum" idx="5"/>
@@ -1334,21 +1259,21 @@
         </p:nvSpPr>
         <p:spPr/>
         <p:txBody>
-          <a:bodyPr xmlns:a="http://schemas.openxmlformats.org/drawingml/2006/main"/>
-          <a:lstStyle xmlns:a="http://schemas.openxmlformats.org/drawingml/2006/main"/>
-          <a:p xmlns:a="http://schemas.openxmlformats.org/drawingml/2006/main"/>
+          <a:bodyPr/>
+          <a:lstStyle/>
+          <a:p/>
         </p:txBody>
       </p:sp>
     </p:spTree>
   </p:cSld>
   <p:clrMapOvr>
-    <a:masterClrMapping xmlns:a="http://schemas.openxmlformats.org/drawingml/2006/main"/>
+    <a:masterClrMapping/>
   </p:clrMapOvr>
 </p:notes>
 </file>
 
 <file path=ppt/notesSlides/notesSlide14.xml><?xml version="1.0" encoding="utf-8"?>
-<p:notes xmlns:p="http://schemas.openxmlformats.org/presentationml/2006/main">
+<p:notes xmlns:a="http://schemas.openxmlformats.org/drawingml/2006/main" xmlns:p="http://schemas.openxmlformats.org/presentationml/2006/main">
   <p:cSld>
     <p:spTree>
       <p:nvGrpSpPr>
@@ -1357,13 +1282,13 @@
         <p:nvPr/>
       </p:nvGrpSpPr>
       <p:grpSpPr>
-        <a:xfrm xmlns:a="http://schemas.openxmlformats.org/drawingml/2006/main"/>
+        <a:xfrm/>
       </p:grpSpPr>
       <p:sp>
         <p:nvSpPr>
           <p:cNvPr id="2" name="Slide Image Placeholder 1"/>
           <p:cNvSpPr>
-            <a:spLocks xmlns:a="http://schemas.openxmlformats.org/drawingml/2006/main" noGrp="1"/>
+            <a:spLocks noGrp="1"/>
           </p:cNvSpPr>
           <p:nvPr>
             <p:ph type="sldImg" idx="0"/>
@@ -1375,7 +1300,7 @@
         <p:nvSpPr>
           <p:cNvPr id="3" name="Notes Placeholder 2"/>
           <p:cNvSpPr>
-            <a:spLocks xmlns:a="http://schemas.openxmlformats.org/drawingml/2006/main" noGrp="1"/>
+            <a:spLocks noGrp="1"/>
           </p:cNvSpPr>
           <p:nvPr>
             <p:ph type="body" idx="1"/>
@@ -1383,136 +1308,121 @@
         </p:nvSpPr>
         <p:spPr/>
         <p:txBody>
-          <a:bodyPr xmlns:a="http://schemas.openxmlformats.org/drawingml/2006/main"/>
-          <a:lstStyle xmlns:a="http://schemas.openxmlformats.org/drawingml/2006/main"/>
-          <a:p xmlns:a="http://schemas.openxmlformats.org/drawingml/2006/main">
-            <a:r>
-              <a:t>PURPOSE</a:t>
-            </a:r>
-          </a:p>
-          <a:p xmlns:a="http://schemas.openxmlformats.org/drawingml/2006/main">
+          <a:bodyPr/>
+          <a:lstStyle/>
+          <a:p>
             <a:r>
               <a:t>Practical Test 2 continued</a:t>
             </a:r>
           </a:p>
-          <a:p xmlns:a="http://schemas.openxmlformats.org/drawingml/2006/main">
+          <a:p>
+            <a:r>
+              <a:t>CML3112, Week 14, slide 14</a:t>
+            </a:r>
+          </a:p>
+          <a:p>
             <a:r>
               <a:t/>
             </a:r>
           </a:p>
-          <a:p xmlns:a="http://schemas.openxmlformats.org/drawingml/2006/main">
-            <a:r>
-              <a:t>CONNECT</a:t>
-            </a:r>
-          </a:p>
-          <a:p xmlns:a="http://schemas.openxmlformats.org/drawingml/2006/main">
-            <a:r>
-              <a:t>Previous slide: Practical Test 2 continued.</a:t>
-            </a:r>
-          </a:p>
-          <a:p xmlns:a="http://schemas.openxmlformats.org/drawingml/2006/main">
+          <a:p>
+            <a:r>
+              <a:t>Explanation to give</a:t>
+            </a:r>
+          </a:p>
+          <a:p>
+            <a:r>
+              <a:t>Explain the order: partition data using the stated protocol, fit preparation on training data, fit models, compare on validation data and leave final test data untouched until choices are fixed.</a:t>
+            </a:r>
+          </a:p>
+          <a:p>
             <a:r>
               <a:t/>
             </a:r>
           </a:p>
-          <a:p xmlns:a="http://schemas.openxmlformats.org/drawingml/2006/main">
-            <a:r>
-              <a:t>EXPLAIN</a:t>
-            </a:r>
-          </a:p>
-          <a:p xmlns:a="http://schemas.openxmlformats.org/drawingml/2006/main">
+          <a:p>
+            <a:r>
+              <a:t>Worked illustration / lecturer answer</a:t>
+            </a:r>
+          </a:p>
+          <a:p>
+            <a:r>
+              <a:t>Compare models on identical held-out observations with the same metric and preprocessing rules. Each cross-validation training fold learns its own preparation values.</a:t>
+            </a:r>
+          </a:p>
+          <a:p>
+            <a:r>
+              <a:t/>
+            </a:r>
+          </a:p>
+          <a:p>
+            <a:r>
+              <a:t>Misconception to address</a:t>
+            </a:r>
+          </a:p>
+          <a:p>
+            <a:r>
+              <a:t>A written claim of no leakage must agree with the executable split and fitting code. Follow the published execution requirement for any criterion linked to the split check.</a:t>
+            </a:r>
+          </a:p>
+          <a:p>
+            <a:r>
+              <a:t/>
+            </a:r>
+          </a:p>
+          <a:p>
+            <a:r>
+              <a:t>On this slide</a:t>
+            </a:r>
+          </a:p>
+          <a:p>
             <a:r>
               <a:t>Pipeline used.</a:t>
             </a:r>
           </a:p>
-          <a:p xmlns:a="http://schemas.openxmlformats.org/drawingml/2006/main">
+          <a:p>
             <a:r>
               <a:t/>
             </a:r>
           </a:p>
-          <a:p xmlns:a="http://schemas.openxmlformats.org/drawingml/2006/main">
+          <a:p>
             <a:r>
               <a:t>No leakage present - a leak found by the marker caps this criterion at zero.</a:t>
             </a:r>
           </a:p>
-          <a:p xmlns:a="http://schemas.openxmlformats.org/drawingml/2006/main">
+          <a:p>
             <a:r>
               <a:t/>
             </a:r>
           </a:p>
-          <a:p xmlns:a="http://schemas.openxmlformats.org/drawingml/2006/main">
+          <a:p>
             <a:r>
               <a:t>Modelling protocol (20.0 total): At least two models built and compared under identical conditions.</a:t>
             </a:r>
           </a:p>
-          <a:p xmlns:a="http://schemas.openxmlformats.org/drawingml/2006/main">
+          <a:p>
             <a:r>
               <a:t/>
             </a:r>
           </a:p>
-          <a:p xmlns:a="http://schemas.openxmlformats.org/drawingml/2006/main">
+          <a:p>
             <a:r>
               <a:t>Baseline included.</a:t>
             </a:r>
           </a:p>
-          <a:p xmlns:a="http://schemas.openxmlformats.org/drawingml/2006/main">
+          <a:p>
             <a:r>
               <a:t/>
             </a:r>
           </a:p>
-          <a:p xmlns:a="http://schemas.openxmlformats.org/drawingml/2006/main">
-            <a:r>
-              <a:t>LECTURER CUE</a:t>
-            </a:r>
-          </a:p>
-          <a:p xmlns:a="http://schemas.openxmlformats.org/drawingml/2006/main">
-            <a:r>
-              <a:t>Read the specific public requirement shown on this slide. Explain the input, output and evidence before independent work; do not work the assessed answer for the class.</a:t>
-            </a:r>
-          </a:p>
-          <a:p xmlns:a="http://schemas.openxmlformats.org/drawingml/2006/main">
-            <a:r>
-              <a:t/>
-            </a:r>
-          </a:p>
-          <a:p xmlns:a="http://schemas.openxmlformats.org/drawingml/2006/main">
-            <a:r>
-              <a:t>TEACHING MODE</a:t>
-            </a:r>
-          </a:p>
-          <a:p xmlns:a="http://schemas.openxmlformats.org/drawingml/2006/main">
-            <a:r>
-              <a:t>Demonstrate first. Read each new symbol aloud, trace the values and compare the shown output. Learners repeat worked examples individually after class.</a:t>
-            </a:r>
-          </a:p>
-          <a:p xmlns:a="http://schemas.openxmlformats.org/drawingml/2006/main">
-            <a:r>
-              <a:t/>
-            </a:r>
-          </a:p>
-          <a:p xmlns:a="http://schemas.openxmlformats.org/drawingml/2006/main">
-            <a:r>
-              <a:t>NEXT</a:t>
-            </a:r>
-          </a:p>
-          <a:p xmlns:a="http://schemas.openxmlformats.org/drawingml/2006/main">
-            <a:r>
-              <a:t>Practical Test 2 continued.</a:t>
-            </a:r>
-          </a:p>
-          <a:p xmlns:a="http://schemas.openxmlformats.org/drawingml/2006/main">
-            <a:r>
-              <a:t/>
-            </a:r>
-          </a:p>
-          <a:p xmlns:a="http://schemas.openxmlformats.org/drawingml/2006/main">
-            <a:r>
-              <a:t>REFERENCES</a:t>
-            </a:r>
-          </a:p>
-          <a:p xmlns:a="http://schemas.openxmlformats.org/drawingml/2006/main">
-            <a:r>
-              <a:t/>
+          <a:p>
+            <a:r>
+              <a:t>Continue to</a:t>
+            </a:r>
+          </a:p>
+          <a:p>
+            <a:r>
+              <a:t>Practical Test 2 continued</a:t>
             </a:r>
           </a:p>
         </p:txBody>
@@ -1521,7 +1431,7 @@
         <p:nvSpPr>
           <p:cNvPr id="4" name="Slide Number Placeholder 3"/>
           <p:cNvSpPr>
-            <a:spLocks xmlns:a="http://schemas.openxmlformats.org/drawingml/2006/main" noGrp="1"/>
+            <a:spLocks noGrp="1"/>
           </p:cNvSpPr>
           <p:nvPr>
             <p:ph type="sldNum" idx="5"/>
@@ -1529,21 +1439,21 @@
         </p:nvSpPr>
         <p:spPr/>
         <p:txBody>
-          <a:bodyPr xmlns:a="http://schemas.openxmlformats.org/drawingml/2006/main"/>
-          <a:lstStyle xmlns:a="http://schemas.openxmlformats.org/drawingml/2006/main"/>
-          <a:p xmlns:a="http://schemas.openxmlformats.org/drawingml/2006/main"/>
+          <a:bodyPr/>
+          <a:lstStyle/>
+          <a:p/>
         </p:txBody>
       </p:sp>
     </p:spTree>
   </p:cSld>
   <p:clrMapOvr>
-    <a:masterClrMapping xmlns:a="http://schemas.openxmlformats.org/drawingml/2006/main"/>
+    <a:masterClrMapping/>
   </p:clrMapOvr>
 </p:notes>
 </file>
 
 <file path=ppt/notesSlides/notesSlide15.xml><?xml version="1.0" encoding="utf-8"?>
-<p:notes xmlns:p="http://schemas.openxmlformats.org/presentationml/2006/main">
+<p:notes xmlns:a="http://schemas.openxmlformats.org/drawingml/2006/main" xmlns:p="http://schemas.openxmlformats.org/presentationml/2006/main">
   <p:cSld>
     <p:spTree>
       <p:nvGrpSpPr>
@@ -1552,13 +1462,13 @@
         <p:nvPr/>
       </p:nvGrpSpPr>
       <p:grpSpPr>
-        <a:xfrm xmlns:a="http://schemas.openxmlformats.org/drawingml/2006/main"/>
+        <a:xfrm/>
       </p:grpSpPr>
       <p:sp>
         <p:nvSpPr>
           <p:cNvPr id="2" name="Slide Image Placeholder 1"/>
           <p:cNvSpPr>
-            <a:spLocks xmlns:a="http://schemas.openxmlformats.org/drawingml/2006/main" noGrp="1"/>
+            <a:spLocks noGrp="1"/>
           </p:cNvSpPr>
           <p:nvPr>
             <p:ph type="sldImg" idx="0"/>
@@ -1570,7 +1480,7 @@
         <p:nvSpPr>
           <p:cNvPr id="3" name="Notes Placeholder 2"/>
           <p:cNvSpPr>
-            <a:spLocks xmlns:a="http://schemas.openxmlformats.org/drawingml/2006/main" noGrp="1"/>
+            <a:spLocks noGrp="1"/>
           </p:cNvSpPr>
           <p:nvPr>
             <p:ph type="body" idx="1"/>
@@ -1578,136 +1488,121 @@
         </p:nvSpPr>
         <p:spPr/>
         <p:txBody>
-          <a:bodyPr xmlns:a="http://schemas.openxmlformats.org/drawingml/2006/main"/>
-          <a:lstStyle xmlns:a="http://schemas.openxmlformats.org/drawingml/2006/main"/>
-          <a:p xmlns:a="http://schemas.openxmlformats.org/drawingml/2006/main">
-            <a:r>
-              <a:t>PURPOSE</a:t>
-            </a:r>
-          </a:p>
-          <a:p xmlns:a="http://schemas.openxmlformats.org/drawingml/2006/main">
+          <a:bodyPr/>
+          <a:lstStyle/>
+          <a:p>
             <a:r>
               <a:t>Practical Test 2 continued</a:t>
             </a:r>
           </a:p>
-          <a:p xmlns:a="http://schemas.openxmlformats.org/drawingml/2006/main">
+          <a:p>
+            <a:r>
+              <a:t>CML3112, Week 14, slide 15</a:t>
+            </a:r>
+          </a:p>
+          <a:p>
             <a:r>
               <a:t/>
             </a:r>
           </a:p>
-          <a:p xmlns:a="http://schemas.openxmlformats.org/drawingml/2006/main">
-            <a:r>
-              <a:t>CONNECT</a:t>
-            </a:r>
-          </a:p>
-          <a:p xmlns:a="http://schemas.openxmlformats.org/drawingml/2006/main">
-            <a:r>
-              <a:t>Previous slide: Practical Test 2 continued.</a:t>
-            </a:r>
-          </a:p>
-          <a:p xmlns:a="http://schemas.openxmlformats.org/drawingml/2006/main">
+          <a:p>
+            <a:r>
+              <a:t>Explanation to give</a:t>
+            </a:r>
+          </a:p>
+          <a:p>
+            <a:r>
+              <a:t>Read the metric with its unit and evaluation population. Explain why that error measure matches the cost of a wrong decision in the stated engineering setting.</a:t>
+            </a:r>
+          </a:p>
+          <a:p>
             <a:r>
               <a:t/>
             </a:r>
           </a:p>
-          <a:p xmlns:a="http://schemas.openxmlformats.org/drawingml/2006/main">
-            <a:r>
-              <a:t>EXPLAIN</a:t>
-            </a:r>
-          </a:p>
-          <a:p xmlns:a="http://schemas.openxmlformats.org/drawingml/2006/main">
+          <a:p>
+            <a:r>
+              <a:t>Worked illustration / lecturer answer</a:t>
+            </a:r>
+          </a:p>
+          <a:p>
+            <a:r>
+              <a:t>MAE 3 kW describes an average absolute error on named observations; it does not guarantee every prediction lies within 3 kW. Report baseline comparison and the evaluation protocol.</a:t>
+            </a:r>
+          </a:p>
+          <a:p>
+            <a:r>
+              <a:t/>
+            </a:r>
+          </a:p>
+          <a:p>
+            <a:r>
+              <a:t>Misconception to address</a:t>
+            </a:r>
+          </a:p>
+          <a:p>
+            <a:r>
+              <a:t>Avoid a deployment claim based only on a score. State genuine limitations involving data coverage, measurement quality or future operating conditions.</a:t>
+            </a:r>
+          </a:p>
+          <a:p>
+            <a:r>
+              <a:t/>
+            </a:r>
+          </a:p>
+          <a:p>
+            <a:r>
+              <a:t>On this slide</a:t>
+            </a:r>
+          </a:p>
+          <a:p>
             <a:r>
               <a:t>Hyperparameters handled sensibly.</a:t>
             </a:r>
           </a:p>
-          <a:p xmlns:a="http://schemas.openxmlformats.org/drawingml/2006/main">
+          <a:p>
             <a:r>
               <a:t/>
             </a:r>
           </a:p>
-          <a:p xmlns:a="http://schemas.openxmlformats.org/drawingml/2006/main">
+          <a:p>
             <a:r>
               <a:t>Evaluation &amp; metric justification (20.0 total): Correct metrics computed.</a:t>
             </a:r>
           </a:p>
-          <a:p xmlns:a="http://schemas.openxmlformats.org/drawingml/2006/main">
+          <a:p>
             <a:r>
               <a:t/>
             </a:r>
           </a:p>
-          <a:p xmlns:a="http://schemas.openxmlformats.org/drawingml/2006/main">
+          <a:p>
             <a:r>
               <a:t>Metric choice defended against the cost of error.</a:t>
             </a:r>
           </a:p>
-          <a:p xmlns:a="http://schemas.openxmlformats.org/drawingml/2006/main">
+          <a:p>
             <a:r>
               <a:t/>
             </a:r>
           </a:p>
-          <a:p xmlns:a="http://schemas.openxmlformats.org/drawingml/2006/main">
+          <a:p>
             <a:r>
               <a:t>Cross-validation reported with a spread, not a single number.</a:t>
             </a:r>
           </a:p>
-          <a:p xmlns:a="http://schemas.openxmlformats.org/drawingml/2006/main">
+          <a:p>
             <a:r>
               <a:t/>
             </a:r>
           </a:p>
-          <a:p xmlns:a="http://schemas.openxmlformats.org/drawingml/2006/main">
-            <a:r>
-              <a:t>LECTURER CUE</a:t>
-            </a:r>
-          </a:p>
-          <a:p xmlns:a="http://schemas.openxmlformats.org/drawingml/2006/main">
-            <a:r>
-              <a:t>Read the specific public requirement shown on this slide. Explain the input, output and evidence before independent work; do not work the assessed answer for the class.</a:t>
-            </a:r>
-          </a:p>
-          <a:p xmlns:a="http://schemas.openxmlformats.org/drawingml/2006/main">
-            <a:r>
-              <a:t/>
-            </a:r>
-          </a:p>
-          <a:p xmlns:a="http://schemas.openxmlformats.org/drawingml/2006/main">
-            <a:r>
-              <a:t>TEACHING MODE</a:t>
-            </a:r>
-          </a:p>
-          <a:p xmlns:a="http://schemas.openxmlformats.org/drawingml/2006/main">
-            <a:r>
-              <a:t>Demonstrate first. Read each new symbol aloud, trace the values and compare the shown output. Learners repeat worked examples individually after class.</a:t>
-            </a:r>
-          </a:p>
-          <a:p xmlns:a="http://schemas.openxmlformats.org/drawingml/2006/main">
-            <a:r>
-              <a:t/>
-            </a:r>
-          </a:p>
-          <a:p xmlns:a="http://schemas.openxmlformats.org/drawingml/2006/main">
-            <a:r>
-              <a:t>NEXT</a:t>
-            </a:r>
-          </a:p>
-          <a:p xmlns:a="http://schemas.openxmlformats.org/drawingml/2006/main">
-            <a:r>
-              <a:t>Practical Test 2 continued.</a:t>
-            </a:r>
-          </a:p>
-          <a:p xmlns:a="http://schemas.openxmlformats.org/drawingml/2006/main">
-            <a:r>
-              <a:t/>
-            </a:r>
-          </a:p>
-          <a:p xmlns:a="http://schemas.openxmlformats.org/drawingml/2006/main">
-            <a:r>
-              <a:t>REFERENCES</a:t>
-            </a:r>
-          </a:p>
-          <a:p xmlns:a="http://schemas.openxmlformats.org/drawingml/2006/main">
-            <a:r>
-              <a:t/>
+          <a:p>
+            <a:r>
+              <a:t>Continue to</a:t>
+            </a:r>
+          </a:p>
+          <a:p>
+            <a:r>
+              <a:t>Practical Test 2 continued</a:t>
             </a:r>
           </a:p>
         </p:txBody>
@@ -1716,7 +1611,7 @@
         <p:nvSpPr>
           <p:cNvPr id="4" name="Slide Number Placeholder 3"/>
           <p:cNvSpPr>
-            <a:spLocks xmlns:a="http://schemas.openxmlformats.org/drawingml/2006/main" noGrp="1"/>
+            <a:spLocks noGrp="1"/>
           </p:cNvSpPr>
           <p:nvPr>
             <p:ph type="sldNum" idx="5"/>
@@ -1724,21 +1619,21 @@
         </p:nvSpPr>
         <p:spPr/>
         <p:txBody>
-          <a:bodyPr xmlns:a="http://schemas.openxmlformats.org/drawingml/2006/main"/>
-          <a:lstStyle xmlns:a="http://schemas.openxmlformats.org/drawingml/2006/main"/>
-          <a:p xmlns:a="http://schemas.openxmlformats.org/drawingml/2006/main"/>
+          <a:bodyPr/>
+          <a:lstStyle/>
+          <a:p/>
         </p:txBody>
       </p:sp>
     </p:spTree>
   </p:cSld>
   <p:clrMapOvr>
-    <a:masterClrMapping xmlns:a="http://schemas.openxmlformats.org/drawingml/2006/main"/>
+    <a:masterClrMapping/>
   </p:clrMapOvr>
 </p:notes>
 </file>
 
 <file path=ppt/notesSlides/notesSlide16.xml><?xml version="1.0" encoding="utf-8"?>
-<p:notes xmlns:p="http://schemas.openxmlformats.org/presentationml/2006/main">
+<p:notes xmlns:a="http://schemas.openxmlformats.org/drawingml/2006/main" xmlns:p="http://schemas.openxmlformats.org/presentationml/2006/main">
   <p:cSld>
     <p:spTree>
       <p:nvGrpSpPr>
@@ -1747,13 +1642,13 @@
         <p:nvPr/>
       </p:nvGrpSpPr>
       <p:grpSpPr>
-        <a:xfrm xmlns:a="http://schemas.openxmlformats.org/drawingml/2006/main"/>
+        <a:xfrm/>
       </p:grpSpPr>
       <p:sp>
         <p:nvSpPr>
           <p:cNvPr id="2" name="Slide Image Placeholder 1"/>
           <p:cNvSpPr>
-            <a:spLocks xmlns:a="http://schemas.openxmlformats.org/drawingml/2006/main" noGrp="1"/>
+            <a:spLocks noGrp="1"/>
           </p:cNvSpPr>
           <p:nvPr>
             <p:ph type="sldImg" idx="0"/>
@@ -1765,7 +1660,7 @@
         <p:nvSpPr>
           <p:cNvPr id="3" name="Notes Placeholder 2"/>
           <p:cNvSpPr>
-            <a:spLocks xmlns:a="http://schemas.openxmlformats.org/drawingml/2006/main" noGrp="1"/>
+            <a:spLocks noGrp="1"/>
           </p:cNvSpPr>
           <p:nvPr>
             <p:ph type="body" idx="1"/>
@@ -1773,136 +1668,121 @@
         </p:nvSpPr>
         <p:spPr/>
         <p:txBody>
-          <a:bodyPr xmlns:a="http://schemas.openxmlformats.org/drawingml/2006/main"/>
-          <a:lstStyle xmlns:a="http://schemas.openxmlformats.org/drawingml/2006/main"/>
-          <a:p xmlns:a="http://schemas.openxmlformats.org/drawingml/2006/main">
-            <a:r>
-              <a:t>PURPOSE</a:t>
-            </a:r>
-          </a:p>
-          <a:p xmlns:a="http://schemas.openxmlformats.org/drawingml/2006/main">
+          <a:bodyPr/>
+          <a:lstStyle/>
+          <a:p>
             <a:r>
               <a:t>Practical Test 2 continued</a:t>
             </a:r>
           </a:p>
-          <a:p xmlns:a="http://schemas.openxmlformats.org/drawingml/2006/main">
+          <a:p>
+            <a:r>
+              <a:t>CML3112, Week 14, slide 16</a:t>
+            </a:r>
+          </a:p>
+          <a:p>
             <a:r>
               <a:t/>
             </a:r>
           </a:p>
-          <a:p xmlns:a="http://schemas.openxmlformats.org/drawingml/2006/main">
-            <a:r>
-              <a:t>CONNECT</a:t>
-            </a:r>
-          </a:p>
-          <a:p xmlns:a="http://schemas.openxmlformats.org/drawingml/2006/main">
-            <a:r>
-              <a:t>Previous slide: Practical Test 2 continued.</a:t>
-            </a:r>
-          </a:p>
-          <a:p xmlns:a="http://schemas.openxmlformats.org/drawingml/2006/main">
+          <a:p>
+            <a:r>
+              <a:t>Explanation to give</a:t>
+            </a:r>
+          </a:p>
+          <a:p>
+            <a:r>
+              <a:t>Read the metric with its unit and evaluation population. Explain why that error measure matches the cost of a wrong decision in the stated engineering setting.</a:t>
+            </a:r>
+          </a:p>
+          <a:p>
             <a:r>
               <a:t/>
             </a:r>
           </a:p>
-          <a:p xmlns:a="http://schemas.openxmlformats.org/drawingml/2006/main">
-            <a:r>
-              <a:t>EXPLAIN</a:t>
-            </a:r>
-          </a:p>
-          <a:p xmlns:a="http://schemas.openxmlformats.org/drawingml/2006/main">
+          <a:p>
+            <a:r>
+              <a:t>Worked illustration / lecturer answer</a:t>
+            </a:r>
+          </a:p>
+          <a:p>
+            <a:r>
+              <a:t>MAE 3 kW describes an average absolute error on named observations; it does not guarantee every prediction lies within 3 kW. Report baseline comparison and the evaluation protocol.</a:t>
+            </a:r>
+          </a:p>
+          <a:p>
+            <a:r>
+              <a:t/>
+            </a:r>
+          </a:p>
+          <a:p>
+            <a:r>
+              <a:t>Misconception to address</a:t>
+            </a:r>
+          </a:p>
+          <a:p>
+            <a:r>
+              <a:t>Avoid a deployment claim based only on a score. State genuine limitations involving data coverage, measurement quality or future operating conditions.</a:t>
+            </a:r>
+          </a:p>
+          <a:p>
+            <a:r>
+              <a:t/>
+            </a:r>
+          </a:p>
+          <a:p>
+            <a:r>
+              <a:t>On this slide</a:t>
+            </a:r>
+          </a:p>
+          <a:p>
             <a:r>
               <a:t>Engineering interpretation &amp; limits (20.0 total): The result is stated in physical or operational units.</a:t>
             </a:r>
           </a:p>
-          <a:p xmlns:a="http://schemas.openxmlformats.org/drawingml/2006/main">
+          <a:p>
             <a:r>
               <a:t/>
             </a:r>
           </a:p>
-          <a:p xmlns:a="http://schemas.openxmlformats.org/drawingml/2006/main">
+          <a:p>
             <a:r>
               <a:t>Three genuine limitations given.</a:t>
             </a:r>
           </a:p>
-          <a:p xmlns:a="http://schemas.openxmlformats.org/drawingml/2006/main">
+          <a:p>
             <a:r>
               <a:t/>
             </a:r>
           </a:p>
-          <a:p xmlns:a="http://schemas.openxmlformats.org/drawingml/2006/main">
+          <a:p>
             <a:r>
               <a:t>A clear position on whether it should be deployed.</a:t>
             </a:r>
           </a:p>
-          <a:p xmlns:a="http://schemas.openxmlformats.org/drawingml/2006/main">
+          <a:p>
             <a:r>
               <a:t/>
             </a:r>
           </a:p>
-          <a:p xmlns:a="http://schemas.openxmlformats.org/drawingml/2006/main">
+          <a:p>
             <a:r>
               <a:t>Code clarity (10.0 total): Runs top to bottom.</a:t>
             </a:r>
           </a:p>
-          <a:p xmlns:a="http://schemas.openxmlformats.org/drawingml/2006/main">
+          <a:p>
             <a:r>
               <a:t/>
             </a:r>
           </a:p>
-          <a:p xmlns:a="http://schemas.openxmlformats.org/drawingml/2006/main">
-            <a:r>
-              <a:t>LECTURER CUE</a:t>
-            </a:r>
-          </a:p>
-          <a:p xmlns:a="http://schemas.openxmlformats.org/drawingml/2006/main">
-            <a:r>
-              <a:t>Read the specific public requirement shown on this slide. Explain the input, output and evidence before independent work; do not work the assessed answer for the class.</a:t>
-            </a:r>
-          </a:p>
-          <a:p xmlns:a="http://schemas.openxmlformats.org/drawingml/2006/main">
-            <a:r>
-              <a:t/>
-            </a:r>
-          </a:p>
-          <a:p xmlns:a="http://schemas.openxmlformats.org/drawingml/2006/main">
-            <a:r>
-              <a:t>TEACHING MODE</a:t>
-            </a:r>
-          </a:p>
-          <a:p xmlns:a="http://schemas.openxmlformats.org/drawingml/2006/main">
-            <a:r>
-              <a:t>Demonstrate first. Read each new symbol aloud, trace the values and compare the shown output. Learners repeat worked examples individually after class.</a:t>
-            </a:r>
-          </a:p>
-          <a:p xmlns:a="http://schemas.openxmlformats.org/drawingml/2006/main">
-            <a:r>
-              <a:t/>
-            </a:r>
-          </a:p>
-          <a:p xmlns:a="http://schemas.openxmlformats.org/drawingml/2006/main">
-            <a:r>
-              <a:t>NEXT</a:t>
-            </a:r>
-          </a:p>
-          <a:p xmlns:a="http://schemas.openxmlformats.org/drawingml/2006/main">
-            <a:r>
-              <a:t>Practical Test 2 continued.</a:t>
-            </a:r>
-          </a:p>
-          <a:p xmlns:a="http://schemas.openxmlformats.org/drawingml/2006/main">
-            <a:r>
-              <a:t/>
-            </a:r>
-          </a:p>
-          <a:p xmlns:a="http://schemas.openxmlformats.org/drawingml/2006/main">
-            <a:r>
-              <a:t>REFERENCES</a:t>
-            </a:r>
-          </a:p>
-          <a:p xmlns:a="http://schemas.openxmlformats.org/drawingml/2006/main">
-            <a:r>
-              <a:t/>
+          <a:p>
+            <a:r>
+              <a:t>Continue to</a:t>
+            </a:r>
+          </a:p>
+          <a:p>
+            <a:r>
+              <a:t>Practical Test 2 continued</a:t>
             </a:r>
           </a:p>
         </p:txBody>
@@ -1911,7 +1791,7 @@
         <p:nvSpPr>
           <p:cNvPr id="4" name="Slide Number Placeholder 3"/>
           <p:cNvSpPr>
-            <a:spLocks xmlns:a="http://schemas.openxmlformats.org/drawingml/2006/main" noGrp="1"/>
+            <a:spLocks noGrp="1"/>
           </p:cNvSpPr>
           <p:nvPr>
             <p:ph type="sldNum" idx="5"/>
@@ -1919,21 +1799,21 @@
         </p:nvSpPr>
         <p:spPr/>
         <p:txBody>
-          <a:bodyPr xmlns:a="http://schemas.openxmlformats.org/drawingml/2006/main"/>
-          <a:lstStyle xmlns:a="http://schemas.openxmlformats.org/drawingml/2006/main"/>
-          <a:p xmlns:a="http://schemas.openxmlformats.org/drawingml/2006/main"/>
+          <a:bodyPr/>
+          <a:lstStyle/>
+          <a:p/>
         </p:txBody>
       </p:sp>
     </p:spTree>
   </p:cSld>
   <p:clrMapOvr>
-    <a:masterClrMapping xmlns:a="http://schemas.openxmlformats.org/drawingml/2006/main"/>
+    <a:masterClrMapping/>
   </p:clrMapOvr>
 </p:notes>
 </file>
 
 <file path=ppt/notesSlides/notesSlide17.xml><?xml version="1.0" encoding="utf-8"?>
-<p:notes xmlns:p="http://schemas.openxmlformats.org/presentationml/2006/main">
+<p:notes xmlns:a="http://schemas.openxmlformats.org/drawingml/2006/main" xmlns:p="http://schemas.openxmlformats.org/presentationml/2006/main">
   <p:cSld>
     <p:spTree>
       <p:nvGrpSpPr>
@@ -1942,13 +1822,13 @@
         <p:nvPr/>
       </p:nvGrpSpPr>
       <p:grpSpPr>
-        <a:xfrm xmlns:a="http://schemas.openxmlformats.org/drawingml/2006/main"/>
+        <a:xfrm/>
       </p:grpSpPr>
       <p:sp>
         <p:nvSpPr>
           <p:cNvPr id="2" name="Slide Image Placeholder 1"/>
           <p:cNvSpPr>
-            <a:spLocks xmlns:a="http://schemas.openxmlformats.org/drawingml/2006/main" noGrp="1"/>
+            <a:spLocks noGrp="1"/>
           </p:cNvSpPr>
           <p:nvPr>
             <p:ph type="sldImg" idx="0"/>
@@ -1960,7 +1840,7 @@
         <p:nvSpPr>
           <p:cNvPr id="3" name="Notes Placeholder 2"/>
           <p:cNvSpPr>
-            <a:spLocks xmlns:a="http://schemas.openxmlformats.org/drawingml/2006/main" noGrp="1"/>
+            <a:spLocks noGrp="1"/>
           </p:cNvSpPr>
           <p:nvPr>
             <p:ph type="body" idx="1"/>
@@ -1968,136 +1848,121 @@
         </p:nvSpPr>
         <p:spPr/>
         <p:txBody>
-          <a:bodyPr xmlns:a="http://schemas.openxmlformats.org/drawingml/2006/main"/>
-          <a:lstStyle xmlns:a="http://schemas.openxmlformats.org/drawingml/2006/main"/>
-          <a:p xmlns:a="http://schemas.openxmlformats.org/drawingml/2006/main">
-            <a:r>
-              <a:t>PURPOSE</a:t>
-            </a:r>
-          </a:p>
-          <a:p xmlns:a="http://schemas.openxmlformats.org/drawingml/2006/main">
+          <a:bodyPr/>
+          <a:lstStyle/>
+          <a:p>
             <a:r>
               <a:t>Practical Test 2 continued</a:t>
             </a:r>
           </a:p>
-          <a:p xmlns:a="http://schemas.openxmlformats.org/drawingml/2006/main">
+          <a:p>
+            <a:r>
+              <a:t>CML3112, Week 14, slide 17</a:t>
+            </a:r>
+          </a:p>
+          <a:p>
             <a:r>
               <a:t/>
             </a:r>
           </a:p>
-          <a:p xmlns:a="http://schemas.openxmlformats.org/drawingml/2006/main">
-            <a:r>
-              <a:t>CONNECT</a:t>
-            </a:r>
-          </a:p>
-          <a:p xmlns:a="http://schemas.openxmlformats.org/drawingml/2006/main">
-            <a:r>
-              <a:t>Previous slide: Practical Test 2 continued.</a:t>
-            </a:r>
-          </a:p>
-          <a:p xmlns:a="http://schemas.openxmlformats.org/drawingml/2006/main">
+          <a:p>
+            <a:r>
+              <a:t>Explanation to give</a:t>
+            </a:r>
+          </a:p>
+          <a:p>
+            <a:r>
+              <a:t>Explain the order: partition data using the stated protocol, fit preparation on training data, fit models, compare on validation data and leave final test data untouched until choices are fixed.</a:t>
+            </a:r>
+          </a:p>
+          <a:p>
             <a:r>
               <a:t/>
             </a:r>
           </a:p>
-          <a:p xmlns:a="http://schemas.openxmlformats.org/drawingml/2006/main">
-            <a:r>
-              <a:t>EXPLAIN</a:t>
-            </a:r>
-          </a:p>
-          <a:p xmlns:a="http://schemas.openxmlformats.org/drawingml/2006/main">
+          <a:p>
+            <a:r>
+              <a:t>Worked illustration / lecturer answer</a:t>
+            </a:r>
+          </a:p>
+          <a:p>
+            <a:r>
+              <a:t>Compare models on identical held-out observations with the same metric and preprocessing rules. Each cross-validation training fold learns its own preparation values.</a:t>
+            </a:r>
+          </a:p>
+          <a:p>
+            <a:r>
+              <a:t/>
+            </a:r>
+          </a:p>
+          <a:p>
+            <a:r>
+              <a:t>Misconception to address</a:t>
+            </a:r>
+          </a:p>
+          <a:p>
+            <a:r>
+              <a:t>A written claim of no leakage must agree with the executable split and fitting code. Follow the published execution requirement for any criterion linked to the split check.</a:t>
+            </a:r>
+          </a:p>
+          <a:p>
+            <a:r>
+              <a:t/>
+            </a:r>
+          </a:p>
+          <a:p>
+            <a:r>
+              <a:t>On this slide</a:t>
+            </a:r>
+          </a:p>
+          <a:p>
             <a:r>
               <a:t>Readable.</a:t>
             </a:r>
           </a:p>
-          <a:p xmlns:a="http://schemas.openxmlformats.org/drawingml/2006/main">
+          <a:p>
             <a:r>
               <a:t/>
             </a:r>
           </a:p>
-          <a:p xmlns:a="http://schemas.openxmlformats.org/drawingml/2006/main">
+          <a:p>
             <a:r>
               <a:t>Commented where the intent is not obvious.</a:t>
             </a:r>
           </a:p>
-          <a:p xmlns:a="http://schemas.openxmlformats.org/drawingml/2006/main">
+          <a:p>
             <a:r>
               <a:t/>
             </a:r>
           </a:p>
-          <a:p xmlns:a="http://schemas.openxmlformats.org/drawingml/2006/main">
+          <a:p>
             <a:r>
               <a:t>Execution requirement for c2: Data-preparation credit requires the published leakage-safe split check to pass.</a:t>
             </a:r>
           </a:p>
-          <a:p xmlns:a="http://schemas.openxmlformats.org/drawingml/2006/main">
+          <a:p>
             <a:r>
               <a:t/>
             </a:r>
           </a:p>
-          <a:p xmlns:a="http://schemas.openxmlformats.org/drawingml/2006/main">
+          <a:p>
             <a:r>
               <a:t>If this check fails, written marks in that criterion are zero; other criteria remain independently scored.</a:t>
             </a:r>
           </a:p>
-          <a:p xmlns:a="http://schemas.openxmlformats.org/drawingml/2006/main">
+          <a:p>
             <a:r>
               <a:t/>
             </a:r>
           </a:p>
-          <a:p xmlns:a="http://schemas.openxmlformats.org/drawingml/2006/main">
-            <a:r>
-              <a:t>LECTURER CUE</a:t>
-            </a:r>
-          </a:p>
-          <a:p xmlns:a="http://schemas.openxmlformats.org/drawingml/2006/main">
-            <a:r>
-              <a:t>Read the specific public requirement shown on this slide. Explain the input, output and evidence before independent work; do not work the assessed answer for the class.</a:t>
-            </a:r>
-          </a:p>
-          <a:p xmlns:a="http://schemas.openxmlformats.org/drawingml/2006/main">
-            <a:r>
-              <a:t/>
-            </a:r>
-          </a:p>
-          <a:p xmlns:a="http://schemas.openxmlformats.org/drawingml/2006/main">
-            <a:r>
-              <a:t>TEACHING MODE</a:t>
-            </a:r>
-          </a:p>
-          <a:p xmlns:a="http://schemas.openxmlformats.org/drawingml/2006/main">
-            <a:r>
-              <a:t>Demonstrate first. Read each new symbol aloud, trace the values and compare the shown output. Learners repeat worked examples individually after class.</a:t>
-            </a:r>
-          </a:p>
-          <a:p xmlns:a="http://schemas.openxmlformats.org/drawingml/2006/main">
-            <a:r>
-              <a:t/>
-            </a:r>
-          </a:p>
-          <a:p xmlns:a="http://schemas.openxmlformats.org/drawingml/2006/main">
-            <a:r>
-              <a:t>NEXT</a:t>
-            </a:r>
-          </a:p>
-          <a:p xmlns:a="http://schemas.openxmlformats.org/drawingml/2006/main">
-            <a:r>
-              <a:t>Practical Test 2 continued.</a:t>
-            </a:r>
-          </a:p>
-          <a:p xmlns:a="http://schemas.openxmlformats.org/drawingml/2006/main">
-            <a:r>
-              <a:t/>
-            </a:r>
-          </a:p>
-          <a:p xmlns:a="http://schemas.openxmlformats.org/drawingml/2006/main">
-            <a:r>
-              <a:t>REFERENCES</a:t>
-            </a:r>
-          </a:p>
-          <a:p xmlns:a="http://schemas.openxmlformats.org/drawingml/2006/main">
-            <a:r>
-              <a:t/>
+          <a:p>
+            <a:r>
+              <a:t>Continue to</a:t>
+            </a:r>
+          </a:p>
+          <a:p>
+            <a:r>
+              <a:t>Practical Test 2 continued</a:t>
             </a:r>
           </a:p>
         </p:txBody>
@@ -2106,7 +1971,7 @@
         <p:nvSpPr>
           <p:cNvPr id="4" name="Slide Number Placeholder 3"/>
           <p:cNvSpPr>
-            <a:spLocks xmlns:a="http://schemas.openxmlformats.org/drawingml/2006/main" noGrp="1"/>
+            <a:spLocks noGrp="1"/>
           </p:cNvSpPr>
           <p:nvPr>
             <p:ph type="sldNum" idx="5"/>
@@ -2114,21 +1979,21 @@
         </p:nvSpPr>
         <p:spPr/>
         <p:txBody>
-          <a:bodyPr xmlns:a="http://schemas.openxmlformats.org/drawingml/2006/main"/>
-          <a:lstStyle xmlns:a="http://schemas.openxmlformats.org/drawingml/2006/main"/>
-          <a:p xmlns:a="http://schemas.openxmlformats.org/drawingml/2006/main"/>
+          <a:bodyPr/>
+          <a:lstStyle/>
+          <a:p/>
         </p:txBody>
       </p:sp>
     </p:spTree>
   </p:cSld>
   <p:clrMapOvr>
-    <a:masterClrMapping xmlns:a="http://schemas.openxmlformats.org/drawingml/2006/main"/>
+    <a:masterClrMapping/>
   </p:clrMapOvr>
 </p:notes>
 </file>
 
 <file path=ppt/notesSlides/notesSlide18.xml><?xml version="1.0" encoding="utf-8"?>
-<p:notes xmlns:p="http://schemas.openxmlformats.org/presentationml/2006/main">
+<p:notes xmlns:a="http://schemas.openxmlformats.org/drawingml/2006/main" xmlns:p="http://schemas.openxmlformats.org/presentationml/2006/main">
   <p:cSld>
     <p:spTree>
       <p:nvGrpSpPr>
@@ -2137,13 +2002,13 @@
         <p:nvPr/>
       </p:nvGrpSpPr>
       <p:grpSpPr>
-        <a:xfrm xmlns:a="http://schemas.openxmlformats.org/drawingml/2006/main"/>
+        <a:xfrm/>
       </p:grpSpPr>
       <p:sp>
         <p:nvSpPr>
           <p:cNvPr id="2" name="Slide Image Placeholder 1"/>
           <p:cNvSpPr>
-            <a:spLocks xmlns:a="http://schemas.openxmlformats.org/drawingml/2006/main" noGrp="1"/>
+            <a:spLocks noGrp="1"/>
           </p:cNvSpPr>
           <p:nvPr>
             <p:ph type="sldImg" idx="0"/>
@@ -2155,7 +2020,7 @@
         <p:nvSpPr>
           <p:cNvPr id="3" name="Notes Placeholder 2"/>
           <p:cNvSpPr>
-            <a:spLocks xmlns:a="http://schemas.openxmlformats.org/drawingml/2006/main" noGrp="1"/>
+            <a:spLocks noGrp="1"/>
           </p:cNvSpPr>
           <p:nvPr>
             <p:ph type="body" idx="1"/>
@@ -2163,136 +2028,121 @@
         </p:nvSpPr>
         <p:spPr/>
         <p:txBody>
-          <a:bodyPr xmlns:a="http://schemas.openxmlformats.org/drawingml/2006/main"/>
-          <a:lstStyle xmlns:a="http://schemas.openxmlformats.org/drawingml/2006/main"/>
-          <a:p xmlns:a="http://schemas.openxmlformats.org/drawingml/2006/main">
-            <a:r>
-              <a:t>PURPOSE</a:t>
-            </a:r>
-          </a:p>
-          <a:p xmlns:a="http://schemas.openxmlformats.org/drawingml/2006/main">
+          <a:bodyPr/>
+          <a:lstStyle/>
+          <a:p>
             <a:r>
               <a:t>Practical Test 2 continued</a:t>
             </a:r>
           </a:p>
-          <a:p xmlns:a="http://schemas.openxmlformats.org/drawingml/2006/main">
+          <a:p>
+            <a:r>
+              <a:t>CML3112, Week 14, slide 18</a:t>
+            </a:r>
+          </a:p>
+          <a:p>
             <a:r>
               <a:t/>
             </a:r>
           </a:p>
-          <a:p xmlns:a="http://schemas.openxmlformats.org/drawingml/2006/main">
-            <a:r>
-              <a:t>CONNECT</a:t>
-            </a:r>
-          </a:p>
-          <a:p xmlns:a="http://schemas.openxmlformats.org/drawingml/2006/main">
-            <a:r>
-              <a:t>Previous slide: Practical Test 2 continued.</a:t>
-            </a:r>
-          </a:p>
-          <a:p xmlns:a="http://schemas.openxmlformats.org/drawingml/2006/main">
+          <a:p>
+            <a:r>
+              <a:t>Explanation to give</a:t>
+            </a:r>
+          </a:p>
+          <a:p>
+            <a:r>
+              <a:t>Prepare for Test 2 by rehearsing the previously taught modelling decisions and the offline evidence workflow. Do not turn the assessed period into a worked lesson.</a:t>
+            </a:r>
+          </a:p>
+          <a:p>
             <a:r>
               <a:t/>
             </a:r>
           </a:p>
-          <a:p xmlns:a="http://schemas.openxmlformats.org/drawingml/2006/main">
-            <a:r>
-              <a:t>EXPLAIN</a:t>
-            </a:r>
-          </a:p>
-          <a:p xmlns:a="http://schemas.openxmlformats.org/drawingml/2006/main">
+          <a:p>
+            <a:r>
+              <a:t>Worked illustration / lecturer answer</a:t>
+            </a:r>
+          </a:p>
+          <a:p>
+            <a:r>
+              <a:t>Part B is typed reasoning in the same notebook, with code execution prohibited. The invigilated collection is authoritative; a later upload only transports that snapshot.</a:t>
+            </a:r>
+          </a:p>
+          <a:p>
+            <a:r>
+              <a:t/>
+            </a:r>
+          </a:p>
+          <a:p>
+            <a:r>
+              <a:t>Misconception to address</a:t>
+            </a:r>
+          </a:p>
+          <a:p>
+            <a:r>
+              <a:t>At the Part A boundary, follow the official snapshot procedure. During the 25-minute Part B period, students type reasoning but must not execute code. Do not change the published timing during an explanation.</a:t>
+            </a:r>
+          </a:p>
+          <a:p>
+            <a:r>
+              <a:t/>
+            </a:r>
+          </a:p>
+          <a:p>
+            <a:r>
+              <a:t>On this slide</a:t>
+            </a:r>
+          </a:p>
+          <a:p>
             <a:r>
               <a:t>Timing and Part B</a:t>
             </a:r>
           </a:p>
-          <a:p xmlns:a="http://schemas.openxmlformats.org/drawingml/2006/main">
+          <a:p>
             <a:r>
               <a:t/>
             </a:r>
           </a:p>
-          <a:p xmlns:a="http://schemas.openxmlformats.org/drawingml/2006/main">
+          <a:p>
             <a:r>
               <a:t>15 minutes setup, 120 minutes practical, 25 minutes typed offline reasoning with code execution prohibited, 20 minutes collection.</a:t>
             </a:r>
           </a:p>
-          <a:p xmlns:a="http://schemas.openxmlformats.org/drawingml/2006/main">
+          <a:p>
             <a:r>
               <a:t/>
             </a:r>
           </a:p>
-          <a:p xmlns:a="http://schemas.openxmlformats.org/drawingml/2006/main">
+          <a:p>
             <a:r>
               <a:t>No internet, messaging or AI.</a:t>
             </a:r>
           </a:p>
-          <a:p xmlns:a="http://schemas.openxmlformats.org/drawingml/2006/main">
+          <a:p>
             <a:r>
               <a:t/>
             </a:r>
           </a:p>
-          <a:p xmlns:a="http://schemas.openxmlformats.org/drawingml/2006/main">
+          <a:p>
             <a:r>
               <a:t>Answer: Why your main cleaning/model choice?</a:t>
             </a:r>
           </a:p>
-          <a:p xmlns:a="http://schemas.openxmlformats.org/drawingml/2006/main">
+          <a:p>
             <a:r>
               <a:t/>
             </a:r>
           </a:p>
-          <a:p xmlns:a="http://schemas.openxmlformats.org/drawingml/2006/main">
-            <a:r>
-              <a:t>LECTURER CUE</a:t>
-            </a:r>
-          </a:p>
-          <a:p xmlns:a="http://schemas.openxmlformats.org/drawingml/2006/main">
-            <a:r>
-              <a:t>Read the specific public requirement shown on this slide. Explain the input, output and evidence before independent work; do not work the assessed answer for the class.</a:t>
-            </a:r>
-          </a:p>
-          <a:p xmlns:a="http://schemas.openxmlformats.org/drawingml/2006/main">
-            <a:r>
-              <a:t/>
-            </a:r>
-          </a:p>
-          <a:p xmlns:a="http://schemas.openxmlformats.org/drawingml/2006/main">
-            <a:r>
-              <a:t>TEACHING MODE</a:t>
-            </a:r>
-          </a:p>
-          <a:p xmlns:a="http://schemas.openxmlformats.org/drawingml/2006/main">
-            <a:r>
-              <a:t>Demonstrate first. Read each new symbol aloud, trace the values and compare the shown output. Learners repeat worked examples individually after class.</a:t>
-            </a:r>
-          </a:p>
-          <a:p xmlns:a="http://schemas.openxmlformats.org/drawingml/2006/main">
-            <a:r>
-              <a:t/>
-            </a:r>
-          </a:p>
-          <a:p xmlns:a="http://schemas.openxmlformats.org/drawingml/2006/main">
-            <a:r>
-              <a:t>NEXT</a:t>
-            </a:r>
-          </a:p>
-          <a:p xmlns:a="http://schemas.openxmlformats.org/drawingml/2006/main">
-            <a:r>
-              <a:t>Practical Test 2 continued.</a:t>
-            </a:r>
-          </a:p>
-          <a:p xmlns:a="http://schemas.openxmlformats.org/drawingml/2006/main">
-            <a:r>
-              <a:t/>
-            </a:r>
-          </a:p>
-          <a:p xmlns:a="http://schemas.openxmlformats.org/drawingml/2006/main">
-            <a:r>
-              <a:t>REFERENCES</a:t>
-            </a:r>
-          </a:p>
-          <a:p xmlns:a="http://schemas.openxmlformats.org/drawingml/2006/main">
-            <a:r>
-              <a:t/>
+          <a:p>
+            <a:r>
+              <a:t>Continue to</a:t>
+            </a:r>
+          </a:p>
+          <a:p>
+            <a:r>
+              <a:t>Practical Test 2 continued</a:t>
             </a:r>
           </a:p>
         </p:txBody>
@@ -2301,7 +2151,7 @@
         <p:nvSpPr>
           <p:cNvPr id="4" name="Slide Number Placeholder 3"/>
           <p:cNvSpPr>
-            <a:spLocks xmlns:a="http://schemas.openxmlformats.org/drawingml/2006/main" noGrp="1"/>
+            <a:spLocks noGrp="1"/>
           </p:cNvSpPr>
           <p:nvPr>
             <p:ph type="sldNum" idx="5"/>
@@ -2309,21 +2159,21 @@
         </p:nvSpPr>
         <p:spPr/>
         <p:txBody>
-          <a:bodyPr xmlns:a="http://schemas.openxmlformats.org/drawingml/2006/main"/>
-          <a:lstStyle xmlns:a="http://schemas.openxmlformats.org/drawingml/2006/main"/>
-          <a:p xmlns:a="http://schemas.openxmlformats.org/drawingml/2006/main"/>
+          <a:bodyPr/>
+          <a:lstStyle/>
+          <a:p/>
         </p:txBody>
       </p:sp>
     </p:spTree>
   </p:cSld>
   <p:clrMapOvr>
-    <a:masterClrMapping xmlns:a="http://schemas.openxmlformats.org/drawingml/2006/main"/>
+    <a:masterClrMapping/>
   </p:clrMapOvr>
 </p:notes>
 </file>
 
 <file path=ppt/notesSlides/notesSlide19.xml><?xml version="1.0" encoding="utf-8"?>
-<p:notes xmlns:p="http://schemas.openxmlformats.org/presentationml/2006/main">
+<p:notes xmlns:a="http://schemas.openxmlformats.org/drawingml/2006/main" xmlns:p="http://schemas.openxmlformats.org/presentationml/2006/main">
   <p:cSld>
     <p:spTree>
       <p:nvGrpSpPr>
@@ -2332,13 +2182,13 @@
         <p:nvPr/>
       </p:nvGrpSpPr>
       <p:grpSpPr>
-        <a:xfrm xmlns:a="http://schemas.openxmlformats.org/drawingml/2006/main"/>
+        <a:xfrm/>
       </p:grpSpPr>
       <p:sp>
         <p:nvSpPr>
           <p:cNvPr id="2" name="Slide Image Placeholder 1"/>
           <p:cNvSpPr>
-            <a:spLocks xmlns:a="http://schemas.openxmlformats.org/drawingml/2006/main" noGrp="1"/>
+            <a:spLocks noGrp="1"/>
           </p:cNvSpPr>
           <p:nvPr>
             <p:ph type="sldImg" idx="0"/>
@@ -2350,7 +2200,7 @@
         <p:nvSpPr>
           <p:cNvPr id="3" name="Notes Placeholder 2"/>
           <p:cNvSpPr>
-            <a:spLocks xmlns:a="http://schemas.openxmlformats.org/drawingml/2006/main" noGrp="1"/>
+            <a:spLocks noGrp="1"/>
           </p:cNvSpPr>
           <p:nvPr>
             <p:ph type="body" idx="1"/>
@@ -2358,136 +2208,121 @@
         </p:nvSpPr>
         <p:spPr/>
         <p:txBody>
-          <a:bodyPr xmlns:a="http://schemas.openxmlformats.org/drawingml/2006/main"/>
-          <a:lstStyle xmlns:a="http://schemas.openxmlformats.org/drawingml/2006/main"/>
-          <a:p xmlns:a="http://schemas.openxmlformats.org/drawingml/2006/main">
-            <a:r>
-              <a:t>PURPOSE</a:t>
-            </a:r>
-          </a:p>
-          <a:p xmlns:a="http://schemas.openxmlformats.org/drawingml/2006/main">
+          <a:bodyPr/>
+          <a:lstStyle/>
+          <a:p>
             <a:r>
               <a:t>Practical Test 2 continued</a:t>
             </a:r>
           </a:p>
-          <a:p xmlns:a="http://schemas.openxmlformats.org/drawingml/2006/main">
+          <a:p>
+            <a:r>
+              <a:t>CML3112, Week 14, slide 19</a:t>
+            </a:r>
+          </a:p>
+          <a:p>
             <a:r>
               <a:t/>
             </a:r>
           </a:p>
-          <a:p xmlns:a="http://schemas.openxmlformats.org/drawingml/2006/main">
-            <a:r>
-              <a:t>CONNECT</a:t>
-            </a:r>
-          </a:p>
-          <a:p xmlns:a="http://schemas.openxmlformats.org/drawingml/2006/main">
-            <a:r>
-              <a:t>Previous slide: Practical Test 2 continued.</a:t>
-            </a:r>
-          </a:p>
-          <a:p xmlns:a="http://schemas.openxmlformats.org/drawingml/2006/main">
+          <a:p>
+            <a:r>
+              <a:t>Explanation to give</a:t>
+            </a:r>
+          </a:p>
+          <a:p>
+            <a:r>
+              <a:t>A chart must answer a stated question and show the actual data result. Explain what one mark represents and label both the quantity and unit before stating the finding.</a:t>
+            </a:r>
+          </a:p>
+          <a:p>
             <a:r>
               <a:t/>
             </a:r>
           </a:p>
-          <a:p xmlns:a="http://schemas.openxmlformats.org/drawingml/2006/main">
-            <a:r>
-              <a:t>EXPLAIN</a:t>
-            </a:r>
-          </a:p>
-          <a:p xmlns:a="http://schemas.openxmlformats.org/drawingml/2006/main">
+          <a:p>
+            <a:r>
+              <a:t>Worked illustration / lecturer answer</a:t>
+            </a:r>
+          </a:p>
+          <a:p>
+            <a:r>
+              <a:t>A useful caption names the group or sample, the observed difference and the relevant unit. A limitation states what the plotted observations cannot establish, such as causation or performance at a new site.</a:t>
+            </a:r>
+          </a:p>
+          <a:p>
+            <a:r>
+              <a:t/>
+            </a:r>
+          </a:p>
+          <a:p>
+            <a:r>
+              <a:t>Misconception to address</a:t>
+            </a:r>
+          </a:p>
+          <a:p>
+            <a:r>
+              <a:t>Text claiming “a chart was made” is not the required chart. Check the exact number and kinds required on this slide and in the assessment guide.</a:t>
+            </a:r>
+          </a:p>
+          <a:p>
+            <a:r>
+              <a:t/>
+            </a:r>
+          </a:p>
+          <a:p>
+            <a:r>
+              <a:t>On this slide</a:t>
+            </a:r>
+          </a:p>
+          <a:p>
             <a:r>
               <a:t>What can your chart/metric not establish?</a:t>
             </a:r>
           </a:p>
-          <a:p xmlns:a="http://schemas.openxmlformats.org/drawingml/2006/main">
+          <a:p>
             <a:r>
               <a:t/>
             </a:r>
           </a:p>
-          <a:p xmlns:a="http://schemas.openxmlformats.org/drawingml/2006/main">
+          <a:p>
             <a:r>
               <a:t>What evidence would change your recommendation?</a:t>
             </a:r>
           </a:p>
-          <a:p xmlns:a="http://schemas.openxmlformats.org/drawingml/2006/main">
+          <a:p>
             <a:r>
               <a:t/>
             </a:r>
           </a:p>
-          <a:p xmlns:a="http://schemas.openxmlformats.org/drawingml/2006/main">
+          <a:p>
             <a:r>
               <a:t>What further data is required?</a:t>
             </a:r>
           </a:p>
-          <a:p xmlns:a="http://schemas.openxmlformats.org/drawingml/2006/main">
+          <a:p>
             <a:r>
               <a:t/>
             </a:r>
           </a:p>
-          <a:p xmlns:a="http://schemas.openxmlformats.org/drawingml/2006/main">
+          <a:p>
             <a:r>
               <a:t>Invigilated offline collection is authoritative; Google upload is a later transport step and must not impose an internet requirement during the test.</a:t>
             </a:r>
           </a:p>
-          <a:p xmlns:a="http://schemas.openxmlformats.org/drawingml/2006/main">
+          <a:p>
             <a:r>
               <a:t/>
             </a:r>
           </a:p>
-          <a:p xmlns:a="http://schemas.openxmlformats.org/drawingml/2006/main">
-            <a:r>
-              <a:t>LECTURER CUE</a:t>
-            </a:r>
-          </a:p>
-          <a:p xmlns:a="http://schemas.openxmlformats.org/drawingml/2006/main">
-            <a:r>
-              <a:t>Read the specific public requirement shown on this slide. Explain the input, output and evidence before independent work; do not work the assessed answer for the class.</a:t>
-            </a:r>
-          </a:p>
-          <a:p xmlns:a="http://schemas.openxmlformats.org/drawingml/2006/main">
-            <a:r>
-              <a:t/>
-            </a:r>
-          </a:p>
-          <a:p xmlns:a="http://schemas.openxmlformats.org/drawingml/2006/main">
-            <a:r>
-              <a:t>TEACHING MODE</a:t>
-            </a:r>
-          </a:p>
-          <a:p xmlns:a="http://schemas.openxmlformats.org/drawingml/2006/main">
-            <a:r>
-              <a:t>Demonstrate first. Read each new symbol aloud, trace the values and compare the shown output. Learners repeat worked examples individually after class.</a:t>
-            </a:r>
-          </a:p>
-          <a:p xmlns:a="http://schemas.openxmlformats.org/drawingml/2006/main">
-            <a:r>
-              <a:t/>
-            </a:r>
-          </a:p>
-          <a:p xmlns:a="http://schemas.openxmlformats.org/drawingml/2006/main">
-            <a:r>
-              <a:t>NEXT</a:t>
-            </a:r>
-          </a:p>
-          <a:p xmlns:a="http://schemas.openxmlformats.org/drawingml/2006/main">
-            <a:r>
-              <a:t>Practical Test 2 submission.</a:t>
-            </a:r>
-          </a:p>
-          <a:p xmlns:a="http://schemas.openxmlformats.org/drawingml/2006/main">
-            <a:r>
-              <a:t/>
-            </a:r>
-          </a:p>
-          <a:p xmlns:a="http://schemas.openxmlformats.org/drawingml/2006/main">
-            <a:r>
-              <a:t>REFERENCES</a:t>
-            </a:r>
-          </a:p>
-          <a:p xmlns:a="http://schemas.openxmlformats.org/drawingml/2006/main">
-            <a:r>
-              <a:t/>
+          <a:p>
+            <a:r>
+              <a:t>Continue to</a:t>
+            </a:r>
+          </a:p>
+          <a:p>
+            <a:r>
+              <a:t>Practical Test 2 submission</a:t>
             </a:r>
           </a:p>
         </p:txBody>
@@ -2496,7 +2331,7 @@
         <p:nvSpPr>
           <p:cNvPr id="4" name="Slide Number Placeholder 3"/>
           <p:cNvSpPr>
-            <a:spLocks xmlns:a="http://schemas.openxmlformats.org/drawingml/2006/main" noGrp="1"/>
+            <a:spLocks noGrp="1"/>
           </p:cNvSpPr>
           <p:nvPr>
             <p:ph type="sldNum" idx="5"/>
@@ -2504,21 +2339,21 @@
         </p:nvSpPr>
         <p:spPr/>
         <p:txBody>
-          <a:bodyPr xmlns:a="http://schemas.openxmlformats.org/drawingml/2006/main"/>
-          <a:lstStyle xmlns:a="http://schemas.openxmlformats.org/drawingml/2006/main"/>
-          <a:p xmlns:a="http://schemas.openxmlformats.org/drawingml/2006/main"/>
+          <a:bodyPr/>
+          <a:lstStyle/>
+          <a:p/>
         </p:txBody>
       </p:sp>
     </p:spTree>
   </p:cSld>
   <p:clrMapOvr>
-    <a:masterClrMapping xmlns:a="http://schemas.openxmlformats.org/drawingml/2006/main"/>
+    <a:masterClrMapping/>
   </p:clrMapOvr>
 </p:notes>
 </file>
 
 <file path=ppt/notesSlides/notesSlide2.xml><?xml version="1.0" encoding="utf-8"?>
-<p:notes xmlns:p="http://schemas.openxmlformats.org/presentationml/2006/main">
+<p:notes xmlns:a="http://schemas.openxmlformats.org/drawingml/2006/main" xmlns:p="http://schemas.openxmlformats.org/presentationml/2006/main">
   <p:cSld>
     <p:spTree>
       <p:nvGrpSpPr>
@@ -2527,13 +2362,13 @@
         <p:nvPr/>
       </p:nvGrpSpPr>
       <p:grpSpPr>
-        <a:xfrm xmlns:a="http://schemas.openxmlformats.org/drawingml/2006/main"/>
+        <a:xfrm/>
       </p:grpSpPr>
       <p:sp>
         <p:nvSpPr>
           <p:cNvPr id="2" name="Slide Image Placeholder 1"/>
           <p:cNvSpPr>
-            <a:spLocks xmlns:a="http://schemas.openxmlformats.org/drawingml/2006/main" noGrp="1"/>
+            <a:spLocks noGrp="1"/>
           </p:cNvSpPr>
           <p:nvPr>
             <p:ph type="sldImg" idx="0"/>
@@ -2545,7 +2380,7 @@
         <p:nvSpPr>
           <p:cNvPr id="3" name="Notes Placeholder 2"/>
           <p:cNvSpPr>
-            <a:spLocks xmlns:a="http://schemas.openxmlformats.org/drawingml/2006/main" noGrp="1"/>
+            <a:spLocks noGrp="1"/>
           </p:cNvSpPr>
           <p:nvPr>
             <p:ph type="body" idx="1"/>
@@ -2553,116 +2388,101 @@
         </p:nvSpPr>
         <p:spPr/>
         <p:txBody>
-          <a:bodyPr xmlns:a="http://schemas.openxmlformats.org/drawingml/2006/main"/>
-          <a:lstStyle xmlns:a="http://schemas.openxmlformats.org/drawingml/2006/main"/>
-          <a:p xmlns:a="http://schemas.openxmlformats.org/drawingml/2006/main">
-            <a:r>
-              <a:t>PURPOSE</a:t>
-            </a:r>
-          </a:p>
-          <a:p xmlns:a="http://schemas.openxmlformats.org/drawingml/2006/main">
+          <a:bodyPr/>
+          <a:lstStyle/>
+          <a:p>
             <a:r>
               <a:t>Today’s learning</a:t>
             </a:r>
           </a:p>
-          <a:p xmlns:a="http://schemas.openxmlformats.org/drawingml/2006/main">
+          <a:p>
+            <a:r>
+              <a:t>CML3112, Week 14, slide 2</a:t>
+            </a:r>
+          </a:p>
+          <a:p>
             <a:r>
               <a:t/>
             </a:r>
           </a:p>
-          <a:p xmlns:a="http://schemas.openxmlformats.org/drawingml/2006/main">
-            <a:r>
-              <a:t>CONNECT</a:t>
-            </a:r>
-          </a:p>
-          <a:p xmlns:a="http://schemas.openxmlformats.org/drawingml/2006/main">
-            <a:r>
-              <a:t>Previous slide: Preparing for Practical Test 2.</a:t>
-            </a:r>
-          </a:p>
-          <a:p xmlns:a="http://schemas.openxmlformats.org/drawingml/2006/main">
+          <a:p>
+            <a:r>
+              <a:t>Explanation to give</a:t>
+            </a:r>
+          </a:p>
+          <a:p>
+            <a:r>
+              <a:t>Prepare for Test 2 by rehearsing the previously taught modelling decisions and the offline evidence workflow. Do not turn the assessed period into a worked lesson.</a:t>
+            </a:r>
+          </a:p>
+          <a:p>
             <a:r>
               <a:t/>
             </a:r>
           </a:p>
-          <a:p xmlns:a="http://schemas.openxmlformats.org/drawingml/2006/main">
-            <a:r>
-              <a:t>EXPLAIN</a:t>
-            </a:r>
-          </a:p>
-          <a:p xmlns:a="http://schemas.openxmlformats.org/drawingml/2006/main">
+          <a:p>
+            <a:r>
+              <a:t>Worked illustration / lecturer answer</a:t>
+            </a:r>
+          </a:p>
+          <a:p>
+            <a:r>
+              <a:t>Part B is typed reasoning in the same notebook, with code execution prohibited. The invigilated collection is authoritative; a later upload only transports that snapshot.</a:t>
+            </a:r>
+          </a:p>
+          <a:p>
+            <a:r>
+              <a:t/>
+            </a:r>
+          </a:p>
+          <a:p>
+            <a:r>
+              <a:t>Misconception to address</a:t>
+            </a:r>
+          </a:p>
+          <a:p>
+            <a:r>
+              <a:t>At the end, check the specific outcome shown here using a small previously demonstrated example. A completed file without an explanation is not evidence of understanding.</a:t>
+            </a:r>
+          </a:p>
+          <a:p>
+            <a:r>
+              <a:t/>
+            </a:r>
+          </a:p>
+          <a:p>
+            <a:r>
+              <a:t>On this slide</a:t>
+            </a:r>
+          </a:p>
+          <a:p>
             <a:r>
               <a:t>Rehearse previously taught modelling decisions.</a:t>
             </a:r>
           </a:p>
-          <a:p xmlns:a="http://schemas.openxmlformats.org/drawingml/2006/main">
+          <a:p>
             <a:r>
               <a:t/>
             </a:r>
           </a:p>
-          <a:p xmlns:a="http://schemas.openxmlformats.org/drawingml/2006/main">
+          <a:p>
             <a:r>
               <a:t>Practise saving the complete test notebook offline.</a:t>
             </a:r>
           </a:p>
-          <a:p xmlns:a="http://schemas.openxmlformats.org/drawingml/2006/main">
+          <a:p>
             <a:r>
               <a:t/>
             </a:r>
           </a:p>
-          <a:p xmlns:a="http://schemas.openxmlformats.org/drawingml/2006/main">
-            <a:r>
-              <a:t>LECTURER CUE</a:t>
-            </a:r>
-          </a:p>
-          <a:p xmlns:a="http://schemas.openxmlformats.org/drawingml/2006/main">
-            <a:r>
-              <a:t>Read the specific public requirement shown on this slide. Explain the input, output and evidence before independent work; do not work the assessed answer for the class.</a:t>
-            </a:r>
-          </a:p>
-          <a:p xmlns:a="http://schemas.openxmlformats.org/drawingml/2006/main">
-            <a:r>
-              <a:t/>
-            </a:r>
-          </a:p>
-          <a:p xmlns:a="http://schemas.openxmlformats.org/drawingml/2006/main">
-            <a:r>
-              <a:t>TEACHING MODE</a:t>
-            </a:r>
-          </a:p>
-          <a:p xmlns:a="http://schemas.openxmlformats.org/drawingml/2006/main">
-            <a:r>
-              <a:t>Demonstrate first. Read each new symbol aloud, trace the values and compare the shown output. Learners repeat worked examples individually after class.</a:t>
-            </a:r>
-          </a:p>
-          <a:p xmlns:a="http://schemas.openxmlformats.org/drawingml/2006/main">
-            <a:r>
-              <a:t/>
-            </a:r>
-          </a:p>
-          <a:p xmlns:a="http://schemas.openxmlformats.org/drawingml/2006/main">
-            <a:r>
-              <a:t>NEXT</a:t>
-            </a:r>
-          </a:p>
-          <a:p xmlns:a="http://schemas.openxmlformats.org/drawingml/2006/main">
-            <a:r>
-              <a:t>Connection to the previous lesson.</a:t>
-            </a:r>
-          </a:p>
-          <a:p xmlns:a="http://schemas.openxmlformats.org/drawingml/2006/main">
-            <a:r>
-              <a:t/>
-            </a:r>
-          </a:p>
-          <a:p xmlns:a="http://schemas.openxmlformats.org/drawingml/2006/main">
-            <a:r>
-              <a:t>REFERENCES</a:t>
-            </a:r>
-          </a:p>
-          <a:p xmlns:a="http://schemas.openxmlformats.org/drawingml/2006/main">
-            <a:r>
-              <a:t/>
+          <a:p>
+            <a:r>
+              <a:t>Continue to</a:t>
+            </a:r>
+          </a:p>
+          <a:p>
+            <a:r>
+              <a:t>Connection to the previous lesson</a:t>
             </a:r>
           </a:p>
         </p:txBody>
@@ -2671,7 +2491,7 @@
         <p:nvSpPr>
           <p:cNvPr id="4" name="Slide Number Placeholder 3"/>
           <p:cNvSpPr>
-            <a:spLocks xmlns:a="http://schemas.openxmlformats.org/drawingml/2006/main" noGrp="1"/>
+            <a:spLocks noGrp="1"/>
           </p:cNvSpPr>
           <p:nvPr>
             <p:ph type="sldNum" idx="5"/>
@@ -2679,21 +2499,21 @@
         </p:nvSpPr>
         <p:spPr/>
         <p:txBody>
-          <a:bodyPr xmlns:a="http://schemas.openxmlformats.org/drawingml/2006/main"/>
-          <a:lstStyle xmlns:a="http://schemas.openxmlformats.org/drawingml/2006/main"/>
-          <a:p xmlns:a="http://schemas.openxmlformats.org/drawingml/2006/main"/>
+          <a:bodyPr/>
+          <a:lstStyle/>
+          <a:p/>
         </p:txBody>
       </p:sp>
     </p:spTree>
   </p:cSld>
   <p:clrMapOvr>
-    <a:masterClrMapping xmlns:a="http://schemas.openxmlformats.org/drawingml/2006/main"/>
+    <a:masterClrMapping/>
   </p:clrMapOvr>
 </p:notes>
 </file>
 
 <file path=ppt/notesSlides/notesSlide20.xml><?xml version="1.0" encoding="utf-8"?>
-<p:notes xmlns:p="http://schemas.openxmlformats.org/presentationml/2006/main">
+<p:notes xmlns:a="http://schemas.openxmlformats.org/drawingml/2006/main" xmlns:p="http://schemas.openxmlformats.org/presentationml/2006/main">
   <p:cSld>
     <p:spTree>
       <p:nvGrpSpPr>
@@ -2702,13 +2522,13 @@
         <p:nvPr/>
       </p:nvGrpSpPr>
       <p:grpSpPr>
-        <a:xfrm xmlns:a="http://schemas.openxmlformats.org/drawingml/2006/main"/>
+        <a:xfrm/>
       </p:grpSpPr>
       <p:sp>
         <p:nvSpPr>
           <p:cNvPr id="2" name="Slide Image Placeholder 1"/>
           <p:cNvSpPr>
-            <a:spLocks xmlns:a="http://schemas.openxmlformats.org/drawingml/2006/main" noGrp="1"/>
+            <a:spLocks noGrp="1"/>
           </p:cNvSpPr>
           <p:nvPr>
             <p:ph type="sldImg" idx="0"/>
@@ -2720,7 +2540,7 @@
         <p:nvSpPr>
           <p:cNvPr id="3" name="Notes Placeholder 2"/>
           <p:cNvSpPr>
-            <a:spLocks xmlns:a="http://schemas.openxmlformats.org/drawingml/2006/main" noGrp="1"/>
+            <a:spLocks noGrp="1"/>
           </p:cNvSpPr>
           <p:nvPr>
             <p:ph type="body" idx="1"/>
@@ -2728,136 +2548,121 @@
         </p:nvSpPr>
         <p:spPr/>
         <p:txBody>
-          <a:bodyPr xmlns:a="http://schemas.openxmlformats.org/drawingml/2006/main"/>
-          <a:lstStyle xmlns:a="http://schemas.openxmlformats.org/drawingml/2006/main"/>
-          <a:p xmlns:a="http://schemas.openxmlformats.org/drawingml/2006/main">
-            <a:r>
-              <a:t>PURPOSE</a:t>
-            </a:r>
-          </a:p>
-          <a:p xmlns:a="http://schemas.openxmlformats.org/drawingml/2006/main">
+          <a:bodyPr/>
+          <a:lstStyle/>
+          <a:p>
             <a:r>
               <a:t>Practical Test 2 submission</a:t>
             </a:r>
           </a:p>
-          <a:p xmlns:a="http://schemas.openxmlformats.org/drawingml/2006/main">
+          <a:p>
+            <a:r>
+              <a:t>CML3112, Week 14, slide 20</a:t>
+            </a:r>
+          </a:p>
+          <a:p>
             <a:r>
               <a:t/>
             </a:r>
           </a:p>
-          <a:p xmlns:a="http://schemas.openxmlformats.org/drawingml/2006/main">
-            <a:r>
-              <a:t>CONNECT</a:t>
-            </a:r>
-          </a:p>
-          <a:p xmlns:a="http://schemas.openxmlformats.org/drawingml/2006/main">
-            <a:r>
-              <a:t>Previous slide: Practical Test 2 continued.</a:t>
-            </a:r>
-          </a:p>
-          <a:p xmlns:a="http://schemas.openxmlformats.org/drawingml/2006/main">
+          <a:p>
+            <a:r>
+              <a:t>Explanation to give</a:t>
+            </a:r>
+          </a:p>
+          <a:p>
+            <a:r>
+              <a:t>This slide hands over CML3112 TEST2. Show the exact form title before uploading. The required packet is one completed .ipynb notebook.</a:t>
+            </a:r>
+          </a:p>
+          <a:p>
             <a:r>
               <a:t/>
             </a:r>
           </a:p>
-          <a:p xmlns:a="http://schemas.openxmlformats.org/drawingml/2006/main">
-            <a:r>
-              <a:t>EXPLAIN</a:t>
-            </a:r>
-          </a:p>
-          <a:p xmlns:a="http://schemas.openxmlformats.org/drawingml/2006/main">
+          <a:p>
+            <a:r>
+              <a:t>Worked illustration / lecturer answer</a:t>
+            </a:r>
+          </a:p>
+          <a:p>
+            <a:r>
+              <a:t>For TEST1/TEST2, save Part B under My written evidence. Collect the complete notebook offline under invigilation; the later form upload only transports that collected version.</a:t>
+            </a:r>
+          </a:p>
+          <a:p>
+            <a:r>
+              <a:t/>
+            </a:r>
+          </a:p>
+          <a:p>
+            <a:r>
+              <a:t>Misconception to address</a:t>
+            </a:r>
+          </a:p>
+          <a:p>
+            <a:r>
+              <a:t>Students enter their own Student Registration Number as required freeform text. They wait for filenames to appear, press Submit and keep the confirmation. A file saved in Drive or GitHub is not itself a form submission.</a:t>
+            </a:r>
+          </a:p>
+          <a:p>
+            <a:r>
+              <a:t/>
+            </a:r>
+          </a:p>
+          <a:p>
+            <a:r>
+              <a:t>On this slide</a:t>
+            </a:r>
+          </a:p>
+          <a:p>
             <a:r>
               <a:t>Offline invigilated collection is authoritative.</a:t>
             </a:r>
           </a:p>
-          <a:p xmlns:a="http://schemas.openxmlformats.org/drawingml/2006/main">
+          <a:p>
             <a:r>
               <a:t/>
             </a:r>
           </a:p>
-          <a:p xmlns:a="http://schemas.openxmlformats.org/drawingml/2006/main">
+          <a:p>
             <a:r>
               <a:t>Google upload is a later transport step.</a:t>
             </a:r>
           </a:p>
-          <a:p xmlns:a="http://schemas.openxmlformats.org/drawingml/2006/main">
+          <a:p>
             <a:r>
               <a:t/>
             </a:r>
           </a:p>
-          <a:p xmlns:a="http://schemas.openxmlformats.org/drawingml/2006/main">
+          <a:p>
             <a:r>
               <a:t>Save one notebook with Part B under My written evidence.</a:t>
             </a:r>
           </a:p>
-          <a:p xmlns:a="http://schemas.openxmlformats.org/drawingml/2006/main">
+          <a:p>
             <a:r>
               <a:t/>
             </a:r>
           </a:p>
-          <a:p xmlns:a="http://schemas.openxmlformats.org/drawingml/2006/main">
+          <a:p>
             <a:r>
               <a:t>No internet, messaging or AI during the test.</a:t>
             </a:r>
           </a:p>
-          <a:p xmlns:a="http://schemas.openxmlformats.org/drawingml/2006/main">
+          <a:p>
             <a:r>
               <a:t/>
             </a:r>
           </a:p>
-          <a:p xmlns:a="http://schemas.openxmlformats.org/drawingml/2006/main">
-            <a:r>
-              <a:t>LECTURER CUE</a:t>
-            </a:r>
-          </a:p>
-          <a:p xmlns:a="http://schemas.openxmlformats.org/drawingml/2006/main">
-            <a:r>
-              <a:t>Read the specific public requirement shown on this slide. Explain the input, output and evidence before independent work; do not work the assessed answer for the class.</a:t>
-            </a:r>
-          </a:p>
-          <a:p xmlns:a="http://schemas.openxmlformats.org/drawingml/2006/main">
-            <a:r>
-              <a:t/>
-            </a:r>
-          </a:p>
-          <a:p xmlns:a="http://schemas.openxmlformats.org/drawingml/2006/main">
-            <a:r>
-              <a:t>TEACHING MODE</a:t>
-            </a:r>
-          </a:p>
-          <a:p xmlns:a="http://schemas.openxmlformats.org/drawingml/2006/main">
-            <a:r>
-              <a:t>Demonstrate first. Read each new symbol aloud, trace the values and compare the shown output. Learners repeat worked examples individually after class.</a:t>
-            </a:r>
-          </a:p>
-          <a:p xmlns:a="http://schemas.openxmlformats.org/drawingml/2006/main">
-            <a:r>
-              <a:t/>
-            </a:r>
-          </a:p>
-          <a:p xmlns:a="http://schemas.openxmlformats.org/drawingml/2006/main">
-            <a:r>
-              <a:t>NEXT</a:t>
-            </a:r>
-          </a:p>
-          <a:p xmlns:a="http://schemas.openxmlformats.org/drawingml/2006/main">
-            <a:r>
-              <a:t>Before you leave.</a:t>
-            </a:r>
-          </a:p>
-          <a:p xmlns:a="http://schemas.openxmlformats.org/drawingml/2006/main">
-            <a:r>
-              <a:t/>
-            </a:r>
-          </a:p>
-          <a:p xmlns:a="http://schemas.openxmlformats.org/drawingml/2006/main">
-            <a:r>
-              <a:t>REFERENCES</a:t>
-            </a:r>
-          </a:p>
-          <a:p xmlns:a="http://schemas.openxmlformats.org/drawingml/2006/main">
-            <a:r>
-              <a:t/>
+          <a:p>
+            <a:r>
+              <a:t>Continue to</a:t>
+            </a:r>
+          </a:p>
+          <a:p>
+            <a:r>
+              <a:t>Revision and submission checklist</a:t>
             </a:r>
           </a:p>
         </p:txBody>
@@ -2866,7 +2671,7 @@
         <p:nvSpPr>
           <p:cNvPr id="4" name="Slide Number Placeholder 3"/>
           <p:cNvSpPr>
-            <a:spLocks xmlns:a="http://schemas.openxmlformats.org/drawingml/2006/main" noGrp="1"/>
+            <a:spLocks noGrp="1"/>
           </p:cNvSpPr>
           <p:nvPr>
             <p:ph type="sldNum" idx="5"/>
@@ -2874,21 +2679,21 @@
         </p:nvSpPr>
         <p:spPr/>
         <p:txBody>
-          <a:bodyPr xmlns:a="http://schemas.openxmlformats.org/drawingml/2006/main"/>
-          <a:lstStyle xmlns:a="http://schemas.openxmlformats.org/drawingml/2006/main"/>
-          <a:p xmlns:a="http://schemas.openxmlformats.org/drawingml/2006/main"/>
+          <a:bodyPr/>
+          <a:lstStyle/>
+          <a:p/>
         </p:txBody>
       </p:sp>
     </p:spTree>
   </p:cSld>
   <p:clrMapOvr>
-    <a:masterClrMapping xmlns:a="http://schemas.openxmlformats.org/drawingml/2006/main"/>
+    <a:masterClrMapping/>
   </p:clrMapOvr>
 </p:notes>
 </file>
 
 <file path=ppt/notesSlides/notesSlide21.xml><?xml version="1.0" encoding="utf-8"?>
-<p:notes xmlns:p="http://schemas.openxmlformats.org/presentationml/2006/main">
+<p:notes xmlns:a="http://schemas.openxmlformats.org/drawingml/2006/main" xmlns:p="http://schemas.openxmlformats.org/presentationml/2006/main">
   <p:cSld>
     <p:spTree>
       <p:nvGrpSpPr>
@@ -2897,13 +2702,13 @@
         <p:nvPr/>
       </p:nvGrpSpPr>
       <p:grpSpPr>
-        <a:xfrm xmlns:a="http://schemas.openxmlformats.org/drawingml/2006/main"/>
+        <a:xfrm/>
       </p:grpSpPr>
       <p:sp>
         <p:nvSpPr>
           <p:cNvPr id="2" name="Slide Image Placeholder 1"/>
           <p:cNvSpPr>
-            <a:spLocks xmlns:a="http://schemas.openxmlformats.org/drawingml/2006/main" noGrp="1"/>
+            <a:spLocks noGrp="1"/>
           </p:cNvSpPr>
           <p:nvPr>
             <p:ph type="sldImg" idx="0"/>
@@ -2915,7 +2720,7 @@
         <p:nvSpPr>
           <p:cNvPr id="3" name="Notes Placeholder 2"/>
           <p:cNvSpPr>
-            <a:spLocks xmlns:a="http://schemas.openxmlformats.org/drawingml/2006/main" noGrp="1"/>
+            <a:spLocks noGrp="1"/>
           </p:cNvSpPr>
           <p:nvPr>
             <p:ph type="body" idx="1"/>
@@ -2923,125 +2728,95 @@
         </p:nvSpPr>
         <p:spPr/>
         <p:txBody>
-          <a:bodyPr xmlns:a="http://schemas.openxmlformats.org/drawingml/2006/main"/>
-          <a:lstStyle xmlns:a="http://schemas.openxmlformats.org/drawingml/2006/main"/>
-          <a:p xmlns:a="http://schemas.openxmlformats.org/drawingml/2006/main">
-            <a:r>
-              <a:t>PURPOSE</a:t>
-            </a:r>
-          </a:p>
-          <a:p xmlns:a="http://schemas.openxmlformats.org/drawingml/2006/main">
+          <a:bodyPr/>
+          <a:lstStyle/>
+          <a:p>
             <a:r>
               <a:t>Revision and submission checklist</a:t>
             </a:r>
           </a:p>
-          <a:p xmlns:a="http://schemas.openxmlformats.org/drawingml/2006/main">
+          <a:p>
+            <a:r>
+              <a:t>CML3112, Week 14, slide 21</a:t>
+            </a:r>
+          </a:p>
+          <a:p>
             <a:r>
               <a:t/>
             </a:r>
           </a:p>
-          <a:p xmlns:a="http://schemas.openxmlformats.org/drawingml/2006/main">
-            <a:r>
-              <a:t>CONNECT</a:t>
-            </a:r>
-          </a:p>
-          <a:p xmlns:a="http://schemas.openxmlformats.org/drawingml/2006/main">
-            <a:r>
-              <a:t>Previous slide: Practical Test 2 submission.</a:t>
-            </a:r>
-          </a:p>
-          <a:p xmlns:a="http://schemas.openxmlformats.org/drawingml/2006/main">
+          <a:p>
+            <a:r>
+              <a:t>Explanation to give</a:t>
+            </a:r>
+          </a:p>
+          <a:p>
+            <a:r>
+              <a:t>Prepare for Test 2 by rehearsing the previously taught modelling decisions and the offline evidence workflow. Do not turn the assessed period into a worked lesson.</a:t>
+            </a:r>
+          </a:p>
+          <a:p>
             <a:r>
               <a:t/>
             </a:r>
           </a:p>
-          <a:p xmlns:a="http://schemas.openxmlformats.org/drawingml/2006/main">
-            <a:r>
-              <a:t>EXPLAIN</a:t>
-            </a:r>
-          </a:p>
-          <a:p xmlns:a="http://schemas.openxmlformats.org/drawingml/2006/main">
+          <a:p>
+            <a:r>
+              <a:t>Worked illustration / lecturer answer</a:t>
+            </a:r>
+          </a:p>
+          <a:p>
+            <a:r>
+              <a:t>Part B is typed reasoning in the same notebook, with code execution prohibited. The invigilated collection is authoritative; a later upload only transports that snapshot.</a:t>
+            </a:r>
+          </a:p>
+          <a:p>
+            <a:r>
+              <a:t/>
+            </a:r>
+          </a:p>
+          <a:p>
+            <a:r>
+              <a:t>Misconception to address</a:t>
+            </a:r>
+          </a:p>
+          <a:p>
+            <a:r>
+              <a:t>Close by identifying the actual saved file and its correct submission route. Read the live deadline. For current weekly notebook tasks, students upload their own work, not the practice notebook, ZIP or grading files.</a:t>
+            </a:r>
+          </a:p>
+          <a:p>
+            <a:r>
+              <a:t/>
+            </a:r>
+          </a:p>
+          <a:p>
+            <a:r>
+              <a:t>On this slide</a:t>
+            </a:r>
+          </a:p>
+          <a:p>
             <a:r>
               <a:t>You can explain training-only preprocessing and locate your saved evidence.</a:t>
             </a:r>
           </a:p>
-          <a:p xmlns:a="http://schemas.openxmlformats.org/drawingml/2006/main">
+          <a:p>
             <a:r>
               <a:t/>
             </a:r>
           </a:p>
-          <a:p xmlns:a="http://schemas.openxmlformats.org/drawingml/2006/main">
+          <a:p>
             <a:r>
               <a:t>Save your work and check the required submission files.</a:t>
             </a:r>
           </a:p>
-          <a:p xmlns:a="http://schemas.openxmlformats.org/drawingml/2006/main">
-            <a:r>
-              <a:t/>
-            </a:r>
-          </a:p>
-          <a:p xmlns:a="http://schemas.openxmlformats.org/drawingml/2006/main">
-            <a:r>
-              <a:t>LECTURER CUE</a:t>
-            </a:r>
-          </a:p>
-          <a:p xmlns:a="http://schemas.openxmlformats.org/drawingml/2006/main">
-            <a:r>
-              <a:t>Read the specific public requirement shown on this slide. Explain the input, output and evidence before independent work; do not work the assessed answer for the class.</a:t>
-            </a:r>
-          </a:p>
-          <a:p xmlns:a="http://schemas.openxmlformats.org/drawingml/2006/main">
-            <a:r>
-              <a:t/>
-            </a:r>
-          </a:p>
-          <a:p xmlns:a="http://schemas.openxmlformats.org/drawingml/2006/main">
-            <a:r>
-              <a:t>TEACHING MODE</a:t>
-            </a:r>
-          </a:p>
-          <a:p xmlns:a="http://schemas.openxmlformats.org/drawingml/2006/main">
-            <a:r>
-              <a:t>Demonstrate first. Read each new symbol aloud, trace the values and compare the shown output. Learners repeat worked examples individually after class.</a:t>
-            </a:r>
-          </a:p>
-          <a:p xmlns:a="http://schemas.openxmlformats.org/drawingml/2006/main">
-            <a:r>
-              <a:t/>
-            </a:r>
-          </a:p>
-          <a:p xmlns:a="http://schemas.openxmlformats.org/drawingml/2006/main">
-            <a:r>
-              <a:t>NEXT</a:t>
-            </a:r>
-          </a:p>
-          <a:p xmlns:a="http://schemas.openxmlformats.org/drawingml/2006/main">
-            <a:r>
-              <a:t>independent revision and the issued task.</a:t>
-            </a:r>
-          </a:p>
-          <a:p xmlns:a="http://schemas.openxmlformats.org/drawingml/2006/main">
-            <a:r>
-              <a:t/>
-            </a:r>
-          </a:p>
-          <a:p xmlns:a="http://schemas.openxmlformats.org/drawingml/2006/main">
-            <a:r>
-              <a:t>REFERENCES</a:t>
-            </a:r>
-          </a:p>
-          <a:p xmlns:a="http://schemas.openxmlformats.org/drawingml/2006/main">
-            <a:r>
-              <a:t/>
-            </a:r>
-          </a:p>
         </p:txBody>
       </p:sp>
       <p:sp>
         <p:nvSpPr>
           <p:cNvPr id="4" name="Slide Number Placeholder 3"/>
           <p:cNvSpPr>
-            <a:spLocks xmlns:a="http://schemas.openxmlformats.org/drawingml/2006/main" noGrp="1"/>
+            <a:spLocks noGrp="1"/>
           </p:cNvSpPr>
           <p:nvPr>
             <p:ph type="sldNum" idx="5"/>
@@ -3049,21 +2824,21 @@
         </p:nvSpPr>
         <p:spPr/>
         <p:txBody>
-          <a:bodyPr xmlns:a="http://schemas.openxmlformats.org/drawingml/2006/main"/>
-          <a:lstStyle xmlns:a="http://schemas.openxmlformats.org/drawingml/2006/main"/>
-          <a:p xmlns:a="http://schemas.openxmlformats.org/drawingml/2006/main"/>
+          <a:bodyPr/>
+          <a:lstStyle/>
+          <a:p/>
         </p:txBody>
       </p:sp>
     </p:spTree>
   </p:cSld>
   <p:clrMapOvr>
-    <a:masterClrMapping xmlns:a="http://schemas.openxmlformats.org/drawingml/2006/main"/>
+    <a:masterClrMapping/>
   </p:clrMapOvr>
 </p:notes>
 </file>
 
 <file path=ppt/notesSlides/notesSlide3.xml><?xml version="1.0" encoding="utf-8"?>
-<p:notes xmlns:p="http://schemas.openxmlformats.org/presentationml/2006/main">
+<p:notes xmlns:a="http://schemas.openxmlformats.org/drawingml/2006/main" xmlns:p="http://schemas.openxmlformats.org/presentationml/2006/main">
   <p:cSld>
     <p:spTree>
       <p:nvGrpSpPr>
@@ -3072,13 +2847,13 @@
         <p:nvPr/>
       </p:nvGrpSpPr>
       <p:grpSpPr>
-        <a:xfrm xmlns:a="http://schemas.openxmlformats.org/drawingml/2006/main"/>
+        <a:xfrm/>
       </p:grpSpPr>
       <p:sp>
         <p:nvSpPr>
           <p:cNvPr id="2" name="Slide Image Placeholder 1"/>
           <p:cNvSpPr>
-            <a:spLocks xmlns:a="http://schemas.openxmlformats.org/drawingml/2006/main" noGrp="1"/>
+            <a:spLocks noGrp="1"/>
           </p:cNvSpPr>
           <p:nvPr>
             <p:ph type="sldImg" idx="0"/>
@@ -3090,7 +2865,7 @@
         <p:nvSpPr>
           <p:cNvPr id="3" name="Notes Placeholder 2"/>
           <p:cNvSpPr>
-            <a:spLocks xmlns:a="http://schemas.openxmlformats.org/drawingml/2006/main" noGrp="1"/>
+            <a:spLocks noGrp="1"/>
           </p:cNvSpPr>
           <p:nvPr>
             <p:ph type="body" idx="1"/>
@@ -3098,106 +2873,91 @@
         </p:nvSpPr>
         <p:spPr/>
         <p:txBody>
-          <a:bodyPr xmlns:a="http://schemas.openxmlformats.org/drawingml/2006/main"/>
-          <a:lstStyle xmlns:a="http://schemas.openxmlformats.org/drawingml/2006/main"/>
-          <a:p xmlns:a="http://schemas.openxmlformats.org/drawingml/2006/main">
-            <a:r>
-              <a:t>PURPOSE</a:t>
-            </a:r>
-          </a:p>
-          <a:p xmlns:a="http://schemas.openxmlformats.org/drawingml/2006/main">
+          <a:bodyPr/>
+          <a:lstStyle/>
+          <a:p>
             <a:r>
               <a:t>Connection to the previous lesson</a:t>
             </a:r>
           </a:p>
-          <a:p xmlns:a="http://schemas.openxmlformats.org/drawingml/2006/main">
+          <a:p>
+            <a:r>
+              <a:t>CML3112, Week 14, slide 3</a:t>
+            </a:r>
+          </a:p>
+          <a:p>
             <a:r>
               <a:t/>
             </a:r>
           </a:p>
-          <a:p xmlns:a="http://schemas.openxmlformats.org/drawingml/2006/main">
-            <a:r>
-              <a:t>CONNECT</a:t>
-            </a:r>
-          </a:p>
-          <a:p xmlns:a="http://schemas.openxmlformats.org/drawingml/2006/main">
-            <a:r>
-              <a:t>Previous slide: Today’s learning.</a:t>
-            </a:r>
-          </a:p>
-          <a:p xmlns:a="http://schemas.openxmlformats.org/drawingml/2006/main">
+          <a:p>
+            <a:r>
+              <a:t>Explanation to give</a:t>
+            </a:r>
+          </a:p>
+          <a:p>
+            <a:r>
+              <a:t>Prepare for Test 2 by rehearsing the previously taught modelling decisions and the offline evidence workflow. Do not turn the assessed period into a worked lesson.</a:t>
+            </a:r>
+          </a:p>
+          <a:p>
             <a:r>
               <a:t/>
             </a:r>
           </a:p>
-          <a:p xmlns:a="http://schemas.openxmlformats.org/drawingml/2006/main">
-            <a:r>
-              <a:t>EXPLAIN</a:t>
-            </a:r>
-          </a:p>
-          <a:p xmlns:a="http://schemas.openxmlformats.org/drawingml/2006/main">
+          <a:p>
+            <a:r>
+              <a:t>Worked illustration / lecturer answer</a:t>
+            </a:r>
+          </a:p>
+          <a:p>
+            <a:r>
+              <a:t>Part B is typed reasoning in the same notebook, with code execution prohibited. The invigilated collection is authoritative; a later upload only transports that snapshot.</a:t>
+            </a:r>
+          </a:p>
+          <a:p>
+            <a:r>
+              <a:t/>
+            </a:r>
+          </a:p>
+          <a:p>
+            <a:r>
+              <a:t>Misconception to address</a:t>
+            </a:r>
+          </a:p>
+          <a:p>
+            <a:r>
+              <a:t>Connect this to the previous result named on this slide. Demonstrate the first step again if necessary; there is no requirement for partner work before the explanation.</a:t>
+            </a:r>
+          </a:p>
+          <a:p>
+            <a:r>
+              <a:t/>
+            </a:r>
+          </a:p>
+          <a:p>
+            <a:r>
+              <a:t>On this slide</a:t>
+            </a:r>
+          </a:p>
+          <a:p>
             <a:r>
               <a:t>Can you name the target, fit only on training records and explain how you would keep the test untouched?</a:t>
             </a:r>
           </a:p>
-          <a:p xmlns:a="http://schemas.openxmlformats.org/drawingml/2006/main">
+          <a:p>
             <a:r>
               <a:t/>
             </a:r>
           </a:p>
-          <a:p xmlns:a="http://schemas.openxmlformats.org/drawingml/2006/main">
-            <a:r>
-              <a:t>LECTURER CUE</a:t>
-            </a:r>
-          </a:p>
-          <a:p xmlns:a="http://schemas.openxmlformats.org/drawingml/2006/main">
-            <a:r>
-              <a:t>Read the specific public requirement shown on this slide. Explain the input, output and evidence before independent work; do not work the assessed answer for the class.</a:t>
-            </a:r>
-          </a:p>
-          <a:p xmlns:a="http://schemas.openxmlformats.org/drawingml/2006/main">
-            <a:r>
-              <a:t/>
-            </a:r>
-          </a:p>
-          <a:p xmlns:a="http://schemas.openxmlformats.org/drawingml/2006/main">
-            <a:r>
-              <a:t>TEACHING MODE</a:t>
-            </a:r>
-          </a:p>
-          <a:p xmlns:a="http://schemas.openxmlformats.org/drawingml/2006/main">
-            <a:r>
-              <a:t>Demonstrate first. Read each new symbol aloud, trace the values and compare the shown output. Learners repeat worked examples individually after class.</a:t>
-            </a:r>
-          </a:p>
-          <a:p xmlns:a="http://schemas.openxmlformats.org/drawingml/2006/main">
-            <a:r>
-              <a:t/>
-            </a:r>
-          </a:p>
-          <a:p xmlns:a="http://schemas.openxmlformats.org/drawingml/2006/main">
-            <a:r>
-              <a:t>NEXT</a:t>
-            </a:r>
-          </a:p>
-          <a:p xmlns:a="http://schemas.openxmlformats.org/drawingml/2006/main">
-            <a:r>
-              <a:t>Preparation happens before the test.</a:t>
-            </a:r>
-          </a:p>
-          <a:p xmlns:a="http://schemas.openxmlformats.org/drawingml/2006/main">
-            <a:r>
-              <a:t/>
-            </a:r>
-          </a:p>
-          <a:p xmlns:a="http://schemas.openxmlformats.org/drawingml/2006/main">
-            <a:r>
-              <a:t>REFERENCES</a:t>
-            </a:r>
-          </a:p>
-          <a:p xmlns:a="http://schemas.openxmlformats.org/drawingml/2006/main">
-            <a:r>
-              <a:t/>
+          <a:p>
+            <a:r>
+              <a:t>Continue to</a:t>
+            </a:r>
+          </a:p>
+          <a:p>
+            <a:r>
+              <a:t>Preparation happens before the test</a:t>
             </a:r>
           </a:p>
         </p:txBody>
@@ -3206,7 +2966,7 @@
         <p:nvSpPr>
           <p:cNvPr id="4" name="Slide Number Placeholder 3"/>
           <p:cNvSpPr>
-            <a:spLocks xmlns:a="http://schemas.openxmlformats.org/drawingml/2006/main" noGrp="1"/>
+            <a:spLocks noGrp="1"/>
           </p:cNvSpPr>
           <p:nvPr>
             <p:ph type="sldNum" idx="5"/>
@@ -3214,21 +2974,21 @@
         </p:nvSpPr>
         <p:spPr/>
         <p:txBody>
-          <a:bodyPr xmlns:a="http://schemas.openxmlformats.org/drawingml/2006/main"/>
-          <a:lstStyle xmlns:a="http://schemas.openxmlformats.org/drawingml/2006/main"/>
-          <a:p xmlns:a="http://schemas.openxmlformats.org/drawingml/2006/main"/>
+          <a:bodyPr/>
+          <a:lstStyle/>
+          <a:p/>
         </p:txBody>
       </p:sp>
     </p:spTree>
   </p:cSld>
   <p:clrMapOvr>
-    <a:masterClrMapping xmlns:a="http://schemas.openxmlformats.org/drawingml/2006/main"/>
+    <a:masterClrMapping/>
   </p:clrMapOvr>
 </p:notes>
 </file>
 
 <file path=ppt/notesSlides/notesSlide4.xml><?xml version="1.0" encoding="utf-8"?>
-<p:notes xmlns:p="http://schemas.openxmlformats.org/presentationml/2006/main">
+<p:notes xmlns:a="http://schemas.openxmlformats.org/drawingml/2006/main" xmlns:p="http://schemas.openxmlformats.org/presentationml/2006/main">
   <p:cSld>
     <p:spTree>
       <p:nvGrpSpPr>
@@ -3237,13 +2997,13 @@
         <p:nvPr/>
       </p:nvGrpSpPr>
       <p:grpSpPr>
-        <a:xfrm xmlns:a="http://schemas.openxmlformats.org/drawingml/2006/main"/>
+        <a:xfrm/>
       </p:grpSpPr>
       <p:sp>
         <p:nvSpPr>
           <p:cNvPr id="2" name="Slide Image Placeholder 1"/>
           <p:cNvSpPr>
-            <a:spLocks xmlns:a="http://schemas.openxmlformats.org/drawingml/2006/main" noGrp="1"/>
+            <a:spLocks noGrp="1"/>
           </p:cNvSpPr>
           <p:nvPr>
             <p:ph type="sldImg" idx="0"/>
@@ -3255,7 +3015,7 @@
         <p:nvSpPr>
           <p:cNvPr id="3" name="Notes Placeholder 2"/>
           <p:cNvSpPr>
-            <a:spLocks xmlns:a="http://schemas.openxmlformats.org/drawingml/2006/main" noGrp="1"/>
+            <a:spLocks noGrp="1"/>
           </p:cNvSpPr>
           <p:nvPr>
             <p:ph type="body" idx="1"/>
@@ -3263,126 +3023,111 @@
         </p:nvSpPr>
         <p:spPr/>
         <p:txBody>
-          <a:bodyPr xmlns:a="http://schemas.openxmlformats.org/drawingml/2006/main"/>
-          <a:lstStyle xmlns:a="http://schemas.openxmlformats.org/drawingml/2006/main"/>
-          <a:p xmlns:a="http://schemas.openxmlformats.org/drawingml/2006/main">
-            <a:r>
-              <a:t>PURPOSE</a:t>
-            </a:r>
-          </a:p>
-          <a:p xmlns:a="http://schemas.openxmlformats.org/drawingml/2006/main">
+          <a:bodyPr/>
+          <a:lstStyle/>
+          <a:p>
             <a:r>
               <a:t>Preparation happens before the test</a:t>
             </a:r>
           </a:p>
-          <a:p xmlns:a="http://schemas.openxmlformats.org/drawingml/2006/main">
+          <a:p>
+            <a:r>
+              <a:t>CML3112, Week 14, slide 4</a:t>
+            </a:r>
+          </a:p>
+          <a:p>
             <a:r>
               <a:t/>
             </a:r>
           </a:p>
-          <a:p xmlns:a="http://schemas.openxmlformats.org/drawingml/2006/main">
-            <a:r>
-              <a:t>CONNECT</a:t>
-            </a:r>
-          </a:p>
-          <a:p xmlns:a="http://schemas.openxmlformats.org/drawingml/2006/main">
-            <a:r>
-              <a:t>Previous slide: Connection to the previous lesson.</a:t>
-            </a:r>
-          </a:p>
-          <a:p xmlns:a="http://schemas.openxmlformats.org/drawingml/2006/main">
+          <a:p>
+            <a:r>
+              <a:t>Explanation to give</a:t>
+            </a:r>
+          </a:p>
+          <a:p>
+            <a:r>
+              <a:t>Show the offline save location and reopen the file before test day. Identify both the code cells and the markdown cell headed My written evidence.</a:t>
+            </a:r>
+          </a:p>
+          <a:p>
             <a:r>
               <a:t/>
             </a:r>
           </a:p>
-          <a:p xmlns:a="http://schemas.openxmlformats.org/drawingml/2006/main">
-            <a:r>
-              <a:t>EXPLAIN</a:t>
-            </a:r>
-          </a:p>
-          <a:p xmlns:a="http://schemas.openxmlformats.org/drawingml/2006/main">
+          <a:p>
+            <a:r>
+              <a:t>Worked illustration / lecturer answer</a:t>
+            </a:r>
+          </a:p>
+          <a:p>
+            <a:r>
+              <a:t>Use a separate practice notebook for rehearsal. Students should locate the actual .ipynb on disk rather than rely on a browser tab or cloud link.</a:t>
+            </a:r>
+          </a:p>
+          <a:p>
+            <a:r>
+              <a:t/>
+            </a:r>
+          </a:p>
+          <a:p>
+            <a:r>
+              <a:t>Misconception to address</a:t>
+            </a:r>
+          </a:p>
+          <a:p>
+            <a:r>
+              <a:t>During the assessed period, report technical failures immediately and follow the invigilator’s instructions. Do not introduce new modelling code or online resources.</a:t>
+            </a:r>
+          </a:p>
+          <a:p>
+            <a:r>
+              <a:t/>
+            </a:r>
+          </a:p>
+          <a:p>
+            <a:r>
+              <a:t>On this slide</a:t>
+            </a:r>
+          </a:p>
+          <a:p>
             <a:r>
               <a:t>Practise the already taught error calculations and data-splitting rules.</a:t>
             </a:r>
           </a:p>
-          <a:p xmlns:a="http://schemas.openxmlformats.org/drawingml/2006/main">
+          <a:p>
             <a:r>
               <a:t/>
             </a:r>
           </a:p>
-          <a:p xmlns:a="http://schemas.openxmlformats.org/drawingml/2006/main">
+          <a:p>
             <a:r>
               <a:t>Use separate practice values.</a:t>
             </a:r>
           </a:p>
-          <a:p xmlns:a="http://schemas.openxmlformats.org/drawingml/2006/main">
+          <a:p>
             <a:r>
               <a:t/>
             </a:r>
           </a:p>
-          <a:p xmlns:a="http://schemas.openxmlformats.org/drawingml/2006/main">
+          <a:p>
             <a:r>
               <a:t>The timed session follows the issued test instructions.</a:t>
             </a:r>
           </a:p>
-          <a:p xmlns:a="http://schemas.openxmlformats.org/drawingml/2006/main">
+          <a:p>
             <a:r>
               <a:t/>
             </a:r>
           </a:p>
-          <a:p xmlns:a="http://schemas.openxmlformats.org/drawingml/2006/main">
-            <a:r>
-              <a:t>LECTURER CUE</a:t>
-            </a:r>
-          </a:p>
-          <a:p xmlns:a="http://schemas.openxmlformats.org/drawingml/2006/main">
-            <a:r>
-              <a:t>Read the specific public requirement shown on this slide. Explain the input, output and evidence before independent work; do not work the assessed answer for the class.</a:t>
-            </a:r>
-          </a:p>
-          <a:p xmlns:a="http://schemas.openxmlformats.org/drawingml/2006/main">
-            <a:r>
-              <a:t/>
-            </a:r>
-          </a:p>
-          <a:p xmlns:a="http://schemas.openxmlformats.org/drawingml/2006/main">
-            <a:r>
-              <a:t>TEACHING MODE</a:t>
-            </a:r>
-          </a:p>
-          <a:p xmlns:a="http://schemas.openxmlformats.org/drawingml/2006/main">
-            <a:r>
-              <a:t>Demonstrate first. Read each new symbol aloud, trace the values and compare the shown output. Learners repeat worked examples individually after class.</a:t>
-            </a:r>
-          </a:p>
-          <a:p xmlns:a="http://schemas.openxmlformats.org/drawingml/2006/main">
-            <a:r>
-              <a:t/>
-            </a:r>
-          </a:p>
-          <a:p xmlns:a="http://schemas.openxmlformats.org/drawingml/2006/main">
-            <a:r>
-              <a:t>NEXT</a:t>
-            </a:r>
-          </a:p>
-          <a:p xmlns:a="http://schemas.openxmlformats.org/drawingml/2006/main">
-            <a:r>
-              <a:t>Rehearse the offline save procedure.</a:t>
-            </a:r>
-          </a:p>
-          <a:p xmlns:a="http://schemas.openxmlformats.org/drawingml/2006/main">
-            <a:r>
-              <a:t/>
-            </a:r>
-          </a:p>
-          <a:p xmlns:a="http://schemas.openxmlformats.org/drawingml/2006/main">
-            <a:r>
-              <a:t>REFERENCES</a:t>
-            </a:r>
-          </a:p>
-          <a:p xmlns:a="http://schemas.openxmlformats.org/drawingml/2006/main">
-            <a:r>
-              <a:t/>
+          <a:p>
+            <a:r>
+              <a:t>Continue to</a:t>
+            </a:r>
+          </a:p>
+          <a:p>
+            <a:r>
+              <a:t>Rehearse the offline save procedure</a:t>
             </a:r>
           </a:p>
         </p:txBody>
@@ -3391,7 +3136,7 @@
         <p:nvSpPr>
           <p:cNvPr id="4" name="Slide Number Placeholder 3"/>
           <p:cNvSpPr>
-            <a:spLocks xmlns:a="http://schemas.openxmlformats.org/drawingml/2006/main" noGrp="1"/>
+            <a:spLocks noGrp="1"/>
           </p:cNvSpPr>
           <p:nvPr>
             <p:ph type="sldNum" idx="5"/>
@@ -3399,21 +3144,21 @@
         </p:nvSpPr>
         <p:spPr/>
         <p:txBody>
-          <a:bodyPr xmlns:a="http://schemas.openxmlformats.org/drawingml/2006/main"/>
-          <a:lstStyle xmlns:a="http://schemas.openxmlformats.org/drawingml/2006/main"/>
-          <a:p xmlns:a="http://schemas.openxmlformats.org/drawingml/2006/main"/>
+          <a:bodyPr/>
+          <a:lstStyle/>
+          <a:p/>
         </p:txBody>
       </p:sp>
     </p:spTree>
   </p:cSld>
   <p:clrMapOvr>
-    <a:masterClrMapping xmlns:a="http://schemas.openxmlformats.org/drawingml/2006/main"/>
+    <a:masterClrMapping/>
   </p:clrMapOvr>
 </p:notes>
 </file>
 
 <file path=ppt/notesSlides/notesSlide5.xml><?xml version="1.0" encoding="utf-8"?>
-<p:notes xmlns:p="http://schemas.openxmlformats.org/presentationml/2006/main">
+<p:notes xmlns:a="http://schemas.openxmlformats.org/drawingml/2006/main" xmlns:p="http://schemas.openxmlformats.org/presentationml/2006/main">
   <p:cSld>
     <p:spTree>
       <p:nvGrpSpPr>
@@ -3422,13 +3167,13 @@
         <p:nvPr/>
       </p:nvGrpSpPr>
       <p:grpSpPr>
-        <a:xfrm xmlns:a="http://schemas.openxmlformats.org/drawingml/2006/main"/>
+        <a:xfrm/>
       </p:grpSpPr>
       <p:sp>
         <p:nvSpPr>
           <p:cNvPr id="2" name="Slide Image Placeholder 1"/>
           <p:cNvSpPr>
-            <a:spLocks xmlns:a="http://schemas.openxmlformats.org/drawingml/2006/main" noGrp="1"/>
+            <a:spLocks noGrp="1"/>
           </p:cNvSpPr>
           <p:nvPr>
             <p:ph type="sldImg" idx="0"/>
@@ -3440,7 +3185,7 @@
         <p:nvSpPr>
           <p:cNvPr id="3" name="Notes Placeholder 2"/>
           <p:cNvSpPr>
-            <a:spLocks xmlns:a="http://schemas.openxmlformats.org/drawingml/2006/main" noGrp="1"/>
+            <a:spLocks noGrp="1"/>
           </p:cNvSpPr>
           <p:nvPr>
             <p:ph type="body" idx="1"/>
@@ -3448,126 +3193,111 @@
         </p:nvSpPr>
         <p:spPr/>
         <p:txBody>
-          <a:bodyPr xmlns:a="http://schemas.openxmlformats.org/drawingml/2006/main"/>
-          <a:lstStyle xmlns:a="http://schemas.openxmlformats.org/drawingml/2006/main"/>
-          <a:p xmlns:a="http://schemas.openxmlformats.org/drawingml/2006/main">
-            <a:r>
-              <a:t>PURPOSE</a:t>
-            </a:r>
-          </a:p>
-          <a:p xmlns:a="http://schemas.openxmlformats.org/drawingml/2006/main">
+          <a:bodyPr/>
+          <a:lstStyle/>
+          <a:p>
             <a:r>
               <a:t>Rehearse the offline save procedure</a:t>
             </a:r>
           </a:p>
-          <a:p xmlns:a="http://schemas.openxmlformats.org/drawingml/2006/main">
+          <a:p>
+            <a:r>
+              <a:t>CML3112, Week 14, slide 5</a:t>
+            </a:r>
+          </a:p>
+          <a:p>
             <a:r>
               <a:t/>
             </a:r>
           </a:p>
-          <a:p xmlns:a="http://schemas.openxmlformats.org/drawingml/2006/main">
-            <a:r>
-              <a:t>CONNECT</a:t>
-            </a:r>
-          </a:p>
-          <a:p xmlns:a="http://schemas.openxmlformats.org/drawingml/2006/main">
-            <a:r>
-              <a:t>Previous slide: Preparation happens before the test.</a:t>
-            </a:r>
-          </a:p>
-          <a:p xmlns:a="http://schemas.openxmlformats.org/drawingml/2006/main">
+          <a:p>
+            <a:r>
+              <a:t>Explanation to give</a:t>
+            </a:r>
+          </a:p>
+          <a:p>
+            <a:r>
+              <a:t>Show the offline save location and reopen the file before test day. Identify both the code cells and the markdown cell headed My written evidence.</a:t>
+            </a:r>
+          </a:p>
+          <a:p>
             <a:r>
               <a:t/>
             </a:r>
           </a:p>
-          <a:p xmlns:a="http://schemas.openxmlformats.org/drawingml/2006/main">
-            <a:r>
-              <a:t>EXPLAIN</a:t>
-            </a:r>
-          </a:p>
-          <a:p xmlns:a="http://schemas.openxmlformats.org/drawingml/2006/main">
+          <a:p>
+            <a:r>
+              <a:t>Worked illustration / lecturer answer</a:t>
+            </a:r>
+          </a:p>
+          <a:p>
+            <a:r>
+              <a:t>Use a separate practice notebook for rehearsal. Students should locate the actual .ipynb on disk rather than rely on a browser tab or cloud link.</a:t>
+            </a:r>
+          </a:p>
+          <a:p>
+            <a:r>
+              <a:t/>
+            </a:r>
+          </a:p>
+          <a:p>
+            <a:r>
+              <a:t>Misconception to address</a:t>
+            </a:r>
+          </a:p>
+          <a:p>
+            <a:r>
+              <a:t>During the assessed period, report technical failures immediately and follow the invigilator’s instructions. Do not introduce new modelling code or online resources.</a:t>
+            </a:r>
+          </a:p>
+          <a:p>
+            <a:r>
+              <a:t/>
+            </a:r>
+          </a:p>
+          <a:p>
+            <a:r>
+              <a:t>On this slide</a:t>
+            </a:r>
+          </a:p>
+          <a:p>
             <a:r>
               <a:t>Save your notebook on the prepared lab computer.</a:t>
             </a:r>
           </a:p>
-          <a:p xmlns:a="http://schemas.openxmlformats.org/drawingml/2006/main">
+          <a:p>
             <a:r>
               <a:t/>
             </a:r>
           </a:p>
-          <a:p xmlns:a="http://schemas.openxmlformats.org/drawingml/2006/main">
+          <a:p>
             <a:r>
               <a:t>Type Part B under My written evidence in the notebook.</a:t>
             </a:r>
           </a:p>
-          <a:p xmlns:a="http://schemas.openxmlformats.org/drawingml/2006/main">
+          <a:p>
             <a:r>
               <a:t/>
             </a:r>
           </a:p>
-          <a:p xmlns:a="http://schemas.openxmlformats.org/drawingml/2006/main">
+          <a:p>
             <a:r>
               <a:t>Locate and reopen the complete notebook without internet.</a:t>
             </a:r>
           </a:p>
-          <a:p xmlns:a="http://schemas.openxmlformats.org/drawingml/2006/main">
+          <a:p>
             <a:r>
               <a:t/>
             </a:r>
           </a:p>
-          <a:p xmlns:a="http://schemas.openxmlformats.org/drawingml/2006/main">
-            <a:r>
-              <a:t>LECTURER CUE</a:t>
-            </a:r>
-          </a:p>
-          <a:p xmlns:a="http://schemas.openxmlformats.org/drawingml/2006/main">
-            <a:r>
-              <a:t>Read the specific public requirement shown on this slide. Explain the input, output and evidence before independent work; do not work the assessed answer for the class.</a:t>
-            </a:r>
-          </a:p>
-          <a:p xmlns:a="http://schemas.openxmlformats.org/drawingml/2006/main">
-            <a:r>
-              <a:t/>
-            </a:r>
-          </a:p>
-          <a:p xmlns:a="http://schemas.openxmlformats.org/drawingml/2006/main">
-            <a:r>
-              <a:t>TEACHING MODE</a:t>
-            </a:r>
-          </a:p>
-          <a:p xmlns:a="http://schemas.openxmlformats.org/drawingml/2006/main">
-            <a:r>
-              <a:t>Demonstrate first. Read each new symbol aloud, trace the values and compare the shown output. Learners repeat worked examples individually after class.</a:t>
-            </a:r>
-          </a:p>
-          <a:p xmlns:a="http://schemas.openxmlformats.org/drawingml/2006/main">
-            <a:r>
-              <a:t/>
-            </a:r>
-          </a:p>
-          <a:p xmlns:a="http://schemas.openxmlformats.org/drawingml/2006/main">
-            <a:r>
-              <a:t>NEXT</a:t>
-            </a:r>
-          </a:p>
-          <a:p xmlns:a="http://schemas.openxmlformats.org/drawingml/2006/main">
-            <a:r>
-              <a:t>A result needs an explanation.</a:t>
-            </a:r>
-          </a:p>
-          <a:p xmlns:a="http://schemas.openxmlformats.org/drawingml/2006/main">
-            <a:r>
-              <a:t/>
-            </a:r>
-          </a:p>
-          <a:p xmlns:a="http://schemas.openxmlformats.org/drawingml/2006/main">
-            <a:r>
-              <a:t>REFERENCES</a:t>
-            </a:r>
-          </a:p>
-          <a:p xmlns:a="http://schemas.openxmlformats.org/drawingml/2006/main">
-            <a:r>
-              <a:t/>
+          <a:p>
+            <a:r>
+              <a:t>Continue to</a:t>
+            </a:r>
+          </a:p>
+          <a:p>
+            <a:r>
+              <a:t>A result needs an explanation</a:t>
             </a:r>
           </a:p>
         </p:txBody>
@@ -3576,7 +3306,7 @@
         <p:nvSpPr>
           <p:cNvPr id="4" name="Slide Number Placeholder 3"/>
           <p:cNvSpPr>
-            <a:spLocks xmlns:a="http://schemas.openxmlformats.org/drawingml/2006/main" noGrp="1"/>
+            <a:spLocks noGrp="1"/>
           </p:cNvSpPr>
           <p:nvPr>
             <p:ph type="sldNum" idx="5"/>
@@ -3584,21 +3314,21 @@
         </p:nvSpPr>
         <p:spPr/>
         <p:txBody>
-          <a:bodyPr xmlns:a="http://schemas.openxmlformats.org/drawingml/2006/main"/>
-          <a:lstStyle xmlns:a="http://schemas.openxmlformats.org/drawingml/2006/main"/>
-          <a:p xmlns:a="http://schemas.openxmlformats.org/drawingml/2006/main"/>
+          <a:bodyPr/>
+          <a:lstStyle/>
+          <a:p/>
         </p:txBody>
       </p:sp>
     </p:spTree>
   </p:cSld>
   <p:clrMapOvr>
-    <a:masterClrMapping xmlns:a="http://schemas.openxmlformats.org/drawingml/2006/main"/>
+    <a:masterClrMapping/>
   </p:clrMapOvr>
 </p:notes>
 </file>
 
 <file path=ppt/notesSlides/notesSlide6.xml><?xml version="1.0" encoding="utf-8"?>
-<p:notes xmlns:p="http://schemas.openxmlformats.org/presentationml/2006/main">
+<p:notes xmlns:a="http://schemas.openxmlformats.org/drawingml/2006/main" xmlns:p="http://schemas.openxmlformats.org/presentationml/2006/main">
   <p:cSld>
     <p:spTree>
       <p:nvGrpSpPr>
@@ -3607,13 +3337,13 @@
         <p:nvPr/>
       </p:nvGrpSpPr>
       <p:grpSpPr>
-        <a:xfrm xmlns:a="http://schemas.openxmlformats.org/drawingml/2006/main"/>
+        <a:xfrm/>
       </p:grpSpPr>
       <p:sp>
         <p:nvSpPr>
           <p:cNvPr id="2" name="Slide Image Placeholder 1"/>
           <p:cNvSpPr>
-            <a:spLocks xmlns:a="http://schemas.openxmlformats.org/drawingml/2006/main" noGrp="1"/>
+            <a:spLocks noGrp="1"/>
           </p:cNvSpPr>
           <p:nvPr>
             <p:ph type="sldImg" idx="0"/>
@@ -3625,7 +3355,7 @@
         <p:nvSpPr>
           <p:cNvPr id="3" name="Notes Placeholder 2"/>
           <p:cNvSpPr>
-            <a:spLocks xmlns:a="http://schemas.openxmlformats.org/drawingml/2006/main" noGrp="1"/>
+            <a:spLocks noGrp="1"/>
           </p:cNvSpPr>
           <p:nvPr>
             <p:ph type="body" idx="1"/>
@@ -3633,126 +3363,111 @@
         </p:nvSpPr>
         <p:spPr/>
         <p:txBody>
-          <a:bodyPr xmlns:a="http://schemas.openxmlformats.org/drawingml/2006/main"/>
-          <a:lstStyle xmlns:a="http://schemas.openxmlformats.org/drawingml/2006/main"/>
-          <a:p xmlns:a="http://schemas.openxmlformats.org/drawingml/2006/main">
-            <a:r>
-              <a:t>PURPOSE</a:t>
-            </a:r>
-          </a:p>
-          <a:p xmlns:a="http://schemas.openxmlformats.org/drawingml/2006/main">
+          <a:bodyPr/>
+          <a:lstStyle/>
+          <a:p>
             <a:r>
               <a:t>A result needs an explanation</a:t>
             </a:r>
           </a:p>
-          <a:p xmlns:a="http://schemas.openxmlformats.org/drawingml/2006/main">
+          <a:p>
+            <a:r>
+              <a:t>CML3112, Week 14, slide 6</a:t>
+            </a:r>
+          </a:p>
+          <a:p>
             <a:r>
               <a:t/>
             </a:r>
           </a:p>
-          <a:p xmlns:a="http://schemas.openxmlformats.org/drawingml/2006/main">
-            <a:r>
-              <a:t>CONNECT</a:t>
-            </a:r>
-          </a:p>
-          <a:p xmlns:a="http://schemas.openxmlformats.org/drawingml/2006/main">
-            <a:r>
-              <a:t>Previous slide: Rehearse the offline save procedure.</a:t>
-            </a:r>
-          </a:p>
-          <a:p xmlns:a="http://schemas.openxmlformats.org/drawingml/2006/main">
+          <a:p>
+            <a:r>
+              <a:t>Explanation to give</a:t>
+            </a:r>
+          </a:p>
+          <a:p>
+            <a:r>
+              <a:t>Read the metric with its unit and evaluation population. Explain why that error measure matches the cost of a wrong decision in the stated engineering setting.</a:t>
+            </a:r>
+          </a:p>
+          <a:p>
             <a:r>
               <a:t/>
             </a:r>
           </a:p>
-          <a:p xmlns:a="http://schemas.openxmlformats.org/drawingml/2006/main">
-            <a:r>
-              <a:t>EXPLAIN</a:t>
-            </a:r>
-          </a:p>
-          <a:p xmlns:a="http://schemas.openxmlformats.org/drawingml/2006/main">
+          <a:p>
+            <a:r>
+              <a:t>Worked illustration / lecturer answer</a:t>
+            </a:r>
+          </a:p>
+          <a:p>
+            <a:r>
+              <a:t>MAE 3 kW describes an average absolute error on named observations; it does not guarantee every prediction lies within 3 kW. Report baseline comparison and the evaluation protocol.</a:t>
+            </a:r>
+          </a:p>
+          <a:p>
+            <a:r>
+              <a:t/>
+            </a:r>
+          </a:p>
+          <a:p>
+            <a:r>
+              <a:t>Misconception to address</a:t>
+            </a:r>
+          </a:p>
+          <a:p>
+            <a:r>
+              <a:t>Avoid a deployment claim based only on a score. State genuine limitations involving data coverage, measurement quality or future operating conditions.</a:t>
+            </a:r>
+          </a:p>
+          <a:p>
+            <a:r>
+              <a:t/>
+            </a:r>
+          </a:p>
+          <a:p>
+            <a:r>
+              <a:t>On this slide</a:t>
+            </a:r>
+          </a:p>
+          <a:p>
             <a:r>
               <a:t>Name the target and its unit or class.</a:t>
             </a:r>
           </a:p>
-          <a:p xmlns:a="http://schemas.openxmlformats.org/drawingml/2006/main">
+          <a:p>
             <a:r>
               <a:t/>
             </a:r>
           </a:p>
-          <a:p xmlns:a="http://schemas.openxmlformats.org/drawingml/2006/main">
+          <a:p>
             <a:r>
               <a:t>Explain which data fitted preprocessing and which data evaluated the model.</a:t>
             </a:r>
           </a:p>
-          <a:p xmlns:a="http://schemas.openxmlformats.org/drawingml/2006/main">
+          <a:p>
             <a:r>
               <a:t/>
             </a:r>
           </a:p>
-          <a:p xmlns:a="http://schemas.openxmlformats.org/drawingml/2006/main">
+          <a:p>
             <a:r>
               <a:t>A high score alone does not establish a useful engineering model.</a:t>
             </a:r>
           </a:p>
-          <a:p xmlns:a="http://schemas.openxmlformats.org/drawingml/2006/main">
+          <a:p>
             <a:r>
               <a:t/>
             </a:r>
           </a:p>
-          <a:p xmlns:a="http://schemas.openxmlformats.org/drawingml/2006/main">
-            <a:r>
-              <a:t>LECTURER CUE</a:t>
-            </a:r>
-          </a:p>
-          <a:p xmlns:a="http://schemas.openxmlformats.org/drawingml/2006/main">
-            <a:r>
-              <a:t>Read the specific public requirement shown on this slide. Explain the input, output and evidence before independent work; do not work the assessed answer for the class.</a:t>
-            </a:r>
-          </a:p>
-          <a:p xmlns:a="http://schemas.openxmlformats.org/drawingml/2006/main">
-            <a:r>
-              <a:t/>
-            </a:r>
-          </a:p>
-          <a:p xmlns:a="http://schemas.openxmlformats.org/drawingml/2006/main">
-            <a:r>
-              <a:t>TEACHING MODE</a:t>
-            </a:r>
-          </a:p>
-          <a:p xmlns:a="http://schemas.openxmlformats.org/drawingml/2006/main">
-            <a:r>
-              <a:t>Demonstrate first. Read each new symbol aloud, trace the values and compare the shown output. Learners repeat worked examples individually after class.</a:t>
-            </a:r>
-          </a:p>
-          <a:p xmlns:a="http://schemas.openxmlformats.org/drawingml/2006/main">
-            <a:r>
-              <a:t/>
-            </a:r>
-          </a:p>
-          <a:p xmlns:a="http://schemas.openxmlformats.org/drawingml/2006/main">
-            <a:r>
-              <a:t>NEXT</a:t>
-            </a:r>
-          </a:p>
-          <a:p xmlns:a="http://schemas.openxmlformats.org/drawingml/2006/main">
-            <a:r>
-              <a:t>Practice before test day.</a:t>
-            </a:r>
-          </a:p>
-          <a:p xmlns:a="http://schemas.openxmlformats.org/drawingml/2006/main">
-            <a:r>
-              <a:t/>
-            </a:r>
-          </a:p>
-          <a:p xmlns:a="http://schemas.openxmlformats.org/drawingml/2006/main">
-            <a:r>
-              <a:t>REFERENCES</a:t>
-            </a:r>
-          </a:p>
-          <a:p xmlns:a="http://schemas.openxmlformats.org/drawingml/2006/main">
-            <a:r>
-              <a:t/>
+          <a:p>
+            <a:r>
+              <a:t>Continue to</a:t>
+            </a:r>
+          </a:p>
+          <a:p>
+            <a:r>
+              <a:t>Practice before test day</a:t>
             </a:r>
           </a:p>
         </p:txBody>
@@ -3761,7 +3476,7 @@
         <p:nvSpPr>
           <p:cNvPr id="4" name="Slide Number Placeholder 3"/>
           <p:cNvSpPr>
-            <a:spLocks xmlns:a="http://schemas.openxmlformats.org/drawingml/2006/main" noGrp="1"/>
+            <a:spLocks noGrp="1"/>
           </p:cNvSpPr>
           <p:nvPr>
             <p:ph type="sldNum" idx="5"/>
@@ -3769,21 +3484,21 @@
         </p:nvSpPr>
         <p:spPr/>
         <p:txBody>
-          <a:bodyPr xmlns:a="http://schemas.openxmlformats.org/drawingml/2006/main"/>
-          <a:lstStyle xmlns:a="http://schemas.openxmlformats.org/drawingml/2006/main"/>
-          <a:p xmlns:a="http://schemas.openxmlformats.org/drawingml/2006/main"/>
+          <a:bodyPr/>
+          <a:lstStyle/>
+          <a:p/>
         </p:txBody>
       </p:sp>
     </p:spTree>
   </p:cSld>
   <p:clrMapOvr>
-    <a:masterClrMapping xmlns:a="http://schemas.openxmlformats.org/drawingml/2006/main"/>
+    <a:masterClrMapping/>
   </p:clrMapOvr>
 </p:notes>
 </file>
 
 <file path=ppt/notesSlides/notesSlide7.xml><?xml version="1.0" encoding="utf-8"?>
-<p:notes xmlns:p="http://schemas.openxmlformats.org/presentationml/2006/main">
+<p:notes xmlns:a="http://schemas.openxmlformats.org/drawingml/2006/main" xmlns:p="http://schemas.openxmlformats.org/presentationml/2006/main">
   <p:cSld>
     <p:spTree>
       <p:nvGrpSpPr>
@@ -3792,13 +3507,13 @@
         <p:nvPr/>
       </p:nvGrpSpPr>
       <p:grpSpPr>
-        <a:xfrm xmlns:a="http://schemas.openxmlformats.org/drawingml/2006/main"/>
+        <a:xfrm/>
       </p:grpSpPr>
       <p:sp>
         <p:nvSpPr>
           <p:cNvPr id="2" name="Slide Image Placeholder 1"/>
           <p:cNvSpPr>
-            <a:spLocks xmlns:a="http://schemas.openxmlformats.org/drawingml/2006/main" noGrp="1"/>
+            <a:spLocks noGrp="1"/>
           </p:cNvSpPr>
           <p:nvPr>
             <p:ph type="sldImg" idx="0"/>
@@ -3810,7 +3525,7 @@
         <p:nvSpPr>
           <p:cNvPr id="3" name="Notes Placeholder 2"/>
           <p:cNvSpPr>
-            <a:spLocks xmlns:a="http://schemas.openxmlformats.org/drawingml/2006/main" noGrp="1"/>
+            <a:spLocks noGrp="1"/>
           </p:cNvSpPr>
           <p:nvPr>
             <p:ph type="body" idx="1"/>
@@ -3818,176 +3533,186 @@
         </p:nvSpPr>
         <p:spPr/>
         <p:txBody>
-          <a:bodyPr xmlns:a="http://schemas.openxmlformats.org/drawingml/2006/main"/>
-          <a:lstStyle xmlns:a="http://schemas.openxmlformats.org/drawingml/2006/main"/>
-          <a:p xmlns:a="http://schemas.openxmlformats.org/drawingml/2006/main">
-            <a:r>
-              <a:t>PURPOSE</a:t>
-            </a:r>
-          </a:p>
-          <a:p xmlns:a="http://schemas.openxmlformats.org/drawingml/2006/main">
+          <a:bodyPr/>
+          <a:lstStyle/>
+          <a:p>
             <a:r>
               <a:t>Practice before test day</a:t>
             </a:r>
           </a:p>
-          <a:p xmlns:a="http://schemas.openxmlformats.org/drawingml/2006/main">
+          <a:p>
+            <a:r>
+              <a:t>CML3112, Week 14, slide 7</a:t>
+            </a:r>
+          </a:p>
+          <a:p>
             <a:r>
               <a:t/>
             </a:r>
           </a:p>
-          <a:p xmlns:a="http://schemas.openxmlformats.org/drawingml/2006/main">
-            <a:r>
-              <a:t>CONNECT</a:t>
-            </a:r>
-          </a:p>
-          <a:p xmlns:a="http://schemas.openxmlformats.org/drawingml/2006/main">
-            <a:r>
-              <a:t>Previous slide: A result needs an explanation.</a:t>
-            </a:r>
-          </a:p>
-          <a:p xmlns:a="http://schemas.openxmlformats.org/drawingml/2006/main">
+          <a:p>
+            <a:r>
+              <a:t>Explanation to give</a:t>
+            </a:r>
+          </a:p>
+          <a:p>
+            <a:r>
+              <a:t>Pair the actual and predicted values in order. The first absolute error is abs(4-5)=1; the second is abs(8-6)=2.</a:t>
+            </a:r>
+          </a:p>
+          <a:p>
             <a:r>
               <a:t/>
             </a:r>
           </a:p>
-          <a:p xmlns:a="http://schemas.openxmlformats.org/drawingml/2006/main">
-            <a:r>
-              <a:t>EXPLAIN</a:t>
-            </a:r>
-          </a:p>
-          <a:p xmlns:a="http://schemas.openxmlformats.org/drawingml/2006/main">
-            <a:r>
-              <a:t>Read the code in this order:</a:t>
-            </a:r>
-          </a:p>
-          <a:p xmlns:a="http://schemas.openxmlformats.org/drawingml/2006/main">
+          <a:p>
+            <a:r>
+              <a:t>Worked illustration / lecturer answer</a:t>
+            </a:r>
+          </a:p>
+          <a:p>
+            <a:r>
+              <a:t>Their mean is (1+2)/2=1.5. The unit is the target unit. Both observations contribute once to the numerator and denominator.</a:t>
+            </a:r>
+          </a:p>
+          <a:p>
+            <a:r>
+              <a:t/>
+            </a:r>
+          </a:p>
+          <a:p>
+            <a:r>
+              <a:t>Misconception to address</a:t>
+            </a:r>
+          </a:p>
+          <a:p>
+            <a:r>
+              <a:t>Use the practice values only before the assessed session. MAE 1.5 is an average, not a maximum error guarantee.</a:t>
+            </a:r>
+          </a:p>
+          <a:p>
+            <a:r>
+              <a:t/>
+            </a:r>
+          </a:p>
+          <a:p>
+            <a:r>
+              <a:t>Read the displayed code line by line</a:t>
+            </a:r>
+          </a:p>
+          <a:p>
             <a:r>
               <a:t>actual = [4, 8]</a:t>
             </a:r>
           </a:p>
-          <a:p xmlns:a="http://schemas.openxmlformats.org/drawingml/2006/main">
+          <a:p>
+            <a:r>
+              <a:t>Evaluate the complete right-hand expression first, then assign its result to the name or selected field on the left.</a:t>
+            </a:r>
+          </a:p>
+          <a:p>
+            <a:r>
+              <a:t/>
+            </a:r>
+          </a:p>
+          <a:p>
             <a:r>
               <a:t>predicted = [5, 6]</a:t>
             </a:r>
           </a:p>
-          <a:p xmlns:a="http://schemas.openxmlformats.org/drawingml/2006/main">
+          <a:p>
+            <a:r>
+              <a:t>Evaluate the complete right-hand expression first, then assign its result to the name or selected field on the left.</a:t>
+            </a:r>
+          </a:p>
+          <a:p>
+            <a:r>
+              <a:t/>
+            </a:r>
+          </a:p>
+          <a:p>
             <a:r>
               <a:t>errors = []</a:t>
             </a:r>
           </a:p>
-          <a:p xmlns:a="http://schemas.openxmlformats.org/drawingml/2006/main">
+          <a:p>
+            <a:r>
+              <a:t>Evaluate the complete right-hand expression first, then assign its result to the name or selected field on the left.</a:t>
+            </a:r>
+          </a:p>
+          <a:p>
+            <a:r>
+              <a:t/>
+            </a:r>
+          </a:p>
+          <a:p>
             <a:r>
               <a:t>for a, p in zip(actual, predicted):</a:t>
             </a:r>
           </a:p>
-          <a:p xmlns:a="http://schemas.openxmlformats.org/drawingml/2006/main">
-            <a:r>
-              <a:t>    errors.append(abs(a - p))</a:t>
-            </a:r>
-          </a:p>
-          <a:p xmlns:a="http://schemas.openxmlformats.org/drawingml/2006/main">
+          <a:p>
+            <a:r>
+              <a:t>Take each item or pair in turn, assign the loop name(s), and repeat the indented body.</a:t>
+            </a:r>
+          </a:p>
+          <a:p>
+            <a:r>
+              <a:t/>
+            </a:r>
+          </a:p>
+          <a:p>
+            <a:r>
+              <a:t>errors.append(abs(a - p))</a:t>
+            </a:r>
+          </a:p>
+          <a:p>
+            <a:r>
+              <a:t>Evaluate the argument and add it as one new item at the end of this list.</a:t>
+            </a:r>
+          </a:p>
+          <a:p>
+            <a:r>
+              <a:t/>
+            </a:r>
+          </a:p>
+          <a:p>
             <a:r>
               <a:t>print(sum(errors) / len(errors))</a:t>
             </a:r>
           </a:p>
-          <a:p xmlns:a="http://schemas.openxmlformats.org/drawingml/2006/main">
+          <a:p>
+            <a:r>
+              <a:t>Evaluate the expression inside the parentheses and display it. Displaying is separate from returning a function result.</a:t>
+            </a:r>
+          </a:p>
+          <a:p>
             <a:r>
               <a:t/>
             </a:r>
           </a:p>
-          <a:p xmlns:a="http://schemas.openxmlformats.org/drawingml/2006/main">
-            <a:r>
-              <a:t>for takes the next item. The indented block repeats.</a:t>
-            </a:r>
-          </a:p>
-          <a:p xmlns:a="http://schemas.openxmlformats.org/drawingml/2006/main">
+          <a:p>
+            <a:r>
+              <a:t>Result / continuity</a:t>
+            </a:r>
+          </a:p>
+          <a:p>
+            <a:r>
+              <a:t>Read top to bottom. Run the complete example in the matching practice notebook.</a:t>
+            </a:r>
+          </a:p>
+          <a:p>
             <a:r>
               <a:t/>
             </a:r>
           </a:p>
-          <a:p xmlns:a="http://schemas.openxmlformats.org/drawingml/2006/main">
-            <a:r>
-              <a:t>zip pairs items at matching positions in these equal-length lists.</a:t>
-            </a:r>
-          </a:p>
-          <a:p xmlns:a="http://schemas.openxmlformats.org/drawingml/2006/main">
-            <a:r>
-              <a:t/>
-            </a:r>
-          </a:p>
-          <a:p xmlns:a="http://schemas.openxmlformats.org/drawingml/2006/main">
-            <a:r>
-              <a:t>print displays a value below the cell.</a:t>
-            </a:r>
-          </a:p>
-          <a:p xmlns:a="http://schemas.openxmlformats.org/drawingml/2006/main">
-            <a:r>
-              <a:t/>
-            </a:r>
-          </a:p>
-          <a:p xmlns:a="http://schemas.openxmlformats.org/drawingml/2006/main">
-            <a:r>
-              <a:t>Read top to bottom. Run the complete example in the matching practice notebook.</a:t>
-            </a:r>
-          </a:p>
-          <a:p xmlns:a="http://schemas.openxmlformats.org/drawingml/2006/main">
-            <a:r>
-              <a:t/>
-            </a:r>
-          </a:p>
-          <a:p xmlns:a="http://schemas.openxmlformats.org/drawingml/2006/main">
-            <a:r>
-              <a:t>LECTURER CUE</a:t>
-            </a:r>
-          </a:p>
-          <a:p xmlns:a="http://schemas.openxmlformats.org/drawingml/2006/main">
-            <a:r>
-              <a:t>Read the specific public requirement shown on this slide. Explain the input, output and evidence before independent work; do not work the assessed answer for the class.</a:t>
-            </a:r>
-          </a:p>
-          <a:p xmlns:a="http://schemas.openxmlformats.org/drawingml/2006/main">
-            <a:r>
-              <a:t/>
-            </a:r>
-          </a:p>
-          <a:p xmlns:a="http://schemas.openxmlformats.org/drawingml/2006/main">
-            <a:r>
-              <a:t>TEACHING MODE</a:t>
-            </a:r>
-          </a:p>
-          <a:p xmlns:a="http://schemas.openxmlformats.org/drawingml/2006/main">
-            <a:r>
-              <a:t>Demonstrate first. Read each new symbol aloud, trace the values and compare the shown output. Learners repeat worked examples individually after class.</a:t>
-            </a:r>
-          </a:p>
-          <a:p xmlns:a="http://schemas.openxmlformats.org/drawingml/2006/main">
-            <a:r>
-              <a:t/>
-            </a:r>
-          </a:p>
-          <a:p xmlns:a="http://schemas.openxmlformats.org/drawingml/2006/main">
-            <a:r>
-              <a:t>NEXT</a:t>
-            </a:r>
-          </a:p>
-          <a:p xmlns:a="http://schemas.openxmlformats.org/drawingml/2006/main">
-            <a:r>
-              <a:t>Test session.</a:t>
-            </a:r>
-          </a:p>
-          <a:p xmlns:a="http://schemas.openxmlformats.org/drawingml/2006/main">
-            <a:r>
-              <a:t/>
-            </a:r>
-          </a:p>
-          <a:p xmlns:a="http://schemas.openxmlformats.org/drawingml/2006/main">
-            <a:r>
-              <a:t>REFERENCES</a:t>
-            </a:r>
-          </a:p>
-          <a:p xmlns:a="http://schemas.openxmlformats.org/drawingml/2006/main">
-            <a:r>
-              <a:t/>
+          <a:p>
+            <a:r>
+              <a:t>Continue to</a:t>
+            </a:r>
+          </a:p>
+          <a:p>
+            <a:r>
+              <a:t>Test session</a:t>
             </a:r>
           </a:p>
         </p:txBody>
@@ -3996,7 +3721,7 @@
         <p:nvSpPr>
           <p:cNvPr id="4" name="Slide Number Placeholder 3"/>
           <p:cNvSpPr>
-            <a:spLocks xmlns:a="http://schemas.openxmlformats.org/drawingml/2006/main" noGrp="1"/>
+            <a:spLocks noGrp="1"/>
           </p:cNvSpPr>
           <p:nvPr>
             <p:ph type="sldNum" idx="5"/>
@@ -4004,21 +3729,21 @@
         </p:nvSpPr>
         <p:spPr/>
         <p:txBody>
-          <a:bodyPr xmlns:a="http://schemas.openxmlformats.org/drawingml/2006/main"/>
-          <a:lstStyle xmlns:a="http://schemas.openxmlformats.org/drawingml/2006/main"/>
-          <a:p xmlns:a="http://schemas.openxmlformats.org/drawingml/2006/main"/>
+          <a:bodyPr/>
+          <a:lstStyle/>
+          <a:p/>
         </p:txBody>
       </p:sp>
     </p:spTree>
   </p:cSld>
   <p:clrMapOvr>
-    <a:masterClrMapping xmlns:a="http://schemas.openxmlformats.org/drawingml/2006/main"/>
+    <a:masterClrMapping/>
   </p:clrMapOvr>
 </p:notes>
 </file>
 
 <file path=ppt/notesSlides/notesSlide8.xml><?xml version="1.0" encoding="utf-8"?>
-<p:notes xmlns:p="http://schemas.openxmlformats.org/presentationml/2006/main">
+<p:notes xmlns:a="http://schemas.openxmlformats.org/drawingml/2006/main" xmlns:p="http://schemas.openxmlformats.org/presentationml/2006/main">
   <p:cSld>
     <p:spTree>
       <p:nvGrpSpPr>
@@ -4027,13 +3752,13 @@
         <p:nvPr/>
       </p:nvGrpSpPr>
       <p:grpSpPr>
-        <a:xfrm xmlns:a="http://schemas.openxmlformats.org/drawingml/2006/main"/>
+        <a:xfrm/>
       </p:grpSpPr>
       <p:sp>
         <p:nvSpPr>
           <p:cNvPr id="2" name="Slide Image Placeholder 1"/>
           <p:cNvSpPr>
-            <a:spLocks xmlns:a="http://schemas.openxmlformats.org/drawingml/2006/main" noGrp="1"/>
+            <a:spLocks noGrp="1"/>
           </p:cNvSpPr>
           <p:nvPr>
             <p:ph type="sldImg" idx="0"/>
@@ -4045,7 +3770,7 @@
         <p:nvSpPr>
           <p:cNvPr id="3" name="Notes Placeholder 2"/>
           <p:cNvSpPr>
-            <a:spLocks xmlns:a="http://schemas.openxmlformats.org/drawingml/2006/main" noGrp="1"/>
+            <a:spLocks noGrp="1"/>
           </p:cNvSpPr>
           <p:nvPr>
             <p:ph type="body" idx="1"/>
@@ -4053,136 +3778,121 @@
         </p:nvSpPr>
         <p:spPr/>
         <p:txBody>
-          <a:bodyPr xmlns:a="http://schemas.openxmlformats.org/drawingml/2006/main"/>
-          <a:lstStyle xmlns:a="http://schemas.openxmlformats.org/drawingml/2006/main"/>
-          <a:p xmlns:a="http://schemas.openxmlformats.org/drawingml/2006/main">
-            <a:r>
-              <a:t>PURPOSE</a:t>
-            </a:r>
-          </a:p>
-          <a:p xmlns:a="http://schemas.openxmlformats.org/drawingml/2006/main">
+          <a:bodyPr/>
+          <a:lstStyle/>
+          <a:p>
             <a:r>
               <a:t>Test session</a:t>
             </a:r>
           </a:p>
-          <a:p xmlns:a="http://schemas.openxmlformats.org/drawingml/2006/main">
+          <a:p>
+            <a:r>
+              <a:t>CML3112, Week 14, slide 8</a:t>
+            </a:r>
+          </a:p>
+          <a:p>
             <a:r>
               <a:t/>
             </a:r>
           </a:p>
-          <a:p xmlns:a="http://schemas.openxmlformats.org/drawingml/2006/main">
-            <a:r>
-              <a:t>CONNECT</a:t>
-            </a:r>
-          </a:p>
-          <a:p xmlns:a="http://schemas.openxmlformats.org/drawingml/2006/main">
-            <a:r>
-              <a:t>Previous slide: Practice before test day.</a:t>
-            </a:r>
-          </a:p>
-          <a:p xmlns:a="http://schemas.openxmlformats.org/drawingml/2006/main">
+          <a:p>
+            <a:r>
+              <a:t>Explanation to give</a:t>
+            </a:r>
+          </a:p>
+          <a:p>
+            <a:r>
+              <a:t>Prepare for Test 2 by rehearsing the previously taught modelling decisions and the offline evidence workflow. Do not turn the assessed period into a worked lesson.</a:t>
+            </a:r>
+          </a:p>
+          <a:p>
             <a:r>
               <a:t/>
             </a:r>
           </a:p>
-          <a:p xmlns:a="http://schemas.openxmlformats.org/drawingml/2006/main">
-            <a:r>
-              <a:t>EXPLAIN</a:t>
-            </a:r>
-          </a:p>
-          <a:p xmlns:a="http://schemas.openxmlformats.org/drawingml/2006/main">
+          <a:p>
+            <a:r>
+              <a:t>Worked illustration / lecturer answer</a:t>
+            </a:r>
+          </a:p>
+          <a:p>
+            <a:r>
+              <a:t>Part B is typed reasoning in the same notebook, with code execution prohibited. The invigilated collection is authoritative; a later upload only transports that snapshot.</a:t>
+            </a:r>
+          </a:p>
+          <a:p>
+            <a:r>
+              <a:t/>
+            </a:r>
+          </a:p>
+          <a:p>
+            <a:r>
+              <a:t>Misconception to address</a:t>
+            </a:r>
+          </a:p>
+          <a:p>
+            <a:r>
+              <a:t>At the Part A boundary, follow the official snapshot procedure. During the 25-minute Part B period, students type reasoning but must not execute code. Do not change the published timing during an explanation.</a:t>
+            </a:r>
+          </a:p>
+          <a:p>
+            <a:r>
+              <a:t/>
+            </a:r>
+          </a:p>
+          <a:p>
+            <a:r>
+              <a:t>On this slide</a:t>
+            </a:r>
+          </a:p>
+          <a:p>
             <a:r>
               <a:t>00–15 minutes: briefing and file check.</a:t>
             </a:r>
           </a:p>
-          <a:p xmlns:a="http://schemas.openxmlformats.org/drawingml/2006/main">
+          <a:p>
             <a:r>
               <a:t/>
             </a:r>
           </a:p>
-          <a:p xmlns:a="http://schemas.openxmlformats.org/drawingml/2006/main">
+          <a:p>
             <a:r>
               <a:t>15–135 minutes: individual practical work.</a:t>
             </a:r>
           </a:p>
-          <a:p xmlns:a="http://schemas.openxmlformats.org/drawingml/2006/main">
+          <a:p>
             <a:r>
               <a:t/>
             </a:r>
           </a:p>
-          <a:p xmlns:a="http://schemas.openxmlformats.org/drawingml/2006/main">
+          <a:p>
             <a:r>
               <a:t>135–160 minutes: typed offline reasoning, with code execution prohibited.</a:t>
             </a:r>
           </a:p>
-          <a:p xmlns:a="http://schemas.openxmlformats.org/drawingml/2006/main">
+          <a:p>
             <a:r>
               <a:t/>
             </a:r>
           </a:p>
-          <a:p xmlns:a="http://schemas.openxmlformats.org/drawingml/2006/main">
+          <a:p>
             <a:r>
               <a:t>160–180 minutes: save and hand in through invigilated offline collection.</a:t>
             </a:r>
           </a:p>
-          <a:p xmlns:a="http://schemas.openxmlformats.org/drawingml/2006/main">
+          <a:p>
             <a:r>
               <a:t/>
             </a:r>
           </a:p>
-          <a:p xmlns:a="http://schemas.openxmlformats.org/drawingml/2006/main">
-            <a:r>
-              <a:t>LECTURER CUE</a:t>
-            </a:r>
-          </a:p>
-          <a:p xmlns:a="http://schemas.openxmlformats.org/drawingml/2006/main">
-            <a:r>
-              <a:t>Read the specific public requirement shown on this slide. Explain the input, output and evidence before independent work; do not work the assessed answer for the class.</a:t>
-            </a:r>
-          </a:p>
-          <a:p xmlns:a="http://schemas.openxmlformats.org/drawingml/2006/main">
-            <a:r>
-              <a:t/>
-            </a:r>
-          </a:p>
-          <a:p xmlns:a="http://schemas.openxmlformats.org/drawingml/2006/main">
-            <a:r>
-              <a:t>TEACHING MODE</a:t>
-            </a:r>
-          </a:p>
-          <a:p xmlns:a="http://schemas.openxmlformats.org/drawingml/2006/main">
-            <a:r>
-              <a:t>Demonstrate first. Read each new symbol aloud, trace the values and compare the shown output. Learners repeat worked examples individually after class.</a:t>
-            </a:r>
-          </a:p>
-          <a:p xmlns:a="http://schemas.openxmlformats.org/drawingml/2006/main">
-            <a:r>
-              <a:t/>
-            </a:r>
-          </a:p>
-          <a:p xmlns:a="http://schemas.openxmlformats.org/drawingml/2006/main">
-            <a:r>
-              <a:t>NEXT</a:t>
-            </a:r>
-          </a:p>
-          <a:p xmlns:a="http://schemas.openxmlformats.org/drawingml/2006/main">
-            <a:r>
-              <a:t>Preparation checkpoint.</a:t>
-            </a:r>
-          </a:p>
-          <a:p xmlns:a="http://schemas.openxmlformats.org/drawingml/2006/main">
-            <a:r>
-              <a:t/>
-            </a:r>
-          </a:p>
-          <a:p xmlns:a="http://schemas.openxmlformats.org/drawingml/2006/main">
-            <a:r>
-              <a:t>REFERENCES</a:t>
-            </a:r>
-          </a:p>
-          <a:p xmlns:a="http://schemas.openxmlformats.org/drawingml/2006/main">
-            <a:r>
-              <a:t/>
+          <a:p>
+            <a:r>
+              <a:t>Continue to</a:t>
+            </a:r>
+          </a:p>
+          <a:p>
+            <a:r>
+              <a:t>Preparation checkpoint</a:t>
             </a:r>
           </a:p>
         </p:txBody>
@@ -4191,7 +3901,7 @@
         <p:nvSpPr>
           <p:cNvPr id="4" name="Slide Number Placeholder 3"/>
           <p:cNvSpPr>
-            <a:spLocks xmlns:a="http://schemas.openxmlformats.org/drawingml/2006/main" noGrp="1"/>
+            <a:spLocks noGrp="1"/>
           </p:cNvSpPr>
           <p:nvPr>
             <p:ph type="sldNum" idx="5"/>
@@ -4199,21 +3909,21 @@
         </p:nvSpPr>
         <p:spPr/>
         <p:txBody>
-          <a:bodyPr xmlns:a="http://schemas.openxmlformats.org/drawingml/2006/main"/>
-          <a:lstStyle xmlns:a="http://schemas.openxmlformats.org/drawingml/2006/main"/>
-          <a:p xmlns:a="http://schemas.openxmlformats.org/drawingml/2006/main"/>
+          <a:bodyPr/>
+          <a:lstStyle/>
+          <a:p/>
         </p:txBody>
       </p:sp>
     </p:spTree>
   </p:cSld>
   <p:clrMapOvr>
-    <a:masterClrMapping xmlns:a="http://schemas.openxmlformats.org/drawingml/2006/main"/>
+    <a:masterClrMapping/>
   </p:clrMapOvr>
 </p:notes>
 </file>
 
 <file path=ppt/notesSlides/notesSlide9.xml><?xml version="1.0" encoding="utf-8"?>
-<p:notes xmlns:p="http://schemas.openxmlformats.org/presentationml/2006/main">
+<p:notes xmlns:a="http://schemas.openxmlformats.org/drawingml/2006/main" xmlns:p="http://schemas.openxmlformats.org/presentationml/2006/main">
   <p:cSld>
     <p:spTree>
       <p:nvGrpSpPr>
@@ -4222,13 +3932,13 @@
         <p:nvPr/>
       </p:nvGrpSpPr>
       <p:grpSpPr>
-        <a:xfrm xmlns:a="http://schemas.openxmlformats.org/drawingml/2006/main"/>
+        <a:xfrm/>
       </p:grpSpPr>
       <p:sp>
         <p:nvSpPr>
           <p:cNvPr id="2" name="Slide Image Placeholder 1"/>
           <p:cNvSpPr>
-            <a:spLocks xmlns:a="http://schemas.openxmlformats.org/drawingml/2006/main" noGrp="1"/>
+            <a:spLocks noGrp="1"/>
           </p:cNvSpPr>
           <p:nvPr>
             <p:ph type="sldImg" idx="0"/>
@@ -4240,7 +3950,7 @@
         <p:nvSpPr>
           <p:cNvPr id="3" name="Notes Placeholder 2"/>
           <p:cNvSpPr>
-            <a:spLocks xmlns:a="http://schemas.openxmlformats.org/drawingml/2006/main" noGrp="1"/>
+            <a:spLocks noGrp="1"/>
           </p:cNvSpPr>
           <p:nvPr>
             <p:ph type="body" idx="1"/>
@@ -4248,106 +3958,91 @@
         </p:nvSpPr>
         <p:spPr/>
         <p:txBody>
-          <a:bodyPr xmlns:a="http://schemas.openxmlformats.org/drawingml/2006/main"/>
-          <a:lstStyle xmlns:a="http://schemas.openxmlformats.org/drawingml/2006/main"/>
-          <a:p xmlns:a="http://schemas.openxmlformats.org/drawingml/2006/main">
-            <a:r>
-              <a:t>PURPOSE</a:t>
-            </a:r>
-          </a:p>
-          <a:p xmlns:a="http://schemas.openxmlformats.org/drawingml/2006/main">
+          <a:bodyPr/>
+          <a:lstStyle/>
+          <a:p>
             <a:r>
               <a:t>Preparation checkpoint</a:t>
             </a:r>
           </a:p>
-          <a:p xmlns:a="http://schemas.openxmlformats.org/drawingml/2006/main">
+          <a:p>
+            <a:r>
+              <a:t>CML3112, Week 14, slide 9</a:t>
+            </a:r>
+          </a:p>
+          <a:p>
             <a:r>
               <a:t/>
             </a:r>
           </a:p>
-          <a:p xmlns:a="http://schemas.openxmlformats.org/drawingml/2006/main">
-            <a:r>
-              <a:t>CONNECT</a:t>
-            </a:r>
-          </a:p>
-          <a:p xmlns:a="http://schemas.openxmlformats.org/drawingml/2006/main">
-            <a:r>
-              <a:t>Previous slide: Test session.</a:t>
-            </a:r>
-          </a:p>
-          <a:p xmlns:a="http://schemas.openxmlformats.org/drawingml/2006/main">
+          <a:p>
+            <a:r>
+              <a:t>Explanation to give</a:t>
+            </a:r>
+          </a:p>
+          <a:p>
+            <a:r>
+              <a:t>Show the offline save location and reopen the file before test day. Identify both the code cells and the markdown cell headed My written evidence.</a:t>
+            </a:r>
+          </a:p>
+          <a:p>
             <a:r>
               <a:t/>
             </a:r>
           </a:p>
-          <a:p xmlns:a="http://schemas.openxmlformats.org/drawingml/2006/main">
-            <a:r>
-              <a:t>EXPLAIN</a:t>
-            </a:r>
-          </a:p>
-          <a:p xmlns:a="http://schemas.openxmlformats.org/drawingml/2006/main">
+          <a:p>
+            <a:r>
+              <a:t>Worked illustration / lecturer answer</a:t>
+            </a:r>
+          </a:p>
+          <a:p>
+            <a:r>
+              <a:t>Use a separate practice notebook for rehearsal. Students should locate the actual .ipynb on disk rather than rely on a browser tab or cloud link.</a:t>
+            </a:r>
+          </a:p>
+          <a:p>
+            <a:r>
+              <a:t/>
+            </a:r>
+          </a:p>
+          <a:p>
+            <a:r>
+              <a:t>Misconception to address</a:t>
+            </a:r>
+          </a:p>
+          <a:p>
+            <a:r>
+              <a:t>During the assessed period, report technical failures immediately and follow the invigilator’s instructions. Do not introduce new modelling code or online resources.</a:t>
+            </a:r>
+          </a:p>
+          <a:p>
+            <a:r>
+              <a:t/>
+            </a:r>
+          </a:p>
+          <a:p>
+            <a:r>
+              <a:t>On this slide</a:t>
+            </a:r>
+          </a:p>
+          <a:p>
             <a:r>
               <a:t>Each learner can save and reopen the complete notebook in the offline setting.</a:t>
             </a:r>
           </a:p>
-          <a:p xmlns:a="http://schemas.openxmlformats.org/drawingml/2006/main">
+          <a:p>
             <a:r>
               <a:t/>
             </a:r>
           </a:p>
-          <a:p xmlns:a="http://schemas.openxmlformats.org/drawingml/2006/main">
-            <a:r>
-              <a:t>LECTURER CUE</a:t>
-            </a:r>
-          </a:p>
-          <a:p xmlns:a="http://schemas.openxmlformats.org/drawingml/2006/main">
-            <a:r>
-              <a:t>Read the specific public requirement shown on this slide. Explain the input, output and evidence before independent work; do not work the assessed answer for the class.</a:t>
-            </a:r>
-          </a:p>
-          <a:p xmlns:a="http://schemas.openxmlformats.org/drawingml/2006/main">
-            <a:r>
-              <a:t/>
-            </a:r>
-          </a:p>
-          <a:p xmlns:a="http://schemas.openxmlformats.org/drawingml/2006/main">
-            <a:r>
-              <a:t>TEACHING MODE</a:t>
-            </a:r>
-          </a:p>
-          <a:p xmlns:a="http://schemas.openxmlformats.org/drawingml/2006/main">
-            <a:r>
-              <a:t>Demonstrate first. Read each new symbol aloud, trace the values and compare the shown output. Learners repeat worked examples individually after class.</a:t>
-            </a:r>
-          </a:p>
-          <a:p xmlns:a="http://schemas.openxmlformats.org/drawingml/2006/main">
-            <a:r>
-              <a:t/>
-            </a:r>
-          </a:p>
-          <a:p xmlns:a="http://schemas.openxmlformats.org/drawingml/2006/main">
-            <a:r>
-              <a:t>NEXT</a:t>
-            </a:r>
-          </a:p>
-          <a:p xmlns:a="http://schemas.openxmlformats.org/drawingml/2006/main">
-            <a:r>
-              <a:t>Your evidence.</a:t>
-            </a:r>
-          </a:p>
-          <a:p xmlns:a="http://schemas.openxmlformats.org/drawingml/2006/main">
-            <a:r>
-              <a:t/>
-            </a:r>
-          </a:p>
-          <a:p xmlns:a="http://schemas.openxmlformats.org/drawingml/2006/main">
-            <a:r>
-              <a:t>REFERENCES</a:t>
-            </a:r>
-          </a:p>
-          <a:p xmlns:a="http://schemas.openxmlformats.org/drawingml/2006/main">
-            <a:r>
-              <a:t/>
+          <a:p>
+            <a:r>
+              <a:t>Continue to</a:t>
+            </a:r>
+          </a:p>
+          <a:p>
+            <a:r>
+              <a:t>Your evidence</a:t>
             </a:r>
           </a:p>
         </p:txBody>
@@ -4356,7 +4051,7 @@
         <p:nvSpPr>
           <p:cNvPr id="4" name="Slide Number Placeholder 3"/>
           <p:cNvSpPr>
-            <a:spLocks xmlns:a="http://schemas.openxmlformats.org/drawingml/2006/main" noGrp="1"/>
+            <a:spLocks noGrp="1"/>
           </p:cNvSpPr>
           <p:nvPr>
             <p:ph type="sldNum" idx="5"/>
@@ -4364,15 +4059,15 @@
         </p:nvSpPr>
         <p:spPr/>
         <p:txBody>
-          <a:bodyPr xmlns:a="http://schemas.openxmlformats.org/drawingml/2006/main"/>
-          <a:lstStyle xmlns:a="http://schemas.openxmlformats.org/drawingml/2006/main"/>
-          <a:p xmlns:a="http://schemas.openxmlformats.org/drawingml/2006/main"/>
+          <a:bodyPr/>
+          <a:lstStyle/>
+          <a:p/>
         </p:txBody>
       </p:sp>
     </p:spTree>
   </p:cSld>
   <p:clrMapOvr>
-    <a:masterClrMapping xmlns:a="http://schemas.openxmlformats.org/drawingml/2006/main"/>
+    <a:masterClrMapping/>
   </p:clrMapOvr>
 </p:notes>
 </file>
@@ -14969,11 +14664,11 @@
 </file>
 
 <file path=ppt/slides/slide21.xml><?xml version="1.0" encoding="utf-8"?>
-<p:sld xmlns:p="http://schemas.openxmlformats.org/presentationml/2006/main">
+<p:sld xmlns:a="http://schemas.openxmlformats.org/drawingml/2006/main" xmlns:ns2="http://schemas.microsoft.com/office/drawing/2014/main" xmlns:ns3="http://schemas.microsoft.com/office/powerpoint/2010/main" xmlns:p="http://schemas.openxmlformats.org/presentationml/2006/main">
   <p:cSld>
     <p:bg>
       <p:bgPr>
-        <a:solidFill xmlns:a="http://schemas.openxmlformats.org/drawingml/2006/main">
+        <a:solidFill>
           <a:srgbClr val="1C3144"/>
         </a:solidFill>
       </p:bgPr>
@@ -14985,41 +14680,41 @@
         <p:nvPr/>
       </p:nvGrpSpPr>
       <p:grpSpPr>
-        <a:xfrm xmlns:a="http://schemas.openxmlformats.org/drawingml/2006/main"/>
+        <a:xfrm/>
       </p:grpSpPr>
       <p:sp>
         <p:nvSpPr>
           <p:cNvPr id="7" name="">
-            <a:extLst xmlns:a="http://schemas.openxmlformats.org/drawingml/2006/main">
-              <a:ext uri="{FF2B5EF4-FFF2-40B4-BE49-F238E27FC236}">
-                <a16:creationId xmlns:a16="http://schemas.microsoft.com/office/drawing/2014/main" id="{10708445-F976-424F-9766-89754AC6EB4A}"/>
-              </a:ext>
-            </a:extLst>
-          </p:cNvPr>
-          <p:cNvSpPr>
-            <a:spLocks xmlns:a="http://schemas.openxmlformats.org/drawingml/2006/main" noGrp="1"/>
-          </p:cNvSpPr>
-          <p:nvPr/>
-        </p:nvSpPr>
-        <p:spPr>
-          <a:xfrm xmlns:a="http://schemas.openxmlformats.org/drawingml/2006/main">
+            <a:extLst>
+              <a:ext uri="{FF2B5EF4-FFF2-40B4-BE49-F238E27FC236}">
+                <ns2:creationId id="{10708445-F976-424F-9766-89754AC6EB4A}"/>
+              </a:ext>
+            </a:extLst>
+          </p:cNvPr>
+          <p:cNvSpPr>
+            <a:spLocks noGrp="1"/>
+          </p:cNvSpPr>
+          <p:nvPr/>
+        </p:nvSpPr>
+        <p:spPr>
+          <a:xfrm>
             <a:off x="590550" y="180975"/>
             <a:ext cx="11049000" cy="285750"/>
           </a:xfrm>
-          <a:prstGeom xmlns:a="http://schemas.openxmlformats.org/drawingml/2006/main" prst="rect">
-            <a:avLst/>
-          </a:prstGeom>
-          <a:noFill xmlns:a="http://schemas.openxmlformats.org/drawingml/2006/main"/>
-          <a:ln xmlns:a="http://schemas.openxmlformats.org/drawingml/2006/main" w="0">
-            <a:noFill/>
-          </a:ln>
-        </p:spPr>
-        <p:txBody>
-          <a:bodyPr xmlns:a="http://schemas.openxmlformats.org/drawingml/2006/main">
+          <a:prstGeom prst="rect">
+            <a:avLst/>
+          </a:prstGeom>
+          <a:noFill/>
+          <a:ln w="0">
+            <a:noFill/>
+          </a:ln>
+        </p:spPr>
+        <p:txBody>
+          <a:bodyPr>
             <a:noAutofit/>
           </a:bodyPr>
-          <a:lstStyle xmlns:a="http://schemas.openxmlformats.org/drawingml/2006/main"/>
-          <a:p xmlns:a="http://schemas.openxmlformats.org/drawingml/2006/main">
+          <a:lstStyle/>
+          <a:p>
             <a:pPr>
               <a:defRPr sz="1500" b="1">
                 <a:solidFill>
@@ -15047,36 +14742,36 @@
       <p:sp>
         <p:nvSpPr>
           <p:cNvPr id="2" name="">
-            <a:extLst xmlns:a="http://schemas.openxmlformats.org/drawingml/2006/main">
-              <a:ext uri="{FF2B5EF4-FFF2-40B4-BE49-F238E27FC236}">
-                <a16:creationId xmlns:a16="http://schemas.microsoft.com/office/drawing/2014/main" id="{55D6DC44-B656-4BA0-8B20-D5833A5A5E72}"/>
-              </a:ext>
-            </a:extLst>
-          </p:cNvPr>
-          <p:cNvSpPr>
-            <a:spLocks xmlns:a="http://schemas.openxmlformats.org/drawingml/2006/main" noGrp="1"/>
-          </p:cNvSpPr>
-          <p:nvPr/>
-        </p:nvSpPr>
-        <p:spPr>
-          <a:xfrm xmlns:a="http://schemas.openxmlformats.org/drawingml/2006/main">
+            <a:extLst>
+              <a:ext uri="{FF2B5EF4-FFF2-40B4-BE49-F238E27FC236}">
+                <ns2:creationId id="{55D6DC44-B656-4BA0-8B20-D5833A5A5E72}"/>
+              </a:ext>
+            </a:extLst>
+          </p:cNvPr>
+          <p:cNvSpPr>
+            <a:spLocks noGrp="1"/>
+          </p:cNvSpPr>
+          <p:nvPr/>
+        </p:nvSpPr>
+        <p:spPr>
+          <a:xfrm>
             <a:off x="590550" y="523875"/>
             <a:ext cx="11049000" cy="809625"/>
           </a:xfrm>
-          <a:prstGeom xmlns:a="http://schemas.openxmlformats.org/drawingml/2006/main" prst="rect">
-            <a:avLst/>
-          </a:prstGeom>
-          <a:noFill xmlns:a="http://schemas.openxmlformats.org/drawingml/2006/main"/>
-          <a:ln xmlns:a="http://schemas.openxmlformats.org/drawingml/2006/main" w="0">
-            <a:noFill/>
-          </a:ln>
-        </p:spPr>
-        <p:txBody>
-          <a:bodyPr xmlns:a="http://schemas.openxmlformats.org/drawingml/2006/main">
+          <a:prstGeom prst="rect">
+            <a:avLst/>
+          </a:prstGeom>
+          <a:noFill/>
+          <a:ln w="0">
+            <a:noFill/>
+          </a:ln>
+        </p:spPr>
+        <p:txBody>
+          <a:bodyPr>
             <a:noAutofit/>
           </a:bodyPr>
-          <a:lstStyle xmlns:a="http://schemas.openxmlformats.org/drawingml/2006/main"/>
-          <a:p xmlns:a="http://schemas.openxmlformats.org/drawingml/2006/main">
+          <a:lstStyle/>
+          <a:p>
             <a:pPr>
               <a:defRPr sz="3150" b="1">
                 <a:solidFill>
@@ -15104,36 +14799,36 @@
       <p:sp>
         <p:nvSpPr>
           <p:cNvPr id="3" name="">
-            <a:extLst xmlns:a="http://schemas.openxmlformats.org/drawingml/2006/main">
-              <a:ext uri="{FF2B5EF4-FFF2-40B4-BE49-F238E27FC236}">
-                <a16:creationId xmlns:a16="http://schemas.microsoft.com/office/drawing/2014/main" id="{3BB87E24-16D5-41DD-8782-7A4DBD7521F9}"/>
-              </a:ext>
-            </a:extLst>
-          </p:cNvPr>
-          <p:cNvSpPr>
-            <a:spLocks xmlns:a="http://schemas.openxmlformats.org/drawingml/2006/main" noGrp="1"/>
-          </p:cNvSpPr>
-          <p:nvPr/>
-        </p:nvSpPr>
-        <p:spPr>
-          <a:xfrm xmlns:a="http://schemas.openxmlformats.org/drawingml/2006/main">
+            <a:extLst>
+              <a:ext uri="{FF2B5EF4-FFF2-40B4-BE49-F238E27FC236}">
+                <ns2:creationId id="{3BB87E24-16D5-41DD-8782-7A4DBD7521F9}"/>
+              </a:ext>
+            </a:extLst>
+          </p:cNvPr>
+          <p:cNvSpPr>
+            <a:spLocks noGrp="1"/>
+          </p:cNvSpPr>
+          <p:nvPr/>
+        </p:nvSpPr>
+        <p:spPr>
+          <a:xfrm>
             <a:off x="619125" y="1619250"/>
             <a:ext cx="2857500" cy="495300"/>
           </a:xfrm>
-          <a:prstGeom xmlns:a="http://schemas.openxmlformats.org/drawingml/2006/main" prst="rect">
-            <a:avLst/>
-          </a:prstGeom>
-          <a:noFill xmlns:a="http://schemas.openxmlformats.org/drawingml/2006/main"/>
-          <a:ln xmlns:a="http://schemas.openxmlformats.org/drawingml/2006/main" w="0">
-            <a:noFill/>
-          </a:ln>
-        </p:spPr>
-        <p:txBody>
-          <a:bodyPr xmlns:a="http://schemas.openxmlformats.org/drawingml/2006/main">
+          <a:prstGeom prst="rect">
+            <a:avLst/>
+          </a:prstGeom>
+          <a:noFill/>
+          <a:ln w="0">
+            <a:noFill/>
+          </a:ln>
+        </p:spPr>
+        <p:txBody>
+          <a:bodyPr>
             <a:noAutofit/>
           </a:bodyPr>
-          <a:lstStyle xmlns:a="http://schemas.openxmlformats.org/drawingml/2006/main"/>
-          <a:p xmlns:a="http://schemas.openxmlformats.org/drawingml/2006/main">
+          <a:lstStyle/>
+          <a:p>
             <a:pPr>
               <a:defRPr sz="1950" b="1">
                 <a:solidFill>
@@ -15161,36 +14856,36 @@
       <p:sp>
         <p:nvSpPr>
           <p:cNvPr id="4" name="">
-            <a:extLst xmlns:a="http://schemas.openxmlformats.org/drawingml/2006/main">
-              <a:ext uri="{FF2B5EF4-FFF2-40B4-BE49-F238E27FC236}">
-                <a16:creationId xmlns:a16="http://schemas.microsoft.com/office/drawing/2014/main" id="{9D3797E9-1CAC-422F-87C8-3AED53FE4246}"/>
-              </a:ext>
-            </a:extLst>
-          </p:cNvPr>
-          <p:cNvSpPr>
-            <a:spLocks xmlns:a="http://schemas.openxmlformats.org/drawingml/2006/main" noGrp="1"/>
-          </p:cNvSpPr>
-          <p:nvPr/>
-        </p:nvSpPr>
-        <p:spPr>
-          <a:xfrm xmlns:a="http://schemas.openxmlformats.org/drawingml/2006/main">
+            <a:extLst>
+              <a:ext uri="{FF2B5EF4-FFF2-40B4-BE49-F238E27FC236}">
+                <ns2:creationId id="{9D3797E9-1CAC-422F-87C8-3AED53FE4246}"/>
+              </a:ext>
+            </a:extLst>
+          </p:cNvPr>
+          <p:cNvSpPr>
+            <a:spLocks noGrp="1"/>
+          </p:cNvSpPr>
+          <p:nvPr/>
+        </p:nvSpPr>
+        <p:spPr>
+          <a:xfrm>
             <a:off x="619125" y="2295525"/>
             <a:ext cx="10810875" cy="3095625"/>
           </a:xfrm>
-          <a:prstGeom xmlns:a="http://schemas.openxmlformats.org/drawingml/2006/main" prst="rect">
-            <a:avLst/>
-          </a:prstGeom>
-          <a:noFill xmlns:a="http://schemas.openxmlformats.org/drawingml/2006/main"/>
-          <a:ln xmlns:a="http://schemas.openxmlformats.org/drawingml/2006/main" w="0">
-            <a:noFill/>
-          </a:ln>
-        </p:spPr>
-        <p:txBody>
-          <a:bodyPr xmlns:a="http://schemas.openxmlformats.org/drawingml/2006/main">
+          <a:prstGeom prst="rect">
+            <a:avLst/>
+          </a:prstGeom>
+          <a:noFill/>
+          <a:ln w="0">
+            <a:noFill/>
+          </a:ln>
+        </p:spPr>
+        <p:txBody>
+          <a:bodyPr>
             <a:noAutofit/>
           </a:bodyPr>
-          <a:lstStyle xmlns:a="http://schemas.openxmlformats.org/drawingml/2006/main"/>
-          <a:p xmlns:a="http://schemas.openxmlformats.org/drawingml/2006/main">
+          <a:lstStyle/>
+          <a:p>
             <a:pPr>
               <a:defRPr sz="2850" b="0">
                 <a:solidFill>
@@ -15213,12 +14908,12 @@
               <a:t>You can explain training-only preprocessing and locate your saved evidence.</a:t>
             </a:r>
           </a:p>
-          <a:p xmlns:a="http://schemas.openxmlformats.org/drawingml/2006/main">
+          <a:p>
             <a:r>
               <a:t/>
             </a:r>
           </a:p>
-          <a:p xmlns:a="http://schemas.openxmlformats.org/drawingml/2006/main">
+          <a:p>
             <a:pPr>
               <a:defRPr sz="2850" b="0">
                 <a:solidFill>
@@ -15246,36 +14941,36 @@
       <p:sp>
         <p:nvSpPr>
           <p:cNvPr id="5" name="">
-            <a:extLst xmlns:a="http://schemas.openxmlformats.org/drawingml/2006/main">
-              <a:ext uri="{FF2B5EF4-FFF2-40B4-BE49-F238E27FC236}">
-                <a16:creationId xmlns:a16="http://schemas.microsoft.com/office/drawing/2014/main" id="{99D8CD31-F433-40BA-BF98-FA72B185AD92}"/>
-              </a:ext>
-            </a:extLst>
-          </p:cNvPr>
-          <p:cNvSpPr>
-            <a:spLocks xmlns:a="http://schemas.openxmlformats.org/drawingml/2006/main" noGrp="1"/>
-          </p:cNvSpPr>
-          <p:nvPr/>
-        </p:nvSpPr>
-        <p:spPr>
-          <a:xfrm xmlns:a="http://schemas.openxmlformats.org/drawingml/2006/main">
+            <a:extLst>
+              <a:ext uri="{FF2B5EF4-FFF2-40B4-BE49-F238E27FC236}">
+                <ns2:creationId id="{99D8CD31-F433-40BA-BF98-FA72B185AD92}"/>
+              </a:ext>
+            </a:extLst>
+          </p:cNvPr>
+          <p:cNvSpPr>
+            <a:spLocks noGrp="1"/>
+          </p:cNvSpPr>
+          <p:nvPr/>
+        </p:nvSpPr>
+        <p:spPr>
+          <a:xfrm>
             <a:off x="619125" y="5791200"/>
             <a:ext cx="10810875" cy="542925"/>
           </a:xfrm>
-          <a:prstGeom xmlns:a="http://schemas.openxmlformats.org/drawingml/2006/main" prst="rect">
-            <a:avLst/>
-          </a:prstGeom>
-          <a:noFill xmlns:a="http://schemas.openxmlformats.org/drawingml/2006/main"/>
-          <a:ln xmlns:a="http://schemas.openxmlformats.org/drawingml/2006/main" w="0">
-            <a:noFill/>
-          </a:ln>
-        </p:spPr>
-        <p:txBody>
-          <a:bodyPr xmlns:a="http://schemas.openxmlformats.org/drawingml/2006/main">
+          <a:prstGeom prst="rect">
+            <a:avLst/>
+          </a:prstGeom>
+          <a:noFill/>
+          <a:ln w="0">
+            <a:noFill/>
+          </a:ln>
+        </p:spPr>
+        <p:txBody>
+          <a:bodyPr>
             <a:noAutofit/>
           </a:bodyPr>
-          <a:lstStyle xmlns:a="http://schemas.openxmlformats.org/drawingml/2006/main"/>
-          <a:p xmlns:a="http://schemas.openxmlformats.org/drawingml/2006/main">
+          <a:lstStyle/>
+          <a:p>
             <a:pPr>
               <a:defRPr sz="1800" b="0">
                 <a:solidFill>
@@ -15295,7 +14990,7 @@
                 <a:ea typeface="Calibri"/>
                 <a:cs typeface="Calibri"/>
               </a:rPr>
-              <a:t>Point to your evidence. Save your work.</a:t>
+              <a:t>Check your answers against the example, then save your work.</a:t>
             </a:r>
           </a:p>
         </p:txBody>
@@ -15303,36 +14998,36 @@
       <p:sp>
         <p:nvSpPr>
           <p:cNvPr id="6" name="">
-            <a:extLst xmlns:a="http://schemas.openxmlformats.org/drawingml/2006/main">
-              <a:ext uri="{FF2B5EF4-FFF2-40B4-BE49-F238E27FC236}">
-                <a16:creationId xmlns:a16="http://schemas.microsoft.com/office/drawing/2014/main" id="{795151FB-EA9F-490C-A234-1CF8D6A697F4}"/>
-              </a:ext>
-            </a:extLst>
-          </p:cNvPr>
-          <p:cNvSpPr>
-            <a:spLocks xmlns:a="http://schemas.openxmlformats.org/drawingml/2006/main" noGrp="1"/>
-          </p:cNvSpPr>
-          <p:nvPr/>
-        </p:nvSpPr>
-        <p:spPr>
-          <a:xfrm xmlns:a="http://schemas.openxmlformats.org/drawingml/2006/main">
+            <a:extLst>
+              <a:ext uri="{FF2B5EF4-FFF2-40B4-BE49-F238E27FC236}">
+                <ns2:creationId id="{795151FB-EA9F-490C-A234-1CF8D6A697F4}"/>
+              </a:ext>
+            </a:extLst>
+          </p:cNvPr>
+          <p:cNvSpPr>
+            <a:spLocks noGrp="1"/>
+          </p:cNvSpPr>
+          <p:nvPr/>
+        </p:nvSpPr>
+        <p:spPr>
+          <a:xfrm>
             <a:off x="590550" y="6524625"/>
             <a:ext cx="10810875" cy="219075"/>
           </a:xfrm>
-          <a:prstGeom xmlns:a="http://schemas.openxmlformats.org/drawingml/2006/main" prst="rect">
-            <a:avLst/>
-          </a:prstGeom>
-          <a:noFill xmlns:a="http://schemas.openxmlformats.org/drawingml/2006/main"/>
-          <a:ln xmlns:a="http://schemas.openxmlformats.org/drawingml/2006/main" w="0">
-            <a:noFill/>
-          </a:ln>
-        </p:spPr>
-        <p:txBody>
-          <a:bodyPr xmlns:a="http://schemas.openxmlformats.org/drawingml/2006/main">
+          <a:prstGeom prst="rect">
+            <a:avLst/>
+          </a:prstGeom>
+          <a:noFill/>
+          <a:ln w="0">
+            <a:noFill/>
+          </a:ln>
+        </p:spPr>
+        <p:txBody>
+          <a:bodyPr>
             <a:noAutofit/>
           </a:bodyPr>
-          <a:lstStyle xmlns:a="http://schemas.openxmlformats.org/drawingml/2006/main"/>
-          <a:p xmlns:a="http://schemas.openxmlformats.org/drawingml/2006/main">
+          <a:lstStyle/>
+          <a:p>
             <a:pPr>
               <a:defRPr sz="1200" b="0">
                 <a:solidFill>
@@ -15360,7 +15055,7 @@
     </p:spTree>
     <p:extLst>
       <p:ext uri="{BB962C8B-B14F-4D97-AF65-F5344CB8AC3E}">
-        <p14:creationId xmlns:p14="http://schemas.microsoft.com/office/powerpoint/2010/main" val="828353580"/>
+        <ns3:creationId val="828353580"/>
       </p:ext>
     </p:extLst>
   </p:cSld>
